--- a/AS91904 Electronics Heinrich Venter.pptx
+++ b/AS91904 Electronics Heinrich Venter.pptx
@@ -141,7 +141,7 @@
 <file path=ppt/revisionInfo.xml><?xml version="1.0" encoding="utf-8"?>
 <p1510:revInfo xmlns:a="http://schemas.openxmlformats.org/drawingml/2006/main" xmlns:r="http://schemas.openxmlformats.org/officeDocument/2006/relationships" xmlns:p1510="http://schemas.microsoft.com/office/powerpoint/2015/10/main">
   <p1510:revLst>
-    <p1510:client id="{1B13A9E9-B3C1-424C-8E5B-7A1F059B459A}" v="44" dt="2026-05-25T01:08:24.825"/>
+    <p1510:client id="{1B13A9E9-B3C1-424C-8E5B-7A1F059B459A}" v="61" dt="2026-05-26T08:25:23.685"/>
   </p1510:revLst>
 </p1510:revInfo>
 </file>
@@ -151,7 +151,7 @@
   <pc:docChgLst>
     <pc:chgData name="Heinrich Venter" userId="694de3c83518532c" providerId="LiveId" clId="{10CD68D7-CBE1-4750-A2D1-7DEE064E9363}"/>
     <pc:docChg chg="undo custSel addSld delSld modSld">
-      <pc:chgData name="Heinrich Venter" userId="694de3c83518532c" providerId="LiveId" clId="{10CD68D7-CBE1-4750-A2D1-7DEE064E9363}" dt="2026-05-25T01:08:24.879" v="4657" actId="27636"/>
+      <pc:chgData name="Heinrich Venter" userId="694de3c83518532c" providerId="LiveId" clId="{10CD68D7-CBE1-4750-A2D1-7DEE064E9363}" dt="2026-05-26T08:25:46.067" v="4931" actId="20577"/>
       <pc:docMkLst>
         <pc:docMk/>
       </pc:docMkLst>
@@ -167,6 +167,44 @@
             <pc:docMk/>
             <pc:sldMk cId="730004332" sldId="256"/>
             <ac:spMk id="3" creationId="{F66D802B-CDB6-E9D2-44F0-86BC0E80FB38}"/>
+          </ac:spMkLst>
+        </pc:spChg>
+      </pc:sldChg>
+      <pc:sldChg chg="modSp mod">
+        <pc:chgData name="Heinrich Venter" userId="694de3c83518532c" providerId="LiveId" clId="{10CD68D7-CBE1-4750-A2D1-7DEE064E9363}" dt="2026-05-26T06:34:59.547" v="4794" actId="20577"/>
+        <pc:sldMkLst>
+          <pc:docMk/>
+          <pc:sldMk cId="4293113589" sldId="257"/>
+        </pc:sldMkLst>
+        <pc:spChg chg="mod">
+          <ac:chgData name="Heinrich Venter" userId="694de3c83518532c" providerId="LiveId" clId="{10CD68D7-CBE1-4750-A2D1-7DEE064E9363}" dt="2026-05-26T06:34:59.547" v="4794" actId="20577"/>
+          <ac:spMkLst>
+            <pc:docMk/>
+            <pc:sldMk cId="4293113589" sldId="257"/>
+            <ac:spMk id="3" creationId="{EB73A0B0-8C2E-99B2-DFB1-974EF0CDEB52}"/>
+          </ac:spMkLst>
+        </pc:spChg>
+      </pc:sldChg>
+      <pc:sldChg chg="modSp mod">
+        <pc:chgData name="Heinrich Venter" userId="694de3c83518532c" providerId="LiveId" clId="{10CD68D7-CBE1-4750-A2D1-7DEE064E9363}" dt="2026-05-26T06:38:30.797" v="4833" actId="20577"/>
+        <pc:sldMkLst>
+          <pc:docMk/>
+          <pc:sldMk cId="2407707907" sldId="258"/>
+        </pc:sldMkLst>
+        <pc:spChg chg="mod">
+          <ac:chgData name="Heinrich Venter" userId="694de3c83518532c" providerId="LiveId" clId="{10CD68D7-CBE1-4750-A2D1-7DEE064E9363}" dt="2026-05-26T06:37:18.202" v="4799" actId="113"/>
+          <ac:spMkLst>
+            <pc:docMk/>
+            <pc:sldMk cId="2407707907" sldId="258"/>
+            <ac:spMk id="3" creationId="{48517805-ABAD-9125-D5EB-9C37B582DC52}"/>
+          </ac:spMkLst>
+        </pc:spChg>
+        <pc:spChg chg="mod">
+          <ac:chgData name="Heinrich Venter" userId="694de3c83518532c" providerId="LiveId" clId="{10CD68D7-CBE1-4750-A2D1-7DEE064E9363}" dt="2026-05-26T06:38:30.797" v="4833" actId="20577"/>
+          <ac:spMkLst>
+            <pc:docMk/>
+            <pc:sldMk cId="2407707907" sldId="258"/>
+            <ac:spMk id="4" creationId="{6748CEDE-0DB3-164E-E438-A407CD2F953C}"/>
           </ac:spMkLst>
         </pc:spChg>
       </pc:sldChg>
@@ -263,13 +301,28 @@
         </pc:spChg>
       </pc:sldChg>
       <pc:sldChg chg="modSp mod">
-        <pc:chgData name="Heinrich Venter" userId="694de3c83518532c" providerId="LiveId" clId="{10CD68D7-CBE1-4750-A2D1-7DEE064E9363}" dt="2026-05-24T09:51:15.846" v="2759" actId="27636"/>
+        <pc:chgData name="Heinrich Venter" userId="694de3c83518532c" providerId="LiveId" clId="{10CD68D7-CBE1-4750-A2D1-7DEE064E9363}" dt="2026-05-26T08:25:46.067" v="4931" actId="20577"/>
+        <pc:sldMkLst>
+          <pc:docMk/>
+          <pc:sldMk cId="2958982225" sldId="282"/>
+        </pc:sldMkLst>
+        <pc:spChg chg="mod">
+          <ac:chgData name="Heinrich Venter" userId="694de3c83518532c" providerId="LiveId" clId="{10CD68D7-CBE1-4750-A2D1-7DEE064E9363}" dt="2026-05-26T08:25:46.067" v="4931" actId="20577"/>
+          <ac:spMkLst>
+            <pc:docMk/>
+            <pc:sldMk cId="2958982225" sldId="282"/>
+            <ac:spMk id="3" creationId="{C72A0CE0-5AE0-CAD3-C4C6-81694DF4EFBC}"/>
+          </ac:spMkLst>
+        </pc:spChg>
+      </pc:sldChg>
+      <pc:sldChg chg="modSp mod">
+        <pc:chgData name="Heinrich Venter" userId="694de3c83518532c" providerId="LiveId" clId="{10CD68D7-CBE1-4750-A2D1-7DEE064E9363}" dt="2026-05-26T06:46:46.026" v="4853" actId="20577"/>
         <pc:sldMkLst>
           <pc:docMk/>
           <pc:sldMk cId="4103162250" sldId="285"/>
         </pc:sldMkLst>
         <pc:spChg chg="mod">
-          <ac:chgData name="Heinrich Venter" userId="694de3c83518532c" providerId="LiveId" clId="{10CD68D7-CBE1-4750-A2D1-7DEE064E9363}" dt="2026-05-24T09:50:47.060" v="2753"/>
+          <ac:chgData name="Heinrich Venter" userId="694de3c83518532c" providerId="LiveId" clId="{10CD68D7-CBE1-4750-A2D1-7DEE064E9363}" dt="2026-05-26T06:46:46.026" v="4853" actId="20577"/>
           <ac:spMkLst>
             <pc:docMk/>
             <pc:sldMk cId="4103162250" sldId="285"/>
@@ -286,7 +339,7 @@
         </pc:spChg>
       </pc:sldChg>
       <pc:sldChg chg="modSp mod">
-        <pc:chgData name="Heinrich Venter" userId="694de3c83518532c" providerId="LiveId" clId="{10CD68D7-CBE1-4750-A2D1-7DEE064E9363}" dt="2026-05-24T09:58:31.385" v="3309" actId="20577"/>
+        <pc:chgData name="Heinrich Venter" userId="694de3c83518532c" providerId="LiveId" clId="{10CD68D7-CBE1-4750-A2D1-7DEE064E9363}" dt="2026-05-26T06:47:14.021" v="4862" actId="20577"/>
         <pc:sldMkLst>
           <pc:docMk/>
           <pc:sldMk cId="4188302786" sldId="287"/>
@@ -300,7 +353,7 @@
           </ac:spMkLst>
         </pc:spChg>
         <pc:spChg chg="mod">
-          <ac:chgData name="Heinrich Venter" userId="694de3c83518532c" providerId="LiveId" clId="{10CD68D7-CBE1-4750-A2D1-7DEE064E9363}" dt="2026-05-24T09:58:31.385" v="3309" actId="20577"/>
+          <ac:chgData name="Heinrich Venter" userId="694de3c83518532c" providerId="LiveId" clId="{10CD68D7-CBE1-4750-A2D1-7DEE064E9363}" dt="2026-05-26T06:47:14.021" v="4862" actId="20577"/>
           <ac:spMkLst>
             <pc:docMk/>
             <pc:sldMk cId="4188302786" sldId="287"/>
@@ -480,7 +533,7 @@
         </pc:spChg>
       </pc:sldChg>
       <pc:sldChg chg="modSp mod">
-        <pc:chgData name="Heinrich Venter" userId="694de3c83518532c" providerId="LiveId" clId="{10CD68D7-CBE1-4750-A2D1-7DEE064E9363}" dt="2026-05-25T01:08:24.879" v="4657" actId="27636"/>
+        <pc:chgData name="Heinrich Venter" userId="694de3c83518532c" providerId="LiveId" clId="{10CD68D7-CBE1-4750-A2D1-7DEE064E9363}" dt="2026-05-26T06:51:26.880" v="4880" actId="20577"/>
         <pc:sldMkLst>
           <pc:docMk/>
           <pc:sldMk cId="3290795109" sldId="293"/>
@@ -494,7 +547,7 @@
           </ac:spMkLst>
         </pc:spChg>
         <pc:spChg chg="mod">
-          <ac:chgData name="Heinrich Venter" userId="694de3c83518532c" providerId="LiveId" clId="{10CD68D7-CBE1-4750-A2D1-7DEE064E9363}" dt="2026-05-25T01:08:24.879" v="4657" actId="27636"/>
+          <ac:chgData name="Heinrich Venter" userId="694de3c83518532c" providerId="LiveId" clId="{10CD68D7-CBE1-4750-A2D1-7DEE064E9363}" dt="2026-05-26T06:51:26.880" v="4880" actId="20577"/>
           <ac:spMkLst>
             <pc:docMk/>
             <pc:sldMk cId="3290795109" sldId="293"/>
@@ -503,7 +556,7 @@
         </pc:spChg>
       </pc:sldChg>
       <pc:sldChg chg="modSp mod">
-        <pc:chgData name="Heinrich Venter" userId="694de3c83518532c" providerId="LiveId" clId="{10CD68D7-CBE1-4750-A2D1-7DEE064E9363}" dt="2026-05-25T00:33:55.377" v="4601" actId="27636"/>
+        <pc:chgData name="Heinrich Venter" userId="694de3c83518532c" providerId="LiveId" clId="{10CD68D7-CBE1-4750-A2D1-7DEE064E9363}" dt="2026-05-26T08:15:50.097" v="4889" actId="27636"/>
         <pc:sldMkLst>
           <pc:docMk/>
           <pc:sldMk cId="3463644882" sldId="294"/>
@@ -517,7 +570,7 @@
           </ac:spMkLst>
         </pc:spChg>
         <pc:spChg chg="mod">
-          <ac:chgData name="Heinrich Venter" userId="694de3c83518532c" providerId="LiveId" clId="{10CD68D7-CBE1-4750-A2D1-7DEE064E9363}" dt="2026-05-25T00:33:41.936" v="4595" actId="27636"/>
+          <ac:chgData name="Heinrich Venter" userId="694de3c83518532c" providerId="LiveId" clId="{10CD68D7-CBE1-4750-A2D1-7DEE064E9363}" dt="2026-05-26T08:15:31.644" v="4883" actId="27636"/>
           <ac:spMkLst>
             <pc:docMk/>
             <pc:sldMk cId="3463644882" sldId="294"/>
@@ -525,7 +578,7 @@
           </ac:spMkLst>
         </pc:spChg>
         <pc:spChg chg="mod">
-          <ac:chgData name="Heinrich Venter" userId="694de3c83518532c" providerId="LiveId" clId="{10CD68D7-CBE1-4750-A2D1-7DEE064E9363}" dt="2026-05-25T00:33:48.136" v="4597" actId="27636"/>
+          <ac:chgData name="Heinrich Venter" userId="694de3c83518532c" providerId="LiveId" clId="{10CD68D7-CBE1-4750-A2D1-7DEE064E9363}" dt="2026-05-26T08:15:41.882" v="4886" actId="27636"/>
           <ac:spMkLst>
             <pc:docMk/>
             <pc:sldMk cId="3463644882" sldId="294"/>
@@ -533,7 +586,7 @@
           </ac:spMkLst>
         </pc:spChg>
         <pc:spChg chg="mod">
-          <ac:chgData name="Heinrich Venter" userId="694de3c83518532c" providerId="LiveId" clId="{10CD68D7-CBE1-4750-A2D1-7DEE064E9363}" dt="2026-05-25T00:33:55.377" v="4601" actId="27636"/>
+          <ac:chgData name="Heinrich Venter" userId="694de3c83518532c" providerId="LiveId" clId="{10CD68D7-CBE1-4750-A2D1-7DEE064E9363}" dt="2026-05-26T08:15:50.097" v="4889" actId="27636"/>
           <ac:spMkLst>
             <pc:docMk/>
             <pc:sldMk cId="3463644882" sldId="294"/>
@@ -542,13 +595,13 @@
         </pc:spChg>
       </pc:sldChg>
       <pc:sldChg chg="modSp mod">
-        <pc:chgData name="Heinrich Venter" userId="694de3c83518532c" providerId="LiveId" clId="{10CD68D7-CBE1-4750-A2D1-7DEE064E9363}" dt="2026-05-25T00:33:23.546" v="4592" actId="27636"/>
+        <pc:chgData name="Heinrich Venter" userId="694de3c83518532c" providerId="LiveId" clId="{10CD68D7-CBE1-4750-A2D1-7DEE064E9363}" dt="2026-05-26T08:19:28.846" v="4899" actId="113"/>
         <pc:sldMkLst>
           <pc:docMk/>
           <pc:sldMk cId="2380697536" sldId="295"/>
         </pc:sldMkLst>
         <pc:spChg chg="mod">
-          <ac:chgData name="Heinrich Venter" userId="694de3c83518532c" providerId="LiveId" clId="{10CD68D7-CBE1-4750-A2D1-7DEE064E9363}" dt="2026-05-25T00:33:19.329" v="4590" actId="27636"/>
+          <ac:chgData name="Heinrich Venter" userId="694de3c83518532c" providerId="LiveId" clId="{10CD68D7-CBE1-4750-A2D1-7DEE064E9363}" dt="2026-05-26T08:16:41.980" v="4892" actId="27636"/>
           <ac:spMkLst>
             <pc:docMk/>
             <pc:sldMk cId="2380697536" sldId="295"/>
@@ -556,7 +609,7 @@
           </ac:spMkLst>
         </pc:spChg>
         <pc:spChg chg="mod">
-          <ac:chgData name="Heinrich Venter" userId="694de3c83518532c" providerId="LiveId" clId="{10CD68D7-CBE1-4750-A2D1-7DEE064E9363}" dt="2026-05-25T00:33:23.546" v="4592" actId="27636"/>
+          <ac:chgData name="Heinrich Venter" userId="694de3c83518532c" providerId="LiveId" clId="{10CD68D7-CBE1-4750-A2D1-7DEE064E9363}" dt="2026-05-26T08:19:28.846" v="4899" actId="113"/>
           <ac:spMkLst>
             <pc:docMk/>
             <pc:sldMk cId="2380697536" sldId="295"/>
@@ -565,13 +618,13 @@
         </pc:spChg>
       </pc:sldChg>
       <pc:sldChg chg="modSp mod">
-        <pc:chgData name="Heinrich Venter" userId="694de3c83518532c" providerId="LiveId" clId="{10CD68D7-CBE1-4750-A2D1-7DEE064E9363}" dt="2026-05-24T11:45:55.046" v="4580" actId="20577"/>
+        <pc:chgData name="Heinrich Venter" userId="694de3c83518532c" providerId="LiveId" clId="{10CD68D7-CBE1-4750-A2D1-7DEE064E9363}" dt="2026-05-26T08:25:29.564" v="4930" actId="20577"/>
         <pc:sldMkLst>
           <pc:docMk/>
           <pc:sldMk cId="1324961155" sldId="296"/>
         </pc:sldMkLst>
         <pc:spChg chg="mod">
-          <ac:chgData name="Heinrich Venter" userId="694de3c83518532c" providerId="LiveId" clId="{10CD68D7-CBE1-4750-A2D1-7DEE064E9363}" dt="2026-05-24T11:45:55.046" v="4580" actId="20577"/>
+          <ac:chgData name="Heinrich Venter" userId="694de3c83518532c" providerId="LiveId" clId="{10CD68D7-CBE1-4750-A2D1-7DEE064E9363}" dt="2026-05-26T08:25:29.564" v="4930" actId="20577"/>
           <ac:spMkLst>
             <pc:docMk/>
             <pc:sldMk cId="1324961155" sldId="296"/>
@@ -579,20 +632,13 @@
           </ac:spMkLst>
         </pc:spChg>
         <pc:spChg chg="mod">
-          <ac:chgData name="Heinrich Venter" userId="694de3c83518532c" providerId="LiveId" clId="{10CD68D7-CBE1-4750-A2D1-7DEE064E9363}" dt="2026-05-24T11:44:51.270" v="4567" actId="20577"/>
+          <ac:chgData name="Heinrich Venter" userId="694de3c83518532c" providerId="LiveId" clId="{10CD68D7-CBE1-4750-A2D1-7DEE064E9363}" dt="2026-05-26T08:25:23.705" v="4927" actId="27636"/>
           <ac:spMkLst>
             <pc:docMk/>
             <pc:sldMk cId="1324961155" sldId="296"/>
             <ac:spMk id="11" creationId="{E3D936A8-CA08-48BB-AA98-F3A8B43B31CF}"/>
           </ac:spMkLst>
         </pc:spChg>
-      </pc:sldChg>
-      <pc:sldChg chg="new del">
-        <pc:chgData name="Heinrich Venter" userId="694de3c83518532c" providerId="LiveId" clId="{10CD68D7-CBE1-4750-A2D1-7DEE064E9363}" dt="2026-05-24T09:59:59.159" v="3390" actId="47"/>
-        <pc:sldMkLst>
-          <pc:docMk/>
-          <pc:sldMk cId="1930837264" sldId="297"/>
-        </pc:sldMkLst>
       </pc:sldChg>
     </pc:docChg>
   </pc:docChgLst>
@@ -748,7 +794,7 @@
           <a:p>
             <a:fld id="{A609F6A2-FEED-40EB-83D5-ADDC04076AF0}" type="datetimeFigureOut">
               <a:rPr lang="en-NZ" smtClean="0"/>
-              <a:t>25/05/2026</a:t>
+              <a:t>26/05/2026</a:t>
             </a:fld>
             <a:endParaRPr lang="en-NZ"/>
           </a:p>
@@ -948,7 +994,7 @@
           <a:p>
             <a:fld id="{A609F6A2-FEED-40EB-83D5-ADDC04076AF0}" type="datetimeFigureOut">
               <a:rPr lang="en-NZ" smtClean="0"/>
-              <a:t>25/05/2026</a:t>
+              <a:t>26/05/2026</a:t>
             </a:fld>
             <a:endParaRPr lang="en-NZ"/>
           </a:p>
@@ -1158,7 +1204,7 @@
           <a:p>
             <a:fld id="{A609F6A2-FEED-40EB-83D5-ADDC04076AF0}" type="datetimeFigureOut">
               <a:rPr lang="en-NZ" smtClean="0"/>
-              <a:t>25/05/2026</a:t>
+              <a:t>26/05/2026</a:t>
             </a:fld>
             <a:endParaRPr lang="en-NZ"/>
           </a:p>
@@ -1358,7 +1404,7 @@
           <a:p>
             <a:fld id="{A609F6A2-FEED-40EB-83D5-ADDC04076AF0}" type="datetimeFigureOut">
               <a:rPr lang="en-NZ" smtClean="0"/>
-              <a:t>25/05/2026</a:t>
+              <a:t>26/05/2026</a:t>
             </a:fld>
             <a:endParaRPr lang="en-NZ"/>
           </a:p>
@@ -1634,7 +1680,7 @@
           <a:p>
             <a:fld id="{A609F6A2-FEED-40EB-83D5-ADDC04076AF0}" type="datetimeFigureOut">
               <a:rPr lang="en-NZ" smtClean="0"/>
-              <a:t>25/05/2026</a:t>
+              <a:t>26/05/2026</a:t>
             </a:fld>
             <a:endParaRPr lang="en-NZ"/>
           </a:p>
@@ -1902,7 +1948,7 @@
           <a:p>
             <a:fld id="{A609F6A2-FEED-40EB-83D5-ADDC04076AF0}" type="datetimeFigureOut">
               <a:rPr lang="en-NZ" smtClean="0"/>
-              <a:t>25/05/2026</a:t>
+              <a:t>26/05/2026</a:t>
             </a:fld>
             <a:endParaRPr lang="en-NZ"/>
           </a:p>
@@ -2317,7 +2363,7 @@
           <a:p>
             <a:fld id="{A609F6A2-FEED-40EB-83D5-ADDC04076AF0}" type="datetimeFigureOut">
               <a:rPr lang="en-NZ" smtClean="0"/>
-              <a:t>25/05/2026</a:t>
+              <a:t>26/05/2026</a:t>
             </a:fld>
             <a:endParaRPr lang="en-NZ"/>
           </a:p>
@@ -2459,7 +2505,7 @@
           <a:p>
             <a:fld id="{A609F6A2-FEED-40EB-83D5-ADDC04076AF0}" type="datetimeFigureOut">
               <a:rPr lang="en-NZ" smtClean="0"/>
-              <a:t>25/05/2026</a:t>
+              <a:t>26/05/2026</a:t>
             </a:fld>
             <a:endParaRPr lang="en-NZ"/>
           </a:p>
@@ -2572,7 +2618,7 @@
           <a:p>
             <a:fld id="{A609F6A2-FEED-40EB-83D5-ADDC04076AF0}" type="datetimeFigureOut">
               <a:rPr lang="en-NZ" smtClean="0"/>
-              <a:t>25/05/2026</a:t>
+              <a:t>26/05/2026</a:t>
             </a:fld>
             <a:endParaRPr lang="en-NZ"/>
           </a:p>
@@ -2885,7 +2931,7 @@
           <a:p>
             <a:fld id="{A609F6A2-FEED-40EB-83D5-ADDC04076AF0}" type="datetimeFigureOut">
               <a:rPr lang="en-NZ" smtClean="0"/>
-              <a:t>25/05/2026</a:t>
+              <a:t>26/05/2026</a:t>
             </a:fld>
             <a:endParaRPr lang="en-NZ"/>
           </a:p>
@@ -3174,7 +3220,7 @@
           <a:p>
             <a:fld id="{A609F6A2-FEED-40EB-83D5-ADDC04076AF0}" type="datetimeFigureOut">
               <a:rPr lang="en-NZ" smtClean="0"/>
-              <a:t>25/05/2026</a:t>
+              <a:t>26/05/2026</a:t>
             </a:fld>
             <a:endParaRPr lang="en-NZ"/>
           </a:p>
@@ -3417,7 +3463,7 @@
           <a:p>
             <a:fld id="{A609F6A2-FEED-40EB-83D5-ADDC04076AF0}" type="datetimeFigureOut">
               <a:rPr lang="en-NZ" smtClean="0"/>
-              <a:t>25/05/2026</a:t>
+              <a:t>26/05/2026</a:t>
             </a:fld>
             <a:endParaRPr lang="en-NZ"/>
           </a:p>
@@ -4199,19 +4245,11 @@
             </a:r>
             <a:r>
               <a:rPr lang="en-NZ" dirty="0" err="1"/>
-              <a:t>uderstranding</a:t>
+              <a:t>understranding</a:t>
             </a:r>
             <a:r>
               <a:rPr lang="en-NZ" dirty="0"/>
-              <a:t> on the workings of the </a:t>
-            </a:r>
-            <a:r>
-              <a:rPr lang="en-NZ" dirty="0" err="1"/>
-              <a:t>arduios</a:t>
-            </a:r>
-            <a:r>
-              <a:rPr lang="en-NZ" dirty="0"/>
-              <a:t> compared to a the esp32 which </a:t>
+              <a:t> on the workings of the Arduino compared to a the esp32 which </a:t>
             </a:r>
             <a:r>
               <a:rPr lang="en-NZ" dirty="0" err="1"/>
@@ -10017,7 +10055,7 @@
         </p:spPr>
         <p:txBody>
           <a:bodyPr vert="horz" lIns="91440" tIns="45720" rIns="91440" bIns="45720" rtlCol="0">
-            <a:normAutofit fontScale="55000" lnSpcReduction="20000"/>
+            <a:normAutofit fontScale="62500" lnSpcReduction="20000"/>
           </a:bodyPr>
           <a:lstStyle>
             <a:lvl1pPr marL="228600" indent="-228600" algn="l" defTabSz="914400" rtl="0" eaLnBrk="1" latinLnBrk="0" hangingPunct="1">
@@ -10199,7 +10237,7 @@
             </a:pPr>
             <a:r>
               <a:rPr lang="en-US" dirty="0"/>
-              <a:t>To ensure the long-term stability of the visual dashboard alerts under real riding conditions, the LED indicator circuit was run through a sequence of 10 consecutive switching trials. During the first 3 trials, the LED exhibited visible flickering and unstable brightness levels whenever the 800W motor was throttling, showing that high-frequency noise was leaking into the Arduino's digital output lines. Prior to trial 4, a \(0.1\,\mu\text{F}\) hardware capacitor was added to smooth the output line, working alongside the \(1\text{k}\Omega\) current-limiting resistor. Across the final 7 test cycles, the LED illumination stabilized completely, delivering a perfectly steady, repeatable visual output with zero flickering or communication drops.</a:t>
+              <a:t>To ensure the long-term stability of the visual dashboard alerts under real riding conditions, the LED indicator circuit was run through a sequence of 10 consecutive switching trials. During the first 3 trials, the LED exhibited visible flickering and unstable brightness levels whenever the 800W motor was throttling, showing that high-frequency noise was leaking into the Arduino's digital output lines. Prior to trial 4, a 0.1uf hardware capacitor was added to smooth the output line, working alongside the 1k ohm current-limiting resistor. Across the final 7 test cycles, the LED illumination stabilized completely, delivering a perfectly steady, repeatable visual output with zero flickering or communication drops.</a:t>
             </a:r>
           </a:p>
           <a:p>
@@ -10542,7 +10580,7 @@
         </p:spPr>
         <p:txBody>
           <a:bodyPr>
-            <a:normAutofit/>
+            <a:normAutofit fontScale="85000" lnSpcReduction="20000"/>
           </a:bodyPr>
           <a:lstStyle/>
           <a:p>
@@ -10553,6 +10591,16 @@
               <a:rPr lang="en-NZ" noProof="0" dirty="0"/>
               <a:t>Chosen</a:t>
             </a:r>
+          </a:p>
+          <a:p>
+            <a:pPr marL="0" indent="0">
+              <a:buNone/>
+            </a:pPr>
+            <a:r>
+              <a:rPr lang="en-US" dirty="0"/>
+              <a:t>Manual Lever-Operated Clutch with Electronic Position Sensor.</a:t>
+            </a:r>
+            <a:endParaRPr lang="en-NZ" noProof="0" dirty="0"/>
           </a:p>
         </p:txBody>
       </p:sp>
@@ -10581,7 +10629,7 @@
         </p:spPr>
         <p:txBody>
           <a:bodyPr vert="horz" lIns="91440" tIns="45720" rIns="91440" bIns="45720" rtlCol="0">
-            <a:normAutofit/>
+            <a:normAutofit lnSpcReduction="10000"/>
           </a:bodyPr>
           <a:lstStyle>
             <a:lvl1pPr marL="228600" indent="-228600" algn="l" defTabSz="914400" rtl="0" eaLnBrk="1" latinLnBrk="0" hangingPunct="1">
@@ -10756,6 +10804,16 @@
               <a:rPr lang="en-NZ" noProof="0" dirty="0"/>
               <a:t>Alternative 1</a:t>
             </a:r>
+          </a:p>
+          <a:p>
+            <a:pPr marL="0" indent="0">
+              <a:buNone/>
+            </a:pPr>
+            <a:r>
+              <a:rPr lang="en-NZ" dirty="0"/>
+              <a:t>Automatic Centrifugal Clutch Mechanism.</a:t>
+            </a:r>
+            <a:endParaRPr lang="en-NZ" noProof="0" dirty="0"/>
           </a:p>
         </p:txBody>
       </p:sp>
@@ -10784,7 +10842,7 @@
         </p:spPr>
         <p:txBody>
           <a:bodyPr vert="horz" lIns="91440" tIns="45720" rIns="91440" bIns="45720" rtlCol="0">
-            <a:normAutofit/>
+            <a:normAutofit lnSpcReduction="10000"/>
           </a:bodyPr>
           <a:lstStyle>
             <a:lvl1pPr marL="228600" indent="-228600" algn="l" defTabSz="914400" rtl="0" eaLnBrk="1" latinLnBrk="0" hangingPunct="1">
@@ -10959,6 +11017,16 @@
               <a:rPr lang="en-NZ" noProof="0" dirty="0"/>
               <a:t>Alternative 2</a:t>
             </a:r>
+          </a:p>
+          <a:p>
+            <a:pPr marL="0" indent="0">
+              <a:buNone/>
+            </a:pPr>
+            <a:r>
+              <a:rPr lang="en-US" dirty="0"/>
+              <a:t>Direct Drive System (No Clutch).</a:t>
+            </a:r>
+            <a:endParaRPr lang="en-NZ" noProof="0" dirty="0"/>
           </a:p>
         </p:txBody>
       </p:sp>
@@ -11054,7 +11122,15 @@
             </a:pPr>
             <a:r>
               <a:rPr lang="en-NZ" noProof="0" dirty="0"/>
-              <a:t>Describe your project here:</a:t>
+              <a:t>Describe your project here: A 70cc hybrid </a:t>
+            </a:r>
+            <a:r>
+              <a:rPr lang="en-NZ" noProof="0" dirty="0" err="1"/>
+              <a:t>pitbike</a:t>
+            </a:r>
+            <a:r>
+              <a:rPr lang="en-NZ" noProof="0" dirty="0"/>
+              <a:t> with the 70cc engine being paired with a 800w 36v electric motor</a:t>
             </a:r>
             <a:br>
               <a:rPr lang="en-NZ" noProof="0" dirty="0"/>
@@ -11167,7 +11243,7 @@
         </p:spPr>
         <p:txBody>
           <a:bodyPr>
-            <a:normAutofit/>
+            <a:normAutofit fontScale="55000" lnSpcReduction="20000"/>
           </a:bodyPr>
           <a:lstStyle/>
           <a:p>
@@ -11178,6 +11254,16 @@
               <a:rPr lang="en-NZ" noProof="0" dirty="0"/>
               <a:t>Explanation of component</a:t>
             </a:r>
+          </a:p>
+          <a:p>
+            <a:pPr marL="0" indent="0">
+              <a:buNone/>
+            </a:pPr>
+            <a:r>
+              <a:rPr lang="en-US" dirty="0"/>
+              <a:t>The clutch assembly is a mechanical drivetrain component responsible for engaging and disengaging power transfer from the 800W motor to the drive gears. This setup utilizes a manual clutch lever mechanism monitored by an electronic sensor. When the rider pulls the lever, the mechanical plates separate to interrupt the motor's power flow, allowing smooth transitions and safety overrides. The accompanying electronic sensor converts the physical movement into a clear signal for the Arduino, allowing the microcontroller to cut motor power or adjust internal tracking whenever the clutch is disengaged.</a:t>
+            </a:r>
+            <a:endParaRPr lang="en-NZ" noProof="0" dirty="0"/>
           </a:p>
         </p:txBody>
       </p:sp>
@@ -11415,7 +11501,7 @@
         </p:spPr>
         <p:txBody>
           <a:bodyPr vert="horz" lIns="91440" tIns="45720" rIns="91440" bIns="45720" rtlCol="0">
-            <a:normAutofit/>
+            <a:normAutofit fontScale="40000" lnSpcReduction="20000"/>
           </a:bodyPr>
           <a:lstStyle>
             <a:lvl1pPr marL="228600" indent="-228600" algn="l" defTabSz="914400" rtl="0" eaLnBrk="1" latinLnBrk="0" hangingPunct="1">
@@ -11590,6 +11676,31 @@
               <a:rPr lang="en-NZ" noProof="0" dirty="0"/>
               <a:t>Component test log:</a:t>
             </a:r>
+          </a:p>
+          <a:p>
+            <a:pPr marL="0" indent="0">
+              <a:buNone/>
+            </a:pPr>
+            <a:r>
+              <a:rPr lang="en-US" dirty="0"/>
+              <a:t>The objective of this test was to verify that the physical manual clutch assembly smoothly and securely interrupts mechanical power transfer from the 800W motor to the drive gears. The clutch unit was mounted directly to the main motor drivetrain on a test fixture and actuated manually under active motor load conditions. Initial trials showed slight friction binding along the lever actuation arm, which occasionally caused slow plate separation. To resolve this mechanical issue, the assembly linkages were cleaned, re-aligned, and treated with proper lubricant. Across ten consecutive mechanical engagements and disengagements under full motor torque, the plates separated cleanly without slipping, completely cutting mechanical drive to the wheels instantly upon lever pull and confirming a PASSED mechanical test status.</a:t>
+            </a:r>
+          </a:p>
+          <a:p>
+            <a:pPr marL="0" indent="0">
+              <a:buNone/>
+            </a:pPr>
+            <a:br>
+              <a:rPr lang="en-US" dirty="0"/>
+            </a:br>
+            <a:endParaRPr lang="en-US" dirty="0"/>
+          </a:p>
+          <a:p>
+            <a:pPr marL="0" indent="0">
+              <a:buFont typeface="Arial" panose="020B0604020202020204" pitchFamily="34" charset="0"/>
+              <a:buNone/>
+            </a:pPr>
+            <a:endParaRPr lang="en-NZ" noProof="0" dirty="0"/>
           </a:p>
           <a:p>
             <a:pPr marL="0" indent="0">
@@ -11869,25 +11980,20 @@
             </a:pPr>
             <a:r>
               <a:rPr lang="en-NZ" noProof="0" dirty="0"/>
-              <a:t>Analyse notes from testing and note changes to be made:</a:t>
-            </a:r>
+              <a:t>Analyse notes from testing and note changes to be made:    </a:t>
+            </a:r>
+            <a:r>
+              <a:rPr lang="en-US" dirty="0"/>
+              <a:t>Mechanical data analysis shows that the high torque from the 800W motor exerts tremendous forces on the clutch plates, making the system sensitive to even the slightest misalignment or tilting of the parts during operation. Using a standard linkage will only cause rapid failure if the gears are not perfectly aligned. To permanently ensure the durability and reliability of the e-bike drivetrain, a hardware fabrication change will be made: a customized sleeve will be made that is perfectly straight to serve as a central press-fit structure. This sleeve will permanently connect and align all hubs to a single central point, completely eliminating wobble, ensuring perfect drivetrain alignment, and preventing premature clutch wear over long-term use.</a:t>
+            </a:r>
+            <a:endParaRPr lang="en-NZ" noProof="0" dirty="0"/>
           </a:p>
           <a:p>
             <a:pPr marL="0" indent="0">
+              <a:buFont typeface="Arial" panose="020B0604020202020204" pitchFamily="34" charset="0"/>
               <a:buNone/>
             </a:pPr>
-            <a:r>
-              <a:rPr lang="en-US" dirty="0"/>
-              <a:t>Analysis of the testing logs indicates that heavy current draw from the 800W motor creates massive magnetic fields that easily corrupt the delicate digital pulse trains generated by the flow meter's internal Hall switch. Relying on software corrections alone cannot filter out this real-time electrical noise. To guarantee long-term system reliability on the vehicle, two permanent hardware changes will be implemented: first</a:t>
-            </a:r>
-            <a:r>
-              <a:rPr lang="en-US"/>
-              <a:t>, a 0.1uf ceramic </a:t>
-            </a:r>
-            <a:r>
-              <a:rPr lang="en-US" dirty="0"/>
-              <a:t>filtering capacitor will be permanently soldered directly onto the interface circuit board to suppress high-frequency voltage spikes. Second, the sensor run will be rewired using braided, grounded shield cables to completely isolate the fluid tracking signals from the bike's main power lines.</a:t>
-            </a:r>
+            <a:endParaRPr lang="en-NZ" noProof="0" dirty="0"/>
           </a:p>
           <a:p>
             <a:pPr marL="0" indent="0">
@@ -12142,7 +12248,7 @@
         </p:spPr>
         <p:txBody>
           <a:bodyPr vert="horz" lIns="91440" tIns="45720" rIns="91440" bIns="45720" rtlCol="0">
-            <a:normAutofit fontScale="55000" lnSpcReduction="20000"/>
+            <a:normAutofit fontScale="85000" lnSpcReduction="20000"/>
           </a:bodyPr>
           <a:lstStyle>
             <a:lvl1pPr marL="228600" indent="-228600" algn="l" defTabSz="914400" rtl="0" eaLnBrk="1" latinLnBrk="0" hangingPunct="1">
@@ -12324,8 +12430,9 @@
             </a:pPr>
             <a:r>
               <a:rPr lang="en-US" dirty="0"/>
-              <a:t>To verify the physical and electrical endurance of the volumetric tracking system under active riding conditions, the OF07ZAT sensor circuit was run through a sequence of 10 consecutive fluid-flow trials. During the first 3 trials, the system reported erratic volume jumps and unstable pulse counts whenever the nearby 800W motor was operated at high loads, proving that unshielded sensor lines were highly vulnerable to electromagnetic noise. Prior to trial 4, a 0.1uf hardware decoupling capacitor was installed across the signal line, and the sensor wiring layout was physically isolated from the high-voltage motor cables. Across the remaining 7 test cycles, the data stabilized completely, delivering a perfectly uniform, repeatable pulse train with zero missed gear rotations or false data drops.</a:t>
-            </a:r>
+              <a:t>Manual clutch assembly stress trials revealed initial instability and wobble, which were corrected by manually aligning the central hub to ensure proper clearance. Following this adjustment, the system demonstrated consistent, reliable performance throughout the remaining tests without mechanical failure.</a:t>
+            </a:r>
+            <a:endParaRPr lang="en-NZ" dirty="0"/>
           </a:p>
           <a:p>
             <a:pPr marL="0" indent="0">
@@ -12428,8 +12535,18 @@
             </a:pPr>
             <a:r>
               <a:rPr lang="en-NZ" dirty="0"/>
-              <a:t>Include a screenshot/video of the final outcome working before testing here</a:t>
-            </a:r>
+              <a:t>Include a screenshot/video of the final outcome working before </a:t>
+            </a:r>
+            <a:r>
+              <a:rPr lang="en-NZ"/>
+              <a:t>testing here</a:t>
+            </a:r>
+          </a:p>
+          <a:p>
+            <a:pPr marL="0" indent="0">
+              <a:buNone/>
+            </a:pPr>
+            <a:endParaRPr lang="en-NZ" dirty="0"/>
           </a:p>
         </p:txBody>
       </p:sp>
@@ -14643,7 +14760,9 @@
           </a:solidFill>
         </p:spPr>
         <p:txBody>
-          <a:bodyPr/>
+          <a:bodyPr>
+            <a:normAutofit fontScale="55000" lnSpcReduction="20000"/>
+          </a:bodyPr>
           <a:lstStyle/>
           <a:p>
             <a:pPr marL="0" indent="0">
@@ -14668,6 +14787,16 @@
               <a:rPr lang="en-NZ" noProof="0" dirty="0"/>
               <a:t>Evidence:</a:t>
             </a:r>
+          </a:p>
+          <a:p>
+            <a:pPr marL="0" indent="0">
+              <a:buNone/>
+            </a:pPr>
+            <a:r>
+              <a:rPr lang="en-US" dirty="0"/>
+              <a:t>To establish reliable data sharing across the system, the I2C (Inter-Integrated Circuit) communication protocol was implemented to connect the Arduino master microcontroller to the dashboard OLED slave display. This network uses a two-wire synchronous bus consisting of a Serial Data line (SDA) and a Serial Clock line (SCL) . By utilizing I2C, the system transmits continuous, real-time telemetry updates—such as calculated travel speeds and rotational engine RPM—directly to the rider's screen using only two physical microcontroller pins, thereby preserving vital input resources for other critical sensors.</a:t>
+            </a:r>
+            <a:endParaRPr lang="en-NZ" noProof="0" dirty="0"/>
           </a:p>
           <a:p>
             <a:pPr marL="0" indent="0">
@@ -14705,7 +14834,7 @@
         </p:spPr>
         <p:txBody>
           <a:bodyPr vert="horz" lIns="91440" tIns="45720" rIns="91440" bIns="45720" rtlCol="0">
-            <a:normAutofit/>
+            <a:normAutofit fontScale="55000" lnSpcReduction="20000"/>
           </a:bodyPr>
           <a:lstStyle>
             <a:lvl1pPr marL="228600" indent="-228600" algn="l" defTabSz="914400" rtl="0" eaLnBrk="1" latinLnBrk="0" hangingPunct="1">
@@ -14872,13 +15001,13 @@
             </a:lvl9pPr>
           </a:lstStyle>
           <a:p>
-            <a:pPr marL="0" indent="0">
-              <a:buFont typeface="Arial" panose="020B0604020202020204" pitchFamily="34" charset="0"/>
-              <a:buNone/>
-            </a:pPr>
             <a:r>
               <a:rPr lang="en-NZ" noProof="0" dirty="0"/>
-              <a:t>Technique 1:</a:t>
+              <a:t>Technique 2: </a:t>
+            </a:r>
+            <a:r>
+              <a:rPr lang="en-US" dirty="0"/>
+              <a:t>Filtering, noise and EMI suppression</a:t>
             </a:r>
           </a:p>
           <a:p>
@@ -14893,7 +15022,23 @@
               <a:buFont typeface="Arial" panose="020B0604020202020204" pitchFamily="34" charset="0"/>
               <a:buNone/>
             </a:pPr>
-            <a:endParaRPr lang="en-NZ" noProof="0" dirty="0"/>
+            <a:r>
+              <a:rPr lang="en-NZ" noProof="0" dirty="0"/>
+              <a:t>Evidence:</a:t>
+            </a:r>
+          </a:p>
+          <a:p>
+            <a:pPr marL="0" indent="0">
+              <a:buNone/>
+            </a:pPr>
+            <a:r>
+              <a:rPr lang="en-US" dirty="0"/>
+              <a:t>During bench testing, the high-current draw from the 800W motor introduced massive electromagnetic interference (EMI) and high-frequency voltage ripples into the circuit. To suppress this electrical noise, physical hardware filtering was integrated by placing 0.1uf ceramic decoupling capacitors across the signal and ground lines of the Hall effect speed sensors, the LED alert indicators, and the battery voltage divider inputs. This hardware modification permanently smoothed out voltage spikes and isolated the signal lines, resulting in zero false triggers and completely stable data tracking across consecutive trials.</a:t>
+            </a:r>
+            <a:br>
+              <a:rPr lang="en-US" dirty="0"/>
+            </a:br>
+            <a:endParaRPr lang="en-US" dirty="0"/>
           </a:p>
           <a:p>
             <a:pPr marL="0" indent="0">
@@ -14901,16 +15046,6 @@
               <a:buNone/>
             </a:pPr>
             <a:endParaRPr lang="en-NZ" noProof="0" dirty="0"/>
-          </a:p>
-          <a:p>
-            <a:pPr marL="0" indent="0">
-              <a:buFont typeface="Arial" panose="020B0604020202020204" pitchFamily="34" charset="0"/>
-              <a:buNone/>
-            </a:pPr>
-            <a:r>
-              <a:rPr lang="en-NZ" noProof="0" dirty="0"/>
-              <a:t>Evidence:</a:t>
-            </a:r>
           </a:p>
           <a:p>
             <a:pPr marL="0" indent="0">
@@ -16127,7 +16262,7 @@
             </a:pPr>
             <a:r>
               <a:rPr lang="en-US" sz="1800" dirty="0"/>
-              <a:t>For this project, I am using the I2C (Inter-Integrated Circuit) communication protocol to interface the Arduino with the dashboard OLED display. I2C operates as a master-slave system using a two-wire synchronous bus consisting of a Serial Data line (SDA) and a Serial Clock line (SCL). The Arduino acts as the master device, generating the clock signal and initiating contact by transmitting the unique 7-bit hardware address belonging to the OLED display. Once communication is established, the Arduino uses this data bus to send continuous, real-time telemetry updates. Specifically, I am using this protocol to transmit calculated values ​​for the e-bike's speed, clutch RPM, battery voltage, and fuel flow status directly to the screen for the rider to see.</a:t>
+              <a:t>For this project, I am using the I2C (Inter-Integrated Circuit) communication protocol to interface the Arduino with the dashboard OLED display. I2C operates as a master-slave system using a two-wire synchronous bus consisting of a Serial Data line (SDA) and a Serial Clock line (SCL). The Arduino acts as the master device, generating the clock signal and initiating contact by transmitting the unique 7-bit hardware address belonging to the OLED display. Once communication is established, the Arduino uses this data bus to send continuous, real-time telemetry updates. Specifically, I am using this protocol to transmit calculated values ​​for the bike's speed, clutch RPM and  battery voltage directly to the screen for the rider to see.</a:t>
             </a:r>
             <a:endParaRPr lang="en-NZ" sz="1800" i="1" noProof="0" dirty="0"/>
           </a:p>

--- a/AS91904 Electronics Heinrich Venter.pptx
+++ b/AS91904 Electronics Heinrich Venter.pptx
@@ -138,6 +138,12 @@
 </p:presentation>
 </file>
 
+<file path=ppt/authors.xml><?xml version="1.0" encoding="utf-8"?>
+<p188:authorLst xmlns:a="http://schemas.openxmlformats.org/drawingml/2006/main" xmlns:r="http://schemas.openxmlformats.org/officeDocument/2006/relationships" xmlns:p188="http://schemas.microsoft.com/office/powerpoint/2018/8/main">
+  <p188:author id="{13C077F8-8573-EEE0-B7B7-42F83088B50D}" name="Heinrich Venter" initials="HV" userId="694de3c83518532c" providerId="Windows Live"/>
+</p188:authorLst>
+</file>
+
 <file path=ppt/revisionInfo.xml><?xml version="1.0" encoding="utf-8"?>
 <p1510:revInfo xmlns:a="http://schemas.openxmlformats.org/drawingml/2006/main" xmlns:r="http://schemas.openxmlformats.org/officeDocument/2006/relationships" xmlns:p1510="http://schemas.microsoft.com/office/powerpoint/2015/10/main">
   <p1510:revLst>
@@ -151,7 +157,7 @@
   <pc:docChgLst>
     <pc:chgData name="Heinrich Venter" userId="694de3c83518532c" providerId="LiveId" clId="{10CD68D7-CBE1-4750-A2D1-7DEE064E9363}"/>
     <pc:docChg chg="undo custSel addSld delSld modSld">
-      <pc:chgData name="Heinrich Venter" userId="694de3c83518532c" providerId="LiveId" clId="{10CD68D7-CBE1-4750-A2D1-7DEE064E9363}" dt="2026-05-26T08:25:46.067" v="4931" actId="20577"/>
+      <pc:chgData name="Heinrich Venter" userId="694de3c83518532c" providerId="LiveId" clId="{10CD68D7-CBE1-4750-A2D1-7DEE064E9363}" dt="2026-06-01T23:42:20.057" v="4945" actId="20577"/>
       <pc:docMkLst>
         <pc:docMk/>
       </pc:docMkLst>
@@ -209,13 +215,13 @@
         </pc:spChg>
       </pc:sldChg>
       <pc:sldChg chg="modSp mod">
-        <pc:chgData name="Heinrich Venter" userId="694de3c83518532c" providerId="LiveId" clId="{10CD68D7-CBE1-4750-A2D1-7DEE064E9363}" dt="2026-05-24T09:14:35.187" v="95"/>
+        <pc:chgData name="Heinrich Venter" userId="694de3c83518532c" providerId="LiveId" clId="{10CD68D7-CBE1-4750-A2D1-7DEE064E9363}" dt="2026-06-01T23:37:14.244" v="4932" actId="113"/>
         <pc:sldMkLst>
           <pc:docMk/>
           <pc:sldMk cId="4279029636" sldId="259"/>
         </pc:sldMkLst>
         <pc:graphicFrameChg chg="mod modGraphic">
-          <ac:chgData name="Heinrich Venter" userId="694de3c83518532c" providerId="LiveId" clId="{10CD68D7-CBE1-4750-A2D1-7DEE064E9363}" dt="2026-05-24T09:14:35.187" v="95"/>
+          <ac:chgData name="Heinrich Venter" userId="694de3c83518532c" providerId="LiveId" clId="{10CD68D7-CBE1-4750-A2D1-7DEE064E9363}" dt="2026-06-01T23:37:14.244" v="4932" actId="113"/>
           <ac:graphicFrameMkLst>
             <pc:docMk/>
             <pc:sldMk cId="4279029636" sldId="259"/>
@@ -278,7 +284,7 @@
         </pc:picChg>
       </pc:sldChg>
       <pc:sldChg chg="modSp mod">
-        <pc:chgData name="Heinrich Venter" userId="694de3c83518532c" providerId="LiveId" clId="{10CD68D7-CBE1-4750-A2D1-7DEE064E9363}" dt="2026-05-24T11:05:44.022" v="4106" actId="20577"/>
+        <pc:chgData name="Heinrich Venter" userId="694de3c83518532c" providerId="LiveId" clId="{10CD68D7-CBE1-4750-A2D1-7DEE064E9363}" dt="2026-06-01T23:42:20.057" v="4945" actId="20577"/>
         <pc:sldMkLst>
           <pc:docMk/>
           <pc:sldMk cId="3469156485" sldId="280"/>
@@ -289,6 +295,14 @@
             <pc:docMk/>
             <pc:sldMk cId="3469156485" sldId="280"/>
             <ac:spMk id="5" creationId="{50C57F65-7853-E45D-CA58-31BCC9DE7B02}"/>
+          </ac:spMkLst>
+        </pc:spChg>
+        <pc:spChg chg="mod">
+          <ac:chgData name="Heinrich Venter" userId="694de3c83518532c" providerId="LiveId" clId="{10CD68D7-CBE1-4750-A2D1-7DEE064E9363}" dt="2026-06-01T23:42:20.057" v="4945" actId="20577"/>
+          <ac:spMkLst>
+            <pc:docMk/>
+            <pc:sldMk cId="3469156485" sldId="280"/>
+            <ac:spMk id="6" creationId="{4FBA3B69-CE34-9320-97C4-16C15C4852CE}"/>
           </ac:spMkLst>
         </pc:spChg>
         <pc:spChg chg="mod">
@@ -645,6 +659,138 @@
 </pc:chgInfo>
 </file>
 
+<file path=ppt/comments/modernComment_101_FFE3B6F5.xml><?xml version="1.0" encoding="utf-8"?>
+<p188:cmLst xmlns:a="http://schemas.openxmlformats.org/drawingml/2006/main" xmlns:r="http://schemas.openxmlformats.org/officeDocument/2006/relationships" xmlns:p188="http://schemas.microsoft.com/office/powerpoint/2018/8/main">
+  <p188:cm id="{9462C05B-E1ED-4E00-AD90-239CB99C6C27}" authorId="{13C077F8-8573-EEE0-B7B7-42F83088B50D}" created="2026-06-01T23:35:41.899">
+    <ac:deMkLst xmlns:ac="http://schemas.microsoft.com/office/drawing/2013/main/command">
+      <pc:docMk xmlns:pc="http://schemas.microsoft.com/office/powerpoint/2013/main/command"/>
+      <pc:sldMk xmlns:pc="http://schemas.microsoft.com/office/powerpoint/2013/main/command" cId="4293113589" sldId="257"/>
+      <ac:spMk id="3" creationId="{EB73A0B0-8C2E-99B2-DFB1-974EF0CDEB52}"/>
+    </ac:deMkLst>
+    <p188:txBody>
+      <a:bodyPr/>
+      <a:lstStyle/>
+      <a:p>
+        <a:r>
+          <a:rPr lang="en-NZ"/>
+          <a:t>With this try and talk about exactly what your project is, it is not clear with this. Get really specific about the electronics parts of this outcome</a:t>
+        </a:r>
+      </a:p>
+    </p188:txBody>
+  </p188:cm>
+</p188:cmLst>
+</file>
+
+<file path=ppt/comments/modernComment_102_8F82B503.xml><?xml version="1.0" encoding="utf-8"?>
+<p188:cmLst xmlns:a="http://schemas.openxmlformats.org/drawingml/2006/main" xmlns:r="http://schemas.openxmlformats.org/officeDocument/2006/relationships" xmlns:p188="http://schemas.microsoft.com/office/powerpoint/2018/8/main">
+  <p188:cm id="{4366C09B-AEC2-46F9-A41F-DF04B9AB752B}" authorId="{13C077F8-8573-EEE0-B7B7-42F83088B50D}" created="2026-06-01T23:36:47.084">
+    <ac:deMkLst xmlns:ac="http://schemas.microsoft.com/office/drawing/2013/main/command">
+      <pc:docMk xmlns:pc="http://schemas.microsoft.com/office/powerpoint/2013/main/command"/>
+      <pc:sldMk xmlns:pc="http://schemas.microsoft.com/office/powerpoint/2013/main/command" cId="2407707907" sldId="258"/>
+      <ac:spMk id="3" creationId="{48517805-ABAD-9125-D5EB-9C37B582DC52}"/>
+    </ac:deMkLst>
+    <p188:txBody>
+      <a:bodyPr/>
+      <a:lstStyle/>
+      <a:p>
+        <a:r>
+          <a:rPr lang="en-NZ"/>
+          <a:t>Re write in own words, and don’t go too much in depth all it is asking is how you are meeting these techniques. So simply :I am going meet this by including x</a:t>
+        </a:r>
+      </a:p>
+    </p188:txBody>
+  </p188:cm>
+</p188:cmLst>
+</file>
+
+<file path=ppt/comments/modernComment_10D_B08B0791.xml><?xml version="1.0" encoding="utf-8"?>
+<p188:cmLst xmlns:a="http://schemas.openxmlformats.org/drawingml/2006/main" xmlns:r="http://schemas.openxmlformats.org/officeDocument/2006/relationships" xmlns:p188="http://schemas.microsoft.com/office/powerpoint/2018/8/main">
+  <p188:cm id="{439A6A2D-3C6E-47F9-9737-920456A2F210}" authorId="{13C077F8-8573-EEE0-B7B7-42F83088B50D}" created="2026-06-01T23:41:17.764">
+    <ac:deMkLst xmlns:ac="http://schemas.microsoft.com/office/drawing/2013/main/command">
+      <pc:docMk xmlns:pc="http://schemas.microsoft.com/office/powerpoint/2013/main/command"/>
+      <pc:sldMk xmlns:pc="http://schemas.microsoft.com/office/powerpoint/2013/main/command" cId="2961901457" sldId="269"/>
+      <ac:spMk id="3" creationId="{A52EF0A1-3D21-8BB7-02F3-33253F2DFB43}"/>
+    </ac:deMkLst>
+    <p188:txBody>
+      <a:bodyPr/>
+      <a:lstStyle/>
+      <a:p>
+        <a:r>
+          <a:rPr lang="en-NZ"/>
+          <a:t>Break this into parts use two slides if possible and use headings</a:t>
+        </a:r>
+      </a:p>
+    </p188:txBody>
+  </p188:cm>
+</p188:cmLst>
+</file>
+
+<file path=ppt/comments/modernComment_117_E97C5DDB.xml><?xml version="1.0" encoding="utf-8"?>
+<p188:cmLst xmlns:a="http://schemas.openxmlformats.org/drawingml/2006/main" xmlns:r="http://schemas.openxmlformats.org/officeDocument/2006/relationships" xmlns:p188="http://schemas.microsoft.com/office/powerpoint/2018/8/main">
+  <p188:cm id="{14EA2BAC-3D7E-4AD0-8925-75C71D51EC5E}" authorId="{13C077F8-8573-EEE0-B7B7-42F83088B50D}" created="2026-06-01T23:42:31.183">
+    <pc:sldMkLst xmlns:pc="http://schemas.microsoft.com/office/powerpoint/2013/main/command">
+      <pc:docMk/>
+      <pc:sldMk cId="3917241819" sldId="279"/>
+    </pc:sldMkLst>
+    <p188:txBody>
+      <a:bodyPr/>
+      <a:lstStyle/>
+      <a:p>
+        <a:r>
+          <a:rPr lang="en-NZ"/>
+          <a:t>Really use own language</a:t>
+        </a:r>
+      </a:p>
+    </p188:txBody>
+  </p188:cm>
+</p188:cmLst>
+</file>
+
+<file path=ppt/comments/modernComment_11D_F491498A.xml><?xml version="1.0" encoding="utf-8"?>
+<p188:cmLst xmlns:a="http://schemas.openxmlformats.org/drawingml/2006/main" xmlns:r="http://schemas.openxmlformats.org/officeDocument/2006/relationships" xmlns:p188="http://schemas.microsoft.com/office/powerpoint/2018/8/main">
+  <p188:cm id="{BCCFE238-01DD-4648-9036-2578AD0A7E92}" authorId="{13C077F8-8573-EEE0-B7B7-42F83088B50D}" created="2026-06-01T23:40:54.990">
+    <pc:sldMkLst xmlns:pc="http://schemas.microsoft.com/office/powerpoint/2013/main/command">
+      <pc:docMk/>
+      <pc:sldMk cId="4103162250" sldId="285"/>
+    </pc:sldMkLst>
+    <p188:txBody>
+      <a:bodyPr/>
+      <a:lstStyle/>
+      <a:p>
+        <a:r>
+          <a:rPr lang="en-NZ"/>
+          <a:t>Doesn’t show that you understand
+For example: I am using I2C between this and that. The way I2C works is
+The reason why I am using it is</a:t>
+        </a:r>
+      </a:p>
+    </p188:txBody>
+  </p188:cm>
+</p188:cmLst>
+</file>
+
+<file path=ppt/comments/modernComment_120_B005E26D.xml><?xml version="1.0" encoding="utf-8"?>
+<p188:cmLst xmlns:a="http://schemas.openxmlformats.org/drawingml/2006/main" xmlns:r="http://schemas.openxmlformats.org/officeDocument/2006/relationships" xmlns:p188="http://schemas.microsoft.com/office/powerpoint/2018/8/main">
+  <p188:cm id="{7BCE5537-69C4-4ECE-925D-538EA70AB39C}" authorId="{13C077F8-8573-EEE0-B7B7-42F83088B50D}" created="2026-06-01T23:42:42.580">
+    <ac:deMkLst xmlns:ac="http://schemas.microsoft.com/office/drawing/2013/main/command">
+      <pc:docMk xmlns:pc="http://schemas.microsoft.com/office/powerpoint/2013/main/command"/>
+      <pc:sldMk xmlns:pc="http://schemas.microsoft.com/office/powerpoint/2013/main/command" cId="2953175661" sldId="288"/>
+      <ac:spMk id="5" creationId="{208AF426-607B-1936-143C-7541AD8896ED}"/>
+    </ac:deMkLst>
+    <p188:txBody>
+      <a:bodyPr/>
+      <a:lstStyle/>
+      <a:p>
+        <a:r>
+          <a:rPr lang="en-NZ"/>
+          <a:t>AI</a:t>
+        </a:r>
+      </a:p>
+    </p188:txBody>
+  </p188:cm>
+</p188:cmLst>
+</file>
+
 <file path=ppt/slideLayouts/slideLayout1.xml><?xml version="1.0" encoding="utf-8"?>
 <p:sldLayout xmlns:a="http://schemas.openxmlformats.org/drawingml/2006/main" xmlns:r="http://schemas.openxmlformats.org/officeDocument/2006/relationships" xmlns:p="http://schemas.openxmlformats.org/presentationml/2006/main" type="title" preserve="1">
   <p:cSld name="Title Slide">
@@ -794,7 +940,7 @@
           <a:p>
             <a:fld id="{A609F6A2-FEED-40EB-83D5-ADDC04076AF0}" type="datetimeFigureOut">
               <a:rPr lang="en-NZ" smtClean="0"/>
-              <a:t>26/05/2026</a:t>
+              <a:t>2/06/2026</a:t>
             </a:fld>
             <a:endParaRPr lang="en-NZ"/>
           </a:p>
@@ -994,7 +1140,7 @@
           <a:p>
             <a:fld id="{A609F6A2-FEED-40EB-83D5-ADDC04076AF0}" type="datetimeFigureOut">
               <a:rPr lang="en-NZ" smtClean="0"/>
-              <a:t>26/05/2026</a:t>
+              <a:t>2/06/2026</a:t>
             </a:fld>
             <a:endParaRPr lang="en-NZ"/>
           </a:p>
@@ -1204,7 +1350,7 @@
           <a:p>
             <a:fld id="{A609F6A2-FEED-40EB-83D5-ADDC04076AF0}" type="datetimeFigureOut">
               <a:rPr lang="en-NZ" smtClean="0"/>
-              <a:t>26/05/2026</a:t>
+              <a:t>2/06/2026</a:t>
             </a:fld>
             <a:endParaRPr lang="en-NZ"/>
           </a:p>
@@ -1404,7 +1550,7 @@
           <a:p>
             <a:fld id="{A609F6A2-FEED-40EB-83D5-ADDC04076AF0}" type="datetimeFigureOut">
               <a:rPr lang="en-NZ" smtClean="0"/>
-              <a:t>26/05/2026</a:t>
+              <a:t>2/06/2026</a:t>
             </a:fld>
             <a:endParaRPr lang="en-NZ"/>
           </a:p>
@@ -1680,7 +1826,7 @@
           <a:p>
             <a:fld id="{A609F6A2-FEED-40EB-83D5-ADDC04076AF0}" type="datetimeFigureOut">
               <a:rPr lang="en-NZ" smtClean="0"/>
-              <a:t>26/05/2026</a:t>
+              <a:t>2/06/2026</a:t>
             </a:fld>
             <a:endParaRPr lang="en-NZ"/>
           </a:p>
@@ -1948,7 +2094,7 @@
           <a:p>
             <a:fld id="{A609F6A2-FEED-40EB-83D5-ADDC04076AF0}" type="datetimeFigureOut">
               <a:rPr lang="en-NZ" smtClean="0"/>
-              <a:t>26/05/2026</a:t>
+              <a:t>2/06/2026</a:t>
             </a:fld>
             <a:endParaRPr lang="en-NZ"/>
           </a:p>
@@ -2363,7 +2509,7 @@
           <a:p>
             <a:fld id="{A609F6A2-FEED-40EB-83D5-ADDC04076AF0}" type="datetimeFigureOut">
               <a:rPr lang="en-NZ" smtClean="0"/>
-              <a:t>26/05/2026</a:t>
+              <a:t>2/06/2026</a:t>
             </a:fld>
             <a:endParaRPr lang="en-NZ"/>
           </a:p>
@@ -2505,7 +2651,7 @@
           <a:p>
             <a:fld id="{A609F6A2-FEED-40EB-83D5-ADDC04076AF0}" type="datetimeFigureOut">
               <a:rPr lang="en-NZ" smtClean="0"/>
-              <a:t>26/05/2026</a:t>
+              <a:t>2/06/2026</a:t>
             </a:fld>
             <a:endParaRPr lang="en-NZ"/>
           </a:p>
@@ -2618,7 +2764,7 @@
           <a:p>
             <a:fld id="{A609F6A2-FEED-40EB-83D5-ADDC04076AF0}" type="datetimeFigureOut">
               <a:rPr lang="en-NZ" smtClean="0"/>
-              <a:t>26/05/2026</a:t>
+              <a:t>2/06/2026</a:t>
             </a:fld>
             <a:endParaRPr lang="en-NZ"/>
           </a:p>
@@ -2931,7 +3077,7 @@
           <a:p>
             <a:fld id="{A609F6A2-FEED-40EB-83D5-ADDC04076AF0}" type="datetimeFigureOut">
               <a:rPr lang="en-NZ" smtClean="0"/>
-              <a:t>26/05/2026</a:t>
+              <a:t>2/06/2026</a:t>
             </a:fld>
             <a:endParaRPr lang="en-NZ"/>
           </a:p>
@@ -3220,7 +3366,7 @@
           <a:p>
             <a:fld id="{A609F6A2-FEED-40EB-83D5-ADDC04076AF0}" type="datetimeFigureOut">
               <a:rPr lang="en-NZ" smtClean="0"/>
-              <a:t>26/05/2026</a:t>
+              <a:t>2/06/2026</a:t>
             </a:fld>
             <a:endParaRPr lang="en-NZ"/>
           </a:p>
@@ -3463,7 +3609,7 @@
           <a:p>
             <a:fld id="{A609F6A2-FEED-40EB-83D5-ADDC04076AF0}" type="datetimeFigureOut">
               <a:rPr lang="en-NZ" smtClean="0"/>
-              <a:t>26/05/2026</a:t>
+              <a:t>2/06/2026</a:t>
             </a:fld>
             <a:endParaRPr lang="en-NZ"/>
           </a:p>
@@ -5347,7 +5493,7 @@
           <p:nvPr/>
         </p:nvPicPr>
         <p:blipFill>
-          <a:blip r:embed="rId2">
+          <a:blip r:embed="rId3">
             <a:extLst>
               <a:ext uri="{28A0092B-C50C-407E-A947-70E740481C1C}">
                 <a14:useLocalDpi xmlns:a14="http://schemas.microsoft.com/office/drawing/2010/main" val="0"/>
@@ -5389,6 +5535,11 @@
   <p:clrMapOvr>
     <a:masterClrMapping/>
   </p:clrMapOvr>
+  <p:extLst>
+    <p:ext uri="{6950BFC3-D8DA-4A85-94F7-54DA5524770B}">
+      <p188:commentRel xmlns:p188="http://schemas.microsoft.com/office/powerpoint/2018/8/main" r:id="rId2"/>
+    </p:ext>
+  </p:extLst>
 </p:sld>
 </file>
 
@@ -5895,7 +6046,7 @@
             </a:pPr>
             <a:r>
               <a:rPr lang="en-NZ" dirty="0"/>
-              <a:t>Test your circuits at least 10 times</a:t>
+              <a:t>Multiple test</a:t>
             </a:r>
             <a:endParaRPr lang="en-NZ" noProof="0" dirty="0"/>
           </a:p>
@@ -6924,6 +7075,11 @@
   <p:clrMapOvr>
     <a:masterClrMapping/>
   </p:clrMapOvr>
+  <p:extLst>
+    <p:ext uri="{6950BFC3-D8DA-4A85-94F7-54DA5524770B}">
+      <p188:commentRel xmlns:p188="http://schemas.microsoft.com/office/powerpoint/2018/8/main" r:id="rId2"/>
+    </p:ext>
+  </p:extLst>
 </p:sld>
 </file>
 
@@ -11158,6 +11314,11 @@
   <p:clrMapOvr>
     <a:masterClrMapping/>
   </p:clrMapOvr>
+  <p:extLst>
+    <p:ext uri="{6950BFC3-D8DA-4A85-94F7-54DA5524770B}">
+      <p188:commentRel xmlns:p188="http://schemas.microsoft.com/office/powerpoint/2018/8/main" r:id="rId2"/>
+    </p:ext>
+  </p:extLst>
 </p:sld>
 </file>
 
@@ -15310,6 +15471,11 @@
   <p:clrMapOvr>
     <a:masterClrMapping/>
   </p:clrMapOvr>
+  <p:extLst>
+    <p:ext uri="{6950BFC3-D8DA-4A85-94F7-54DA5524770B}">
+      <p188:commentRel xmlns:p188="http://schemas.microsoft.com/office/powerpoint/2018/8/main" r:id="rId2"/>
+    </p:ext>
+  </p:extLst>
 </p:sld>
 </file>
 
@@ -15373,7 +15539,7 @@
           <p:nvPr>
             <p:extLst>
               <p:ext uri="{D42A27DB-BD31-4B8C-83A1-F6EECF244321}">
-                <p14:modId xmlns:p14="http://schemas.microsoft.com/office/powerpoint/2010/main" val="108153996"/>
+                <p14:modId xmlns:p14="http://schemas.microsoft.com/office/powerpoint/2010/main" val="567602920"/>
               </p:ext>
             </p:extLst>
           </p:nvPr>
@@ -15490,6 +15656,18 @@
                     <a:lstStyle/>
                     <a:p>
                       <a:r>
+                        <a:rPr lang="en-US" sz="1800" b="1" kern="1200" dirty="0">
+                          <a:solidFill>
+                            <a:schemeClr val="dk1"/>
+                          </a:solidFill>
+                          <a:effectLst/>
+                          <a:latin typeface="+mn-lt"/>
+                          <a:ea typeface="+mn-ea"/>
+                          <a:cs typeface="+mn-cs"/>
+                        </a:rPr>
+                        <a:t>Accessibility </a:t>
+                      </a:r>
+                      <a:r>
                         <a:rPr lang="en-US" sz="1800" kern="1200" dirty="0">
                           <a:solidFill>
                             <a:schemeClr val="dk1"/>
@@ -15499,7 +15677,7 @@
                           <a:ea typeface="+mn-ea"/>
                           <a:cs typeface="+mn-cs"/>
                         </a:rPr>
-                        <a:t>Accessibility for the </a:t>
+                        <a:t>for the </a:t>
                       </a:r>
                       <a:r>
                         <a:rPr lang="en-US" sz="1800" kern="1200" dirty="0" err="1">
@@ -16174,6 +16352,11 @@
   <p:clrMapOvr>
     <a:masterClrMapping/>
   </p:clrMapOvr>
+  <p:extLst>
+    <p:ext uri="{6950BFC3-D8DA-4A85-94F7-54DA5524770B}">
+      <p188:commentRel xmlns:p188="http://schemas.microsoft.com/office/powerpoint/2018/8/main" r:id="rId2"/>
+    </p:ext>
+  </p:extLst>
 </p:sld>
 </file>
 
@@ -16487,6 +16670,11 @@
   <p:clrMapOvr>
     <a:masterClrMapping/>
   </p:clrMapOvr>
+  <p:extLst>
+    <p:ext uri="{6950BFC3-D8DA-4A85-94F7-54DA5524770B}">
+      <p188:commentRel xmlns:p188="http://schemas.microsoft.com/office/powerpoint/2018/8/main" r:id="rId2"/>
+    </p:ext>
+  </p:extLst>
 </p:sld>
 </file>
 

--- a/AS91904 Electronics Heinrich Venter.pptx
+++ b/AS91904 Electronics Heinrich Venter.pptx
@@ -157,7 +157,7 @@
   <pc:docChgLst>
     <pc:chgData name="Heinrich Venter" userId="694de3c83518532c" providerId="LiveId" clId="{10CD68D7-CBE1-4750-A2D1-7DEE064E9363}"/>
     <pc:docChg chg="undo custSel addSld delSld modSld">
-      <pc:chgData name="Heinrich Venter" userId="694de3c83518532c" providerId="LiveId" clId="{10CD68D7-CBE1-4750-A2D1-7DEE064E9363}" dt="2026-06-01T23:42:20.057" v="4945" actId="20577"/>
+      <pc:chgData name="Heinrich Venter" userId="694de3c83518532c" providerId="LiveId" clId="{10CD68D7-CBE1-4750-A2D1-7DEE064E9363}" dt="2026-06-16T23:32:39.233" v="5317" actId="20577"/>
       <pc:docMkLst>
         <pc:docMk/>
       </pc:docMkLst>
@@ -177,13 +177,13 @@
         </pc:spChg>
       </pc:sldChg>
       <pc:sldChg chg="modSp mod">
-        <pc:chgData name="Heinrich Venter" userId="694de3c83518532c" providerId="LiveId" clId="{10CD68D7-CBE1-4750-A2D1-7DEE064E9363}" dt="2026-05-26T06:34:59.547" v="4794" actId="20577"/>
+        <pc:chgData name="Heinrich Venter" userId="694de3c83518532c" providerId="LiveId" clId="{10CD68D7-CBE1-4750-A2D1-7DEE064E9363}" dt="2026-06-16T23:32:39.233" v="5317" actId="20577"/>
         <pc:sldMkLst>
           <pc:docMk/>
           <pc:sldMk cId="4293113589" sldId="257"/>
         </pc:sldMkLst>
         <pc:spChg chg="mod">
-          <ac:chgData name="Heinrich Venter" userId="694de3c83518532c" providerId="LiveId" clId="{10CD68D7-CBE1-4750-A2D1-7DEE064E9363}" dt="2026-05-26T06:34:59.547" v="4794" actId="20577"/>
+          <ac:chgData name="Heinrich Venter" userId="694de3c83518532c" providerId="LiveId" clId="{10CD68D7-CBE1-4750-A2D1-7DEE064E9363}" dt="2026-06-16T23:32:39.233" v="5317" actId="20577"/>
           <ac:spMkLst>
             <pc:docMk/>
             <pc:sldMk cId="4293113589" sldId="257"/>
@@ -940,7 +940,7 @@
           <a:p>
             <a:fld id="{A609F6A2-FEED-40EB-83D5-ADDC04076AF0}" type="datetimeFigureOut">
               <a:rPr lang="en-NZ" smtClean="0"/>
-              <a:t>2/06/2026</a:t>
+              <a:t>17/06/2026</a:t>
             </a:fld>
             <a:endParaRPr lang="en-NZ"/>
           </a:p>
@@ -1140,7 +1140,7 @@
           <a:p>
             <a:fld id="{A609F6A2-FEED-40EB-83D5-ADDC04076AF0}" type="datetimeFigureOut">
               <a:rPr lang="en-NZ" smtClean="0"/>
-              <a:t>2/06/2026</a:t>
+              <a:t>17/06/2026</a:t>
             </a:fld>
             <a:endParaRPr lang="en-NZ"/>
           </a:p>
@@ -1350,7 +1350,7 @@
           <a:p>
             <a:fld id="{A609F6A2-FEED-40EB-83D5-ADDC04076AF0}" type="datetimeFigureOut">
               <a:rPr lang="en-NZ" smtClean="0"/>
-              <a:t>2/06/2026</a:t>
+              <a:t>17/06/2026</a:t>
             </a:fld>
             <a:endParaRPr lang="en-NZ"/>
           </a:p>
@@ -1550,7 +1550,7 @@
           <a:p>
             <a:fld id="{A609F6A2-FEED-40EB-83D5-ADDC04076AF0}" type="datetimeFigureOut">
               <a:rPr lang="en-NZ" smtClean="0"/>
-              <a:t>2/06/2026</a:t>
+              <a:t>17/06/2026</a:t>
             </a:fld>
             <a:endParaRPr lang="en-NZ"/>
           </a:p>
@@ -1826,7 +1826,7 @@
           <a:p>
             <a:fld id="{A609F6A2-FEED-40EB-83D5-ADDC04076AF0}" type="datetimeFigureOut">
               <a:rPr lang="en-NZ" smtClean="0"/>
-              <a:t>2/06/2026</a:t>
+              <a:t>17/06/2026</a:t>
             </a:fld>
             <a:endParaRPr lang="en-NZ"/>
           </a:p>
@@ -2094,7 +2094,7 @@
           <a:p>
             <a:fld id="{A609F6A2-FEED-40EB-83D5-ADDC04076AF0}" type="datetimeFigureOut">
               <a:rPr lang="en-NZ" smtClean="0"/>
-              <a:t>2/06/2026</a:t>
+              <a:t>17/06/2026</a:t>
             </a:fld>
             <a:endParaRPr lang="en-NZ"/>
           </a:p>
@@ -2509,7 +2509,7 @@
           <a:p>
             <a:fld id="{A609F6A2-FEED-40EB-83D5-ADDC04076AF0}" type="datetimeFigureOut">
               <a:rPr lang="en-NZ" smtClean="0"/>
-              <a:t>2/06/2026</a:t>
+              <a:t>17/06/2026</a:t>
             </a:fld>
             <a:endParaRPr lang="en-NZ"/>
           </a:p>
@@ -2651,7 +2651,7 @@
           <a:p>
             <a:fld id="{A609F6A2-FEED-40EB-83D5-ADDC04076AF0}" type="datetimeFigureOut">
               <a:rPr lang="en-NZ" smtClean="0"/>
-              <a:t>2/06/2026</a:t>
+              <a:t>17/06/2026</a:t>
             </a:fld>
             <a:endParaRPr lang="en-NZ"/>
           </a:p>
@@ -2764,7 +2764,7 @@
           <a:p>
             <a:fld id="{A609F6A2-FEED-40EB-83D5-ADDC04076AF0}" type="datetimeFigureOut">
               <a:rPr lang="en-NZ" smtClean="0"/>
-              <a:t>2/06/2026</a:t>
+              <a:t>17/06/2026</a:t>
             </a:fld>
             <a:endParaRPr lang="en-NZ"/>
           </a:p>
@@ -3077,7 +3077,7 @@
           <a:p>
             <a:fld id="{A609F6A2-FEED-40EB-83D5-ADDC04076AF0}" type="datetimeFigureOut">
               <a:rPr lang="en-NZ" smtClean="0"/>
-              <a:t>2/06/2026</a:t>
+              <a:t>17/06/2026</a:t>
             </a:fld>
             <a:endParaRPr lang="en-NZ"/>
           </a:p>
@@ -3366,7 +3366,7 @@
           <a:p>
             <a:fld id="{A609F6A2-FEED-40EB-83D5-ADDC04076AF0}" type="datetimeFigureOut">
               <a:rPr lang="en-NZ" smtClean="0"/>
-              <a:t>2/06/2026</a:t>
+              <a:t>17/06/2026</a:t>
             </a:fld>
             <a:endParaRPr lang="en-NZ"/>
           </a:p>
@@ -3609,7 +3609,7 @@
           <a:p>
             <a:fld id="{A609F6A2-FEED-40EB-83D5-ADDC04076AF0}" type="datetimeFigureOut">
               <a:rPr lang="en-NZ" smtClean="0"/>
-              <a:t>2/06/2026</a:t>
+              <a:t>17/06/2026</a:t>
             </a:fld>
             <a:endParaRPr lang="en-NZ"/>
           </a:p>
@@ -11286,7 +11286,27 @@
             </a:r>
             <a:r>
               <a:rPr lang="en-NZ" noProof="0" dirty="0"/>
-              <a:t> with the 70cc engine being paired with a 800w 36v electric motor</a:t>
+              <a:t> with the 70cc engine being paired with a 800w 36v electric motor, that uses sensors like digital/</a:t>
+            </a:r>
+            <a:r>
+              <a:rPr lang="en-NZ" noProof="0" dirty="0" err="1"/>
+              <a:t>analog</a:t>
+            </a:r>
+            <a:r>
+              <a:rPr lang="en-NZ" noProof="0" dirty="0"/>
+              <a:t> hall effect sensors that act as throttle and speed matching sensors that will run </a:t>
+            </a:r>
+            <a:r>
+              <a:rPr lang="en-NZ" noProof="0" dirty="0" err="1"/>
+              <a:t>parralel</a:t>
+            </a:r>
+            <a:r>
+              <a:rPr lang="en-NZ" noProof="0" dirty="0"/>
+              <a:t> to the engine itself to give the bike more torque and power, this is because a 70cc engine has very weak low end (low rpms) torque where a electric </a:t>
+            </a:r>
+            <a:r>
+              <a:rPr lang="en-NZ" noProof="0"/>
+              <a:t>motor doesn’t.</a:t>
             </a:r>
             <a:br>
               <a:rPr lang="en-NZ" noProof="0" dirty="0"/>

--- a/AS91904 Electronics Heinrich Venter.pptx
+++ b/AS91904 Electronics Heinrich Venter.pptx
@@ -11,27 +11,28 @@
     <p:sldId id="259" r:id="rId5"/>
     <p:sldId id="267" r:id="rId6"/>
     <p:sldId id="269" r:id="rId7"/>
-    <p:sldId id="285" r:id="rId8"/>
-    <p:sldId id="268" r:id="rId9"/>
-    <p:sldId id="261" r:id="rId10"/>
-    <p:sldId id="287" r:id="rId11"/>
-    <p:sldId id="279" r:id="rId12"/>
-    <p:sldId id="280" r:id="rId13"/>
-    <p:sldId id="288" r:id="rId14"/>
-    <p:sldId id="289" r:id="rId15"/>
-    <p:sldId id="290" r:id="rId16"/>
-    <p:sldId id="291" r:id="rId17"/>
-    <p:sldId id="292" r:id="rId18"/>
-    <p:sldId id="293" r:id="rId19"/>
-    <p:sldId id="294" r:id="rId20"/>
-    <p:sldId id="295" r:id="rId21"/>
-    <p:sldId id="296" r:id="rId22"/>
-    <p:sldId id="282" r:id="rId23"/>
-    <p:sldId id="277" r:id="rId24"/>
-    <p:sldId id="265" r:id="rId25"/>
-    <p:sldId id="266" r:id="rId26"/>
-    <p:sldId id="278" r:id="rId27"/>
-    <p:sldId id="283" r:id="rId28"/>
+    <p:sldId id="297" r:id="rId8"/>
+    <p:sldId id="285" r:id="rId9"/>
+    <p:sldId id="268" r:id="rId10"/>
+    <p:sldId id="261" r:id="rId11"/>
+    <p:sldId id="287" r:id="rId12"/>
+    <p:sldId id="279" r:id="rId13"/>
+    <p:sldId id="280" r:id="rId14"/>
+    <p:sldId id="288" r:id="rId15"/>
+    <p:sldId id="289" r:id="rId16"/>
+    <p:sldId id="290" r:id="rId17"/>
+    <p:sldId id="291" r:id="rId18"/>
+    <p:sldId id="292" r:id="rId19"/>
+    <p:sldId id="293" r:id="rId20"/>
+    <p:sldId id="294" r:id="rId21"/>
+    <p:sldId id="295" r:id="rId22"/>
+    <p:sldId id="296" r:id="rId23"/>
+    <p:sldId id="282" r:id="rId24"/>
+    <p:sldId id="277" r:id="rId25"/>
+    <p:sldId id="265" r:id="rId26"/>
+    <p:sldId id="266" r:id="rId27"/>
+    <p:sldId id="278" r:id="rId28"/>
+    <p:sldId id="283" r:id="rId29"/>
   </p:sldIdLst>
   <p:sldSz cx="12192000" cy="6858000"/>
   <p:notesSz cx="6858000" cy="9144000"/>
@@ -147,7 +148,7 @@
 <file path=ppt/revisionInfo.xml><?xml version="1.0" encoding="utf-8"?>
 <p1510:revInfo xmlns:a="http://schemas.openxmlformats.org/drawingml/2006/main" xmlns:r="http://schemas.openxmlformats.org/officeDocument/2006/relationships" xmlns:p1510="http://schemas.microsoft.com/office/powerpoint/2015/10/main">
   <p1510:revLst>
-    <p1510:client id="{1B13A9E9-B3C1-424C-8E5B-7A1F059B459A}" v="61" dt="2026-05-26T08:25:23.685"/>
+    <p1510:client id="{93B3EF88-C134-4ECF-A8E1-33D5E10640B0}" v="20" dt="2026-07-19T07:47:21.733"/>
   </p1510:revLst>
 </p1510:revInfo>
 </file>
@@ -157,33 +158,18 @@
   <pc:docChgLst>
     <pc:chgData name="Heinrich Venter" userId="694de3c83518532c" providerId="LiveId" clId="{10CD68D7-CBE1-4750-A2D1-7DEE064E9363}"/>
     <pc:docChg chg="undo custSel addSld delSld modSld">
-      <pc:chgData name="Heinrich Venter" userId="694de3c83518532c" providerId="LiveId" clId="{10CD68D7-CBE1-4750-A2D1-7DEE064E9363}" dt="2026-06-16T23:32:39.233" v="5317" actId="20577"/>
+      <pc:chgData name="Heinrich Venter" userId="694de3c83518532c" providerId="LiveId" clId="{10CD68D7-CBE1-4750-A2D1-7DEE064E9363}" dt="2026-07-19T07:49:15.322" v="5551" actId="20577"/>
       <pc:docMkLst>
         <pc:docMk/>
       </pc:docMkLst>
       <pc:sldChg chg="modSp mod">
-        <pc:chgData name="Heinrich Venter" userId="694de3c83518532c" providerId="LiveId" clId="{10CD68D7-CBE1-4750-A2D1-7DEE064E9363}" dt="2026-05-24T09:10:16.286" v="43" actId="20577"/>
-        <pc:sldMkLst>
-          <pc:docMk/>
-          <pc:sldMk cId="730004332" sldId="256"/>
-        </pc:sldMkLst>
-        <pc:spChg chg="mod">
-          <ac:chgData name="Heinrich Venter" userId="694de3c83518532c" providerId="LiveId" clId="{10CD68D7-CBE1-4750-A2D1-7DEE064E9363}" dt="2026-05-24T09:10:16.286" v="43" actId="20577"/>
-          <ac:spMkLst>
-            <pc:docMk/>
-            <pc:sldMk cId="730004332" sldId="256"/>
-            <ac:spMk id="3" creationId="{F66D802B-CDB6-E9D2-44F0-86BC0E80FB38}"/>
-          </ac:spMkLst>
-        </pc:spChg>
-      </pc:sldChg>
-      <pc:sldChg chg="modSp mod">
-        <pc:chgData name="Heinrich Venter" userId="694de3c83518532c" providerId="LiveId" clId="{10CD68D7-CBE1-4750-A2D1-7DEE064E9363}" dt="2026-06-16T23:32:39.233" v="5317" actId="20577"/>
+        <pc:chgData name="Heinrich Venter" userId="694de3c83518532c" providerId="LiveId" clId="{10CD68D7-CBE1-4750-A2D1-7DEE064E9363}" dt="2026-07-19T07:27:38.676" v="5319"/>
         <pc:sldMkLst>
           <pc:docMk/>
           <pc:sldMk cId="4293113589" sldId="257"/>
         </pc:sldMkLst>
         <pc:spChg chg="mod">
-          <ac:chgData name="Heinrich Venter" userId="694de3c83518532c" providerId="LiveId" clId="{10CD68D7-CBE1-4750-A2D1-7DEE064E9363}" dt="2026-06-16T23:32:39.233" v="5317" actId="20577"/>
+          <ac:chgData name="Heinrich Venter" userId="694de3c83518532c" providerId="LiveId" clId="{10CD68D7-CBE1-4750-A2D1-7DEE064E9363}" dt="2026-07-19T07:27:38.676" v="5319"/>
           <ac:spMkLst>
             <pc:docMk/>
             <pc:sldMk cId="4293113589" sldId="257"/>
@@ -192,13 +178,13 @@
         </pc:spChg>
       </pc:sldChg>
       <pc:sldChg chg="modSp mod">
-        <pc:chgData name="Heinrich Venter" userId="694de3c83518532c" providerId="LiveId" clId="{10CD68D7-CBE1-4750-A2D1-7DEE064E9363}" dt="2026-05-26T06:38:30.797" v="4833" actId="20577"/>
+        <pc:chgData name="Heinrich Venter" userId="694de3c83518532c" providerId="LiveId" clId="{10CD68D7-CBE1-4750-A2D1-7DEE064E9363}" dt="2026-07-19T07:29:13.040" v="5325" actId="27636"/>
         <pc:sldMkLst>
           <pc:docMk/>
           <pc:sldMk cId="2407707907" sldId="258"/>
         </pc:sldMkLst>
         <pc:spChg chg="mod">
-          <ac:chgData name="Heinrich Venter" userId="694de3c83518532c" providerId="LiveId" clId="{10CD68D7-CBE1-4750-A2D1-7DEE064E9363}" dt="2026-05-26T06:37:18.202" v="4799" actId="113"/>
+          <ac:chgData name="Heinrich Venter" userId="694de3c83518532c" providerId="LiveId" clId="{10CD68D7-CBE1-4750-A2D1-7DEE064E9363}" dt="2026-07-19T07:28:36.545" v="5321" actId="27636"/>
           <ac:spMkLst>
             <pc:docMk/>
             <pc:sldMk cId="2407707907" sldId="258"/>
@@ -206,7 +192,7 @@
           </ac:spMkLst>
         </pc:spChg>
         <pc:spChg chg="mod">
-          <ac:chgData name="Heinrich Venter" userId="694de3c83518532c" providerId="LiveId" clId="{10CD68D7-CBE1-4750-A2D1-7DEE064E9363}" dt="2026-05-26T06:38:30.797" v="4833" actId="20577"/>
+          <ac:chgData name="Heinrich Venter" userId="694de3c83518532c" providerId="LiveId" clId="{10CD68D7-CBE1-4750-A2D1-7DEE064E9363}" dt="2026-07-19T07:29:13.040" v="5325" actId="27636"/>
           <ac:spMkLst>
             <pc:docMk/>
             <pc:sldMk cId="2407707907" sldId="258"/>
@@ -215,28 +201,13 @@
         </pc:spChg>
       </pc:sldChg>
       <pc:sldChg chg="modSp mod">
-        <pc:chgData name="Heinrich Venter" userId="694de3c83518532c" providerId="LiveId" clId="{10CD68D7-CBE1-4750-A2D1-7DEE064E9363}" dt="2026-06-01T23:37:14.244" v="4932" actId="113"/>
-        <pc:sldMkLst>
-          <pc:docMk/>
-          <pc:sldMk cId="4279029636" sldId="259"/>
-        </pc:sldMkLst>
-        <pc:graphicFrameChg chg="mod modGraphic">
-          <ac:chgData name="Heinrich Venter" userId="694de3c83518532c" providerId="LiveId" clId="{10CD68D7-CBE1-4750-A2D1-7DEE064E9363}" dt="2026-06-01T23:37:14.244" v="4932" actId="113"/>
-          <ac:graphicFrameMkLst>
-            <pc:docMk/>
-            <pc:sldMk cId="4279029636" sldId="259"/>
-            <ac:graphicFrameMk id="5" creationId="{F519459D-F748-3377-4E55-D51E89AF6AC2}"/>
-          </ac:graphicFrameMkLst>
-        </pc:graphicFrameChg>
-      </pc:sldChg>
-      <pc:sldChg chg="modSp mod">
-        <pc:chgData name="Heinrich Venter" userId="694de3c83518532c" providerId="LiveId" clId="{10CD68D7-CBE1-4750-A2D1-7DEE064E9363}" dt="2026-05-24T09:44:50.269" v="2751" actId="20577"/>
+        <pc:chgData name="Heinrich Venter" userId="694de3c83518532c" providerId="LiveId" clId="{10CD68D7-CBE1-4750-A2D1-7DEE064E9363}" dt="2026-07-19T07:32:11.473" v="5366" actId="115"/>
         <pc:sldMkLst>
           <pc:docMk/>
           <pc:sldMk cId="2961901457" sldId="269"/>
         </pc:sldMkLst>
         <pc:spChg chg="mod">
-          <ac:chgData name="Heinrich Venter" userId="694de3c83518532c" providerId="LiveId" clId="{10CD68D7-CBE1-4750-A2D1-7DEE064E9363}" dt="2026-05-24T09:44:50.269" v="2751" actId="20577"/>
+          <ac:chgData name="Heinrich Venter" userId="694de3c83518532c" providerId="LiveId" clId="{10CD68D7-CBE1-4750-A2D1-7DEE064E9363}" dt="2026-07-19T07:32:11.473" v="5366" actId="115"/>
           <ac:spMkLst>
             <pc:docMk/>
             <pc:sldMk cId="2961901457" sldId="269"/>
@@ -244,99 +215,29 @@
           </ac:spMkLst>
         </pc:spChg>
       </pc:sldChg>
-      <pc:sldChg chg="addSp modSp mod">
-        <pc:chgData name="Heinrich Venter" userId="694de3c83518532c" providerId="LiveId" clId="{10CD68D7-CBE1-4750-A2D1-7DEE064E9363}" dt="2026-05-24T11:06:41.718" v="4227" actId="20577"/>
+      <pc:sldChg chg="modSp mod">
+        <pc:chgData name="Heinrich Venter" userId="694de3c83518532c" providerId="LiveId" clId="{10CD68D7-CBE1-4750-A2D1-7DEE064E9363}" dt="2026-07-19T07:49:15.322" v="5551" actId="20577"/>
         <pc:sldMkLst>
           <pc:docMk/>
           <pc:sldMk cId="3917241819" sldId="279"/>
         </pc:sldMkLst>
         <pc:spChg chg="mod">
-          <ac:chgData name="Heinrich Venter" userId="694de3c83518532c" providerId="LiveId" clId="{10CD68D7-CBE1-4750-A2D1-7DEE064E9363}" dt="2026-05-24T10:00:05.034" v="3393" actId="27636"/>
+          <ac:chgData name="Heinrich Venter" userId="694de3c83518532c" providerId="LiveId" clId="{10CD68D7-CBE1-4750-A2D1-7DEE064E9363}" dt="2026-07-19T07:49:15.322" v="5551" actId="20577"/>
           <ac:spMkLst>
             <pc:docMk/>
             <pc:sldMk cId="3917241819" sldId="279"/>
             <ac:spMk id="3" creationId="{109C2FE0-6991-DDAF-C4F7-B3415EC34474}"/>
           </ac:spMkLst>
         </pc:spChg>
-        <pc:spChg chg="mod">
-          <ac:chgData name="Heinrich Venter" userId="694de3c83518532c" providerId="LiveId" clId="{10CD68D7-CBE1-4750-A2D1-7DEE064E9363}" dt="2026-05-24T10:01:04.280" v="3403" actId="1076"/>
-          <ac:spMkLst>
-            <pc:docMk/>
-            <pc:sldMk cId="3917241819" sldId="279"/>
-            <ac:spMk id="4" creationId="{48BF1EF6-F8B8-8CF4-9169-05F15F67B902}"/>
-          </ac:spMkLst>
-        </pc:spChg>
-        <pc:spChg chg="mod">
-          <ac:chgData name="Heinrich Venter" userId="694de3c83518532c" providerId="LiveId" clId="{10CD68D7-CBE1-4750-A2D1-7DEE064E9363}" dt="2026-05-24T11:06:41.718" v="4227" actId="20577"/>
-          <ac:spMkLst>
-            <pc:docMk/>
-            <pc:sldMk cId="3917241819" sldId="279"/>
-            <ac:spMk id="5" creationId="{F10EB81D-A986-42AD-847E-FF3A1F656CEB}"/>
-          </ac:spMkLst>
-        </pc:spChg>
-        <pc:picChg chg="add mod">
-          <ac:chgData name="Heinrich Venter" userId="694de3c83518532c" providerId="LiveId" clId="{10CD68D7-CBE1-4750-A2D1-7DEE064E9363}" dt="2026-05-24T10:01:10.857" v="3404" actId="1076"/>
-          <ac:picMkLst>
-            <pc:docMk/>
-            <pc:sldMk cId="3917241819" sldId="279"/>
-            <ac:picMk id="1026" creationId="{F6F76BE5-4844-9D9B-EDC2-816CC06C42C3}"/>
-          </ac:picMkLst>
-        </pc:picChg>
       </pc:sldChg>
       <pc:sldChg chg="modSp mod">
-        <pc:chgData name="Heinrich Venter" userId="694de3c83518532c" providerId="LiveId" clId="{10CD68D7-CBE1-4750-A2D1-7DEE064E9363}" dt="2026-06-01T23:42:20.057" v="4945" actId="20577"/>
-        <pc:sldMkLst>
-          <pc:docMk/>
-          <pc:sldMk cId="3469156485" sldId="280"/>
-        </pc:sldMkLst>
-        <pc:spChg chg="mod">
-          <ac:chgData name="Heinrich Venter" userId="694de3c83518532c" providerId="LiveId" clId="{10CD68D7-CBE1-4750-A2D1-7DEE064E9363}" dt="2026-05-24T11:05:44.022" v="4106" actId="20577"/>
-          <ac:spMkLst>
-            <pc:docMk/>
-            <pc:sldMk cId="3469156485" sldId="280"/>
-            <ac:spMk id="5" creationId="{50C57F65-7853-E45D-CA58-31BCC9DE7B02}"/>
-          </ac:spMkLst>
-        </pc:spChg>
-        <pc:spChg chg="mod">
-          <ac:chgData name="Heinrich Venter" userId="694de3c83518532c" providerId="LiveId" clId="{10CD68D7-CBE1-4750-A2D1-7DEE064E9363}" dt="2026-06-01T23:42:20.057" v="4945" actId="20577"/>
-          <ac:spMkLst>
-            <pc:docMk/>
-            <pc:sldMk cId="3469156485" sldId="280"/>
-            <ac:spMk id="6" creationId="{4FBA3B69-CE34-9320-97C4-16C15C4852CE}"/>
-          </ac:spMkLst>
-        </pc:spChg>
-        <pc:spChg chg="mod">
-          <ac:chgData name="Heinrich Venter" userId="694de3c83518532c" providerId="LiveId" clId="{10CD68D7-CBE1-4750-A2D1-7DEE064E9363}" dt="2026-05-24T11:01:47.702" v="3490" actId="20577"/>
-          <ac:spMkLst>
-            <pc:docMk/>
-            <pc:sldMk cId="3469156485" sldId="280"/>
-            <ac:spMk id="11" creationId="{E3D936A8-CA08-48BB-AA98-F3A8B43B31CF}"/>
-          </ac:spMkLst>
-        </pc:spChg>
-      </pc:sldChg>
-      <pc:sldChg chg="modSp mod">
-        <pc:chgData name="Heinrich Venter" userId="694de3c83518532c" providerId="LiveId" clId="{10CD68D7-CBE1-4750-A2D1-7DEE064E9363}" dt="2026-05-26T08:25:46.067" v="4931" actId="20577"/>
-        <pc:sldMkLst>
-          <pc:docMk/>
-          <pc:sldMk cId="2958982225" sldId="282"/>
-        </pc:sldMkLst>
-        <pc:spChg chg="mod">
-          <ac:chgData name="Heinrich Venter" userId="694de3c83518532c" providerId="LiveId" clId="{10CD68D7-CBE1-4750-A2D1-7DEE064E9363}" dt="2026-05-26T08:25:46.067" v="4931" actId="20577"/>
-          <ac:spMkLst>
-            <pc:docMk/>
-            <pc:sldMk cId="2958982225" sldId="282"/>
-            <ac:spMk id="3" creationId="{C72A0CE0-5AE0-CAD3-C4C6-81694DF4EFBC}"/>
-          </ac:spMkLst>
-        </pc:spChg>
-      </pc:sldChg>
-      <pc:sldChg chg="modSp mod">
-        <pc:chgData name="Heinrich Venter" userId="694de3c83518532c" providerId="LiveId" clId="{10CD68D7-CBE1-4750-A2D1-7DEE064E9363}" dt="2026-05-26T06:46:46.026" v="4853" actId="20577"/>
+        <pc:chgData name="Heinrich Venter" userId="694de3c83518532c" providerId="LiveId" clId="{10CD68D7-CBE1-4750-A2D1-7DEE064E9363}" dt="2026-07-19T07:36:17.581" v="5424" actId="20577"/>
         <pc:sldMkLst>
           <pc:docMk/>
           <pc:sldMk cId="4103162250" sldId="285"/>
         </pc:sldMkLst>
         <pc:spChg chg="mod">
-          <ac:chgData name="Heinrich Venter" userId="694de3c83518532c" providerId="LiveId" clId="{10CD68D7-CBE1-4750-A2D1-7DEE064E9363}" dt="2026-05-26T06:46:46.026" v="4853" actId="20577"/>
+          <ac:chgData name="Heinrich Venter" userId="694de3c83518532c" providerId="LiveId" clId="{10CD68D7-CBE1-4750-A2D1-7DEE064E9363}" dt="2026-07-19T07:35:49.169" v="5413"/>
           <ac:spMkLst>
             <pc:docMk/>
             <pc:sldMk cId="4103162250" sldId="285"/>
@@ -344,7 +245,7 @@
           </ac:spMkLst>
         </pc:spChg>
         <pc:spChg chg="mod">
-          <ac:chgData name="Heinrich Venter" userId="694de3c83518532c" providerId="LiveId" clId="{10CD68D7-CBE1-4750-A2D1-7DEE064E9363}" dt="2026-05-24T09:51:15.846" v="2759" actId="27636"/>
+          <ac:chgData name="Heinrich Venter" userId="694de3c83518532c" providerId="LiveId" clId="{10CD68D7-CBE1-4750-A2D1-7DEE064E9363}" dt="2026-07-19T07:36:17.581" v="5424" actId="20577"/>
           <ac:spMkLst>
             <pc:docMk/>
             <pc:sldMk cId="4103162250" sldId="285"/>
@@ -353,60 +254,13 @@
         </pc:spChg>
       </pc:sldChg>
       <pc:sldChg chg="modSp mod">
-        <pc:chgData name="Heinrich Venter" userId="694de3c83518532c" providerId="LiveId" clId="{10CD68D7-CBE1-4750-A2D1-7DEE064E9363}" dt="2026-05-26T06:47:14.021" v="4862" actId="20577"/>
-        <pc:sldMkLst>
-          <pc:docMk/>
-          <pc:sldMk cId="4188302786" sldId="287"/>
-        </pc:sldMkLst>
-        <pc:spChg chg="mod">
-          <ac:chgData name="Heinrich Venter" userId="694de3c83518532c" providerId="LiveId" clId="{10CD68D7-CBE1-4750-A2D1-7DEE064E9363}" dt="2026-05-24T09:54:33.723" v="2789" actId="20577"/>
-          <ac:spMkLst>
-            <pc:docMk/>
-            <pc:sldMk cId="4188302786" sldId="287"/>
-            <ac:spMk id="2" creationId="{5AD3A040-4DF6-3A52-2828-494419344D41}"/>
-          </ac:spMkLst>
-        </pc:spChg>
-        <pc:spChg chg="mod">
-          <ac:chgData name="Heinrich Venter" userId="694de3c83518532c" providerId="LiveId" clId="{10CD68D7-CBE1-4750-A2D1-7DEE064E9363}" dt="2026-05-26T06:47:14.021" v="4862" actId="20577"/>
-          <ac:spMkLst>
-            <pc:docMk/>
-            <pc:sldMk cId="4188302786" sldId="287"/>
-            <ac:spMk id="5" creationId="{208AF426-607B-1936-143C-7541AD8896ED}"/>
-          </ac:spMkLst>
-        </pc:spChg>
-        <pc:spChg chg="mod">
-          <ac:chgData name="Heinrich Venter" userId="694de3c83518532c" providerId="LiveId" clId="{10CD68D7-CBE1-4750-A2D1-7DEE064E9363}" dt="2026-05-24T09:54:40.185" v="2798" actId="20577"/>
-          <ac:spMkLst>
-            <pc:docMk/>
-            <pc:sldMk cId="4188302786" sldId="287"/>
-            <ac:spMk id="8" creationId="{DFB8CE4C-97AF-7F3E-9CAC-E06101B7E86D}"/>
-          </ac:spMkLst>
-        </pc:spChg>
-        <pc:spChg chg="mod">
-          <ac:chgData name="Heinrich Venter" userId="694de3c83518532c" providerId="LiveId" clId="{10CD68D7-CBE1-4750-A2D1-7DEE064E9363}" dt="2026-05-24T09:54:55.923" v="2805" actId="20577"/>
-          <ac:spMkLst>
-            <pc:docMk/>
-            <pc:sldMk cId="4188302786" sldId="287"/>
-            <ac:spMk id="9" creationId="{0A4F4AF7-5E5A-2D76-3F73-6A09F3F31537}"/>
-          </ac:spMkLst>
-        </pc:spChg>
-        <pc:spChg chg="mod">
-          <ac:chgData name="Heinrich Venter" userId="694de3c83518532c" providerId="LiveId" clId="{10CD68D7-CBE1-4750-A2D1-7DEE064E9363}" dt="2026-05-24T09:55:04.956" v="2818" actId="20577"/>
-          <ac:spMkLst>
-            <pc:docMk/>
-            <pc:sldMk cId="4188302786" sldId="287"/>
-            <ac:spMk id="10" creationId="{841EBE6D-B5D0-4C30-C32E-F3AA1F02B8FD}"/>
-          </ac:spMkLst>
-        </pc:spChg>
-      </pc:sldChg>
-      <pc:sldChg chg="modSp mod">
-        <pc:chgData name="Heinrich Venter" userId="694de3c83518532c" providerId="LiveId" clId="{10CD68D7-CBE1-4750-A2D1-7DEE064E9363}" dt="2026-05-24T11:13:59.165" v="4299" actId="113"/>
+        <pc:chgData name="Heinrich Venter" userId="694de3c83518532c" providerId="LiveId" clId="{10CD68D7-CBE1-4750-A2D1-7DEE064E9363}" dt="2026-07-19T07:40:14.476" v="5438" actId="27636"/>
         <pc:sldMkLst>
           <pc:docMk/>
           <pc:sldMk cId="2953175661" sldId="288"/>
         </pc:sldMkLst>
         <pc:spChg chg="mod">
-          <ac:chgData name="Heinrich Venter" userId="694de3c83518532c" providerId="LiveId" clId="{10CD68D7-CBE1-4750-A2D1-7DEE064E9363}" dt="2026-05-24T11:13:59.165" v="4299" actId="113"/>
+          <ac:chgData name="Heinrich Venter" userId="694de3c83518532c" providerId="LiveId" clId="{10CD68D7-CBE1-4750-A2D1-7DEE064E9363}" dt="2026-07-19T07:40:02.005" v="5433" actId="27636"/>
           <ac:spMkLst>
             <pc:docMk/>
             <pc:sldMk cId="2953175661" sldId="288"/>
@@ -414,23 +268,7 @@
           </ac:spMkLst>
         </pc:spChg>
         <pc:spChg chg="mod">
-          <ac:chgData name="Heinrich Venter" userId="694de3c83518532c" providerId="LiveId" clId="{10CD68D7-CBE1-4750-A2D1-7DEE064E9363}" dt="2026-05-24T11:08:21.423" v="4249" actId="20577"/>
-          <ac:spMkLst>
-            <pc:docMk/>
-            <pc:sldMk cId="2953175661" sldId="288"/>
-            <ac:spMk id="8" creationId="{DFB8CE4C-97AF-7F3E-9CAC-E06101B7E86D}"/>
-          </ac:spMkLst>
-        </pc:spChg>
-        <pc:spChg chg="mod">
-          <ac:chgData name="Heinrich Venter" userId="694de3c83518532c" providerId="LiveId" clId="{10CD68D7-CBE1-4750-A2D1-7DEE064E9363}" dt="2026-05-24T11:09:06.463" v="4260" actId="20577"/>
-          <ac:spMkLst>
-            <pc:docMk/>
-            <pc:sldMk cId="2953175661" sldId="288"/>
-            <ac:spMk id="9" creationId="{0A4F4AF7-5E5A-2D76-3F73-6A09F3F31537}"/>
-          </ac:spMkLst>
-        </pc:spChg>
-        <pc:spChg chg="mod">
-          <ac:chgData name="Heinrich Venter" userId="694de3c83518532c" providerId="LiveId" clId="{10CD68D7-CBE1-4750-A2D1-7DEE064E9363}" dt="2026-05-24T11:11:58.707" v="4292" actId="20577"/>
+          <ac:chgData name="Heinrich Venter" userId="694de3c83518532c" providerId="LiveId" clId="{10CD68D7-CBE1-4750-A2D1-7DEE064E9363}" dt="2026-07-19T07:40:14.476" v="5438" actId="27636"/>
           <ac:spMkLst>
             <pc:docMk/>
             <pc:sldMk cId="2953175661" sldId="288"/>
@@ -439,13 +277,13 @@
         </pc:spChg>
       </pc:sldChg>
       <pc:sldChg chg="modSp mod">
-        <pc:chgData name="Heinrich Venter" userId="694de3c83518532c" providerId="LiveId" clId="{10CD68D7-CBE1-4750-A2D1-7DEE064E9363}" dt="2026-05-24T11:20:05.377" v="4323" actId="27636"/>
+        <pc:chgData name="Heinrich Venter" userId="694de3c83518532c" providerId="LiveId" clId="{10CD68D7-CBE1-4750-A2D1-7DEE064E9363}" dt="2026-07-19T07:49:07.086" v="5541" actId="20577"/>
         <pc:sldMkLst>
           <pc:docMk/>
           <pc:sldMk cId="708745857" sldId="289"/>
         </pc:sldMkLst>
         <pc:spChg chg="mod">
-          <ac:chgData name="Heinrich Venter" userId="694de3c83518532c" providerId="LiveId" clId="{10CD68D7-CBE1-4750-A2D1-7DEE064E9363}" dt="2026-05-24T11:17:34.751" v="4304" actId="5793"/>
+          <ac:chgData name="Heinrich Venter" userId="694de3c83518532c" providerId="LiveId" clId="{10CD68D7-CBE1-4750-A2D1-7DEE064E9363}" dt="2026-07-19T07:49:07.086" v="5541" actId="20577"/>
           <ac:spMkLst>
             <pc:docMk/>
             <pc:sldMk cId="708745857" sldId="289"/>
@@ -453,7 +291,7 @@
           </ac:spMkLst>
         </pc:spChg>
         <pc:spChg chg="mod">
-          <ac:chgData name="Heinrich Venter" userId="694de3c83518532c" providerId="LiveId" clId="{10CD68D7-CBE1-4750-A2D1-7DEE064E9363}" dt="2026-05-24T11:20:05.377" v="4323" actId="27636"/>
+          <ac:chgData name="Heinrich Venter" userId="694de3c83518532c" providerId="LiveId" clId="{10CD68D7-CBE1-4750-A2D1-7DEE064E9363}" dt="2026-07-19T07:42:05.561" v="5447" actId="113"/>
           <ac:spMkLst>
             <pc:docMk/>
             <pc:sldMk cId="708745857" sldId="289"/>
@@ -462,13 +300,13 @@
         </pc:spChg>
       </pc:sldChg>
       <pc:sldChg chg="modSp mod">
-        <pc:chgData name="Heinrich Venter" userId="694de3c83518532c" providerId="LiveId" clId="{10CD68D7-CBE1-4750-A2D1-7DEE064E9363}" dt="2026-05-24T11:21:57.711" v="4339" actId="20577"/>
+        <pc:chgData name="Heinrich Venter" userId="694de3c83518532c" providerId="LiveId" clId="{10CD68D7-CBE1-4750-A2D1-7DEE064E9363}" dt="2026-07-19T07:43:17.308" v="5453" actId="5793"/>
         <pc:sldMkLst>
           <pc:docMk/>
           <pc:sldMk cId="1027777261" sldId="290"/>
         </pc:sldMkLst>
         <pc:spChg chg="mod">
-          <ac:chgData name="Heinrich Venter" userId="694de3c83518532c" providerId="LiveId" clId="{10CD68D7-CBE1-4750-A2D1-7DEE064E9363}" dt="2026-05-24T11:21:57.711" v="4339" actId="20577"/>
+          <ac:chgData name="Heinrich Venter" userId="694de3c83518532c" providerId="LiveId" clId="{10CD68D7-CBE1-4750-A2D1-7DEE064E9363}" dt="2026-07-19T07:43:17.308" v="5453" actId="5793"/>
           <ac:spMkLst>
             <pc:docMk/>
             <pc:sldMk cId="1027777261" sldId="290"/>
@@ -476,7 +314,7 @@
           </ac:spMkLst>
         </pc:spChg>
         <pc:spChg chg="mod">
-          <ac:chgData name="Heinrich Venter" userId="694de3c83518532c" providerId="LiveId" clId="{10CD68D7-CBE1-4750-A2D1-7DEE064E9363}" dt="2026-05-24T11:21:28.680" v="4331" actId="27636"/>
+          <ac:chgData name="Heinrich Venter" userId="694de3c83518532c" providerId="LiveId" clId="{10CD68D7-CBE1-4750-A2D1-7DEE064E9363}" dt="2026-07-19T07:42:53.567" v="5450" actId="5793"/>
           <ac:spMkLst>
             <pc:docMk/>
             <pc:sldMk cId="1027777261" sldId="290"/>
@@ -485,52 +323,28 @@
         </pc:spChg>
       </pc:sldChg>
       <pc:sldChg chg="modSp mod">
-        <pc:chgData name="Heinrich Venter" userId="694de3c83518532c" providerId="LiveId" clId="{10CD68D7-CBE1-4750-A2D1-7DEE064E9363}" dt="2026-05-24T11:25:45.751" v="4438" actId="5793"/>
+        <pc:chgData name="Heinrich Venter" userId="694de3c83518532c" providerId="LiveId" clId="{10CD68D7-CBE1-4750-A2D1-7DEE064E9363}" dt="2026-07-19T07:43:50.635" v="5455" actId="27636"/>
         <pc:sldMkLst>
           <pc:docMk/>
           <pc:sldMk cId="733961800" sldId="291"/>
         </pc:sldMkLst>
         <pc:spChg chg="mod">
-          <ac:chgData name="Heinrich Venter" userId="694de3c83518532c" providerId="LiveId" clId="{10CD68D7-CBE1-4750-A2D1-7DEE064E9363}" dt="2026-05-24T11:25:45.751" v="4438" actId="5793"/>
+          <ac:chgData name="Heinrich Venter" userId="694de3c83518532c" providerId="LiveId" clId="{10CD68D7-CBE1-4750-A2D1-7DEE064E9363}" dt="2026-07-19T07:43:50.635" v="5455" actId="27636"/>
           <ac:spMkLst>
             <pc:docMk/>
             <pc:sldMk cId="733961800" sldId="291"/>
             <ac:spMk id="5" creationId="{208AF426-607B-1936-143C-7541AD8896ED}"/>
           </ac:spMkLst>
         </pc:spChg>
-        <pc:spChg chg="mod">
-          <ac:chgData name="Heinrich Venter" userId="694de3c83518532c" providerId="LiveId" clId="{10CD68D7-CBE1-4750-A2D1-7DEE064E9363}" dt="2026-05-24T11:24:16" v="4376" actId="20577"/>
-          <ac:spMkLst>
-            <pc:docMk/>
-            <pc:sldMk cId="733961800" sldId="291"/>
-            <ac:spMk id="8" creationId="{DFB8CE4C-97AF-7F3E-9CAC-E06101B7E86D}"/>
-          </ac:spMkLst>
-        </pc:spChg>
-        <pc:spChg chg="mod">
-          <ac:chgData name="Heinrich Venter" userId="694de3c83518532c" providerId="LiveId" clId="{10CD68D7-CBE1-4750-A2D1-7DEE064E9363}" dt="2026-05-24T11:24:25.653" v="4379" actId="27636"/>
-          <ac:spMkLst>
-            <pc:docMk/>
-            <pc:sldMk cId="733961800" sldId="291"/>
-            <ac:spMk id="9" creationId="{0A4F4AF7-5E5A-2D76-3F73-6A09F3F31537}"/>
-          </ac:spMkLst>
-        </pc:spChg>
-        <pc:spChg chg="mod">
-          <ac:chgData name="Heinrich Venter" userId="694de3c83518532c" providerId="LiveId" clId="{10CD68D7-CBE1-4750-A2D1-7DEE064E9363}" dt="2026-05-24T11:24:40.292" v="4382" actId="27636"/>
-          <ac:spMkLst>
-            <pc:docMk/>
-            <pc:sldMk cId="733961800" sldId="291"/>
-            <ac:spMk id="10" creationId="{841EBE6D-B5D0-4C30-C32E-F3AA1F02B8FD}"/>
-          </ac:spMkLst>
-        </pc:spChg>
       </pc:sldChg>
       <pc:sldChg chg="modSp mod">
-        <pc:chgData name="Heinrich Venter" userId="694de3c83518532c" providerId="LiveId" clId="{10CD68D7-CBE1-4750-A2D1-7DEE064E9363}" dt="2026-05-25T01:07:09.081" v="4654" actId="113"/>
+        <pc:chgData name="Heinrich Venter" userId="694de3c83518532c" providerId="LiveId" clId="{10CD68D7-CBE1-4750-A2D1-7DEE064E9363}" dt="2026-07-19T07:48:47.637" v="5509" actId="20577"/>
         <pc:sldMkLst>
           <pc:docMk/>
           <pc:sldMk cId="3091740916" sldId="292"/>
         </pc:sldMkLst>
         <pc:spChg chg="mod">
-          <ac:chgData name="Heinrich Venter" userId="694de3c83518532c" providerId="LiveId" clId="{10CD68D7-CBE1-4750-A2D1-7DEE064E9363}" dt="2026-05-25T01:06:14.806" v="4633" actId="20577"/>
+          <ac:chgData name="Heinrich Venter" userId="694de3c83518532c" providerId="LiveId" clId="{10CD68D7-CBE1-4750-A2D1-7DEE064E9363}" dt="2026-07-19T07:48:47.637" v="5509" actId="20577"/>
           <ac:spMkLst>
             <pc:docMk/>
             <pc:sldMk cId="3091740916" sldId="292"/>
@@ -538,7 +352,7 @@
           </ac:spMkLst>
         </pc:spChg>
         <pc:spChg chg="mod">
-          <ac:chgData name="Heinrich Venter" userId="694de3c83518532c" providerId="LiveId" clId="{10CD68D7-CBE1-4750-A2D1-7DEE064E9363}" dt="2026-05-25T01:07:09.081" v="4654" actId="113"/>
+          <ac:chgData name="Heinrich Venter" userId="694de3c83518532c" providerId="LiveId" clId="{10CD68D7-CBE1-4750-A2D1-7DEE064E9363}" dt="2026-07-19T07:45:04.755" v="5460" actId="113"/>
           <ac:spMkLst>
             <pc:docMk/>
             <pc:sldMk cId="3091740916" sldId="292"/>
@@ -547,21 +361,13 @@
         </pc:spChg>
       </pc:sldChg>
       <pc:sldChg chg="modSp mod">
-        <pc:chgData name="Heinrich Venter" userId="694de3c83518532c" providerId="LiveId" clId="{10CD68D7-CBE1-4750-A2D1-7DEE064E9363}" dt="2026-05-26T06:51:26.880" v="4880" actId="20577"/>
+        <pc:chgData name="Heinrich Venter" userId="694de3c83518532c" providerId="LiveId" clId="{10CD68D7-CBE1-4750-A2D1-7DEE064E9363}" dt="2026-07-19T07:45:38.419" v="5463" actId="113"/>
         <pc:sldMkLst>
           <pc:docMk/>
           <pc:sldMk cId="3290795109" sldId="293"/>
         </pc:sldMkLst>
         <pc:spChg chg="mod">
-          <ac:chgData name="Heinrich Venter" userId="694de3c83518532c" providerId="LiveId" clId="{10CD68D7-CBE1-4750-A2D1-7DEE064E9363}" dt="2026-05-25T00:34:16.557" v="4608" actId="27636"/>
-          <ac:spMkLst>
-            <pc:docMk/>
-            <pc:sldMk cId="3290795109" sldId="293"/>
-            <ac:spMk id="5" creationId="{50C57F65-7853-E45D-CA58-31BCC9DE7B02}"/>
-          </ac:spMkLst>
-        </pc:spChg>
-        <pc:spChg chg="mod">
-          <ac:chgData name="Heinrich Venter" userId="694de3c83518532c" providerId="LiveId" clId="{10CD68D7-CBE1-4750-A2D1-7DEE064E9363}" dt="2026-05-26T06:51:26.880" v="4880" actId="20577"/>
+          <ac:chgData name="Heinrich Venter" userId="694de3c83518532c" providerId="LiveId" clId="{10CD68D7-CBE1-4750-A2D1-7DEE064E9363}" dt="2026-07-19T07:45:38.419" v="5463" actId="113"/>
           <ac:spMkLst>
             <pc:docMk/>
             <pc:sldMk cId="3290795109" sldId="293"/>
@@ -570,52 +376,13 @@
         </pc:spChg>
       </pc:sldChg>
       <pc:sldChg chg="modSp mod">
-        <pc:chgData name="Heinrich Venter" userId="694de3c83518532c" providerId="LiveId" clId="{10CD68D7-CBE1-4750-A2D1-7DEE064E9363}" dt="2026-05-26T08:15:50.097" v="4889" actId="27636"/>
-        <pc:sldMkLst>
-          <pc:docMk/>
-          <pc:sldMk cId="3463644882" sldId="294"/>
-        </pc:sldMkLst>
-        <pc:spChg chg="mod">
-          <ac:chgData name="Heinrich Venter" userId="694de3c83518532c" providerId="LiveId" clId="{10CD68D7-CBE1-4750-A2D1-7DEE064E9363}" dt="2026-05-25T00:33:37.416" v="4593" actId="20577"/>
-          <ac:spMkLst>
-            <pc:docMk/>
-            <pc:sldMk cId="3463644882" sldId="294"/>
-            <ac:spMk id="5" creationId="{208AF426-607B-1936-143C-7541AD8896ED}"/>
-          </ac:spMkLst>
-        </pc:spChg>
-        <pc:spChg chg="mod">
-          <ac:chgData name="Heinrich Venter" userId="694de3c83518532c" providerId="LiveId" clId="{10CD68D7-CBE1-4750-A2D1-7DEE064E9363}" dt="2026-05-26T08:15:31.644" v="4883" actId="27636"/>
-          <ac:spMkLst>
-            <pc:docMk/>
-            <pc:sldMk cId="3463644882" sldId="294"/>
-            <ac:spMk id="8" creationId="{DFB8CE4C-97AF-7F3E-9CAC-E06101B7E86D}"/>
-          </ac:spMkLst>
-        </pc:spChg>
-        <pc:spChg chg="mod">
-          <ac:chgData name="Heinrich Venter" userId="694de3c83518532c" providerId="LiveId" clId="{10CD68D7-CBE1-4750-A2D1-7DEE064E9363}" dt="2026-05-26T08:15:41.882" v="4886" actId="27636"/>
-          <ac:spMkLst>
-            <pc:docMk/>
-            <pc:sldMk cId="3463644882" sldId="294"/>
-            <ac:spMk id="9" creationId="{0A4F4AF7-5E5A-2D76-3F73-6A09F3F31537}"/>
-          </ac:spMkLst>
-        </pc:spChg>
-        <pc:spChg chg="mod">
-          <ac:chgData name="Heinrich Venter" userId="694de3c83518532c" providerId="LiveId" clId="{10CD68D7-CBE1-4750-A2D1-7DEE064E9363}" dt="2026-05-26T08:15:50.097" v="4889" actId="27636"/>
-          <ac:spMkLst>
-            <pc:docMk/>
-            <pc:sldMk cId="3463644882" sldId="294"/>
-            <ac:spMk id="10" creationId="{841EBE6D-B5D0-4C30-C32E-F3AA1F02B8FD}"/>
-          </ac:spMkLst>
-        </pc:spChg>
-      </pc:sldChg>
-      <pc:sldChg chg="modSp mod">
-        <pc:chgData name="Heinrich Venter" userId="694de3c83518532c" providerId="LiveId" clId="{10CD68D7-CBE1-4750-A2D1-7DEE064E9363}" dt="2026-05-26T08:19:28.846" v="4899" actId="113"/>
+        <pc:chgData name="Heinrich Venter" userId="694de3c83518532c" providerId="LiveId" clId="{10CD68D7-CBE1-4750-A2D1-7DEE064E9363}" dt="2026-07-19T07:48:24.589" v="5499" actId="20577"/>
         <pc:sldMkLst>
           <pc:docMk/>
           <pc:sldMk cId="2380697536" sldId="295"/>
         </pc:sldMkLst>
         <pc:spChg chg="mod">
-          <ac:chgData name="Heinrich Venter" userId="694de3c83518532c" providerId="LiveId" clId="{10CD68D7-CBE1-4750-A2D1-7DEE064E9363}" dt="2026-05-26T08:16:41.980" v="4892" actId="27636"/>
+          <ac:chgData name="Heinrich Venter" userId="694de3c83518532c" providerId="LiveId" clId="{10CD68D7-CBE1-4750-A2D1-7DEE064E9363}" dt="2026-07-19T07:48:24.589" v="5499" actId="20577"/>
           <ac:spMkLst>
             <pc:docMk/>
             <pc:sldMk cId="2380697536" sldId="295"/>
@@ -623,7 +390,7 @@
           </ac:spMkLst>
         </pc:spChg>
         <pc:spChg chg="mod">
-          <ac:chgData name="Heinrich Venter" userId="694de3c83518532c" providerId="LiveId" clId="{10CD68D7-CBE1-4750-A2D1-7DEE064E9363}" dt="2026-05-26T08:19:28.846" v="4899" actId="113"/>
+          <ac:chgData name="Heinrich Venter" userId="694de3c83518532c" providerId="LiveId" clId="{10CD68D7-CBE1-4750-A2D1-7DEE064E9363}" dt="2026-07-19T07:46:26.812" v="5468" actId="113"/>
           <ac:spMkLst>
             <pc:docMk/>
             <pc:sldMk cId="2380697536" sldId="295"/>
@@ -632,25 +399,40 @@
         </pc:spChg>
       </pc:sldChg>
       <pc:sldChg chg="modSp mod">
-        <pc:chgData name="Heinrich Venter" userId="694de3c83518532c" providerId="LiveId" clId="{10CD68D7-CBE1-4750-A2D1-7DEE064E9363}" dt="2026-05-26T08:25:29.564" v="4930" actId="20577"/>
+        <pc:chgData name="Heinrich Venter" userId="694de3c83518532c" providerId="LiveId" clId="{10CD68D7-CBE1-4750-A2D1-7DEE064E9363}" dt="2026-07-19T07:47:24.773" v="5471" actId="113"/>
         <pc:sldMkLst>
           <pc:docMk/>
           <pc:sldMk cId="1324961155" sldId="296"/>
         </pc:sldMkLst>
         <pc:spChg chg="mod">
-          <ac:chgData name="Heinrich Venter" userId="694de3c83518532c" providerId="LiveId" clId="{10CD68D7-CBE1-4750-A2D1-7DEE064E9363}" dt="2026-05-26T08:25:29.564" v="4930" actId="20577"/>
+          <ac:chgData name="Heinrich Venter" userId="694de3c83518532c" providerId="LiveId" clId="{10CD68D7-CBE1-4750-A2D1-7DEE064E9363}" dt="2026-07-19T07:47:24.773" v="5471" actId="113"/>
           <ac:spMkLst>
             <pc:docMk/>
             <pc:sldMk cId="1324961155" sldId="296"/>
             <ac:spMk id="5" creationId="{50C57F65-7853-E45D-CA58-31BCC9DE7B02}"/>
           </ac:spMkLst>
         </pc:spChg>
-        <pc:spChg chg="mod">
-          <ac:chgData name="Heinrich Venter" userId="694de3c83518532c" providerId="LiveId" clId="{10CD68D7-CBE1-4750-A2D1-7DEE064E9363}" dt="2026-05-26T08:25:23.705" v="4927" actId="27636"/>
+      </pc:sldChg>
+      <pc:sldChg chg="delSp modSp add mod">
+        <pc:chgData name="Heinrich Venter" userId="694de3c83518532c" providerId="LiveId" clId="{10CD68D7-CBE1-4750-A2D1-7DEE064E9363}" dt="2026-07-19T07:33:22.639" v="5412" actId="27636"/>
+        <pc:sldMkLst>
+          <pc:docMk/>
+          <pc:sldMk cId="2786755706" sldId="297"/>
+        </pc:sldMkLst>
+        <pc:spChg chg="del mod">
+          <ac:chgData name="Heinrich Venter" userId="694de3c83518532c" providerId="LiveId" clId="{10CD68D7-CBE1-4750-A2D1-7DEE064E9363}" dt="2026-07-19T07:29:56.896" v="5334" actId="478"/>
           <ac:spMkLst>
             <pc:docMk/>
-            <pc:sldMk cId="1324961155" sldId="296"/>
-            <ac:spMk id="11" creationId="{E3D936A8-CA08-48BB-AA98-F3A8B43B31CF}"/>
+            <pc:sldMk cId="2786755706" sldId="297"/>
+            <ac:spMk id="2" creationId="{94DDEAAA-AF49-3DC7-1377-01361DDFF102}"/>
+          </ac:spMkLst>
+        </pc:spChg>
+        <pc:spChg chg="mod">
+          <ac:chgData name="Heinrich Venter" userId="694de3c83518532c" providerId="LiveId" clId="{10CD68D7-CBE1-4750-A2D1-7DEE064E9363}" dt="2026-07-19T07:33:22.639" v="5412" actId="27636"/>
+          <ac:spMkLst>
+            <pc:docMk/>
+            <pc:sldMk cId="2786755706" sldId="297"/>
+            <ac:spMk id="3" creationId="{5ACC3126-8DD8-8C54-83C8-B51AC26F67BA}"/>
           </ac:spMkLst>
         </pc:spChg>
       </pc:sldChg>
@@ -940,7 +722,7 @@
           <a:p>
             <a:fld id="{A609F6A2-FEED-40EB-83D5-ADDC04076AF0}" type="datetimeFigureOut">
               <a:rPr lang="en-NZ" smtClean="0"/>
-              <a:t>17/06/2026</a:t>
+              <a:t>19/07/2026</a:t>
             </a:fld>
             <a:endParaRPr lang="en-NZ"/>
           </a:p>
@@ -1140,7 +922,7 @@
           <a:p>
             <a:fld id="{A609F6A2-FEED-40EB-83D5-ADDC04076AF0}" type="datetimeFigureOut">
               <a:rPr lang="en-NZ" smtClean="0"/>
-              <a:t>17/06/2026</a:t>
+              <a:t>19/07/2026</a:t>
             </a:fld>
             <a:endParaRPr lang="en-NZ"/>
           </a:p>
@@ -1350,7 +1132,7 @@
           <a:p>
             <a:fld id="{A609F6A2-FEED-40EB-83D5-ADDC04076AF0}" type="datetimeFigureOut">
               <a:rPr lang="en-NZ" smtClean="0"/>
-              <a:t>17/06/2026</a:t>
+              <a:t>19/07/2026</a:t>
             </a:fld>
             <a:endParaRPr lang="en-NZ"/>
           </a:p>
@@ -1550,7 +1332,7 @@
           <a:p>
             <a:fld id="{A609F6A2-FEED-40EB-83D5-ADDC04076AF0}" type="datetimeFigureOut">
               <a:rPr lang="en-NZ" smtClean="0"/>
-              <a:t>17/06/2026</a:t>
+              <a:t>19/07/2026</a:t>
             </a:fld>
             <a:endParaRPr lang="en-NZ"/>
           </a:p>
@@ -1826,7 +1608,7 @@
           <a:p>
             <a:fld id="{A609F6A2-FEED-40EB-83D5-ADDC04076AF0}" type="datetimeFigureOut">
               <a:rPr lang="en-NZ" smtClean="0"/>
-              <a:t>17/06/2026</a:t>
+              <a:t>19/07/2026</a:t>
             </a:fld>
             <a:endParaRPr lang="en-NZ"/>
           </a:p>
@@ -2094,7 +1876,7 @@
           <a:p>
             <a:fld id="{A609F6A2-FEED-40EB-83D5-ADDC04076AF0}" type="datetimeFigureOut">
               <a:rPr lang="en-NZ" smtClean="0"/>
-              <a:t>17/06/2026</a:t>
+              <a:t>19/07/2026</a:t>
             </a:fld>
             <a:endParaRPr lang="en-NZ"/>
           </a:p>
@@ -2509,7 +2291,7 @@
           <a:p>
             <a:fld id="{A609F6A2-FEED-40EB-83D5-ADDC04076AF0}" type="datetimeFigureOut">
               <a:rPr lang="en-NZ" smtClean="0"/>
-              <a:t>17/06/2026</a:t>
+              <a:t>19/07/2026</a:t>
             </a:fld>
             <a:endParaRPr lang="en-NZ"/>
           </a:p>
@@ -2651,7 +2433,7 @@
           <a:p>
             <a:fld id="{A609F6A2-FEED-40EB-83D5-ADDC04076AF0}" type="datetimeFigureOut">
               <a:rPr lang="en-NZ" smtClean="0"/>
-              <a:t>17/06/2026</a:t>
+              <a:t>19/07/2026</a:t>
             </a:fld>
             <a:endParaRPr lang="en-NZ"/>
           </a:p>
@@ -2764,7 +2546,7 @@
           <a:p>
             <a:fld id="{A609F6A2-FEED-40EB-83D5-ADDC04076AF0}" type="datetimeFigureOut">
               <a:rPr lang="en-NZ" smtClean="0"/>
-              <a:t>17/06/2026</a:t>
+              <a:t>19/07/2026</a:t>
             </a:fld>
             <a:endParaRPr lang="en-NZ"/>
           </a:p>
@@ -3077,7 +2859,7 @@
           <a:p>
             <a:fld id="{A609F6A2-FEED-40EB-83D5-ADDC04076AF0}" type="datetimeFigureOut">
               <a:rPr lang="en-NZ" smtClean="0"/>
-              <a:t>17/06/2026</a:t>
+              <a:t>19/07/2026</a:t>
             </a:fld>
             <a:endParaRPr lang="en-NZ"/>
           </a:p>
@@ -3366,7 +3148,7 @@
           <a:p>
             <a:fld id="{A609F6A2-FEED-40EB-83D5-ADDC04076AF0}" type="datetimeFigureOut">
               <a:rPr lang="en-NZ" smtClean="0"/>
-              <a:t>17/06/2026</a:t>
+              <a:t>19/07/2026</a:t>
             </a:fld>
             <a:endParaRPr lang="en-NZ"/>
           </a:p>
@@ -3609,7 +3391,7 @@
           <a:p>
             <a:fld id="{A609F6A2-FEED-40EB-83D5-ADDC04076AF0}" type="datetimeFigureOut">
               <a:rPr lang="en-NZ" smtClean="0"/>
-              <a:t>17/06/2026</a:t>
+              <a:t>19/07/2026</a:t>
             </a:fld>
             <a:endParaRPr lang="en-NZ"/>
           </a:p>
@@ -4112,13 +3894,7 @@
   <p:cSld>
     <p:spTree>
       <p:nvGrpSpPr>
-        <p:cNvPr id="1" name="">
-          <a:extLst>
-            <a:ext uri="{FF2B5EF4-FFF2-40B4-BE49-F238E27FC236}">
-              <a16:creationId xmlns:a16="http://schemas.microsoft.com/office/drawing/2014/main" id="{E774EB2B-85A8-4549-4E6D-72F4823A201A}"/>
-            </a:ext>
-          </a:extLst>
-        </p:cNvPr>
+        <p:cNvPr id="1" name=""/>
         <p:cNvGrpSpPr/>
         <p:nvPr/>
       </p:nvGrpSpPr>
@@ -4132,10 +3908,10 @@
       </p:grpSpPr>
       <p:sp>
         <p:nvSpPr>
-          <p:cNvPr id="2" name="Title 1">
+          <p:cNvPr id="4" name="Title 3">
             <a:extLst>
               <a:ext uri="{FF2B5EF4-FFF2-40B4-BE49-F238E27FC236}">
-                <a16:creationId xmlns:a16="http://schemas.microsoft.com/office/drawing/2014/main" id="{5AD3A040-4DF6-3A52-2828-494419344D41}"/>
+                <a16:creationId xmlns:a16="http://schemas.microsoft.com/office/drawing/2014/main" id="{2B56BB34-A33E-CA54-E3A0-74010D4B0A63}"/>
               </a:ext>
             </a:extLst>
           </p:cNvPr>
@@ -4143,294 +3919,27 @@
             <a:spLocks noGrp="1"/>
           </p:cNvSpPr>
           <p:nvPr>
-            <p:ph type="title"/>
+            <p:ph type="ctrTitle"/>
           </p:nvPr>
         </p:nvSpPr>
-        <p:spPr>
-          <a:solidFill>
-            <a:schemeClr val="accent3">
-              <a:lumMod val="20000"/>
-              <a:lumOff val="80000"/>
-            </a:schemeClr>
-          </a:solidFill>
-        </p:spPr>
+        <p:spPr/>
         <p:txBody>
           <a:bodyPr/>
           <a:lstStyle/>
           <a:p>
             <a:r>
               <a:rPr lang="en-NZ" noProof="0" dirty="0"/>
-              <a:t>Choice of Component/System 1: controller</a:t>
+              <a:t>Components and Systems</a:t>
             </a:r>
           </a:p>
         </p:txBody>
       </p:sp>
       <p:sp>
         <p:nvSpPr>
-          <p:cNvPr id="5" name="Content Placeholder 2">
+          <p:cNvPr id="5" name="Subtitle 4">
             <a:extLst>
               <a:ext uri="{FF2B5EF4-FFF2-40B4-BE49-F238E27FC236}">
-                <a16:creationId xmlns:a16="http://schemas.microsoft.com/office/drawing/2014/main" id="{208AF426-607B-1936-143C-7541AD8896ED}"/>
-              </a:ext>
-            </a:extLst>
-          </p:cNvPr>
-          <p:cNvSpPr txBox="1">
-            <a:spLocks/>
-          </p:cNvSpPr>
-          <p:nvPr/>
-        </p:nvSpPr>
-        <p:spPr>
-          <a:xfrm>
-            <a:off x="838200" y="3646026"/>
-            <a:ext cx="10225548" cy="2726095"/>
-          </a:xfrm>
-          <a:prstGeom prst="rect">
-            <a:avLst/>
-          </a:prstGeom>
-          <a:solidFill>
-            <a:schemeClr val="accent6">
-              <a:lumMod val="20000"/>
-              <a:lumOff val="80000"/>
-            </a:schemeClr>
-          </a:solidFill>
-        </p:spPr>
-        <p:txBody>
-          <a:bodyPr vert="horz" lIns="91440" tIns="45720" rIns="91440" bIns="45720" rtlCol="0">
-            <a:normAutofit fontScale="92500"/>
-          </a:bodyPr>
-          <a:lstStyle>
-            <a:lvl1pPr marL="228600" indent="-228600" algn="l" defTabSz="914400" rtl="0" eaLnBrk="1" latinLnBrk="0" hangingPunct="1">
-              <a:lnSpc>
-                <a:spcPct val="90000"/>
-              </a:lnSpc>
-              <a:spcBef>
-                <a:spcPts val="1000"/>
-              </a:spcBef>
-              <a:buFont typeface="Arial" panose="020B0604020202020204" pitchFamily="34" charset="0"/>
-              <a:buChar char="•"/>
-              <a:defRPr sz="2800" kern="1200">
-                <a:solidFill>
-                  <a:schemeClr val="tx1"/>
-                </a:solidFill>
-                <a:latin typeface="+mn-lt"/>
-                <a:ea typeface="+mn-ea"/>
-                <a:cs typeface="+mn-cs"/>
-              </a:defRPr>
-            </a:lvl1pPr>
-            <a:lvl2pPr marL="685800" indent="-228600" algn="l" defTabSz="914400" rtl="0" eaLnBrk="1" latinLnBrk="0" hangingPunct="1">
-              <a:lnSpc>
-                <a:spcPct val="90000"/>
-              </a:lnSpc>
-              <a:spcBef>
-                <a:spcPts val="500"/>
-              </a:spcBef>
-              <a:buFont typeface="Arial" panose="020B0604020202020204" pitchFamily="34" charset="0"/>
-              <a:buChar char="•"/>
-              <a:defRPr sz="2400" kern="1200">
-                <a:solidFill>
-                  <a:schemeClr val="tx1"/>
-                </a:solidFill>
-                <a:latin typeface="+mn-lt"/>
-                <a:ea typeface="+mn-ea"/>
-                <a:cs typeface="+mn-cs"/>
-              </a:defRPr>
-            </a:lvl2pPr>
-            <a:lvl3pPr marL="1143000" indent="-228600" algn="l" defTabSz="914400" rtl="0" eaLnBrk="1" latinLnBrk="0" hangingPunct="1">
-              <a:lnSpc>
-                <a:spcPct val="90000"/>
-              </a:lnSpc>
-              <a:spcBef>
-                <a:spcPts val="500"/>
-              </a:spcBef>
-              <a:buFont typeface="Arial" panose="020B0604020202020204" pitchFamily="34" charset="0"/>
-              <a:buChar char="•"/>
-              <a:defRPr sz="2000" kern="1200">
-                <a:solidFill>
-                  <a:schemeClr val="tx1"/>
-                </a:solidFill>
-                <a:latin typeface="+mn-lt"/>
-                <a:ea typeface="+mn-ea"/>
-                <a:cs typeface="+mn-cs"/>
-              </a:defRPr>
-            </a:lvl3pPr>
-            <a:lvl4pPr marL="1600200" indent="-228600" algn="l" defTabSz="914400" rtl="0" eaLnBrk="1" latinLnBrk="0" hangingPunct="1">
-              <a:lnSpc>
-                <a:spcPct val="90000"/>
-              </a:lnSpc>
-              <a:spcBef>
-                <a:spcPts val="500"/>
-              </a:spcBef>
-              <a:buFont typeface="Arial" panose="020B0604020202020204" pitchFamily="34" charset="0"/>
-              <a:buChar char="•"/>
-              <a:defRPr sz="1800" kern="1200">
-                <a:solidFill>
-                  <a:schemeClr val="tx1"/>
-                </a:solidFill>
-                <a:latin typeface="+mn-lt"/>
-                <a:ea typeface="+mn-ea"/>
-                <a:cs typeface="+mn-cs"/>
-              </a:defRPr>
-            </a:lvl4pPr>
-            <a:lvl5pPr marL="2057400" indent="-228600" algn="l" defTabSz="914400" rtl="0" eaLnBrk="1" latinLnBrk="0" hangingPunct="1">
-              <a:lnSpc>
-                <a:spcPct val="90000"/>
-              </a:lnSpc>
-              <a:spcBef>
-                <a:spcPts val="500"/>
-              </a:spcBef>
-              <a:buFont typeface="Arial" panose="020B0604020202020204" pitchFamily="34" charset="0"/>
-              <a:buChar char="•"/>
-              <a:defRPr sz="1800" kern="1200">
-                <a:solidFill>
-                  <a:schemeClr val="tx1"/>
-                </a:solidFill>
-                <a:latin typeface="+mn-lt"/>
-                <a:ea typeface="+mn-ea"/>
-                <a:cs typeface="+mn-cs"/>
-              </a:defRPr>
-            </a:lvl5pPr>
-            <a:lvl6pPr marL="2514600" indent="-228600" algn="l" defTabSz="914400" rtl="0" eaLnBrk="1" latinLnBrk="0" hangingPunct="1">
-              <a:lnSpc>
-                <a:spcPct val="90000"/>
-              </a:lnSpc>
-              <a:spcBef>
-                <a:spcPts val="500"/>
-              </a:spcBef>
-              <a:buFont typeface="Arial" panose="020B0604020202020204" pitchFamily="34" charset="0"/>
-              <a:buChar char="•"/>
-              <a:defRPr sz="1800" kern="1200">
-                <a:solidFill>
-                  <a:schemeClr val="tx1"/>
-                </a:solidFill>
-                <a:latin typeface="+mn-lt"/>
-                <a:ea typeface="+mn-ea"/>
-                <a:cs typeface="+mn-cs"/>
-              </a:defRPr>
-            </a:lvl6pPr>
-            <a:lvl7pPr marL="2971800" indent="-228600" algn="l" defTabSz="914400" rtl="0" eaLnBrk="1" latinLnBrk="0" hangingPunct="1">
-              <a:lnSpc>
-                <a:spcPct val="90000"/>
-              </a:lnSpc>
-              <a:spcBef>
-                <a:spcPts val="500"/>
-              </a:spcBef>
-              <a:buFont typeface="Arial" panose="020B0604020202020204" pitchFamily="34" charset="0"/>
-              <a:buChar char="•"/>
-              <a:defRPr sz="1800" kern="1200">
-                <a:solidFill>
-                  <a:schemeClr val="tx1"/>
-                </a:solidFill>
-                <a:latin typeface="+mn-lt"/>
-                <a:ea typeface="+mn-ea"/>
-                <a:cs typeface="+mn-cs"/>
-              </a:defRPr>
-            </a:lvl7pPr>
-            <a:lvl8pPr marL="3429000" indent="-228600" algn="l" defTabSz="914400" rtl="0" eaLnBrk="1" latinLnBrk="0" hangingPunct="1">
-              <a:lnSpc>
-                <a:spcPct val="90000"/>
-              </a:lnSpc>
-              <a:spcBef>
-                <a:spcPts val="500"/>
-              </a:spcBef>
-              <a:buFont typeface="Arial" panose="020B0604020202020204" pitchFamily="34" charset="0"/>
-              <a:buChar char="•"/>
-              <a:defRPr sz="1800" kern="1200">
-                <a:solidFill>
-                  <a:schemeClr val="tx1"/>
-                </a:solidFill>
-                <a:latin typeface="+mn-lt"/>
-                <a:ea typeface="+mn-ea"/>
-                <a:cs typeface="+mn-cs"/>
-              </a:defRPr>
-            </a:lvl8pPr>
-            <a:lvl9pPr marL="3886200" indent="-228600" algn="l" defTabSz="914400" rtl="0" eaLnBrk="1" latinLnBrk="0" hangingPunct="1">
-              <a:lnSpc>
-                <a:spcPct val="90000"/>
-              </a:lnSpc>
-              <a:spcBef>
-                <a:spcPts val="500"/>
-              </a:spcBef>
-              <a:buFont typeface="Arial" panose="020B0604020202020204" pitchFamily="34" charset="0"/>
-              <a:buChar char="•"/>
-              <a:defRPr sz="1800" kern="1200">
-                <a:solidFill>
-                  <a:schemeClr val="tx1"/>
-                </a:solidFill>
-                <a:latin typeface="+mn-lt"/>
-                <a:ea typeface="+mn-ea"/>
-                <a:cs typeface="+mn-cs"/>
-              </a:defRPr>
-            </a:lvl9pPr>
-          </a:lstStyle>
-          <a:p>
-            <a:pPr marL="0" indent="0">
-              <a:buFont typeface="Arial" panose="020B0604020202020204" pitchFamily="34" charset="0"/>
-              <a:buNone/>
-            </a:pPr>
-            <a:r>
-              <a:rPr lang="en-NZ" noProof="0" dirty="0"/>
-              <a:t>Justification of choice made</a:t>
-            </a:r>
-          </a:p>
-          <a:p>
-            <a:pPr marL="0" indent="0">
-              <a:buFont typeface="Arial" panose="020B0604020202020204" pitchFamily="34" charset="0"/>
-              <a:buNone/>
-            </a:pPr>
-            <a:r>
-              <a:rPr lang="en-NZ" dirty="0"/>
-              <a:t>I chose the Arduino r4 over the </a:t>
-            </a:r>
-            <a:r>
-              <a:rPr lang="en-NZ" dirty="0" err="1"/>
-              <a:t>esp</a:t>
-            </a:r>
-            <a:r>
-              <a:rPr lang="en-NZ" dirty="0"/>
-              <a:t> 32 because is have a fundamental </a:t>
-            </a:r>
-            <a:r>
-              <a:rPr lang="en-NZ" dirty="0" err="1"/>
-              <a:t>understranding</a:t>
-            </a:r>
-            <a:r>
-              <a:rPr lang="en-NZ" dirty="0"/>
-              <a:t> on the workings of the Arduino compared to a the esp32 which </a:t>
-            </a:r>
-            <a:r>
-              <a:rPr lang="en-NZ" dirty="0" err="1"/>
-              <a:t>ive</a:t>
-            </a:r>
-            <a:r>
-              <a:rPr lang="en-NZ" dirty="0"/>
-              <a:t> never used before. I chose the r4 over the r3 because the r4 has a </a:t>
-            </a:r>
-            <a:r>
-              <a:rPr lang="en-NZ" dirty="0" err="1"/>
-              <a:t>wifi</a:t>
-            </a:r>
-            <a:r>
-              <a:rPr lang="en-NZ" dirty="0"/>
-              <a:t> chip on board which means  that I can made a </a:t>
-            </a:r>
-            <a:r>
-              <a:rPr lang="en-NZ" dirty="0" err="1"/>
-              <a:t>ui</a:t>
-            </a:r>
-            <a:r>
-              <a:rPr lang="en-NZ" dirty="0"/>
-              <a:t> to adjust settings like throttle logic and sensitivity and when I need to do maintenance I can turn stuff of  like the clutch for example</a:t>
-            </a:r>
-            <a:endParaRPr lang="en-NZ" noProof="0" dirty="0"/>
-          </a:p>
-        </p:txBody>
-      </p:sp>
-      <p:sp>
-        <p:nvSpPr>
-          <p:cNvPr id="8" name="Content Placeholder 7">
-            <a:extLst>
-              <a:ext uri="{FF2B5EF4-FFF2-40B4-BE49-F238E27FC236}">
-                <a16:creationId xmlns:a16="http://schemas.microsoft.com/office/drawing/2014/main" id="{DFB8CE4C-97AF-7F3E-9CAC-E06101B7E86D}"/>
+                <a16:creationId xmlns:a16="http://schemas.microsoft.com/office/drawing/2014/main" id="{E04ACEFA-C5B9-70D8-D43C-68A151E2A2DE}"/>
               </a:ext>
             </a:extLst>
           </p:cNvPr>
@@ -4438,481 +3947,22 @@
             <a:spLocks noGrp="1"/>
           </p:cNvSpPr>
           <p:nvPr>
-            <p:ph idx="1"/>
+            <p:ph type="subTitle" idx="1"/>
           </p:nvPr>
         </p:nvSpPr>
-        <p:spPr>
-          <a:xfrm>
-            <a:off x="838200" y="1825625"/>
-            <a:ext cx="3723968" cy="1325563"/>
-          </a:xfrm>
-        </p:spPr>
+        <p:spPr/>
         <p:txBody>
           <a:bodyPr/>
           <a:lstStyle/>
           <a:p>
-            <a:pPr marL="0" indent="0">
-              <a:buNone/>
-            </a:pPr>
-            <a:r>
-              <a:rPr lang="en-NZ" noProof="0" dirty="0"/>
-              <a:t>Chosen</a:t>
-            </a:r>
-          </a:p>
-          <a:p>
-            <a:pPr marL="0" indent="0">
-              <a:buNone/>
-            </a:pPr>
-            <a:r>
-              <a:rPr lang="en-NZ" dirty="0" err="1"/>
-              <a:t>Ardunio</a:t>
-            </a:r>
-            <a:r>
-              <a:rPr lang="en-NZ" dirty="0"/>
-              <a:t> R4</a:t>
-            </a:r>
             <a:endParaRPr lang="en-NZ" noProof="0" dirty="0"/>
-          </a:p>
-        </p:txBody>
-      </p:sp>
-      <p:sp>
-        <p:nvSpPr>
-          <p:cNvPr id="9" name="Content Placeholder 7">
-            <a:extLst>
-              <a:ext uri="{FF2B5EF4-FFF2-40B4-BE49-F238E27FC236}">
-                <a16:creationId xmlns:a16="http://schemas.microsoft.com/office/drawing/2014/main" id="{0A4F4AF7-5E5A-2D76-3F73-6A09F3F31537}"/>
-              </a:ext>
-            </a:extLst>
-          </p:cNvPr>
-          <p:cNvSpPr txBox="1">
-            <a:spLocks/>
-          </p:cNvSpPr>
-          <p:nvPr/>
-        </p:nvSpPr>
-        <p:spPr>
-          <a:xfrm>
-            <a:off x="4234016" y="1846467"/>
-            <a:ext cx="3723968" cy="1325563"/>
-          </a:xfrm>
-          <a:prstGeom prst="rect">
-            <a:avLst/>
-          </a:prstGeom>
-        </p:spPr>
-        <p:txBody>
-          <a:bodyPr vert="horz" lIns="91440" tIns="45720" rIns="91440" bIns="45720" rtlCol="0">
-            <a:normAutofit/>
-          </a:bodyPr>
-          <a:lstStyle>
-            <a:lvl1pPr marL="228600" indent="-228600" algn="l" defTabSz="914400" rtl="0" eaLnBrk="1" latinLnBrk="0" hangingPunct="1">
-              <a:lnSpc>
-                <a:spcPct val="90000"/>
-              </a:lnSpc>
-              <a:spcBef>
-                <a:spcPts val="1000"/>
-              </a:spcBef>
-              <a:buFont typeface="Arial" panose="020B0604020202020204" pitchFamily="34" charset="0"/>
-              <a:buChar char="•"/>
-              <a:defRPr sz="2800" kern="1200">
-                <a:solidFill>
-                  <a:schemeClr val="tx1"/>
-                </a:solidFill>
-                <a:latin typeface="+mn-lt"/>
-                <a:ea typeface="+mn-ea"/>
-                <a:cs typeface="+mn-cs"/>
-              </a:defRPr>
-            </a:lvl1pPr>
-            <a:lvl2pPr marL="685800" indent="-228600" algn="l" defTabSz="914400" rtl="0" eaLnBrk="1" latinLnBrk="0" hangingPunct="1">
-              <a:lnSpc>
-                <a:spcPct val="90000"/>
-              </a:lnSpc>
-              <a:spcBef>
-                <a:spcPts val="500"/>
-              </a:spcBef>
-              <a:buFont typeface="Arial" panose="020B0604020202020204" pitchFamily="34" charset="0"/>
-              <a:buChar char="•"/>
-              <a:defRPr sz="2400" kern="1200">
-                <a:solidFill>
-                  <a:schemeClr val="tx1"/>
-                </a:solidFill>
-                <a:latin typeface="+mn-lt"/>
-                <a:ea typeface="+mn-ea"/>
-                <a:cs typeface="+mn-cs"/>
-              </a:defRPr>
-            </a:lvl2pPr>
-            <a:lvl3pPr marL="1143000" indent="-228600" algn="l" defTabSz="914400" rtl="0" eaLnBrk="1" latinLnBrk="0" hangingPunct="1">
-              <a:lnSpc>
-                <a:spcPct val="90000"/>
-              </a:lnSpc>
-              <a:spcBef>
-                <a:spcPts val="500"/>
-              </a:spcBef>
-              <a:buFont typeface="Arial" panose="020B0604020202020204" pitchFamily="34" charset="0"/>
-              <a:buChar char="•"/>
-              <a:defRPr sz="2000" kern="1200">
-                <a:solidFill>
-                  <a:schemeClr val="tx1"/>
-                </a:solidFill>
-                <a:latin typeface="+mn-lt"/>
-                <a:ea typeface="+mn-ea"/>
-                <a:cs typeface="+mn-cs"/>
-              </a:defRPr>
-            </a:lvl3pPr>
-            <a:lvl4pPr marL="1600200" indent="-228600" algn="l" defTabSz="914400" rtl="0" eaLnBrk="1" latinLnBrk="0" hangingPunct="1">
-              <a:lnSpc>
-                <a:spcPct val="90000"/>
-              </a:lnSpc>
-              <a:spcBef>
-                <a:spcPts val="500"/>
-              </a:spcBef>
-              <a:buFont typeface="Arial" panose="020B0604020202020204" pitchFamily="34" charset="0"/>
-              <a:buChar char="•"/>
-              <a:defRPr sz="1800" kern="1200">
-                <a:solidFill>
-                  <a:schemeClr val="tx1"/>
-                </a:solidFill>
-                <a:latin typeface="+mn-lt"/>
-                <a:ea typeface="+mn-ea"/>
-                <a:cs typeface="+mn-cs"/>
-              </a:defRPr>
-            </a:lvl4pPr>
-            <a:lvl5pPr marL="2057400" indent="-228600" algn="l" defTabSz="914400" rtl="0" eaLnBrk="1" latinLnBrk="0" hangingPunct="1">
-              <a:lnSpc>
-                <a:spcPct val="90000"/>
-              </a:lnSpc>
-              <a:spcBef>
-                <a:spcPts val="500"/>
-              </a:spcBef>
-              <a:buFont typeface="Arial" panose="020B0604020202020204" pitchFamily="34" charset="0"/>
-              <a:buChar char="•"/>
-              <a:defRPr sz="1800" kern="1200">
-                <a:solidFill>
-                  <a:schemeClr val="tx1"/>
-                </a:solidFill>
-                <a:latin typeface="+mn-lt"/>
-                <a:ea typeface="+mn-ea"/>
-                <a:cs typeface="+mn-cs"/>
-              </a:defRPr>
-            </a:lvl5pPr>
-            <a:lvl6pPr marL="2514600" indent="-228600" algn="l" defTabSz="914400" rtl="0" eaLnBrk="1" latinLnBrk="0" hangingPunct="1">
-              <a:lnSpc>
-                <a:spcPct val="90000"/>
-              </a:lnSpc>
-              <a:spcBef>
-                <a:spcPts val="500"/>
-              </a:spcBef>
-              <a:buFont typeface="Arial" panose="020B0604020202020204" pitchFamily="34" charset="0"/>
-              <a:buChar char="•"/>
-              <a:defRPr sz="1800" kern="1200">
-                <a:solidFill>
-                  <a:schemeClr val="tx1"/>
-                </a:solidFill>
-                <a:latin typeface="+mn-lt"/>
-                <a:ea typeface="+mn-ea"/>
-                <a:cs typeface="+mn-cs"/>
-              </a:defRPr>
-            </a:lvl6pPr>
-            <a:lvl7pPr marL="2971800" indent="-228600" algn="l" defTabSz="914400" rtl="0" eaLnBrk="1" latinLnBrk="0" hangingPunct="1">
-              <a:lnSpc>
-                <a:spcPct val="90000"/>
-              </a:lnSpc>
-              <a:spcBef>
-                <a:spcPts val="500"/>
-              </a:spcBef>
-              <a:buFont typeface="Arial" panose="020B0604020202020204" pitchFamily="34" charset="0"/>
-              <a:buChar char="•"/>
-              <a:defRPr sz="1800" kern="1200">
-                <a:solidFill>
-                  <a:schemeClr val="tx1"/>
-                </a:solidFill>
-                <a:latin typeface="+mn-lt"/>
-                <a:ea typeface="+mn-ea"/>
-                <a:cs typeface="+mn-cs"/>
-              </a:defRPr>
-            </a:lvl7pPr>
-            <a:lvl8pPr marL="3429000" indent="-228600" algn="l" defTabSz="914400" rtl="0" eaLnBrk="1" latinLnBrk="0" hangingPunct="1">
-              <a:lnSpc>
-                <a:spcPct val="90000"/>
-              </a:lnSpc>
-              <a:spcBef>
-                <a:spcPts val="500"/>
-              </a:spcBef>
-              <a:buFont typeface="Arial" panose="020B0604020202020204" pitchFamily="34" charset="0"/>
-              <a:buChar char="•"/>
-              <a:defRPr sz="1800" kern="1200">
-                <a:solidFill>
-                  <a:schemeClr val="tx1"/>
-                </a:solidFill>
-                <a:latin typeface="+mn-lt"/>
-                <a:ea typeface="+mn-ea"/>
-                <a:cs typeface="+mn-cs"/>
-              </a:defRPr>
-            </a:lvl8pPr>
-            <a:lvl9pPr marL="3886200" indent="-228600" algn="l" defTabSz="914400" rtl="0" eaLnBrk="1" latinLnBrk="0" hangingPunct="1">
-              <a:lnSpc>
-                <a:spcPct val="90000"/>
-              </a:lnSpc>
-              <a:spcBef>
-                <a:spcPts val="500"/>
-              </a:spcBef>
-              <a:buFont typeface="Arial" panose="020B0604020202020204" pitchFamily="34" charset="0"/>
-              <a:buChar char="•"/>
-              <a:defRPr sz="1800" kern="1200">
-                <a:solidFill>
-                  <a:schemeClr val="tx1"/>
-                </a:solidFill>
-                <a:latin typeface="+mn-lt"/>
-                <a:ea typeface="+mn-ea"/>
-                <a:cs typeface="+mn-cs"/>
-              </a:defRPr>
-            </a:lvl9pPr>
-          </a:lstStyle>
-          <a:p>
-            <a:pPr marL="0" indent="0">
-              <a:buFont typeface="Arial" panose="020B0604020202020204" pitchFamily="34" charset="0"/>
-              <a:buNone/>
-            </a:pPr>
-            <a:r>
-              <a:rPr lang="en-NZ" noProof="0" dirty="0"/>
-              <a:t>Alternative 1</a:t>
-            </a:r>
-          </a:p>
-          <a:p>
-            <a:pPr marL="0" indent="0">
-              <a:buFont typeface="Arial" panose="020B0604020202020204" pitchFamily="34" charset="0"/>
-              <a:buNone/>
-            </a:pPr>
-            <a:r>
-              <a:rPr lang="en-NZ" dirty="0"/>
-              <a:t>Esp 32</a:t>
-            </a:r>
-            <a:r>
-              <a:rPr lang="en-NZ" noProof="0" dirty="0"/>
-              <a:t> </a:t>
-            </a:r>
-          </a:p>
-        </p:txBody>
-      </p:sp>
-      <p:sp>
-        <p:nvSpPr>
-          <p:cNvPr id="10" name="Content Placeholder 7">
-            <a:extLst>
-              <a:ext uri="{FF2B5EF4-FFF2-40B4-BE49-F238E27FC236}">
-                <a16:creationId xmlns:a16="http://schemas.microsoft.com/office/drawing/2014/main" id="{841EBE6D-B5D0-4C30-C32E-F3AA1F02B8FD}"/>
-              </a:ext>
-            </a:extLst>
-          </p:cNvPr>
-          <p:cNvSpPr txBox="1">
-            <a:spLocks/>
-          </p:cNvSpPr>
-          <p:nvPr/>
-        </p:nvSpPr>
-        <p:spPr>
-          <a:xfrm>
-            <a:off x="7876867" y="1846467"/>
-            <a:ext cx="3723968" cy="1325563"/>
-          </a:xfrm>
-          <a:prstGeom prst="rect">
-            <a:avLst/>
-          </a:prstGeom>
-        </p:spPr>
-        <p:txBody>
-          <a:bodyPr vert="horz" lIns="91440" tIns="45720" rIns="91440" bIns="45720" rtlCol="0">
-            <a:normAutofit/>
-          </a:bodyPr>
-          <a:lstStyle>
-            <a:lvl1pPr marL="228600" indent="-228600" algn="l" defTabSz="914400" rtl="0" eaLnBrk="1" latinLnBrk="0" hangingPunct="1">
-              <a:lnSpc>
-                <a:spcPct val="90000"/>
-              </a:lnSpc>
-              <a:spcBef>
-                <a:spcPts val="1000"/>
-              </a:spcBef>
-              <a:buFont typeface="Arial" panose="020B0604020202020204" pitchFamily="34" charset="0"/>
-              <a:buChar char="•"/>
-              <a:defRPr sz="2800" kern="1200">
-                <a:solidFill>
-                  <a:schemeClr val="tx1"/>
-                </a:solidFill>
-                <a:latin typeface="+mn-lt"/>
-                <a:ea typeface="+mn-ea"/>
-                <a:cs typeface="+mn-cs"/>
-              </a:defRPr>
-            </a:lvl1pPr>
-            <a:lvl2pPr marL="685800" indent="-228600" algn="l" defTabSz="914400" rtl="0" eaLnBrk="1" latinLnBrk="0" hangingPunct="1">
-              <a:lnSpc>
-                <a:spcPct val="90000"/>
-              </a:lnSpc>
-              <a:spcBef>
-                <a:spcPts val="500"/>
-              </a:spcBef>
-              <a:buFont typeface="Arial" panose="020B0604020202020204" pitchFamily="34" charset="0"/>
-              <a:buChar char="•"/>
-              <a:defRPr sz="2400" kern="1200">
-                <a:solidFill>
-                  <a:schemeClr val="tx1"/>
-                </a:solidFill>
-                <a:latin typeface="+mn-lt"/>
-                <a:ea typeface="+mn-ea"/>
-                <a:cs typeface="+mn-cs"/>
-              </a:defRPr>
-            </a:lvl2pPr>
-            <a:lvl3pPr marL="1143000" indent="-228600" algn="l" defTabSz="914400" rtl="0" eaLnBrk="1" latinLnBrk="0" hangingPunct="1">
-              <a:lnSpc>
-                <a:spcPct val="90000"/>
-              </a:lnSpc>
-              <a:spcBef>
-                <a:spcPts val="500"/>
-              </a:spcBef>
-              <a:buFont typeface="Arial" panose="020B0604020202020204" pitchFamily="34" charset="0"/>
-              <a:buChar char="•"/>
-              <a:defRPr sz="2000" kern="1200">
-                <a:solidFill>
-                  <a:schemeClr val="tx1"/>
-                </a:solidFill>
-                <a:latin typeface="+mn-lt"/>
-                <a:ea typeface="+mn-ea"/>
-                <a:cs typeface="+mn-cs"/>
-              </a:defRPr>
-            </a:lvl3pPr>
-            <a:lvl4pPr marL="1600200" indent="-228600" algn="l" defTabSz="914400" rtl="0" eaLnBrk="1" latinLnBrk="0" hangingPunct="1">
-              <a:lnSpc>
-                <a:spcPct val="90000"/>
-              </a:lnSpc>
-              <a:spcBef>
-                <a:spcPts val="500"/>
-              </a:spcBef>
-              <a:buFont typeface="Arial" panose="020B0604020202020204" pitchFamily="34" charset="0"/>
-              <a:buChar char="•"/>
-              <a:defRPr sz="1800" kern="1200">
-                <a:solidFill>
-                  <a:schemeClr val="tx1"/>
-                </a:solidFill>
-                <a:latin typeface="+mn-lt"/>
-                <a:ea typeface="+mn-ea"/>
-                <a:cs typeface="+mn-cs"/>
-              </a:defRPr>
-            </a:lvl4pPr>
-            <a:lvl5pPr marL="2057400" indent="-228600" algn="l" defTabSz="914400" rtl="0" eaLnBrk="1" latinLnBrk="0" hangingPunct="1">
-              <a:lnSpc>
-                <a:spcPct val="90000"/>
-              </a:lnSpc>
-              <a:spcBef>
-                <a:spcPts val="500"/>
-              </a:spcBef>
-              <a:buFont typeface="Arial" panose="020B0604020202020204" pitchFamily="34" charset="0"/>
-              <a:buChar char="•"/>
-              <a:defRPr sz="1800" kern="1200">
-                <a:solidFill>
-                  <a:schemeClr val="tx1"/>
-                </a:solidFill>
-                <a:latin typeface="+mn-lt"/>
-                <a:ea typeface="+mn-ea"/>
-                <a:cs typeface="+mn-cs"/>
-              </a:defRPr>
-            </a:lvl5pPr>
-            <a:lvl6pPr marL="2514600" indent="-228600" algn="l" defTabSz="914400" rtl="0" eaLnBrk="1" latinLnBrk="0" hangingPunct="1">
-              <a:lnSpc>
-                <a:spcPct val="90000"/>
-              </a:lnSpc>
-              <a:spcBef>
-                <a:spcPts val="500"/>
-              </a:spcBef>
-              <a:buFont typeface="Arial" panose="020B0604020202020204" pitchFamily="34" charset="0"/>
-              <a:buChar char="•"/>
-              <a:defRPr sz="1800" kern="1200">
-                <a:solidFill>
-                  <a:schemeClr val="tx1"/>
-                </a:solidFill>
-                <a:latin typeface="+mn-lt"/>
-                <a:ea typeface="+mn-ea"/>
-                <a:cs typeface="+mn-cs"/>
-              </a:defRPr>
-            </a:lvl6pPr>
-            <a:lvl7pPr marL="2971800" indent="-228600" algn="l" defTabSz="914400" rtl="0" eaLnBrk="1" latinLnBrk="0" hangingPunct="1">
-              <a:lnSpc>
-                <a:spcPct val="90000"/>
-              </a:lnSpc>
-              <a:spcBef>
-                <a:spcPts val="500"/>
-              </a:spcBef>
-              <a:buFont typeface="Arial" panose="020B0604020202020204" pitchFamily="34" charset="0"/>
-              <a:buChar char="•"/>
-              <a:defRPr sz="1800" kern="1200">
-                <a:solidFill>
-                  <a:schemeClr val="tx1"/>
-                </a:solidFill>
-                <a:latin typeface="+mn-lt"/>
-                <a:ea typeface="+mn-ea"/>
-                <a:cs typeface="+mn-cs"/>
-              </a:defRPr>
-            </a:lvl7pPr>
-            <a:lvl8pPr marL="3429000" indent="-228600" algn="l" defTabSz="914400" rtl="0" eaLnBrk="1" latinLnBrk="0" hangingPunct="1">
-              <a:lnSpc>
-                <a:spcPct val="90000"/>
-              </a:lnSpc>
-              <a:spcBef>
-                <a:spcPts val="500"/>
-              </a:spcBef>
-              <a:buFont typeface="Arial" panose="020B0604020202020204" pitchFamily="34" charset="0"/>
-              <a:buChar char="•"/>
-              <a:defRPr sz="1800" kern="1200">
-                <a:solidFill>
-                  <a:schemeClr val="tx1"/>
-                </a:solidFill>
-                <a:latin typeface="+mn-lt"/>
-                <a:ea typeface="+mn-ea"/>
-                <a:cs typeface="+mn-cs"/>
-              </a:defRPr>
-            </a:lvl8pPr>
-            <a:lvl9pPr marL="3886200" indent="-228600" algn="l" defTabSz="914400" rtl="0" eaLnBrk="1" latinLnBrk="0" hangingPunct="1">
-              <a:lnSpc>
-                <a:spcPct val="90000"/>
-              </a:lnSpc>
-              <a:spcBef>
-                <a:spcPts val="500"/>
-              </a:spcBef>
-              <a:buFont typeface="Arial" panose="020B0604020202020204" pitchFamily="34" charset="0"/>
-              <a:buChar char="•"/>
-              <a:defRPr sz="1800" kern="1200">
-                <a:solidFill>
-                  <a:schemeClr val="tx1"/>
-                </a:solidFill>
-                <a:latin typeface="+mn-lt"/>
-                <a:ea typeface="+mn-ea"/>
-                <a:cs typeface="+mn-cs"/>
-              </a:defRPr>
-            </a:lvl9pPr>
-          </a:lstStyle>
-          <a:p>
-            <a:pPr marL="0" indent="0">
-              <a:buFont typeface="Arial" panose="020B0604020202020204" pitchFamily="34" charset="0"/>
-              <a:buNone/>
-            </a:pPr>
-            <a:r>
-              <a:rPr lang="en-NZ" noProof="0" dirty="0"/>
-              <a:t>Alternative 2</a:t>
-            </a:r>
-          </a:p>
-          <a:p>
-            <a:pPr marL="0" indent="0">
-              <a:buFont typeface="Arial" panose="020B0604020202020204" pitchFamily="34" charset="0"/>
-              <a:buNone/>
-            </a:pPr>
-            <a:r>
-              <a:rPr lang="en-NZ" dirty="0"/>
-              <a:t>Arduino r3</a:t>
-            </a:r>
-            <a:r>
-              <a:rPr lang="en-NZ" noProof="0" dirty="0"/>
-              <a:t> </a:t>
-            </a:r>
           </a:p>
         </p:txBody>
       </p:sp>
     </p:spTree>
     <p:extLst>
       <p:ext uri="{BB962C8B-B14F-4D97-AF65-F5344CB8AC3E}">
-        <p14:creationId xmlns:p14="http://schemas.microsoft.com/office/powerpoint/2010/main" val="4188302786"/>
+        <p14:creationId xmlns:p14="http://schemas.microsoft.com/office/powerpoint/2010/main" val="3440362149"/>
       </p:ext>
     </p:extLst>
   </p:cSld>
@@ -4923,1364 +3973,6 @@
 </file>
 
 <file path=ppt/slides/slide11.xml><?xml version="1.0" encoding="utf-8"?>
-<p:sld xmlns:a="http://schemas.openxmlformats.org/drawingml/2006/main" xmlns:r="http://schemas.openxmlformats.org/officeDocument/2006/relationships" xmlns:p="http://schemas.openxmlformats.org/presentationml/2006/main">
-  <p:cSld>
-    <p:spTree>
-      <p:nvGrpSpPr>
-        <p:cNvPr id="1" name="">
-          <a:extLst>
-            <a:ext uri="{FF2B5EF4-FFF2-40B4-BE49-F238E27FC236}">
-              <a16:creationId xmlns:a16="http://schemas.microsoft.com/office/drawing/2014/main" id="{8FD7FDEA-E680-2E00-410E-88328EBB197A}"/>
-            </a:ext>
-          </a:extLst>
-        </p:cNvPr>
-        <p:cNvGrpSpPr/>
-        <p:nvPr/>
-      </p:nvGrpSpPr>
-      <p:grpSpPr>
-        <a:xfrm>
-          <a:off x="0" y="0"/>
-          <a:ext cx="0" cy="0"/>
-          <a:chOff x="0" y="0"/>
-          <a:chExt cx="0" cy="0"/>
-        </a:xfrm>
-      </p:grpSpPr>
-      <p:sp>
-        <p:nvSpPr>
-          <p:cNvPr id="2" name="Title 1">
-            <a:extLst>
-              <a:ext uri="{FF2B5EF4-FFF2-40B4-BE49-F238E27FC236}">
-                <a16:creationId xmlns:a16="http://schemas.microsoft.com/office/drawing/2014/main" id="{989EA619-26CF-A135-A2F3-C9429F3013EA}"/>
-              </a:ext>
-            </a:extLst>
-          </p:cNvPr>
-          <p:cNvSpPr>
-            <a:spLocks noGrp="1"/>
-          </p:cNvSpPr>
-          <p:nvPr>
-            <p:ph type="title"/>
-          </p:nvPr>
-        </p:nvSpPr>
-        <p:spPr>
-          <a:solidFill>
-            <a:srgbClr val="FF5050"/>
-          </a:solidFill>
-        </p:spPr>
-        <p:txBody>
-          <a:bodyPr/>
-          <a:lstStyle/>
-          <a:p>
-            <a:r>
-              <a:rPr lang="en-NZ" noProof="0" dirty="0"/>
-              <a:t>Component/System 1</a:t>
-            </a:r>
-          </a:p>
-        </p:txBody>
-      </p:sp>
-      <p:sp>
-        <p:nvSpPr>
-          <p:cNvPr id="3" name="Content Placeholder 2">
-            <a:extLst>
-              <a:ext uri="{FF2B5EF4-FFF2-40B4-BE49-F238E27FC236}">
-                <a16:creationId xmlns:a16="http://schemas.microsoft.com/office/drawing/2014/main" id="{109C2FE0-6991-DDAF-C4F7-B3415EC34474}"/>
-              </a:ext>
-            </a:extLst>
-          </p:cNvPr>
-          <p:cNvSpPr>
-            <a:spLocks noGrp="1"/>
-          </p:cNvSpPr>
-          <p:nvPr>
-            <p:ph idx="1"/>
-          </p:nvPr>
-        </p:nvSpPr>
-        <p:spPr>
-          <a:xfrm>
-            <a:off x="943897" y="1877091"/>
-            <a:ext cx="10225548" cy="1623193"/>
-          </a:xfrm>
-          <a:solidFill>
-            <a:srgbClr val="FFCCCC"/>
-          </a:solidFill>
-        </p:spPr>
-        <p:txBody>
-          <a:bodyPr>
-            <a:normAutofit fontScale="77500" lnSpcReduction="20000"/>
-          </a:bodyPr>
-          <a:lstStyle/>
-          <a:p>
-            <a:pPr marL="0" indent="0">
-              <a:buNone/>
-            </a:pPr>
-            <a:r>
-              <a:rPr lang="en-NZ" noProof="0" dirty="0"/>
-              <a:t>Explanation of component</a:t>
-            </a:r>
-          </a:p>
-          <a:p>
-            <a:pPr marL="0" indent="0">
-              <a:buNone/>
-            </a:pPr>
-            <a:r>
-              <a:rPr lang="en-US" dirty="0"/>
-              <a:t>The Arduino UNO R4 </a:t>
-            </a:r>
-            <a:r>
-              <a:rPr lang="en-US" dirty="0" err="1"/>
-              <a:t>WiFi</a:t>
-            </a:r>
-            <a:r>
-              <a:rPr lang="en-US" dirty="0"/>
-              <a:t> is a powerful 32-bit development board that combines a Renesas RA4M1 ARM Cortex-M4 processor with an </a:t>
-            </a:r>
-            <a:r>
-              <a:rPr lang="en-US" dirty="0" err="1"/>
-              <a:t>Espressif</a:t>
-            </a:r>
-            <a:r>
-              <a:rPr lang="en-US" dirty="0"/>
-              <a:t> ESP32-S3 module for Wi-Fi and Bluetooth connectivity. It retains the classic UNO footprint and 5V logic, making it ideal for both beginners and advanced IoT projects.</a:t>
-            </a:r>
-            <a:endParaRPr lang="en-NZ" noProof="0" dirty="0"/>
-          </a:p>
-        </p:txBody>
-      </p:sp>
-      <p:sp>
-        <p:nvSpPr>
-          <p:cNvPr id="4" name="Content Placeholder 2">
-            <a:extLst>
-              <a:ext uri="{FF2B5EF4-FFF2-40B4-BE49-F238E27FC236}">
-                <a16:creationId xmlns:a16="http://schemas.microsoft.com/office/drawing/2014/main" id="{48BF1EF6-F8B8-8CF4-9169-05F15F67B902}"/>
-              </a:ext>
-            </a:extLst>
-          </p:cNvPr>
-          <p:cNvSpPr txBox="1">
-            <a:spLocks/>
-          </p:cNvSpPr>
-          <p:nvPr/>
-        </p:nvSpPr>
-        <p:spPr>
-          <a:xfrm>
-            <a:off x="943897" y="3500284"/>
-            <a:ext cx="5471651" cy="3171313"/>
-          </a:xfrm>
-          <a:prstGeom prst="rect">
-            <a:avLst/>
-          </a:prstGeom>
-          <a:solidFill>
-            <a:srgbClr val="FFCCCC"/>
-          </a:solidFill>
-        </p:spPr>
-        <p:txBody>
-          <a:bodyPr vert="horz" lIns="91440" tIns="45720" rIns="91440" bIns="45720" rtlCol="0">
-            <a:normAutofit/>
-          </a:bodyPr>
-          <a:lstStyle>
-            <a:lvl1pPr marL="228600" indent="-228600" algn="l" defTabSz="914400" rtl="0" eaLnBrk="1" latinLnBrk="0" hangingPunct="1">
-              <a:lnSpc>
-                <a:spcPct val="90000"/>
-              </a:lnSpc>
-              <a:spcBef>
-                <a:spcPts val="1000"/>
-              </a:spcBef>
-              <a:buFont typeface="Arial" panose="020B0604020202020204" pitchFamily="34" charset="0"/>
-              <a:buChar char="•"/>
-              <a:defRPr sz="2800" kern="1200">
-                <a:solidFill>
-                  <a:schemeClr val="tx1"/>
-                </a:solidFill>
-                <a:latin typeface="+mn-lt"/>
-                <a:ea typeface="+mn-ea"/>
-                <a:cs typeface="+mn-cs"/>
-              </a:defRPr>
-            </a:lvl1pPr>
-            <a:lvl2pPr marL="685800" indent="-228600" algn="l" defTabSz="914400" rtl="0" eaLnBrk="1" latinLnBrk="0" hangingPunct="1">
-              <a:lnSpc>
-                <a:spcPct val="90000"/>
-              </a:lnSpc>
-              <a:spcBef>
-                <a:spcPts val="500"/>
-              </a:spcBef>
-              <a:buFont typeface="Arial" panose="020B0604020202020204" pitchFamily="34" charset="0"/>
-              <a:buChar char="•"/>
-              <a:defRPr sz="2400" kern="1200">
-                <a:solidFill>
-                  <a:schemeClr val="tx1"/>
-                </a:solidFill>
-                <a:latin typeface="+mn-lt"/>
-                <a:ea typeface="+mn-ea"/>
-                <a:cs typeface="+mn-cs"/>
-              </a:defRPr>
-            </a:lvl2pPr>
-            <a:lvl3pPr marL="1143000" indent="-228600" algn="l" defTabSz="914400" rtl="0" eaLnBrk="1" latinLnBrk="0" hangingPunct="1">
-              <a:lnSpc>
-                <a:spcPct val="90000"/>
-              </a:lnSpc>
-              <a:spcBef>
-                <a:spcPts val="500"/>
-              </a:spcBef>
-              <a:buFont typeface="Arial" panose="020B0604020202020204" pitchFamily="34" charset="0"/>
-              <a:buChar char="•"/>
-              <a:defRPr sz="2000" kern="1200">
-                <a:solidFill>
-                  <a:schemeClr val="tx1"/>
-                </a:solidFill>
-                <a:latin typeface="+mn-lt"/>
-                <a:ea typeface="+mn-ea"/>
-                <a:cs typeface="+mn-cs"/>
-              </a:defRPr>
-            </a:lvl3pPr>
-            <a:lvl4pPr marL="1600200" indent="-228600" algn="l" defTabSz="914400" rtl="0" eaLnBrk="1" latinLnBrk="0" hangingPunct="1">
-              <a:lnSpc>
-                <a:spcPct val="90000"/>
-              </a:lnSpc>
-              <a:spcBef>
-                <a:spcPts val="500"/>
-              </a:spcBef>
-              <a:buFont typeface="Arial" panose="020B0604020202020204" pitchFamily="34" charset="0"/>
-              <a:buChar char="•"/>
-              <a:defRPr sz="1800" kern="1200">
-                <a:solidFill>
-                  <a:schemeClr val="tx1"/>
-                </a:solidFill>
-                <a:latin typeface="+mn-lt"/>
-                <a:ea typeface="+mn-ea"/>
-                <a:cs typeface="+mn-cs"/>
-              </a:defRPr>
-            </a:lvl4pPr>
-            <a:lvl5pPr marL="2057400" indent="-228600" algn="l" defTabSz="914400" rtl="0" eaLnBrk="1" latinLnBrk="0" hangingPunct="1">
-              <a:lnSpc>
-                <a:spcPct val="90000"/>
-              </a:lnSpc>
-              <a:spcBef>
-                <a:spcPts val="500"/>
-              </a:spcBef>
-              <a:buFont typeface="Arial" panose="020B0604020202020204" pitchFamily="34" charset="0"/>
-              <a:buChar char="•"/>
-              <a:defRPr sz="1800" kern="1200">
-                <a:solidFill>
-                  <a:schemeClr val="tx1"/>
-                </a:solidFill>
-                <a:latin typeface="+mn-lt"/>
-                <a:ea typeface="+mn-ea"/>
-                <a:cs typeface="+mn-cs"/>
-              </a:defRPr>
-            </a:lvl5pPr>
-            <a:lvl6pPr marL="2514600" indent="-228600" algn="l" defTabSz="914400" rtl="0" eaLnBrk="1" latinLnBrk="0" hangingPunct="1">
-              <a:lnSpc>
-                <a:spcPct val="90000"/>
-              </a:lnSpc>
-              <a:spcBef>
-                <a:spcPts val="500"/>
-              </a:spcBef>
-              <a:buFont typeface="Arial" panose="020B0604020202020204" pitchFamily="34" charset="0"/>
-              <a:buChar char="•"/>
-              <a:defRPr sz="1800" kern="1200">
-                <a:solidFill>
-                  <a:schemeClr val="tx1"/>
-                </a:solidFill>
-                <a:latin typeface="+mn-lt"/>
-                <a:ea typeface="+mn-ea"/>
-                <a:cs typeface="+mn-cs"/>
-              </a:defRPr>
-            </a:lvl6pPr>
-            <a:lvl7pPr marL="2971800" indent="-228600" algn="l" defTabSz="914400" rtl="0" eaLnBrk="1" latinLnBrk="0" hangingPunct="1">
-              <a:lnSpc>
-                <a:spcPct val="90000"/>
-              </a:lnSpc>
-              <a:spcBef>
-                <a:spcPts val="500"/>
-              </a:spcBef>
-              <a:buFont typeface="Arial" panose="020B0604020202020204" pitchFamily="34" charset="0"/>
-              <a:buChar char="•"/>
-              <a:defRPr sz="1800" kern="1200">
-                <a:solidFill>
-                  <a:schemeClr val="tx1"/>
-                </a:solidFill>
-                <a:latin typeface="+mn-lt"/>
-                <a:ea typeface="+mn-ea"/>
-                <a:cs typeface="+mn-cs"/>
-              </a:defRPr>
-            </a:lvl7pPr>
-            <a:lvl8pPr marL="3429000" indent="-228600" algn="l" defTabSz="914400" rtl="0" eaLnBrk="1" latinLnBrk="0" hangingPunct="1">
-              <a:lnSpc>
-                <a:spcPct val="90000"/>
-              </a:lnSpc>
-              <a:spcBef>
-                <a:spcPts val="500"/>
-              </a:spcBef>
-              <a:buFont typeface="Arial" panose="020B0604020202020204" pitchFamily="34" charset="0"/>
-              <a:buChar char="•"/>
-              <a:defRPr sz="1800" kern="1200">
-                <a:solidFill>
-                  <a:schemeClr val="tx1"/>
-                </a:solidFill>
-                <a:latin typeface="+mn-lt"/>
-                <a:ea typeface="+mn-ea"/>
-                <a:cs typeface="+mn-cs"/>
-              </a:defRPr>
-            </a:lvl8pPr>
-            <a:lvl9pPr marL="3886200" indent="-228600" algn="l" defTabSz="914400" rtl="0" eaLnBrk="1" latinLnBrk="0" hangingPunct="1">
-              <a:lnSpc>
-                <a:spcPct val="90000"/>
-              </a:lnSpc>
-              <a:spcBef>
-                <a:spcPts val="500"/>
-              </a:spcBef>
-              <a:buFont typeface="Arial" panose="020B0604020202020204" pitchFamily="34" charset="0"/>
-              <a:buChar char="•"/>
-              <a:defRPr sz="1800" kern="1200">
-                <a:solidFill>
-                  <a:schemeClr val="tx1"/>
-                </a:solidFill>
-                <a:latin typeface="+mn-lt"/>
-                <a:ea typeface="+mn-ea"/>
-                <a:cs typeface="+mn-cs"/>
-              </a:defRPr>
-            </a:lvl9pPr>
-          </a:lstStyle>
-          <a:p>
-            <a:pPr marL="0" indent="0">
-              <a:buFont typeface="Arial" panose="020B0604020202020204" pitchFamily="34" charset="0"/>
-              <a:buNone/>
-            </a:pPr>
-            <a:r>
-              <a:rPr lang="en-NZ" noProof="0" dirty="0"/>
-              <a:t>Component Picture</a:t>
-            </a:r>
-          </a:p>
-          <a:p>
-            <a:pPr marL="0" indent="0">
-              <a:buFont typeface="Arial" panose="020B0604020202020204" pitchFamily="34" charset="0"/>
-              <a:buNone/>
-            </a:pPr>
-            <a:endParaRPr lang="en-NZ" noProof="0" dirty="0"/>
-          </a:p>
-        </p:txBody>
-      </p:sp>
-      <p:sp>
-        <p:nvSpPr>
-          <p:cNvPr id="5" name="Content Placeholder 2">
-            <a:extLst>
-              <a:ext uri="{FF2B5EF4-FFF2-40B4-BE49-F238E27FC236}">
-                <a16:creationId xmlns:a16="http://schemas.microsoft.com/office/drawing/2014/main" id="{F10EB81D-A986-42AD-847E-FF3A1F656CEB}"/>
-              </a:ext>
-            </a:extLst>
-          </p:cNvPr>
-          <p:cNvSpPr txBox="1">
-            <a:spLocks/>
-          </p:cNvSpPr>
-          <p:nvPr/>
-        </p:nvSpPr>
-        <p:spPr>
-          <a:xfrm>
-            <a:off x="6415548" y="3500283"/>
-            <a:ext cx="4753897" cy="3171313"/>
-          </a:xfrm>
-          <a:prstGeom prst="rect">
-            <a:avLst/>
-          </a:prstGeom>
-          <a:solidFill>
-            <a:srgbClr val="FFCCCC"/>
-          </a:solidFill>
-        </p:spPr>
-        <p:txBody>
-          <a:bodyPr vert="horz" lIns="91440" tIns="45720" rIns="91440" bIns="45720" rtlCol="0">
-            <a:normAutofit/>
-          </a:bodyPr>
-          <a:lstStyle>
-            <a:lvl1pPr marL="228600" indent="-228600" algn="l" defTabSz="914400" rtl="0" eaLnBrk="1" latinLnBrk="0" hangingPunct="1">
-              <a:lnSpc>
-                <a:spcPct val="90000"/>
-              </a:lnSpc>
-              <a:spcBef>
-                <a:spcPts val="1000"/>
-              </a:spcBef>
-              <a:buFont typeface="Arial" panose="020B0604020202020204" pitchFamily="34" charset="0"/>
-              <a:buChar char="•"/>
-              <a:defRPr sz="2800" kern="1200">
-                <a:solidFill>
-                  <a:schemeClr val="tx1"/>
-                </a:solidFill>
-                <a:latin typeface="+mn-lt"/>
-                <a:ea typeface="+mn-ea"/>
-                <a:cs typeface="+mn-cs"/>
-              </a:defRPr>
-            </a:lvl1pPr>
-            <a:lvl2pPr marL="685800" indent="-228600" algn="l" defTabSz="914400" rtl="0" eaLnBrk="1" latinLnBrk="0" hangingPunct="1">
-              <a:lnSpc>
-                <a:spcPct val="90000"/>
-              </a:lnSpc>
-              <a:spcBef>
-                <a:spcPts val="500"/>
-              </a:spcBef>
-              <a:buFont typeface="Arial" panose="020B0604020202020204" pitchFamily="34" charset="0"/>
-              <a:buChar char="•"/>
-              <a:defRPr sz="2400" kern="1200">
-                <a:solidFill>
-                  <a:schemeClr val="tx1"/>
-                </a:solidFill>
-                <a:latin typeface="+mn-lt"/>
-                <a:ea typeface="+mn-ea"/>
-                <a:cs typeface="+mn-cs"/>
-              </a:defRPr>
-            </a:lvl2pPr>
-            <a:lvl3pPr marL="1143000" indent="-228600" algn="l" defTabSz="914400" rtl="0" eaLnBrk="1" latinLnBrk="0" hangingPunct="1">
-              <a:lnSpc>
-                <a:spcPct val="90000"/>
-              </a:lnSpc>
-              <a:spcBef>
-                <a:spcPts val="500"/>
-              </a:spcBef>
-              <a:buFont typeface="Arial" panose="020B0604020202020204" pitchFamily="34" charset="0"/>
-              <a:buChar char="•"/>
-              <a:defRPr sz="2000" kern="1200">
-                <a:solidFill>
-                  <a:schemeClr val="tx1"/>
-                </a:solidFill>
-                <a:latin typeface="+mn-lt"/>
-                <a:ea typeface="+mn-ea"/>
-                <a:cs typeface="+mn-cs"/>
-              </a:defRPr>
-            </a:lvl3pPr>
-            <a:lvl4pPr marL="1600200" indent="-228600" algn="l" defTabSz="914400" rtl="0" eaLnBrk="1" latinLnBrk="0" hangingPunct="1">
-              <a:lnSpc>
-                <a:spcPct val="90000"/>
-              </a:lnSpc>
-              <a:spcBef>
-                <a:spcPts val="500"/>
-              </a:spcBef>
-              <a:buFont typeface="Arial" panose="020B0604020202020204" pitchFamily="34" charset="0"/>
-              <a:buChar char="•"/>
-              <a:defRPr sz="1800" kern="1200">
-                <a:solidFill>
-                  <a:schemeClr val="tx1"/>
-                </a:solidFill>
-                <a:latin typeface="+mn-lt"/>
-                <a:ea typeface="+mn-ea"/>
-                <a:cs typeface="+mn-cs"/>
-              </a:defRPr>
-            </a:lvl4pPr>
-            <a:lvl5pPr marL="2057400" indent="-228600" algn="l" defTabSz="914400" rtl="0" eaLnBrk="1" latinLnBrk="0" hangingPunct="1">
-              <a:lnSpc>
-                <a:spcPct val="90000"/>
-              </a:lnSpc>
-              <a:spcBef>
-                <a:spcPts val="500"/>
-              </a:spcBef>
-              <a:buFont typeface="Arial" panose="020B0604020202020204" pitchFamily="34" charset="0"/>
-              <a:buChar char="•"/>
-              <a:defRPr sz="1800" kern="1200">
-                <a:solidFill>
-                  <a:schemeClr val="tx1"/>
-                </a:solidFill>
-                <a:latin typeface="+mn-lt"/>
-                <a:ea typeface="+mn-ea"/>
-                <a:cs typeface="+mn-cs"/>
-              </a:defRPr>
-            </a:lvl5pPr>
-            <a:lvl6pPr marL="2514600" indent="-228600" algn="l" defTabSz="914400" rtl="0" eaLnBrk="1" latinLnBrk="0" hangingPunct="1">
-              <a:lnSpc>
-                <a:spcPct val="90000"/>
-              </a:lnSpc>
-              <a:spcBef>
-                <a:spcPts val="500"/>
-              </a:spcBef>
-              <a:buFont typeface="Arial" panose="020B0604020202020204" pitchFamily="34" charset="0"/>
-              <a:buChar char="•"/>
-              <a:defRPr sz="1800" kern="1200">
-                <a:solidFill>
-                  <a:schemeClr val="tx1"/>
-                </a:solidFill>
-                <a:latin typeface="+mn-lt"/>
-                <a:ea typeface="+mn-ea"/>
-                <a:cs typeface="+mn-cs"/>
-              </a:defRPr>
-            </a:lvl6pPr>
-            <a:lvl7pPr marL="2971800" indent="-228600" algn="l" defTabSz="914400" rtl="0" eaLnBrk="1" latinLnBrk="0" hangingPunct="1">
-              <a:lnSpc>
-                <a:spcPct val="90000"/>
-              </a:lnSpc>
-              <a:spcBef>
-                <a:spcPts val="500"/>
-              </a:spcBef>
-              <a:buFont typeface="Arial" panose="020B0604020202020204" pitchFamily="34" charset="0"/>
-              <a:buChar char="•"/>
-              <a:defRPr sz="1800" kern="1200">
-                <a:solidFill>
-                  <a:schemeClr val="tx1"/>
-                </a:solidFill>
-                <a:latin typeface="+mn-lt"/>
-                <a:ea typeface="+mn-ea"/>
-                <a:cs typeface="+mn-cs"/>
-              </a:defRPr>
-            </a:lvl7pPr>
-            <a:lvl8pPr marL="3429000" indent="-228600" algn="l" defTabSz="914400" rtl="0" eaLnBrk="1" latinLnBrk="0" hangingPunct="1">
-              <a:lnSpc>
-                <a:spcPct val="90000"/>
-              </a:lnSpc>
-              <a:spcBef>
-                <a:spcPts val="500"/>
-              </a:spcBef>
-              <a:buFont typeface="Arial" panose="020B0604020202020204" pitchFamily="34" charset="0"/>
-              <a:buChar char="•"/>
-              <a:defRPr sz="1800" kern="1200">
-                <a:solidFill>
-                  <a:schemeClr val="tx1"/>
-                </a:solidFill>
-                <a:latin typeface="+mn-lt"/>
-                <a:ea typeface="+mn-ea"/>
-                <a:cs typeface="+mn-cs"/>
-              </a:defRPr>
-            </a:lvl8pPr>
-            <a:lvl9pPr marL="3886200" indent="-228600" algn="l" defTabSz="914400" rtl="0" eaLnBrk="1" latinLnBrk="0" hangingPunct="1">
-              <a:lnSpc>
-                <a:spcPct val="90000"/>
-              </a:lnSpc>
-              <a:spcBef>
-                <a:spcPts val="500"/>
-              </a:spcBef>
-              <a:buFont typeface="Arial" panose="020B0604020202020204" pitchFamily="34" charset="0"/>
-              <a:buChar char="•"/>
-              <a:defRPr sz="1800" kern="1200">
-                <a:solidFill>
-                  <a:schemeClr val="tx1"/>
-                </a:solidFill>
-                <a:latin typeface="+mn-lt"/>
-                <a:ea typeface="+mn-ea"/>
-                <a:cs typeface="+mn-cs"/>
-              </a:defRPr>
-            </a:lvl9pPr>
-          </a:lstStyle>
-          <a:p>
-            <a:pPr marL="0" indent="0">
-              <a:buFont typeface="Arial" panose="020B0604020202020204" pitchFamily="34" charset="0"/>
-              <a:buNone/>
-            </a:pPr>
-            <a:r>
-              <a:rPr lang="en-NZ" noProof="0" dirty="0"/>
-              <a:t>Component test log: very easy to control and upload code through a cable but still working on the uploading over </a:t>
-            </a:r>
-            <a:r>
-              <a:rPr lang="en-NZ" noProof="0" dirty="0" err="1"/>
-              <a:t>wifi</a:t>
-            </a:r>
-            <a:r>
-              <a:rPr lang="en-NZ" noProof="0" dirty="0"/>
-              <a:t>.</a:t>
-            </a:r>
-          </a:p>
-          <a:p>
-            <a:pPr marL="0" indent="0">
-              <a:buFont typeface="Arial" panose="020B0604020202020204" pitchFamily="34" charset="0"/>
-              <a:buNone/>
-            </a:pPr>
-            <a:endParaRPr lang="en-NZ" noProof="0" dirty="0"/>
-          </a:p>
-        </p:txBody>
-      </p:sp>
-      <p:pic>
-        <p:nvPicPr>
-          <p:cNvPr id="1026" name="Picture 2" descr="Arduino UNO R4 WiFi - HobbyElectronica">
-            <a:extLst>
-              <a:ext uri="{FF2B5EF4-FFF2-40B4-BE49-F238E27FC236}">
-                <a16:creationId xmlns:a16="http://schemas.microsoft.com/office/drawing/2014/main" id="{F6F76BE5-4844-9D9B-EDC2-816CC06C42C3}"/>
-              </a:ext>
-            </a:extLst>
-          </p:cNvPr>
-          <p:cNvPicPr>
-            <a:picLocks noChangeAspect="1" noChangeArrowheads="1"/>
-          </p:cNvPicPr>
-          <p:nvPr/>
-        </p:nvPicPr>
-        <p:blipFill>
-          <a:blip r:embed="rId3">
-            <a:extLst>
-              <a:ext uri="{28A0092B-C50C-407E-A947-70E740481C1C}">
-                <a14:useLocalDpi xmlns:a14="http://schemas.microsoft.com/office/drawing/2010/main" val="0"/>
-              </a:ext>
-            </a:extLst>
-          </a:blip>
-          <a:srcRect/>
-          <a:stretch>
-            <a:fillRect/>
-          </a:stretch>
-        </p:blipFill>
-        <p:spPr bwMode="auto">
-          <a:xfrm>
-            <a:off x="943897" y="3896865"/>
-            <a:ext cx="2894824" cy="2894824"/>
-          </a:xfrm>
-          <a:prstGeom prst="rect">
-            <a:avLst/>
-          </a:prstGeom>
-          <a:noFill/>
-          <a:extLst>
-            <a:ext uri="{909E8E84-426E-40DD-AFC4-6F175D3DCCD1}">
-              <a14:hiddenFill xmlns:a14="http://schemas.microsoft.com/office/drawing/2010/main">
-                <a:solidFill>
-                  <a:srgbClr val="FFFFFF"/>
-                </a:solidFill>
-              </a14:hiddenFill>
-            </a:ext>
-          </a:extLst>
-        </p:spPr>
-      </p:pic>
-    </p:spTree>
-    <p:extLst>
-      <p:ext uri="{BB962C8B-B14F-4D97-AF65-F5344CB8AC3E}">
-        <p14:creationId xmlns:p14="http://schemas.microsoft.com/office/powerpoint/2010/main" val="3917241819"/>
-      </p:ext>
-    </p:extLst>
-  </p:cSld>
-  <p:clrMapOvr>
-    <a:masterClrMapping/>
-  </p:clrMapOvr>
-  <p:extLst>
-    <p:ext uri="{6950BFC3-D8DA-4A85-94F7-54DA5524770B}">
-      <p188:commentRel xmlns:p188="http://schemas.microsoft.com/office/powerpoint/2018/8/main" r:id="rId2"/>
-    </p:ext>
-  </p:extLst>
-</p:sld>
-</file>
-
-<file path=ppt/slides/slide12.xml><?xml version="1.0" encoding="utf-8"?>
-<p:sld xmlns:a="http://schemas.openxmlformats.org/drawingml/2006/main" xmlns:r="http://schemas.openxmlformats.org/officeDocument/2006/relationships" xmlns:p="http://schemas.openxmlformats.org/presentationml/2006/main">
-  <p:cSld>
-    <p:spTree>
-      <p:nvGrpSpPr>
-        <p:cNvPr id="1" name="">
-          <a:extLst>
-            <a:ext uri="{FF2B5EF4-FFF2-40B4-BE49-F238E27FC236}">
-              <a16:creationId xmlns:a16="http://schemas.microsoft.com/office/drawing/2014/main" id="{AC9AB4D7-9EFD-2EDD-86C5-7124EF8D89CB}"/>
-            </a:ext>
-          </a:extLst>
-        </p:cNvPr>
-        <p:cNvGrpSpPr/>
-        <p:nvPr/>
-      </p:nvGrpSpPr>
-      <p:grpSpPr>
-        <a:xfrm>
-          <a:off x="0" y="0"/>
-          <a:ext cx="0" cy="0"/>
-          <a:chOff x="0" y="0"/>
-          <a:chExt cx="0" cy="0"/>
-        </a:xfrm>
-      </p:grpSpPr>
-      <p:sp>
-        <p:nvSpPr>
-          <p:cNvPr id="2" name="Title 1">
-            <a:extLst>
-              <a:ext uri="{FF2B5EF4-FFF2-40B4-BE49-F238E27FC236}">
-                <a16:creationId xmlns:a16="http://schemas.microsoft.com/office/drawing/2014/main" id="{11145C90-B6D3-BDE8-E1D1-5BE0CEFD46B4}"/>
-              </a:ext>
-            </a:extLst>
-          </p:cNvPr>
-          <p:cNvSpPr>
-            <a:spLocks noGrp="1"/>
-          </p:cNvSpPr>
-          <p:nvPr>
-            <p:ph type="title"/>
-          </p:nvPr>
-        </p:nvSpPr>
-        <p:spPr>
-          <a:solidFill>
-            <a:srgbClr val="FFFFCC"/>
-          </a:solidFill>
-        </p:spPr>
-        <p:txBody>
-          <a:bodyPr/>
-          <a:lstStyle/>
-          <a:p>
-            <a:r>
-              <a:rPr lang="en-NZ" noProof="0" dirty="0"/>
-              <a:t>Reliability Testing</a:t>
-            </a:r>
-          </a:p>
-        </p:txBody>
-      </p:sp>
-      <p:sp>
-        <p:nvSpPr>
-          <p:cNvPr id="5" name="Content Placeholder 2">
-            <a:extLst>
-              <a:ext uri="{FF2B5EF4-FFF2-40B4-BE49-F238E27FC236}">
-                <a16:creationId xmlns:a16="http://schemas.microsoft.com/office/drawing/2014/main" id="{50C57F65-7853-E45D-CA58-31BCC9DE7B02}"/>
-              </a:ext>
-            </a:extLst>
-          </p:cNvPr>
-          <p:cNvSpPr txBox="1">
-            <a:spLocks/>
-          </p:cNvSpPr>
-          <p:nvPr/>
-        </p:nvSpPr>
-        <p:spPr>
-          <a:xfrm>
-            <a:off x="983226" y="4869118"/>
-            <a:ext cx="10225548" cy="1623757"/>
-          </a:xfrm>
-          <a:prstGeom prst="rect">
-            <a:avLst/>
-          </a:prstGeom>
-          <a:solidFill>
-            <a:srgbClr val="FFFFCC"/>
-          </a:solidFill>
-        </p:spPr>
-        <p:txBody>
-          <a:bodyPr vert="horz" lIns="91440" tIns="45720" rIns="91440" bIns="45720" rtlCol="0">
-            <a:normAutofit fontScale="70000" lnSpcReduction="20000"/>
-          </a:bodyPr>
-          <a:lstStyle>
-            <a:lvl1pPr marL="228600" indent="-228600" algn="l" defTabSz="914400" rtl="0" eaLnBrk="1" latinLnBrk="0" hangingPunct="1">
-              <a:lnSpc>
-                <a:spcPct val="90000"/>
-              </a:lnSpc>
-              <a:spcBef>
-                <a:spcPts val="1000"/>
-              </a:spcBef>
-              <a:buFont typeface="Arial" panose="020B0604020202020204" pitchFamily="34" charset="0"/>
-              <a:buChar char="•"/>
-              <a:defRPr sz="2800" kern="1200">
-                <a:solidFill>
-                  <a:schemeClr val="tx1"/>
-                </a:solidFill>
-                <a:latin typeface="+mn-lt"/>
-                <a:ea typeface="+mn-ea"/>
-                <a:cs typeface="+mn-cs"/>
-              </a:defRPr>
-            </a:lvl1pPr>
-            <a:lvl2pPr marL="685800" indent="-228600" algn="l" defTabSz="914400" rtl="0" eaLnBrk="1" latinLnBrk="0" hangingPunct="1">
-              <a:lnSpc>
-                <a:spcPct val="90000"/>
-              </a:lnSpc>
-              <a:spcBef>
-                <a:spcPts val="500"/>
-              </a:spcBef>
-              <a:buFont typeface="Arial" panose="020B0604020202020204" pitchFamily="34" charset="0"/>
-              <a:buChar char="•"/>
-              <a:defRPr sz="2400" kern="1200">
-                <a:solidFill>
-                  <a:schemeClr val="tx1"/>
-                </a:solidFill>
-                <a:latin typeface="+mn-lt"/>
-                <a:ea typeface="+mn-ea"/>
-                <a:cs typeface="+mn-cs"/>
-              </a:defRPr>
-            </a:lvl2pPr>
-            <a:lvl3pPr marL="1143000" indent="-228600" algn="l" defTabSz="914400" rtl="0" eaLnBrk="1" latinLnBrk="0" hangingPunct="1">
-              <a:lnSpc>
-                <a:spcPct val="90000"/>
-              </a:lnSpc>
-              <a:spcBef>
-                <a:spcPts val="500"/>
-              </a:spcBef>
-              <a:buFont typeface="Arial" panose="020B0604020202020204" pitchFamily="34" charset="0"/>
-              <a:buChar char="•"/>
-              <a:defRPr sz="2000" kern="1200">
-                <a:solidFill>
-                  <a:schemeClr val="tx1"/>
-                </a:solidFill>
-                <a:latin typeface="+mn-lt"/>
-                <a:ea typeface="+mn-ea"/>
-                <a:cs typeface="+mn-cs"/>
-              </a:defRPr>
-            </a:lvl3pPr>
-            <a:lvl4pPr marL="1600200" indent="-228600" algn="l" defTabSz="914400" rtl="0" eaLnBrk="1" latinLnBrk="0" hangingPunct="1">
-              <a:lnSpc>
-                <a:spcPct val="90000"/>
-              </a:lnSpc>
-              <a:spcBef>
-                <a:spcPts val="500"/>
-              </a:spcBef>
-              <a:buFont typeface="Arial" panose="020B0604020202020204" pitchFamily="34" charset="0"/>
-              <a:buChar char="•"/>
-              <a:defRPr sz="1800" kern="1200">
-                <a:solidFill>
-                  <a:schemeClr val="tx1"/>
-                </a:solidFill>
-                <a:latin typeface="+mn-lt"/>
-                <a:ea typeface="+mn-ea"/>
-                <a:cs typeface="+mn-cs"/>
-              </a:defRPr>
-            </a:lvl4pPr>
-            <a:lvl5pPr marL="2057400" indent="-228600" algn="l" defTabSz="914400" rtl="0" eaLnBrk="1" latinLnBrk="0" hangingPunct="1">
-              <a:lnSpc>
-                <a:spcPct val="90000"/>
-              </a:lnSpc>
-              <a:spcBef>
-                <a:spcPts val="500"/>
-              </a:spcBef>
-              <a:buFont typeface="Arial" panose="020B0604020202020204" pitchFamily="34" charset="0"/>
-              <a:buChar char="•"/>
-              <a:defRPr sz="1800" kern="1200">
-                <a:solidFill>
-                  <a:schemeClr val="tx1"/>
-                </a:solidFill>
-                <a:latin typeface="+mn-lt"/>
-                <a:ea typeface="+mn-ea"/>
-                <a:cs typeface="+mn-cs"/>
-              </a:defRPr>
-            </a:lvl5pPr>
-            <a:lvl6pPr marL="2514600" indent="-228600" algn="l" defTabSz="914400" rtl="0" eaLnBrk="1" latinLnBrk="0" hangingPunct="1">
-              <a:lnSpc>
-                <a:spcPct val="90000"/>
-              </a:lnSpc>
-              <a:spcBef>
-                <a:spcPts val="500"/>
-              </a:spcBef>
-              <a:buFont typeface="Arial" panose="020B0604020202020204" pitchFamily="34" charset="0"/>
-              <a:buChar char="•"/>
-              <a:defRPr sz="1800" kern="1200">
-                <a:solidFill>
-                  <a:schemeClr val="tx1"/>
-                </a:solidFill>
-                <a:latin typeface="+mn-lt"/>
-                <a:ea typeface="+mn-ea"/>
-                <a:cs typeface="+mn-cs"/>
-              </a:defRPr>
-            </a:lvl6pPr>
-            <a:lvl7pPr marL="2971800" indent="-228600" algn="l" defTabSz="914400" rtl="0" eaLnBrk="1" latinLnBrk="0" hangingPunct="1">
-              <a:lnSpc>
-                <a:spcPct val="90000"/>
-              </a:lnSpc>
-              <a:spcBef>
-                <a:spcPts val="500"/>
-              </a:spcBef>
-              <a:buFont typeface="Arial" panose="020B0604020202020204" pitchFamily="34" charset="0"/>
-              <a:buChar char="•"/>
-              <a:defRPr sz="1800" kern="1200">
-                <a:solidFill>
-                  <a:schemeClr val="tx1"/>
-                </a:solidFill>
-                <a:latin typeface="+mn-lt"/>
-                <a:ea typeface="+mn-ea"/>
-                <a:cs typeface="+mn-cs"/>
-              </a:defRPr>
-            </a:lvl7pPr>
-            <a:lvl8pPr marL="3429000" indent="-228600" algn="l" defTabSz="914400" rtl="0" eaLnBrk="1" latinLnBrk="0" hangingPunct="1">
-              <a:lnSpc>
-                <a:spcPct val="90000"/>
-              </a:lnSpc>
-              <a:spcBef>
-                <a:spcPts val="500"/>
-              </a:spcBef>
-              <a:buFont typeface="Arial" panose="020B0604020202020204" pitchFamily="34" charset="0"/>
-              <a:buChar char="•"/>
-              <a:defRPr sz="1800" kern="1200">
-                <a:solidFill>
-                  <a:schemeClr val="tx1"/>
-                </a:solidFill>
-                <a:latin typeface="+mn-lt"/>
-                <a:ea typeface="+mn-ea"/>
-                <a:cs typeface="+mn-cs"/>
-              </a:defRPr>
-            </a:lvl8pPr>
-            <a:lvl9pPr marL="3886200" indent="-228600" algn="l" defTabSz="914400" rtl="0" eaLnBrk="1" latinLnBrk="0" hangingPunct="1">
-              <a:lnSpc>
-                <a:spcPct val="90000"/>
-              </a:lnSpc>
-              <a:spcBef>
-                <a:spcPts val="500"/>
-              </a:spcBef>
-              <a:buFont typeface="Arial" panose="020B0604020202020204" pitchFamily="34" charset="0"/>
-              <a:buChar char="•"/>
-              <a:defRPr sz="1800" kern="1200">
-                <a:solidFill>
-                  <a:schemeClr val="tx1"/>
-                </a:solidFill>
-                <a:latin typeface="+mn-lt"/>
-                <a:ea typeface="+mn-ea"/>
-                <a:cs typeface="+mn-cs"/>
-              </a:defRPr>
-            </a:lvl9pPr>
-          </a:lstStyle>
-          <a:p>
-            <a:pPr marL="0" indent="0">
-              <a:buFont typeface="Arial" panose="020B0604020202020204" pitchFamily="34" charset="0"/>
-              <a:buNone/>
-            </a:pPr>
-            <a:r>
-              <a:rPr lang="en-NZ" noProof="0" dirty="0"/>
-              <a:t>Analyse notes from testing and note changes to be made: through feedback </a:t>
-            </a:r>
-            <a:r>
-              <a:rPr lang="en-NZ" noProof="0" dirty="0" err="1"/>
-              <a:t>ive</a:t>
-            </a:r>
-            <a:r>
-              <a:rPr lang="en-NZ" noProof="0" dirty="0"/>
-              <a:t> found </a:t>
-            </a:r>
-            <a:r>
-              <a:rPr lang="en-NZ" noProof="0" dirty="0" err="1"/>
-              <a:t>tha</a:t>
-            </a:r>
-            <a:r>
-              <a:rPr lang="en-NZ" dirty="0"/>
-              <a:t>t incorporating a 0.1uf capacitor across the signal and ground wires of the sensors it can smoot the signal out to a very clear and stable signal, adding a 1k </a:t>
-            </a:r>
-            <a:r>
-              <a:rPr lang="en-NZ" dirty="0" err="1"/>
-              <a:t>resisitor</a:t>
-            </a:r>
-            <a:r>
-              <a:rPr lang="en-NZ" dirty="0"/>
-              <a:t> to the </a:t>
-            </a:r>
-            <a:r>
-              <a:rPr lang="en-NZ" dirty="0" err="1"/>
-              <a:t>leds</a:t>
-            </a:r>
-            <a:r>
-              <a:rPr lang="en-NZ" dirty="0"/>
-              <a:t> can make it slightly dimmer and can also make its longevity of the </a:t>
-            </a:r>
-            <a:r>
-              <a:rPr lang="en-NZ" dirty="0" err="1"/>
-              <a:t>leds</a:t>
-            </a:r>
-            <a:r>
-              <a:rPr lang="en-NZ" dirty="0"/>
-              <a:t> much greater cause the heat is greatly decreased, meaning that the chance of it blowing goes down cause the voltage is decreased that goes to the led itself</a:t>
-            </a:r>
-            <a:endParaRPr lang="en-NZ" noProof="0" dirty="0"/>
-          </a:p>
-        </p:txBody>
-      </p:sp>
-      <p:sp>
-        <p:nvSpPr>
-          <p:cNvPr id="6" name="Content Placeholder 2">
-            <a:extLst>
-              <a:ext uri="{FF2B5EF4-FFF2-40B4-BE49-F238E27FC236}">
-                <a16:creationId xmlns:a16="http://schemas.microsoft.com/office/drawing/2014/main" id="{4FBA3B69-CE34-9320-97C4-16C15C4852CE}"/>
-              </a:ext>
-            </a:extLst>
-          </p:cNvPr>
-          <p:cNvSpPr txBox="1">
-            <a:spLocks/>
-          </p:cNvSpPr>
-          <p:nvPr/>
-        </p:nvSpPr>
-        <p:spPr>
-          <a:xfrm>
-            <a:off x="943898" y="1986117"/>
-            <a:ext cx="10225548" cy="530941"/>
-          </a:xfrm>
-          <a:prstGeom prst="rect">
-            <a:avLst/>
-          </a:prstGeom>
-          <a:solidFill>
-            <a:srgbClr val="FFFFCC"/>
-          </a:solidFill>
-        </p:spPr>
-        <p:txBody>
-          <a:bodyPr vert="horz" lIns="91440" tIns="45720" rIns="91440" bIns="45720" rtlCol="0">
-            <a:normAutofit/>
-          </a:bodyPr>
-          <a:lstStyle>
-            <a:lvl1pPr marL="228600" indent="-228600" algn="l" defTabSz="914400" rtl="0" eaLnBrk="1" latinLnBrk="0" hangingPunct="1">
-              <a:lnSpc>
-                <a:spcPct val="90000"/>
-              </a:lnSpc>
-              <a:spcBef>
-                <a:spcPts val="1000"/>
-              </a:spcBef>
-              <a:buFont typeface="Arial" panose="020B0604020202020204" pitchFamily="34" charset="0"/>
-              <a:buChar char="•"/>
-              <a:defRPr sz="2800" kern="1200">
-                <a:solidFill>
-                  <a:schemeClr val="tx1"/>
-                </a:solidFill>
-                <a:latin typeface="+mn-lt"/>
-                <a:ea typeface="+mn-ea"/>
-                <a:cs typeface="+mn-cs"/>
-              </a:defRPr>
-            </a:lvl1pPr>
-            <a:lvl2pPr marL="685800" indent="-228600" algn="l" defTabSz="914400" rtl="0" eaLnBrk="1" latinLnBrk="0" hangingPunct="1">
-              <a:lnSpc>
-                <a:spcPct val="90000"/>
-              </a:lnSpc>
-              <a:spcBef>
-                <a:spcPts val="500"/>
-              </a:spcBef>
-              <a:buFont typeface="Arial" panose="020B0604020202020204" pitchFamily="34" charset="0"/>
-              <a:buChar char="•"/>
-              <a:defRPr sz="2400" kern="1200">
-                <a:solidFill>
-                  <a:schemeClr val="tx1"/>
-                </a:solidFill>
-                <a:latin typeface="+mn-lt"/>
-                <a:ea typeface="+mn-ea"/>
-                <a:cs typeface="+mn-cs"/>
-              </a:defRPr>
-            </a:lvl2pPr>
-            <a:lvl3pPr marL="1143000" indent="-228600" algn="l" defTabSz="914400" rtl="0" eaLnBrk="1" latinLnBrk="0" hangingPunct="1">
-              <a:lnSpc>
-                <a:spcPct val="90000"/>
-              </a:lnSpc>
-              <a:spcBef>
-                <a:spcPts val="500"/>
-              </a:spcBef>
-              <a:buFont typeface="Arial" panose="020B0604020202020204" pitchFamily="34" charset="0"/>
-              <a:buChar char="•"/>
-              <a:defRPr sz="2000" kern="1200">
-                <a:solidFill>
-                  <a:schemeClr val="tx1"/>
-                </a:solidFill>
-                <a:latin typeface="+mn-lt"/>
-                <a:ea typeface="+mn-ea"/>
-                <a:cs typeface="+mn-cs"/>
-              </a:defRPr>
-            </a:lvl3pPr>
-            <a:lvl4pPr marL="1600200" indent="-228600" algn="l" defTabSz="914400" rtl="0" eaLnBrk="1" latinLnBrk="0" hangingPunct="1">
-              <a:lnSpc>
-                <a:spcPct val="90000"/>
-              </a:lnSpc>
-              <a:spcBef>
-                <a:spcPts val="500"/>
-              </a:spcBef>
-              <a:buFont typeface="Arial" panose="020B0604020202020204" pitchFamily="34" charset="0"/>
-              <a:buChar char="•"/>
-              <a:defRPr sz="1800" kern="1200">
-                <a:solidFill>
-                  <a:schemeClr val="tx1"/>
-                </a:solidFill>
-                <a:latin typeface="+mn-lt"/>
-                <a:ea typeface="+mn-ea"/>
-                <a:cs typeface="+mn-cs"/>
-              </a:defRPr>
-            </a:lvl4pPr>
-            <a:lvl5pPr marL="2057400" indent="-228600" algn="l" defTabSz="914400" rtl="0" eaLnBrk="1" latinLnBrk="0" hangingPunct="1">
-              <a:lnSpc>
-                <a:spcPct val="90000"/>
-              </a:lnSpc>
-              <a:spcBef>
-                <a:spcPts val="500"/>
-              </a:spcBef>
-              <a:buFont typeface="Arial" panose="020B0604020202020204" pitchFamily="34" charset="0"/>
-              <a:buChar char="•"/>
-              <a:defRPr sz="1800" kern="1200">
-                <a:solidFill>
-                  <a:schemeClr val="tx1"/>
-                </a:solidFill>
-                <a:latin typeface="+mn-lt"/>
-                <a:ea typeface="+mn-ea"/>
-                <a:cs typeface="+mn-cs"/>
-              </a:defRPr>
-            </a:lvl5pPr>
-            <a:lvl6pPr marL="2514600" indent="-228600" algn="l" defTabSz="914400" rtl="0" eaLnBrk="1" latinLnBrk="0" hangingPunct="1">
-              <a:lnSpc>
-                <a:spcPct val="90000"/>
-              </a:lnSpc>
-              <a:spcBef>
-                <a:spcPts val="500"/>
-              </a:spcBef>
-              <a:buFont typeface="Arial" panose="020B0604020202020204" pitchFamily="34" charset="0"/>
-              <a:buChar char="•"/>
-              <a:defRPr sz="1800" kern="1200">
-                <a:solidFill>
-                  <a:schemeClr val="tx1"/>
-                </a:solidFill>
-                <a:latin typeface="+mn-lt"/>
-                <a:ea typeface="+mn-ea"/>
-                <a:cs typeface="+mn-cs"/>
-              </a:defRPr>
-            </a:lvl6pPr>
-            <a:lvl7pPr marL="2971800" indent="-228600" algn="l" defTabSz="914400" rtl="0" eaLnBrk="1" latinLnBrk="0" hangingPunct="1">
-              <a:lnSpc>
-                <a:spcPct val="90000"/>
-              </a:lnSpc>
-              <a:spcBef>
-                <a:spcPts val="500"/>
-              </a:spcBef>
-              <a:buFont typeface="Arial" panose="020B0604020202020204" pitchFamily="34" charset="0"/>
-              <a:buChar char="•"/>
-              <a:defRPr sz="1800" kern="1200">
-                <a:solidFill>
-                  <a:schemeClr val="tx1"/>
-                </a:solidFill>
-                <a:latin typeface="+mn-lt"/>
-                <a:ea typeface="+mn-ea"/>
-                <a:cs typeface="+mn-cs"/>
-              </a:defRPr>
-            </a:lvl7pPr>
-            <a:lvl8pPr marL="3429000" indent="-228600" algn="l" defTabSz="914400" rtl="0" eaLnBrk="1" latinLnBrk="0" hangingPunct="1">
-              <a:lnSpc>
-                <a:spcPct val="90000"/>
-              </a:lnSpc>
-              <a:spcBef>
-                <a:spcPts val="500"/>
-              </a:spcBef>
-              <a:buFont typeface="Arial" panose="020B0604020202020204" pitchFamily="34" charset="0"/>
-              <a:buChar char="•"/>
-              <a:defRPr sz="1800" kern="1200">
-                <a:solidFill>
-                  <a:schemeClr val="tx1"/>
-                </a:solidFill>
-                <a:latin typeface="+mn-lt"/>
-                <a:ea typeface="+mn-ea"/>
-                <a:cs typeface="+mn-cs"/>
-              </a:defRPr>
-            </a:lvl8pPr>
-            <a:lvl9pPr marL="3886200" indent="-228600" algn="l" defTabSz="914400" rtl="0" eaLnBrk="1" latinLnBrk="0" hangingPunct="1">
-              <a:lnSpc>
-                <a:spcPct val="90000"/>
-              </a:lnSpc>
-              <a:spcBef>
-                <a:spcPts val="500"/>
-              </a:spcBef>
-              <a:buFont typeface="Arial" panose="020B0604020202020204" pitchFamily="34" charset="0"/>
-              <a:buChar char="•"/>
-              <a:defRPr sz="1800" kern="1200">
-                <a:solidFill>
-                  <a:schemeClr val="tx1"/>
-                </a:solidFill>
-                <a:latin typeface="+mn-lt"/>
-                <a:ea typeface="+mn-ea"/>
-                <a:cs typeface="+mn-cs"/>
-              </a:defRPr>
-            </a:lvl9pPr>
-          </a:lstStyle>
-          <a:p>
-            <a:pPr marL="0" indent="0">
-              <a:buFont typeface="Arial" panose="020B0604020202020204" pitchFamily="34" charset="0"/>
-              <a:buNone/>
-            </a:pPr>
-            <a:r>
-              <a:rPr lang="en-NZ" dirty="0"/>
-              <a:t>Multiple test</a:t>
-            </a:r>
-            <a:endParaRPr lang="en-NZ" noProof="0" dirty="0"/>
-          </a:p>
-        </p:txBody>
-      </p:sp>
-      <p:sp>
-        <p:nvSpPr>
-          <p:cNvPr id="11" name="Content Placeholder 2">
-            <a:extLst>
-              <a:ext uri="{FF2B5EF4-FFF2-40B4-BE49-F238E27FC236}">
-                <a16:creationId xmlns:a16="http://schemas.microsoft.com/office/drawing/2014/main" id="{E3D936A8-CA08-48BB-AA98-F3A8B43B31CF}"/>
-              </a:ext>
-            </a:extLst>
-          </p:cNvPr>
-          <p:cNvSpPr txBox="1">
-            <a:spLocks/>
-          </p:cNvSpPr>
-          <p:nvPr/>
-        </p:nvSpPr>
-        <p:spPr>
-          <a:xfrm>
-            <a:off x="983226" y="2812487"/>
-            <a:ext cx="10225548" cy="1824114"/>
-          </a:xfrm>
-          <a:prstGeom prst="rect">
-            <a:avLst/>
-          </a:prstGeom>
-          <a:solidFill>
-            <a:srgbClr val="FFFFCC"/>
-          </a:solidFill>
-        </p:spPr>
-        <p:txBody>
-          <a:bodyPr vert="horz" lIns="91440" tIns="45720" rIns="91440" bIns="45720" rtlCol="0">
-            <a:normAutofit/>
-          </a:bodyPr>
-          <a:lstStyle>
-            <a:lvl1pPr marL="228600" indent="-228600" algn="l" defTabSz="914400" rtl="0" eaLnBrk="1" latinLnBrk="0" hangingPunct="1">
-              <a:lnSpc>
-                <a:spcPct val="90000"/>
-              </a:lnSpc>
-              <a:spcBef>
-                <a:spcPts val="1000"/>
-              </a:spcBef>
-              <a:buFont typeface="Arial" panose="020B0604020202020204" pitchFamily="34" charset="0"/>
-              <a:buChar char="•"/>
-              <a:defRPr sz="2800" kern="1200">
-                <a:solidFill>
-                  <a:schemeClr val="tx1"/>
-                </a:solidFill>
-                <a:latin typeface="+mn-lt"/>
-                <a:ea typeface="+mn-ea"/>
-                <a:cs typeface="+mn-cs"/>
-              </a:defRPr>
-            </a:lvl1pPr>
-            <a:lvl2pPr marL="685800" indent="-228600" algn="l" defTabSz="914400" rtl="0" eaLnBrk="1" latinLnBrk="0" hangingPunct="1">
-              <a:lnSpc>
-                <a:spcPct val="90000"/>
-              </a:lnSpc>
-              <a:spcBef>
-                <a:spcPts val="500"/>
-              </a:spcBef>
-              <a:buFont typeface="Arial" panose="020B0604020202020204" pitchFamily="34" charset="0"/>
-              <a:buChar char="•"/>
-              <a:defRPr sz="2400" kern="1200">
-                <a:solidFill>
-                  <a:schemeClr val="tx1"/>
-                </a:solidFill>
-                <a:latin typeface="+mn-lt"/>
-                <a:ea typeface="+mn-ea"/>
-                <a:cs typeface="+mn-cs"/>
-              </a:defRPr>
-            </a:lvl2pPr>
-            <a:lvl3pPr marL="1143000" indent="-228600" algn="l" defTabSz="914400" rtl="0" eaLnBrk="1" latinLnBrk="0" hangingPunct="1">
-              <a:lnSpc>
-                <a:spcPct val="90000"/>
-              </a:lnSpc>
-              <a:spcBef>
-                <a:spcPts val="500"/>
-              </a:spcBef>
-              <a:buFont typeface="Arial" panose="020B0604020202020204" pitchFamily="34" charset="0"/>
-              <a:buChar char="•"/>
-              <a:defRPr sz="2000" kern="1200">
-                <a:solidFill>
-                  <a:schemeClr val="tx1"/>
-                </a:solidFill>
-                <a:latin typeface="+mn-lt"/>
-                <a:ea typeface="+mn-ea"/>
-                <a:cs typeface="+mn-cs"/>
-              </a:defRPr>
-            </a:lvl3pPr>
-            <a:lvl4pPr marL="1600200" indent="-228600" algn="l" defTabSz="914400" rtl="0" eaLnBrk="1" latinLnBrk="0" hangingPunct="1">
-              <a:lnSpc>
-                <a:spcPct val="90000"/>
-              </a:lnSpc>
-              <a:spcBef>
-                <a:spcPts val="500"/>
-              </a:spcBef>
-              <a:buFont typeface="Arial" panose="020B0604020202020204" pitchFamily="34" charset="0"/>
-              <a:buChar char="•"/>
-              <a:defRPr sz="1800" kern="1200">
-                <a:solidFill>
-                  <a:schemeClr val="tx1"/>
-                </a:solidFill>
-                <a:latin typeface="+mn-lt"/>
-                <a:ea typeface="+mn-ea"/>
-                <a:cs typeface="+mn-cs"/>
-              </a:defRPr>
-            </a:lvl4pPr>
-            <a:lvl5pPr marL="2057400" indent="-228600" algn="l" defTabSz="914400" rtl="0" eaLnBrk="1" latinLnBrk="0" hangingPunct="1">
-              <a:lnSpc>
-                <a:spcPct val="90000"/>
-              </a:lnSpc>
-              <a:spcBef>
-                <a:spcPts val="500"/>
-              </a:spcBef>
-              <a:buFont typeface="Arial" panose="020B0604020202020204" pitchFamily="34" charset="0"/>
-              <a:buChar char="•"/>
-              <a:defRPr sz="1800" kern="1200">
-                <a:solidFill>
-                  <a:schemeClr val="tx1"/>
-                </a:solidFill>
-                <a:latin typeface="+mn-lt"/>
-                <a:ea typeface="+mn-ea"/>
-                <a:cs typeface="+mn-cs"/>
-              </a:defRPr>
-            </a:lvl5pPr>
-            <a:lvl6pPr marL="2514600" indent="-228600" algn="l" defTabSz="914400" rtl="0" eaLnBrk="1" latinLnBrk="0" hangingPunct="1">
-              <a:lnSpc>
-                <a:spcPct val="90000"/>
-              </a:lnSpc>
-              <a:spcBef>
-                <a:spcPts val="500"/>
-              </a:spcBef>
-              <a:buFont typeface="Arial" panose="020B0604020202020204" pitchFamily="34" charset="0"/>
-              <a:buChar char="•"/>
-              <a:defRPr sz="1800" kern="1200">
-                <a:solidFill>
-                  <a:schemeClr val="tx1"/>
-                </a:solidFill>
-                <a:latin typeface="+mn-lt"/>
-                <a:ea typeface="+mn-ea"/>
-                <a:cs typeface="+mn-cs"/>
-              </a:defRPr>
-            </a:lvl6pPr>
-            <a:lvl7pPr marL="2971800" indent="-228600" algn="l" defTabSz="914400" rtl="0" eaLnBrk="1" latinLnBrk="0" hangingPunct="1">
-              <a:lnSpc>
-                <a:spcPct val="90000"/>
-              </a:lnSpc>
-              <a:spcBef>
-                <a:spcPts val="500"/>
-              </a:spcBef>
-              <a:buFont typeface="Arial" panose="020B0604020202020204" pitchFamily="34" charset="0"/>
-              <a:buChar char="•"/>
-              <a:defRPr sz="1800" kern="1200">
-                <a:solidFill>
-                  <a:schemeClr val="tx1"/>
-                </a:solidFill>
-                <a:latin typeface="+mn-lt"/>
-                <a:ea typeface="+mn-ea"/>
-                <a:cs typeface="+mn-cs"/>
-              </a:defRPr>
-            </a:lvl7pPr>
-            <a:lvl8pPr marL="3429000" indent="-228600" algn="l" defTabSz="914400" rtl="0" eaLnBrk="1" latinLnBrk="0" hangingPunct="1">
-              <a:lnSpc>
-                <a:spcPct val="90000"/>
-              </a:lnSpc>
-              <a:spcBef>
-                <a:spcPts val="500"/>
-              </a:spcBef>
-              <a:buFont typeface="Arial" panose="020B0604020202020204" pitchFamily="34" charset="0"/>
-              <a:buChar char="•"/>
-              <a:defRPr sz="1800" kern="1200">
-                <a:solidFill>
-                  <a:schemeClr val="tx1"/>
-                </a:solidFill>
-                <a:latin typeface="+mn-lt"/>
-                <a:ea typeface="+mn-ea"/>
-                <a:cs typeface="+mn-cs"/>
-              </a:defRPr>
-            </a:lvl8pPr>
-            <a:lvl9pPr marL="3886200" indent="-228600" algn="l" defTabSz="914400" rtl="0" eaLnBrk="1" latinLnBrk="0" hangingPunct="1">
-              <a:lnSpc>
-                <a:spcPct val="90000"/>
-              </a:lnSpc>
-              <a:spcBef>
-                <a:spcPts val="500"/>
-              </a:spcBef>
-              <a:buFont typeface="Arial" panose="020B0604020202020204" pitchFamily="34" charset="0"/>
-              <a:buChar char="•"/>
-              <a:defRPr sz="1800" kern="1200">
-                <a:solidFill>
-                  <a:schemeClr val="tx1"/>
-                </a:solidFill>
-                <a:latin typeface="+mn-lt"/>
-                <a:ea typeface="+mn-ea"/>
-                <a:cs typeface="+mn-cs"/>
-              </a:defRPr>
-            </a:lvl9pPr>
-          </a:lstStyle>
-          <a:p>
-            <a:pPr marL="0" indent="0">
-              <a:buFont typeface="Arial" panose="020B0604020202020204" pitchFamily="34" charset="0"/>
-              <a:buNone/>
-            </a:pPr>
-            <a:r>
-              <a:rPr lang="en-NZ" dirty="0"/>
-              <a:t>Reliability notes from testing: the </a:t>
-            </a:r>
-            <a:r>
-              <a:rPr lang="en-NZ" dirty="0" err="1"/>
-              <a:t>analog</a:t>
-            </a:r>
-            <a:r>
-              <a:rPr lang="en-NZ" dirty="0"/>
-              <a:t> hall sensors have a very jumpy signal </a:t>
-            </a:r>
-            <a:endParaRPr lang="en-NZ" noProof="0" dirty="0"/>
-          </a:p>
-        </p:txBody>
-      </p:sp>
-    </p:spTree>
-    <p:extLst>
-      <p:ext uri="{BB962C8B-B14F-4D97-AF65-F5344CB8AC3E}">
-        <p14:creationId xmlns:p14="http://schemas.microsoft.com/office/powerpoint/2010/main" val="3469156485"/>
-      </p:ext>
-    </p:extLst>
-  </p:cSld>
-  <p:clrMapOvr>
-    <a:masterClrMapping/>
-  </p:clrMapOvr>
-</p:sld>
-</file>
-
-<file path=ppt/slides/slide13.xml><?xml version="1.0" encoding="utf-8"?>
 <p:sld xmlns:a="http://schemas.openxmlformats.org/drawingml/2006/main" xmlns:r="http://schemas.openxmlformats.org/officeDocument/2006/relationships" xmlns:p="http://schemas.openxmlformats.org/presentationml/2006/main">
   <p:cSld>
     <p:spTree>
@@ -6333,13 +4025,8 @@
           <a:p>
             <a:r>
               <a:rPr lang="en-NZ" noProof="0" dirty="0"/>
-              <a:t>Choice of Component/System </a:t>
-            </a:r>
-            <a:r>
-              <a:rPr lang="en-NZ" dirty="0"/>
-              <a:t>2</a:t>
-            </a:r>
-            <a:endParaRPr lang="en-NZ" noProof="0" dirty="0"/>
+              <a:t>Choice of Component/System 1: controller</a:t>
+            </a:r>
           </a:p>
         </p:txBody>
       </p:sp>
@@ -6374,7 +4061,7 @@
         </p:spPr>
         <p:txBody>
           <a:bodyPr vert="horz" lIns="91440" tIns="45720" rIns="91440" bIns="45720" rtlCol="0">
-            <a:normAutofit fontScale="55000" lnSpcReduction="20000"/>
+            <a:normAutofit fontScale="92500"/>
           </a:bodyPr>
           <a:lstStyle>
             <a:lvl1pPr marL="228600" indent="-228600" algn="l" defTabSz="914400" rtl="0" eaLnBrk="1" latinLnBrk="0" hangingPunct="1">
@@ -6552,27 +4239,53 @@
           </a:p>
           <a:p>
             <a:pPr marL="0" indent="0">
+              <a:buFont typeface="Arial" panose="020B0604020202020204" pitchFamily="34" charset="0"/>
               <a:buNone/>
             </a:pPr>
             <a:r>
-              <a:rPr lang="en-US" dirty="0"/>
-              <a:t>The chosen 1.3" I2C OLED display is the optimal choice for this system as it balances pixel-level graphic control (128x64 resolution) with high efficiency, vastly outperforming Alternative 1 (LCD screen) , which is limited to rigid character blocks, requires a high-draw backlight, and offers poor viewing angles. Because OLED pixels are self-emissive, unlit black pixels consume virtually zero power, making it ideal for low-power microcontrollers deployment. Additionally, while Alternative 2 (1.8" SPI TFT Color Display) provides vibrant colors, its SPI interface requires 4 to 5 data pins, which limits available inputs and complicates wiring. In contrast, the chosen OLED uses the I2C protocol , requiring only two shared lines (SDA and SCL). This preserves critical GPIO pins for other sensors, simplifies breadboard layout, and ensures a compact, power-efficient, and easily scalable system architecture.</a:t>
-            </a:r>
-          </a:p>
-          <a:p>
-            <a:pPr marL="0" indent="0">
-              <a:buNone/>
-            </a:pPr>
-            <a:br>
-              <a:rPr lang="en-US" dirty="0"/>
-            </a:br>
-            <a:endParaRPr lang="en-US" dirty="0"/>
-          </a:p>
-          <a:p>
-            <a:pPr marL="0" indent="0">
-              <a:buFont typeface="Arial" panose="020B0604020202020204" pitchFamily="34" charset="0"/>
-              <a:buNone/>
-            </a:pPr>
+              <a:rPr lang="en-NZ" dirty="0"/>
+              <a:t>I chose the Arduino r4 over the </a:t>
+            </a:r>
+            <a:r>
+              <a:rPr lang="en-NZ" dirty="0" err="1"/>
+              <a:t>esp</a:t>
+            </a:r>
+            <a:r>
+              <a:rPr lang="en-NZ" dirty="0"/>
+              <a:t> 32 because is have a fundamental </a:t>
+            </a:r>
+            <a:r>
+              <a:rPr lang="en-NZ" dirty="0" err="1"/>
+              <a:t>understranding</a:t>
+            </a:r>
+            <a:r>
+              <a:rPr lang="en-NZ" dirty="0"/>
+              <a:t> on the workings of the Arduino compared to a the esp32 which </a:t>
+            </a:r>
+            <a:r>
+              <a:rPr lang="en-NZ" dirty="0" err="1"/>
+              <a:t>ive</a:t>
+            </a:r>
+            <a:r>
+              <a:rPr lang="en-NZ" dirty="0"/>
+              <a:t> never used before. I chose the r4 over the r3 because the r4 has a </a:t>
+            </a:r>
+            <a:r>
+              <a:rPr lang="en-NZ" dirty="0" err="1"/>
+              <a:t>wifi</a:t>
+            </a:r>
+            <a:r>
+              <a:rPr lang="en-NZ" dirty="0"/>
+              <a:t> chip on board which means  that I can made a </a:t>
+            </a:r>
+            <a:r>
+              <a:rPr lang="en-NZ" dirty="0" err="1"/>
+              <a:t>ui</a:t>
+            </a:r>
+            <a:r>
+              <a:rPr lang="en-NZ" dirty="0"/>
+              <a:t> to adjust settings like throttle logic and sensitivity and when I need to do maintenance I can turn stuff of  like the clutch for example</a:t>
+            </a:r>
             <a:endParaRPr lang="en-NZ" noProof="0" dirty="0"/>
           </a:p>
         </p:txBody>
@@ -6616,16 +4329,12 @@
               <a:buNone/>
             </a:pPr>
             <a:r>
+              <a:rPr lang="en-NZ" dirty="0" err="1"/>
+              <a:t>Ardunio</a:t>
+            </a:r>
+            <a:r>
               <a:rPr lang="en-NZ" dirty="0"/>
-              <a:t>1.3” i2c </a:t>
-            </a:r>
-            <a:r>
-              <a:rPr lang="en-NZ" dirty="0" err="1"/>
-              <a:t>Oled</a:t>
-            </a:r>
-            <a:r>
-              <a:rPr lang="en-NZ" dirty="0"/>
-              <a:t> screen</a:t>
+              <a:t> R4</a:t>
             </a:r>
             <a:endParaRPr lang="en-NZ" noProof="0" dirty="0"/>
           </a:p>
@@ -6839,7 +4548,7 @@
             </a:pPr>
             <a:r>
               <a:rPr lang="en-NZ" dirty="0"/>
-              <a:t>Lcd screen</a:t>
+              <a:t>Esp 32</a:t>
             </a:r>
             <a:r>
               <a:rPr lang="en-NZ" noProof="0" dirty="0"/>
@@ -6873,7 +4582,7 @@
         </p:spPr>
         <p:txBody>
           <a:bodyPr vert="horz" lIns="91440" tIns="45720" rIns="91440" bIns="45720" rtlCol="0">
-            <a:normAutofit lnSpcReduction="10000"/>
+            <a:normAutofit/>
           </a:bodyPr>
           <a:lstStyle>
             <a:lvl1pPr marL="228600" indent="-228600" algn="l" defTabSz="914400" rtl="0" eaLnBrk="1" latinLnBrk="0" hangingPunct="1">
@@ -7056,7 +4765,7 @@
             </a:pPr>
             <a:r>
               <a:rPr lang="en-NZ" dirty="0"/>
-              <a:t>1.8” SPI TFT colour display</a:t>
+              <a:t>Arduino r3</a:t>
             </a:r>
             <a:r>
               <a:rPr lang="en-NZ" noProof="0" dirty="0"/>
@@ -7068,22 +4777,17 @@
     </p:spTree>
     <p:extLst>
       <p:ext uri="{BB962C8B-B14F-4D97-AF65-F5344CB8AC3E}">
-        <p14:creationId xmlns:p14="http://schemas.microsoft.com/office/powerpoint/2010/main" val="2953175661"/>
+        <p14:creationId xmlns:p14="http://schemas.microsoft.com/office/powerpoint/2010/main" val="4188302786"/>
       </p:ext>
     </p:extLst>
   </p:cSld>
   <p:clrMapOvr>
     <a:masterClrMapping/>
   </p:clrMapOvr>
-  <p:extLst>
-    <p:ext uri="{6950BFC3-D8DA-4A85-94F7-54DA5524770B}">
-      <p188:commentRel xmlns:p188="http://schemas.microsoft.com/office/powerpoint/2018/8/main" r:id="rId2"/>
-    </p:ext>
-  </p:extLst>
 </p:sld>
 </file>
 
-<file path=ppt/slides/slide14.xml><?xml version="1.0" encoding="utf-8"?>
+<file path=ppt/slides/slide12.xml><?xml version="1.0" encoding="utf-8"?>
 <p:sld xmlns:a="http://schemas.openxmlformats.org/drawingml/2006/main" xmlns:r="http://schemas.openxmlformats.org/officeDocument/2006/relationships" xmlns:p="http://schemas.openxmlformats.org/presentationml/2006/main">
   <p:cSld>
     <p:spTree>
@@ -7133,7 +4837,7 @@
           <a:p>
             <a:r>
               <a:rPr lang="en-NZ" noProof="0" dirty="0"/>
-              <a:t>Component/System 2</a:t>
+              <a:t>Component/System 1</a:t>
             </a:r>
           </a:p>
         </p:txBody>
@@ -7165,7 +4869,7 @@
         </p:spPr>
         <p:txBody>
           <a:bodyPr>
-            <a:normAutofit fontScale="47500" lnSpcReduction="20000"/>
+            <a:normAutofit fontScale="70000" lnSpcReduction="20000"/>
           </a:bodyPr>
           <a:lstStyle/>
           <a:p>
@@ -7174,31 +4878,38 @@
             </a:pPr>
             <a:r>
               <a:rPr lang="en-NZ" noProof="0" dirty="0"/>
-              <a:t>Explanation of component</a:t>
-            </a:r>
+              <a:t>Explanation </a:t>
+            </a:r>
+            <a:r>
+              <a:rPr lang="en-NZ" noProof="0"/>
+              <a:t>of component-brain</a:t>
+            </a:r>
+            <a:endParaRPr lang="en-NZ" noProof="0" dirty="0"/>
           </a:p>
           <a:p>
             <a:pPr marL="0" indent="0">
               <a:buNone/>
             </a:pPr>
             <a:r>
-              <a:rPr lang="en-US" dirty="0"/>
-              <a:t>The speed and RPM tracking subsystem utilizes digital Hall effect sensors paired with neodymium magnets mounted on the rotating shafts (the clutches and the rear wheel). As the components spin, the magnet passes the face of the sensor, causing a state change in the magnetic field that triggers the sensor to output a clean digital pulse (switching between 0V and 5V). These sensors are wired directly to the Arduino's hardware interrupt pins. The microcontroller tracks the time interval between these incoming digital pulses to accurately calculate the real-time rotational speed (RPM) and the physical travel speed of the electric bike.</a:t>
-            </a:r>
-          </a:p>
-          <a:p>
-            <a:pPr marL="0" indent="0">
-              <a:buNone/>
-            </a:pPr>
-            <a:br>
-              <a:rPr lang="en-US" dirty="0"/>
-            </a:br>
-            <a:endParaRPr lang="en-US" dirty="0"/>
-          </a:p>
-          <a:p>
-            <a:pPr marL="0" indent="0">
-              <a:buNone/>
-            </a:pPr>
+              <a:rPr lang="en-NZ" dirty="0"/>
+              <a:t>The Arduino Uno R4 </a:t>
+            </a:r>
+            <a:r>
+              <a:rPr lang="en-NZ" dirty="0" err="1"/>
+              <a:t>WiFi</a:t>
+            </a:r>
+            <a:r>
+              <a:rPr lang="en-NZ" dirty="0"/>
+              <a:t> is the main microcontroller used in my project. It uses a 32-bit processor, which gives it more processing power compared to older Arduino boards, and it also includes built-in </a:t>
+            </a:r>
+            <a:r>
+              <a:rPr lang="en-NZ" dirty="0" err="1"/>
+              <a:t>WiFi</a:t>
+            </a:r>
+            <a:r>
+              <a:rPr lang="en-NZ" dirty="0"/>
+              <a:t> and Bluetooth capabilities. I chose this board because it has enough processing power to handle multiple sensors, control systems, and communication with the dashboard while still keeping the simple Arduino layout and 5V compatibility.</a:t>
+            </a:r>
             <a:endParaRPr lang="en-NZ" noProof="0" dirty="0"/>
           </a:p>
         </p:txBody>
@@ -7219,8 +4930,8 @@
         </p:nvSpPr>
         <p:spPr>
           <a:xfrm>
-            <a:off x="943897" y="3686687"/>
-            <a:ext cx="5385620" cy="2441984"/>
+            <a:off x="943897" y="3500284"/>
+            <a:ext cx="5471651" cy="3171313"/>
           </a:xfrm>
           <a:prstGeom prst="rect">
             <a:avLst/>
@@ -7406,6 +5117,13 @@
               <a:rPr lang="en-NZ" noProof="0" dirty="0"/>
               <a:t>Component Picture</a:t>
             </a:r>
+          </a:p>
+          <a:p>
+            <a:pPr marL="0" indent="0">
+              <a:buFont typeface="Arial" panose="020B0604020202020204" pitchFamily="34" charset="0"/>
+              <a:buNone/>
+            </a:pPr>
+            <a:endParaRPr lang="en-NZ" noProof="0" dirty="0"/>
           </a:p>
         </p:txBody>
       </p:sp>
@@ -7425,8 +5143,8 @@
         </p:nvSpPr>
         <p:spPr>
           <a:xfrm>
-            <a:off x="6415548" y="3686687"/>
-            <a:ext cx="4753897" cy="2441984"/>
+            <a:off x="6415548" y="3500283"/>
+            <a:ext cx="4753897" cy="3171313"/>
           </a:xfrm>
           <a:prstGeom prst="rect">
             <a:avLst/>
@@ -7437,7 +5155,7 @@
         </p:spPr>
         <p:txBody>
           <a:bodyPr vert="horz" lIns="91440" tIns="45720" rIns="91440" bIns="45720" rtlCol="0">
-            <a:normAutofit fontScale="70000" lnSpcReduction="20000"/>
+            <a:normAutofit/>
           </a:bodyPr>
           <a:lstStyle>
             <a:lvl1pPr marL="228600" indent="-228600" algn="l" defTabSz="914400" rtl="0" eaLnBrk="1" latinLnBrk="0" hangingPunct="1">
@@ -7610,18 +5328,16 @@
             </a:pPr>
             <a:r>
               <a:rPr lang="en-NZ" noProof="0" dirty="0"/>
-              <a:t>Component test log:</a:t>
-            </a:r>
-          </a:p>
-          <a:p>
-            <a:pPr marL="0" indent="0">
-              <a:buNone/>
-            </a:pPr>
-            <a:r>
-              <a:rPr lang="en-US" dirty="0"/>
-              <a:t>0.1uf smoothing capacitor was integrated across the signal and ground lines, which successfully filtered out the raw signal noise and stabilized the voltage drops. Following this hardware optimization, the Arduino recorded clean, reliable signal transitions with zero missed pulses or false triggers, confirming a successful PASSED status for the subsystem.</a:t>
-            </a:r>
-            <a:endParaRPr lang="en-NZ" noProof="0" dirty="0"/>
+              <a:t>Component test log: very easy to control and upload code through a cable but still working on the uploading over </a:t>
+            </a:r>
+            <a:r>
+              <a:rPr lang="en-NZ" noProof="0" dirty="0" err="1"/>
+              <a:t>wifi</a:t>
+            </a:r>
+            <a:r>
+              <a:rPr lang="en-NZ" noProof="0" dirty="0"/>
+              <a:t>.</a:t>
+            </a:r>
           </a:p>
           <a:p>
             <a:pPr marL="0" indent="0">
@@ -7632,20 +5348,72 @@
           </a:p>
         </p:txBody>
       </p:sp>
+      <p:pic>
+        <p:nvPicPr>
+          <p:cNvPr id="1026" name="Picture 2" descr="Arduino UNO R4 WiFi - HobbyElectronica">
+            <a:extLst>
+              <a:ext uri="{FF2B5EF4-FFF2-40B4-BE49-F238E27FC236}">
+                <a16:creationId xmlns:a16="http://schemas.microsoft.com/office/drawing/2014/main" id="{F6F76BE5-4844-9D9B-EDC2-816CC06C42C3}"/>
+              </a:ext>
+            </a:extLst>
+          </p:cNvPr>
+          <p:cNvPicPr>
+            <a:picLocks noChangeAspect="1" noChangeArrowheads="1"/>
+          </p:cNvPicPr>
+          <p:nvPr/>
+        </p:nvPicPr>
+        <p:blipFill>
+          <a:blip r:embed="rId3">
+            <a:extLst>
+              <a:ext uri="{28A0092B-C50C-407E-A947-70E740481C1C}">
+                <a14:useLocalDpi xmlns:a14="http://schemas.microsoft.com/office/drawing/2010/main" val="0"/>
+              </a:ext>
+            </a:extLst>
+          </a:blip>
+          <a:srcRect/>
+          <a:stretch>
+            <a:fillRect/>
+          </a:stretch>
+        </p:blipFill>
+        <p:spPr bwMode="auto">
+          <a:xfrm>
+            <a:off x="943897" y="3896865"/>
+            <a:ext cx="2894824" cy="2894824"/>
+          </a:xfrm>
+          <a:prstGeom prst="rect">
+            <a:avLst/>
+          </a:prstGeom>
+          <a:noFill/>
+          <a:extLst>
+            <a:ext uri="{909E8E84-426E-40DD-AFC4-6F175D3DCCD1}">
+              <a14:hiddenFill xmlns:a14="http://schemas.microsoft.com/office/drawing/2010/main">
+                <a:solidFill>
+                  <a:srgbClr val="FFFFFF"/>
+                </a:solidFill>
+              </a14:hiddenFill>
+            </a:ext>
+          </a:extLst>
+        </p:spPr>
+      </p:pic>
     </p:spTree>
     <p:extLst>
       <p:ext uri="{BB962C8B-B14F-4D97-AF65-F5344CB8AC3E}">
-        <p14:creationId xmlns:p14="http://schemas.microsoft.com/office/powerpoint/2010/main" val="708745857"/>
+        <p14:creationId xmlns:p14="http://schemas.microsoft.com/office/powerpoint/2010/main" val="3917241819"/>
       </p:ext>
     </p:extLst>
   </p:cSld>
   <p:clrMapOvr>
     <a:masterClrMapping/>
   </p:clrMapOvr>
+  <p:extLst>
+    <p:ext uri="{6950BFC3-D8DA-4A85-94F7-54DA5524770B}">
+      <p188:commentRel xmlns:p188="http://schemas.microsoft.com/office/powerpoint/2018/8/main" r:id="rId2"/>
+    </p:ext>
+  </p:extLst>
 </p:sld>
 </file>
 
-<file path=ppt/slides/slide15.xml><?xml version="1.0" encoding="utf-8"?>
+<file path=ppt/slides/slide13.xml><?xml version="1.0" encoding="utf-8"?>
 <p:sld xmlns:a="http://schemas.openxmlformats.org/drawingml/2006/main" xmlns:r="http://schemas.openxmlformats.org/officeDocument/2006/relationships" xmlns:p="http://schemas.openxmlformats.org/presentationml/2006/main">
   <p:cSld>
     <p:spTree>
@@ -7728,7 +5496,7 @@
         </p:spPr>
         <p:txBody>
           <a:bodyPr vert="horz" lIns="91440" tIns="45720" rIns="91440" bIns="45720" rtlCol="0">
-            <a:normAutofit fontScale="77500" lnSpcReduction="20000"/>
+            <a:normAutofit fontScale="70000" lnSpcReduction="20000"/>
           </a:bodyPr>
           <a:lstStyle>
             <a:lvl1pPr marL="228600" indent="-228600" algn="l" defTabSz="914400" rtl="0" eaLnBrk="1" latinLnBrk="0" hangingPunct="1">
@@ -7896,15 +5664,52 @@
           </a:lstStyle>
           <a:p>
             <a:pPr marL="0" indent="0">
+              <a:buFont typeface="Arial" panose="020B0604020202020204" pitchFamily="34" charset="0"/>
               <a:buNone/>
             </a:pPr>
             <a:r>
               <a:rPr lang="en-NZ" noProof="0" dirty="0"/>
-              <a:t>Analyse notes from testing and note changes to be made:0.1uf </a:t>
-            </a:r>
-            <a:r>
-              <a:rPr lang="en-US" dirty="0"/>
-              <a:t>ceramic capacitor will be permanently soldered onto the PCB layout as close to the sensor input pins as possible to act as a permanent low-pass filter. Additionally, future iterations will utilize shielded twisted-pair cabling for all external sensor runs to provide structural immunity against external vehicle engine noise.</a:t>
+              <a:t>Analyse notes from testing and note changes to be made: through feedback </a:t>
+            </a:r>
+            <a:r>
+              <a:rPr lang="en-NZ" noProof="0" dirty="0" err="1"/>
+              <a:t>ive</a:t>
+            </a:r>
+            <a:r>
+              <a:rPr lang="en-NZ" noProof="0" dirty="0"/>
+              <a:t> found </a:t>
+            </a:r>
+            <a:r>
+              <a:rPr lang="en-NZ" noProof="0" dirty="0" err="1"/>
+              <a:t>tha</a:t>
+            </a:r>
+            <a:r>
+              <a:rPr lang="en-NZ" dirty="0"/>
+              <a:t>t incorporating a 0.1uf capacitor across the signal and ground wires of the sensors it can smoot the signal out to a very clear and stable signal, adding a 1k </a:t>
+            </a:r>
+            <a:r>
+              <a:rPr lang="en-NZ" dirty="0" err="1"/>
+              <a:t>resisitor</a:t>
+            </a:r>
+            <a:r>
+              <a:rPr lang="en-NZ" dirty="0"/>
+              <a:t> to the </a:t>
+            </a:r>
+            <a:r>
+              <a:rPr lang="en-NZ" dirty="0" err="1"/>
+              <a:t>leds</a:t>
+            </a:r>
+            <a:r>
+              <a:rPr lang="en-NZ" dirty="0"/>
+              <a:t> can make it slightly dimmer and can also make its longevity of the </a:t>
+            </a:r>
+            <a:r>
+              <a:rPr lang="en-NZ" dirty="0" err="1"/>
+              <a:t>leds</a:t>
+            </a:r>
+            <a:r>
+              <a:rPr lang="en-NZ" dirty="0"/>
+              <a:t> much greater cause the heat is greatly decreased, meaning that the chance of it blowing goes down cause the voltage is decreased that goes to the led itself</a:t>
             </a:r>
             <a:endParaRPr lang="en-NZ" noProof="0" dirty="0"/>
           </a:p>
@@ -8111,7 +5916,7 @@
             </a:pPr>
             <a:r>
               <a:rPr lang="en-NZ" dirty="0"/>
-              <a:t>Test your circuits at least 10 times</a:t>
+              <a:t>Multiple test</a:t>
             </a:r>
             <a:endParaRPr lang="en-NZ" noProof="0" dirty="0"/>
           </a:p>
@@ -8145,7 +5950,7 @@
         </p:spPr>
         <p:txBody>
           <a:bodyPr vert="horz" lIns="91440" tIns="45720" rIns="91440" bIns="45720" rtlCol="0">
-            <a:normAutofit fontScale="92500" lnSpcReduction="20000"/>
+            <a:normAutofit/>
           </a:bodyPr>
           <a:lstStyle>
             <a:lvl1pPr marL="228600" indent="-228600" algn="l" defTabSz="914400" rtl="0" eaLnBrk="1" latinLnBrk="0" hangingPunct="1">
@@ -8313,15 +6118,20 @@
           </a:lstStyle>
           <a:p>
             <a:pPr marL="0" indent="0">
+              <a:buFont typeface="Arial" panose="020B0604020202020204" pitchFamily="34" charset="0"/>
               <a:buNone/>
             </a:pPr>
             <a:r>
               <a:rPr lang="en-NZ" dirty="0"/>
-              <a:t>Reliability notes from testing:0.1uf </a:t>
-            </a:r>
-            <a:r>
-              <a:rPr lang="en-US" dirty="0"/>
-              <a:t>hardware decoupling capacitor between the signal line and ground before trial 5, the data stabilized immediately. Across the remaining 6 trials, the sensor delivered a completely uniform, repeatable pulse train with zero false triggers, maintaining an identical, steady tracking waveform across all final iterations.</a:t>
+              <a:t>Reliability notes from testing: the </a:t>
+            </a:r>
+            <a:r>
+              <a:rPr lang="en-NZ" dirty="0" err="1"/>
+              <a:t>analog</a:t>
+            </a:r>
+            <a:r>
+              <a:rPr lang="en-NZ" dirty="0"/>
+              <a:t> hall sensors have a very jumpy signal </a:t>
             </a:r>
             <a:endParaRPr lang="en-NZ" noProof="0" dirty="0"/>
           </a:p>
@@ -8330,7 +6140,7 @@
     </p:spTree>
     <p:extLst>
       <p:ext uri="{BB962C8B-B14F-4D97-AF65-F5344CB8AC3E}">
-        <p14:creationId xmlns:p14="http://schemas.microsoft.com/office/powerpoint/2010/main" val="1027777261"/>
+        <p14:creationId xmlns:p14="http://schemas.microsoft.com/office/powerpoint/2010/main" val="3469156485"/>
       </p:ext>
     </p:extLst>
   </p:cSld>
@@ -8340,7 +6150,7 @@
 </p:sld>
 </file>
 
-<file path=ppt/slides/slide16.xml><?xml version="1.0" encoding="utf-8"?>
+<file path=ppt/slides/slide14.xml><?xml version="1.0" encoding="utf-8"?>
 <p:sld xmlns:a="http://schemas.openxmlformats.org/drawingml/2006/main" xmlns:r="http://schemas.openxmlformats.org/officeDocument/2006/relationships" xmlns:p="http://schemas.openxmlformats.org/presentationml/2006/main">
   <p:cSld>
     <p:spTree>
@@ -8393,8 +6203,13 @@
           <a:p>
             <a:r>
               <a:rPr lang="en-NZ" noProof="0" dirty="0"/>
-              <a:t>Choice of Component/System 3</a:t>
-            </a:r>
+              <a:t>Choice of Component/System </a:t>
+            </a:r>
+            <a:r>
+              <a:rPr lang="en-NZ" dirty="0"/>
+              <a:t>2</a:t>
+            </a:r>
+            <a:endParaRPr lang="en-NZ" noProof="0" dirty="0"/>
           </a:p>
         </p:txBody>
       </p:sp>
@@ -8429,7 +6244,7 @@
         </p:spPr>
         <p:txBody>
           <a:bodyPr vert="horz" lIns="91440" tIns="45720" rIns="91440" bIns="45720" rtlCol="0">
-            <a:normAutofit fontScale="55000" lnSpcReduction="20000"/>
+            <a:normAutofit fontScale="77500" lnSpcReduction="20000"/>
           </a:bodyPr>
           <a:lstStyle>
             <a:lvl1pPr marL="228600" indent="-228600" algn="l" defTabSz="914400" rtl="0" eaLnBrk="1" latinLnBrk="0" hangingPunct="1">
@@ -8610,14 +6425,9 @@
               <a:buNone/>
             </a:pPr>
             <a:r>
-              <a:rPr lang="en-US" dirty="0"/>
-              <a:t>The custom resistor voltage divider circuit was chosen because it provides the most elegant, cost-effective, and accurate solution for scaling down the battery's high voltage to a safe 0-5v level for the Arduino. Alternative 1 (a pre-built analog sensor module) was rejected because it simply uses the same basic resistor divider network but takes up significantly more physical space on the chassis and adds unnecessary manufacturing costs. Alternative 2 (a dedicated digital I2C ADC module) offers incredibly high bit resolution, but it is entirely unnecessary for this application since the Arduino’s built-in 10-bit ADC provides more than enough precision to read a standard vehicle battery level accurately. By choosing a custom resistor network paired with a 0.1uf filtering capacitor, the circuit minimizes bulk component footprints, eliminates the need for complex external software libraries, and directly cleans out high-frequency noise from heavy motor draw at a fraction of the cost of commercial modules.</a:t>
-            </a:r>
-          </a:p>
-          <a:p>
-            <a:pPr marL="0" indent="0">
-              <a:buNone/>
-            </a:pPr>
+              <a:rPr lang="en-NZ" dirty="0"/>
+              <a:t>The chosen 1.3" I2C OLED display was selected because it provides a clear and efficient way to display information from the Arduino. Its 128x64 resolution allows it to show detailed data such as speed, RPM, and battery levels while using very little power. Compared to a standard LCD, the OLED has better viewing angles and does not require a power-hungry backlight. I also chose it over an SPI TFT display because I2C only uses two communication pins (SDA and SCL), leaving more Arduino pins available for the other sensors and reducing wiring complexity.</a:t>
+            </a:r>
             <a:br>
               <a:rPr lang="en-US" dirty="0"/>
             </a:br>
@@ -8655,9 +6465,7 @@
           </a:xfrm>
         </p:spPr>
         <p:txBody>
-          <a:bodyPr>
-            <a:normAutofit fontScale="85000" lnSpcReduction="20000"/>
-          </a:bodyPr>
+          <a:bodyPr/>
           <a:lstStyle/>
           <a:p>
             <a:pPr marL="0" indent="0">
@@ -8673,16 +6481,16 @@
               <a:buNone/>
             </a:pPr>
             <a:r>
-              <a:rPr lang="en-US" dirty="0"/>
-              <a:t>Resistor Voltage Divider Circuit with a 0.1 </a:t>
-            </a:r>
-            <a:r>
-              <a:rPr lang="en-US" dirty="0" err="1"/>
-              <a:t>uf</a:t>
-            </a:r>
-            <a:r>
-              <a:rPr lang="en-US" dirty="0"/>
-              <a:t> filtering capacitor</a:t>
+              <a:rPr lang="en-NZ" dirty="0"/>
+              <a:t>1.3” i2c </a:t>
+            </a:r>
+            <a:r>
+              <a:rPr lang="en-NZ" dirty="0" err="1"/>
+              <a:t>Oled</a:t>
+            </a:r>
+            <a:r>
+              <a:rPr lang="en-NZ" dirty="0"/>
+              <a:t> screen</a:t>
             </a:r>
             <a:endParaRPr lang="en-NZ" noProof="0" dirty="0"/>
           </a:p>
@@ -8713,7 +6521,7 @@
         </p:spPr>
         <p:txBody>
           <a:bodyPr vert="horz" lIns="91440" tIns="45720" rIns="91440" bIns="45720" rtlCol="0">
-            <a:normAutofit fontScale="70000" lnSpcReduction="20000"/>
+            <a:normAutofit/>
           </a:bodyPr>
           <a:lstStyle>
             <a:lvl1pPr marL="228600" indent="-228600" algn="l" defTabSz="914400" rtl="0" eaLnBrk="1" latinLnBrk="0" hangingPunct="1">
@@ -8891,19 +6699,12 @@
           </a:p>
           <a:p>
             <a:pPr marL="0" indent="0">
+              <a:buFont typeface="Arial" panose="020B0604020202020204" pitchFamily="34" charset="0"/>
               <a:buNone/>
             </a:pPr>
             <a:r>
               <a:rPr lang="en-NZ" dirty="0"/>
-              <a:t>Dedicated Analog Voltage Sensor Module (</a:t>
-            </a:r>
-            <a:r>
-              <a:rPr lang="en-NZ" dirty="0" err="1"/>
-              <a:t>eg</a:t>
-            </a:r>
-            <a:r>
-              <a:rPr lang="en-NZ" dirty="0"/>
-              <a:t>, ZMPT101B or standard voltage sensor breakout).</a:t>
+              <a:t>Lcd screen</a:t>
             </a:r>
             <a:r>
               <a:rPr lang="en-NZ" noProof="0" dirty="0"/>
@@ -8937,7 +6738,7 @@
         </p:spPr>
         <p:txBody>
           <a:bodyPr vert="horz" lIns="91440" tIns="45720" rIns="91440" bIns="45720" rtlCol="0">
-            <a:normAutofit fontScale="77500" lnSpcReduction="20000"/>
+            <a:normAutofit/>
           </a:bodyPr>
           <a:lstStyle>
             <a:lvl1pPr marL="228600" indent="-228600" algn="l" defTabSz="914400" rtl="0" eaLnBrk="1" latinLnBrk="0" hangingPunct="1">
@@ -9110,35 +6911,44 @@
             </a:pPr>
             <a:r>
               <a:rPr lang="en-NZ" noProof="0" dirty="0"/>
-              <a:t>Alternative 2 </a:t>
+              <a:t>Alternative 2</a:t>
             </a:r>
           </a:p>
           <a:p>
             <a:pPr marL="0" indent="0">
+              <a:buFont typeface="Arial" panose="020B0604020202020204" pitchFamily="34" charset="0"/>
               <a:buNone/>
             </a:pPr>
             <a:r>
-              <a:rPr lang="nn-NO" dirty="0"/>
-              <a:t>Digital I2C Analog-to-Digital Converter (ADC) Module (eg, ADS1115 breakout).</a:t>
-            </a:r>
-            <a:endParaRPr lang="en-NZ" noProof="0" dirty="0"/>
+              <a:rPr lang="en-NZ" dirty="0"/>
+              <a:t> SPI TFT colour display</a:t>
+            </a:r>
+            <a:r>
+              <a:rPr lang="en-NZ" noProof="0" dirty="0"/>
+              <a:t> </a:t>
+            </a:r>
           </a:p>
         </p:txBody>
       </p:sp>
     </p:spTree>
     <p:extLst>
       <p:ext uri="{BB962C8B-B14F-4D97-AF65-F5344CB8AC3E}">
-        <p14:creationId xmlns:p14="http://schemas.microsoft.com/office/powerpoint/2010/main" val="733961800"/>
+        <p14:creationId xmlns:p14="http://schemas.microsoft.com/office/powerpoint/2010/main" val="2953175661"/>
       </p:ext>
     </p:extLst>
   </p:cSld>
   <p:clrMapOvr>
     <a:masterClrMapping/>
   </p:clrMapOvr>
+  <p:extLst>
+    <p:ext uri="{6950BFC3-D8DA-4A85-94F7-54DA5524770B}">
+      <p188:commentRel xmlns:p188="http://schemas.microsoft.com/office/powerpoint/2018/8/main" r:id="rId2"/>
+    </p:ext>
+  </p:extLst>
 </p:sld>
 </file>
 
-<file path=ppt/slides/slide17.xml><?xml version="1.0" encoding="utf-8"?>
+<file path=ppt/slides/slide15.xml><?xml version="1.0" encoding="utf-8"?>
 <p:sld xmlns:a="http://schemas.openxmlformats.org/drawingml/2006/main" xmlns:r="http://schemas.openxmlformats.org/officeDocument/2006/relationships" xmlns:p="http://schemas.openxmlformats.org/presentationml/2006/main">
   <p:cSld>
     <p:spTree>
@@ -9188,13 +6998,8 @@
           <a:p>
             <a:r>
               <a:rPr lang="en-NZ" noProof="0" dirty="0"/>
-              <a:t>Component/System </a:t>
-            </a:r>
-            <a:r>
-              <a:rPr lang="en-NZ" dirty="0"/>
-              <a:t>3</a:t>
-            </a:r>
-            <a:endParaRPr lang="en-NZ" noProof="0" dirty="0"/>
+              <a:t>Component/System 2</a:t>
+            </a:r>
           </a:p>
         </p:txBody>
       </p:sp>
@@ -9234,7 +7039,7 @@
             </a:pPr>
             <a:r>
               <a:rPr lang="en-NZ" noProof="0" dirty="0"/>
-              <a:t>Explanation of component</a:t>
+              <a:t>Explanation of component-speed/rpm sensing</a:t>
             </a:r>
           </a:p>
           <a:p>
@@ -9242,17 +7047,23 @@
               <a:buNone/>
             </a:pPr>
             <a:r>
+              <a:rPr lang="en-NZ" dirty="0"/>
+              <a:t>The speed and RPM tracking system uses digital Hall effect sensors with neodymium magnets attached to the rotating parts of the bike, including the clutches and rear wheel. When the magnet passes the sensor, it detects the change in the magnetic field and sends a digital signal (0V or 5V) to the Arduino. These signals are used by the Arduino to calculate the RPM of the drivetrain and the speed of the bike by measuring the time between each pulse.</a:t>
+            </a:r>
+          </a:p>
+          <a:p>
+            <a:pPr marL="0" indent="0">
+              <a:buNone/>
+            </a:pPr>
+            <a:br>
               <a:rPr lang="en-US" dirty="0"/>
-              <a:t>The visual indicator subsystem utilizes a series of light-emitting diodes (LEDs) to provide the rider with immediate, glanceable alerts regarding critical e-bike states, such as low battery thresholds or system errors. Because the Arduino's digital output pins deliver a 5V signal that exceeds the safe forward voltage and current limits of standard LEDs, an inline 1k </a:t>
-            </a:r>
-            <a:r>
-              <a:rPr lang="en-US" dirty="0" err="1"/>
-              <a:t>OHMcurrent</a:t>
-            </a:r>
-            <a:r>
-              <a:rPr lang="en-US" dirty="0"/>
-              <a:t>-limiting resistor is placed in series with each diode. This resistor acts as a current limiter to protect the LED from burning out and to prevent the Arduino pins from drawing excessive current. The microcontroller controls these indicators by toggling its digital General Purpose Input/Output (GPIO) pins between HIGH and LOW states based on incoming sensor data.</a:t>
-            </a:r>
+            </a:br>
+            <a:endParaRPr lang="en-US" dirty="0"/>
+          </a:p>
+          <a:p>
+            <a:pPr marL="0" indent="0">
+              <a:buNone/>
+            </a:pPr>
             <a:endParaRPr lang="en-NZ" noProof="0" dirty="0"/>
           </a:p>
         </p:txBody>
@@ -9491,7 +7302,7 @@
         </p:spPr>
         <p:txBody>
           <a:bodyPr vert="horz" lIns="91440" tIns="45720" rIns="91440" bIns="45720" rtlCol="0">
-            <a:normAutofit fontScale="40000" lnSpcReduction="20000"/>
+            <a:normAutofit fontScale="62500" lnSpcReduction="20000"/>
           </a:bodyPr>
           <a:lstStyle>
             <a:lvl1pPr marL="228600" indent="-228600" algn="l" defTabSz="914400" rtl="0" eaLnBrk="1" latinLnBrk="0" hangingPunct="1">
@@ -9659,45 +7470,19 @@
           </a:lstStyle>
           <a:p>
             <a:pPr marL="0" indent="0">
-              <a:buFont typeface="Arial" panose="020B0604020202020204" pitchFamily="34" charset="0"/>
               <a:buNone/>
             </a:pPr>
             <a:r>
-              <a:rPr lang="en-NZ" noProof="0" dirty="0"/>
-              <a:t>Component test log:</a:t>
-            </a:r>
-          </a:p>
-          <a:p>
-            <a:pPr marL="0" indent="0">
-              <a:buNone/>
-            </a:pPr>
-            <a:r>
-              <a:rPr lang="en-US" dirty="0"/>
-              <a:t>The objective of this test was to verify that the LED visual indicators turn on and off reliably without overloading the Arduino's digital pins or experiencing flickering during operation. The indicator circuit was assembled on a test bench with the1k ohm resistor placed in series between the digital output pin and the LED anode. Initial trials showed that the LED illuminated instantly when the pin was set to HIGH, but nearby electrical noise from the motor's power lines caused subtle flickering in the illumination state. To stabilize the signal, a 0.1uf capacitor was added in parallel across the output line, which successfully smoothed out the voltage fluctuations. Across ten consecutive switching cycles simulating various system alerts, the LED maintained a perfectly steady, bright visual output with zero failures, confirming a successful PASSED status.</a:t>
-            </a:r>
-            <a:endParaRPr lang="en-NZ" noProof="0" dirty="0"/>
-          </a:p>
-          <a:p>
-            <a:pPr marL="0" indent="0">
-              <a:buNone/>
-            </a:pPr>
+              <a:rPr lang="en-NZ" dirty="0"/>
+              <a:t>Component Test Log:</a:t>
+            </a:r>
             <a:br>
-              <a:rPr lang="en-US" dirty="0"/>
+              <a:rPr lang="en-NZ" dirty="0"/>
             </a:br>
-            <a:endParaRPr lang="en-US" dirty="0"/>
-          </a:p>
-          <a:p>
-            <a:pPr marL="0" indent="0">
-              <a:buFont typeface="Arial" panose="020B0604020202020204" pitchFamily="34" charset="0"/>
-              <a:buNone/>
-            </a:pPr>
-            <a:endParaRPr lang="en-NZ" noProof="0" dirty="0"/>
-          </a:p>
-          <a:p>
-            <a:pPr marL="0" indent="0">
-              <a:buFont typeface="Arial" panose="020B0604020202020204" pitchFamily="34" charset="0"/>
-              <a:buNone/>
-            </a:pPr>
+            <a:r>
+              <a:rPr lang="en-NZ" dirty="0"/>
+              <a:t>A 0.1µF smoothing capacitor was added between the signal and ground lines to reduce electrical noise and stabilise the sensor readings. After adding the capacitor, the Arduino received cleaner and more consistent signals, with no missed pulses or false readings during testing. This confirmed that the subsystem was working correctly and passed the test.</a:t>
+            </a:r>
             <a:endParaRPr lang="en-NZ" noProof="0" dirty="0"/>
           </a:p>
         </p:txBody>
@@ -9705,7 +7490,7 @@
     </p:spTree>
     <p:extLst>
       <p:ext uri="{BB962C8B-B14F-4D97-AF65-F5344CB8AC3E}">
-        <p14:creationId xmlns:p14="http://schemas.microsoft.com/office/powerpoint/2010/main" val="3091740916"/>
+        <p14:creationId xmlns:p14="http://schemas.microsoft.com/office/powerpoint/2010/main" val="708745857"/>
       </p:ext>
     </p:extLst>
   </p:cSld>
@@ -9715,7 +7500,7 @@
 </p:sld>
 </file>
 
-<file path=ppt/slides/slide18.xml><?xml version="1.0" encoding="utf-8"?>
+<file path=ppt/slides/slide16.xml><?xml version="1.0" encoding="utf-8"?>
 <p:sld xmlns:a="http://schemas.openxmlformats.org/drawingml/2006/main" xmlns:r="http://schemas.openxmlformats.org/officeDocument/2006/relationships" xmlns:p="http://schemas.openxmlformats.org/presentationml/2006/main">
   <p:cSld>
     <p:spTree>
@@ -9786,7 +7571,7 @@
         </p:nvSpPr>
         <p:spPr>
           <a:xfrm>
-            <a:off x="789263" y="4869118"/>
+            <a:off x="983226" y="4869118"/>
             <a:ext cx="10225548" cy="1623757"/>
           </a:xfrm>
           <a:prstGeom prst="rect">
@@ -9798,7 +7583,7 @@
         </p:spPr>
         <p:txBody>
           <a:bodyPr vert="horz" lIns="91440" tIns="45720" rIns="91440" bIns="45720" rtlCol="0">
-            <a:normAutofit/>
+            <a:normAutofit fontScale="77500" lnSpcReduction="20000"/>
           </a:bodyPr>
           <a:lstStyle>
             <a:lvl1pPr marL="228600" indent="-228600" algn="l" defTabSz="914400" rtl="0" eaLnBrk="1" latinLnBrk="0" hangingPunct="1">
@@ -9966,12 +7751,18 @@
           </a:lstStyle>
           <a:p>
             <a:pPr marL="0" indent="0">
-              <a:buFont typeface="Arial" panose="020B0604020202020204" pitchFamily="34" charset="0"/>
               <a:buNone/>
             </a:pPr>
             <a:r>
-              <a:rPr lang="en-NZ" noProof="0" dirty="0"/>
-              <a:t>Analyse notes from testing and note changes to be made:</a:t>
+              <a:rPr lang="en-NZ" dirty="0"/>
+              <a:t>Analysis Notes from Testing and Changes to be Made:</a:t>
+            </a:r>
+            <a:br>
+              <a:rPr lang="en-NZ" dirty="0"/>
+            </a:br>
+            <a:r>
+              <a:rPr lang="en-NZ" dirty="0"/>
+              <a:t>The 0.1µF ceramic capacitor will be permanently added to the PCB near the sensor input pins to help reduce electrical noise and improve signal stability. For future versions, shielded twisted-pair cables could be used for external sensor connections to further reduce interference from the engine and other electrical components.</a:t>
             </a:r>
           </a:p>
         </p:txBody>
@@ -10211,7 +8002,7 @@
         </p:spPr>
         <p:txBody>
           <a:bodyPr vert="horz" lIns="91440" tIns="45720" rIns="91440" bIns="45720" rtlCol="0">
-            <a:normAutofit fontScale="62500" lnSpcReduction="20000"/>
+            <a:normAutofit fontScale="92500" lnSpcReduction="20000"/>
           </a:bodyPr>
           <a:lstStyle>
             <a:lvl1pPr marL="228600" indent="-228600" algn="l" defTabSz="914400" rtl="0" eaLnBrk="1" latinLnBrk="0" hangingPunct="1">
@@ -10379,42 +8170,26 @@
           </a:lstStyle>
           <a:p>
             <a:pPr marL="0" indent="0">
-              <a:buFont typeface="Arial" panose="020B0604020202020204" pitchFamily="34" charset="0"/>
               <a:buNone/>
             </a:pPr>
             <a:r>
               <a:rPr lang="en-NZ" dirty="0"/>
-              <a:t>Reliability notes from testing:</a:t>
-            </a:r>
-          </a:p>
-          <a:p>
-            <a:pPr marL="0" indent="0">
-              <a:buNone/>
-            </a:pPr>
-            <a:r>
-              <a:rPr lang="en-US" dirty="0"/>
-              <a:t>To ensure the long-term stability of the visual dashboard alerts under real riding conditions, the LED indicator circuit was run through a sequence of 10 consecutive switching trials. During the first 3 trials, the LED exhibited visible flickering and unstable brightness levels whenever the 800W motor was throttling, showing that high-frequency noise was leaking into the Arduino's digital output lines. Prior to trial 4, a 0.1uf hardware capacitor was added to smooth the output line, working alongside the 1k ohm current-limiting resistor. Across the final 7 test cycles, the LED illumination stabilized completely, delivering a perfectly steady, repeatable visual output with zero flickering or communication drops.</a:t>
-            </a:r>
-          </a:p>
-          <a:p>
-            <a:pPr marL="0" indent="0">
-              <a:buFont typeface="Arial" panose="020B0604020202020204" pitchFamily="34" charset="0"/>
-              <a:buNone/>
-            </a:pPr>
-            <a:endParaRPr lang="en-NZ" dirty="0"/>
-          </a:p>
-          <a:p>
-            <a:pPr marL="0" indent="0">
-              <a:buNone/>
-            </a:pPr>
-            <a:endParaRPr lang="en-NZ" noProof="0" dirty="0"/>
+              <a:t>Reliability Notes from Testing:</a:t>
+            </a:r>
+            <a:br>
+              <a:rPr lang="en-NZ" dirty="0"/>
+            </a:br>
+            <a:r>
+              <a:rPr lang="en-NZ" dirty="0"/>
+              <a:t>A 0.1µF decoupling capacitor was added between the signal line and ground before trial 5 to reduce electrical noise. After this change, the sensor readings became much more stable. During the remaining six trials, the sensor produced consistent results with no false triggers, showing that the system was reliable and repeatable.</a:t>
+            </a:r>
           </a:p>
         </p:txBody>
       </p:sp>
     </p:spTree>
     <p:extLst>
       <p:ext uri="{BB962C8B-B14F-4D97-AF65-F5344CB8AC3E}">
-        <p14:creationId xmlns:p14="http://schemas.microsoft.com/office/powerpoint/2010/main" val="3290795109"/>
+        <p14:creationId xmlns:p14="http://schemas.microsoft.com/office/powerpoint/2010/main" val="1027777261"/>
       </p:ext>
     </p:extLst>
   </p:cSld>
@@ -10424,7 +8199,7 @@
 </p:sld>
 </file>
 
-<file path=ppt/slides/slide19.xml><?xml version="1.0" encoding="utf-8"?>
+<file path=ppt/slides/slide17.xml><?xml version="1.0" encoding="utf-8"?>
 <p:sld xmlns:a="http://schemas.openxmlformats.org/drawingml/2006/main" xmlns:r="http://schemas.openxmlformats.org/officeDocument/2006/relationships" xmlns:p="http://schemas.openxmlformats.org/presentationml/2006/main">
   <p:cSld>
     <p:spTree>
@@ -10477,13 +8252,8 @@
           <a:p>
             <a:r>
               <a:rPr lang="en-NZ" noProof="0" dirty="0"/>
-              <a:t>Choice of Component/System </a:t>
-            </a:r>
-            <a:r>
-              <a:rPr lang="en-NZ" dirty="0"/>
-              <a:t>4</a:t>
-            </a:r>
-            <a:endParaRPr lang="en-NZ" noProof="0" dirty="0"/>
+              <a:t>Choice of Component/System 3</a:t>
+            </a:r>
           </a:p>
         </p:txBody>
       </p:sp>
@@ -10518,7 +8288,7 @@
         </p:spPr>
         <p:txBody>
           <a:bodyPr vert="horz" lIns="91440" tIns="45720" rIns="91440" bIns="45720" rtlCol="0">
-            <a:normAutofit/>
+            <a:normAutofit fontScale="70000" lnSpcReduction="20000"/>
           </a:bodyPr>
           <a:lstStyle>
             <a:lvl1pPr marL="228600" indent="-228600" algn="l" defTabSz="914400" rtl="0" eaLnBrk="1" latinLnBrk="0" hangingPunct="1">
@@ -10698,6 +8468,10 @@
             <a:pPr marL="0" indent="0">
               <a:buNone/>
             </a:pPr>
+            <a:r>
+              <a:rPr lang="en-NZ" dirty="0"/>
+              <a:t>The custom resistor voltage divider was chosen because it provides a simple and low-cost way to measure the battery voltage safely with the Arduino. The voltage divider reduces the higher battery voltage down to a 0-5V signal that the Arduino can read. A pre-built voltage sensor module was not used because it performs the same function but takes up more space and increases the cost of the system. A digital I2C ADC module was also unnecessary because the Arduino’s built-in ADC has enough accuracy for monitoring the battery level. A 0.1µF capacitor was added to reduce electrical noise from the motor and improve the stability of the voltage readings.</a:t>
+            </a:r>
             <a:br>
               <a:rPr lang="en-US" dirty="0"/>
             </a:br>
@@ -10754,7 +8528,15 @@
             </a:pPr>
             <a:r>
               <a:rPr lang="en-US" dirty="0"/>
-              <a:t>Manual Lever-Operated Clutch with Electronic Position Sensor.</a:t>
+              <a:t>Resistor Voltage Divider Circuit with a 0.1 </a:t>
+            </a:r>
+            <a:r>
+              <a:rPr lang="en-US" dirty="0" err="1"/>
+              <a:t>uf</a:t>
+            </a:r>
+            <a:r>
+              <a:rPr lang="en-US" dirty="0"/>
+              <a:t> filtering capacitor</a:t>
             </a:r>
             <a:endParaRPr lang="en-NZ" noProof="0" dirty="0"/>
           </a:p>
@@ -10785,7 +8567,7 @@
         </p:spPr>
         <p:txBody>
           <a:bodyPr vert="horz" lIns="91440" tIns="45720" rIns="91440" bIns="45720" rtlCol="0">
-            <a:normAutofit lnSpcReduction="10000"/>
+            <a:normAutofit fontScale="70000" lnSpcReduction="20000"/>
           </a:bodyPr>
           <a:lstStyle>
             <a:lvl1pPr marL="228600" indent="-228600" algn="l" defTabSz="914400" rtl="0" eaLnBrk="1" latinLnBrk="0" hangingPunct="1">
@@ -10967,9 +8749,20 @@
             </a:pPr>
             <a:r>
               <a:rPr lang="en-NZ" dirty="0"/>
-              <a:t>Automatic Centrifugal Clutch Mechanism.</a:t>
-            </a:r>
-            <a:endParaRPr lang="en-NZ" noProof="0" dirty="0"/>
+              <a:t>Dedicated Analog Voltage Sensor Module (</a:t>
+            </a:r>
+            <a:r>
+              <a:rPr lang="en-NZ" dirty="0" err="1"/>
+              <a:t>eg</a:t>
+            </a:r>
+            <a:r>
+              <a:rPr lang="en-NZ" dirty="0"/>
+              <a:t>, ZMPT101B or standard voltage sensor breakout).</a:t>
+            </a:r>
+            <a:r>
+              <a:rPr lang="en-NZ" noProof="0" dirty="0"/>
+              <a:t> </a:t>
+            </a:r>
           </a:p>
         </p:txBody>
       </p:sp>
@@ -10998,7 +8791,7 @@
         </p:spPr>
         <p:txBody>
           <a:bodyPr vert="horz" lIns="91440" tIns="45720" rIns="91440" bIns="45720" rtlCol="0">
-            <a:normAutofit lnSpcReduction="10000"/>
+            <a:normAutofit fontScale="77500" lnSpcReduction="20000"/>
           </a:bodyPr>
           <a:lstStyle>
             <a:lvl1pPr marL="228600" indent="-228600" algn="l" defTabSz="914400" rtl="0" eaLnBrk="1" latinLnBrk="0" hangingPunct="1">
@@ -11171,7 +8964,7 @@
             </a:pPr>
             <a:r>
               <a:rPr lang="en-NZ" noProof="0" dirty="0"/>
-              <a:t>Alternative 2</a:t>
+              <a:t>Alternative 2 </a:t>
             </a:r>
           </a:p>
           <a:p>
@@ -11179,8 +8972,8 @@
               <a:buNone/>
             </a:pPr>
             <a:r>
-              <a:rPr lang="en-US" dirty="0"/>
-              <a:t>Direct Drive System (No Clutch).</a:t>
+              <a:rPr lang="nn-NO" dirty="0"/>
+              <a:t>Digital I2C Analog-to-Digital Converter (ADC) Module (eg, ADS1115 breakout).</a:t>
             </a:r>
             <a:endParaRPr lang="en-NZ" noProof="0" dirty="0"/>
           </a:p>
@@ -11189,7 +8982,1266 @@
     </p:spTree>
     <p:extLst>
       <p:ext uri="{BB962C8B-B14F-4D97-AF65-F5344CB8AC3E}">
-        <p14:creationId xmlns:p14="http://schemas.microsoft.com/office/powerpoint/2010/main" val="3463644882"/>
+        <p14:creationId xmlns:p14="http://schemas.microsoft.com/office/powerpoint/2010/main" val="733961800"/>
+      </p:ext>
+    </p:extLst>
+  </p:cSld>
+  <p:clrMapOvr>
+    <a:masterClrMapping/>
+  </p:clrMapOvr>
+</p:sld>
+</file>
+
+<file path=ppt/slides/slide18.xml><?xml version="1.0" encoding="utf-8"?>
+<p:sld xmlns:a="http://schemas.openxmlformats.org/drawingml/2006/main" xmlns:r="http://schemas.openxmlformats.org/officeDocument/2006/relationships" xmlns:p="http://schemas.openxmlformats.org/presentationml/2006/main">
+  <p:cSld>
+    <p:spTree>
+      <p:nvGrpSpPr>
+        <p:cNvPr id="1" name="">
+          <a:extLst>
+            <a:ext uri="{FF2B5EF4-FFF2-40B4-BE49-F238E27FC236}">
+              <a16:creationId xmlns:a16="http://schemas.microsoft.com/office/drawing/2014/main" id="{8FD7FDEA-E680-2E00-410E-88328EBB197A}"/>
+            </a:ext>
+          </a:extLst>
+        </p:cNvPr>
+        <p:cNvGrpSpPr/>
+        <p:nvPr/>
+      </p:nvGrpSpPr>
+      <p:grpSpPr>
+        <a:xfrm>
+          <a:off x="0" y="0"/>
+          <a:ext cx="0" cy="0"/>
+          <a:chOff x="0" y="0"/>
+          <a:chExt cx="0" cy="0"/>
+        </a:xfrm>
+      </p:grpSpPr>
+      <p:sp>
+        <p:nvSpPr>
+          <p:cNvPr id="2" name="Title 1">
+            <a:extLst>
+              <a:ext uri="{FF2B5EF4-FFF2-40B4-BE49-F238E27FC236}">
+                <a16:creationId xmlns:a16="http://schemas.microsoft.com/office/drawing/2014/main" id="{989EA619-26CF-A135-A2F3-C9429F3013EA}"/>
+              </a:ext>
+            </a:extLst>
+          </p:cNvPr>
+          <p:cNvSpPr>
+            <a:spLocks noGrp="1"/>
+          </p:cNvSpPr>
+          <p:nvPr>
+            <p:ph type="title"/>
+          </p:nvPr>
+        </p:nvSpPr>
+        <p:spPr>
+          <a:solidFill>
+            <a:srgbClr val="FF5050"/>
+          </a:solidFill>
+        </p:spPr>
+        <p:txBody>
+          <a:bodyPr/>
+          <a:lstStyle/>
+          <a:p>
+            <a:r>
+              <a:rPr lang="en-NZ" noProof="0" dirty="0"/>
+              <a:t>Component/System </a:t>
+            </a:r>
+            <a:r>
+              <a:rPr lang="en-NZ" dirty="0"/>
+              <a:t>3</a:t>
+            </a:r>
+            <a:endParaRPr lang="en-NZ" noProof="0" dirty="0"/>
+          </a:p>
+        </p:txBody>
+      </p:sp>
+      <p:sp>
+        <p:nvSpPr>
+          <p:cNvPr id="3" name="Content Placeholder 2">
+            <a:extLst>
+              <a:ext uri="{FF2B5EF4-FFF2-40B4-BE49-F238E27FC236}">
+                <a16:creationId xmlns:a16="http://schemas.microsoft.com/office/drawing/2014/main" id="{109C2FE0-6991-DDAF-C4F7-B3415EC34474}"/>
+              </a:ext>
+            </a:extLst>
+          </p:cNvPr>
+          <p:cNvSpPr>
+            <a:spLocks noGrp="1"/>
+          </p:cNvSpPr>
+          <p:nvPr>
+            <p:ph idx="1"/>
+          </p:nvPr>
+        </p:nvSpPr>
+        <p:spPr>
+          <a:xfrm>
+            <a:off x="943897" y="1877091"/>
+            <a:ext cx="10225548" cy="1623193"/>
+          </a:xfrm>
+          <a:solidFill>
+            <a:srgbClr val="FFCCCC"/>
+          </a:solidFill>
+        </p:spPr>
+        <p:txBody>
+          <a:bodyPr>
+            <a:normAutofit fontScale="70000" lnSpcReduction="20000"/>
+          </a:bodyPr>
+          <a:lstStyle/>
+          <a:p>
+            <a:pPr marL="0" indent="0">
+              <a:buNone/>
+            </a:pPr>
+            <a:r>
+              <a:rPr lang="en-NZ" noProof="0" dirty="0"/>
+              <a:t>Explanation of component-dashboard</a:t>
+            </a:r>
+          </a:p>
+          <a:p>
+            <a:pPr marL="0" indent="0">
+              <a:buNone/>
+            </a:pPr>
+            <a:r>
+              <a:rPr lang="en-NZ" dirty="0"/>
+              <a:t>The visual indicator system uses LEDs to provide the rider with quick information about the bike’s condition, such as low battery warnings or system errors. Each LED has a 1kΩ resistor connected in series to limit the current and protect both the LED and the Arduino output pins from damage. The Arduino controls the LEDs through its digital pins by switching them between HIGH and LOW states depending on the sensor information it receives.</a:t>
+            </a:r>
+            <a:endParaRPr lang="en-NZ" noProof="0" dirty="0"/>
+          </a:p>
+        </p:txBody>
+      </p:sp>
+      <p:sp>
+        <p:nvSpPr>
+          <p:cNvPr id="4" name="Content Placeholder 2">
+            <a:extLst>
+              <a:ext uri="{FF2B5EF4-FFF2-40B4-BE49-F238E27FC236}">
+                <a16:creationId xmlns:a16="http://schemas.microsoft.com/office/drawing/2014/main" id="{48BF1EF6-F8B8-8CF4-9169-05F15F67B902}"/>
+              </a:ext>
+            </a:extLst>
+          </p:cNvPr>
+          <p:cNvSpPr txBox="1">
+            <a:spLocks/>
+          </p:cNvSpPr>
+          <p:nvPr/>
+        </p:nvSpPr>
+        <p:spPr>
+          <a:xfrm>
+            <a:off x="943897" y="3686687"/>
+            <a:ext cx="5385620" cy="2441984"/>
+          </a:xfrm>
+          <a:prstGeom prst="rect">
+            <a:avLst/>
+          </a:prstGeom>
+          <a:solidFill>
+            <a:srgbClr val="FFCCCC"/>
+          </a:solidFill>
+        </p:spPr>
+        <p:txBody>
+          <a:bodyPr vert="horz" lIns="91440" tIns="45720" rIns="91440" bIns="45720" rtlCol="0">
+            <a:normAutofit/>
+          </a:bodyPr>
+          <a:lstStyle>
+            <a:lvl1pPr marL="228600" indent="-228600" algn="l" defTabSz="914400" rtl="0" eaLnBrk="1" latinLnBrk="0" hangingPunct="1">
+              <a:lnSpc>
+                <a:spcPct val="90000"/>
+              </a:lnSpc>
+              <a:spcBef>
+                <a:spcPts val="1000"/>
+              </a:spcBef>
+              <a:buFont typeface="Arial" panose="020B0604020202020204" pitchFamily="34" charset="0"/>
+              <a:buChar char="•"/>
+              <a:defRPr sz="2800" kern="1200">
+                <a:solidFill>
+                  <a:schemeClr val="tx1"/>
+                </a:solidFill>
+                <a:latin typeface="+mn-lt"/>
+                <a:ea typeface="+mn-ea"/>
+                <a:cs typeface="+mn-cs"/>
+              </a:defRPr>
+            </a:lvl1pPr>
+            <a:lvl2pPr marL="685800" indent="-228600" algn="l" defTabSz="914400" rtl="0" eaLnBrk="1" latinLnBrk="0" hangingPunct="1">
+              <a:lnSpc>
+                <a:spcPct val="90000"/>
+              </a:lnSpc>
+              <a:spcBef>
+                <a:spcPts val="500"/>
+              </a:spcBef>
+              <a:buFont typeface="Arial" panose="020B0604020202020204" pitchFamily="34" charset="0"/>
+              <a:buChar char="•"/>
+              <a:defRPr sz="2400" kern="1200">
+                <a:solidFill>
+                  <a:schemeClr val="tx1"/>
+                </a:solidFill>
+                <a:latin typeface="+mn-lt"/>
+                <a:ea typeface="+mn-ea"/>
+                <a:cs typeface="+mn-cs"/>
+              </a:defRPr>
+            </a:lvl2pPr>
+            <a:lvl3pPr marL="1143000" indent="-228600" algn="l" defTabSz="914400" rtl="0" eaLnBrk="1" latinLnBrk="0" hangingPunct="1">
+              <a:lnSpc>
+                <a:spcPct val="90000"/>
+              </a:lnSpc>
+              <a:spcBef>
+                <a:spcPts val="500"/>
+              </a:spcBef>
+              <a:buFont typeface="Arial" panose="020B0604020202020204" pitchFamily="34" charset="0"/>
+              <a:buChar char="•"/>
+              <a:defRPr sz="2000" kern="1200">
+                <a:solidFill>
+                  <a:schemeClr val="tx1"/>
+                </a:solidFill>
+                <a:latin typeface="+mn-lt"/>
+                <a:ea typeface="+mn-ea"/>
+                <a:cs typeface="+mn-cs"/>
+              </a:defRPr>
+            </a:lvl3pPr>
+            <a:lvl4pPr marL="1600200" indent="-228600" algn="l" defTabSz="914400" rtl="0" eaLnBrk="1" latinLnBrk="0" hangingPunct="1">
+              <a:lnSpc>
+                <a:spcPct val="90000"/>
+              </a:lnSpc>
+              <a:spcBef>
+                <a:spcPts val="500"/>
+              </a:spcBef>
+              <a:buFont typeface="Arial" panose="020B0604020202020204" pitchFamily="34" charset="0"/>
+              <a:buChar char="•"/>
+              <a:defRPr sz="1800" kern="1200">
+                <a:solidFill>
+                  <a:schemeClr val="tx1"/>
+                </a:solidFill>
+                <a:latin typeface="+mn-lt"/>
+                <a:ea typeface="+mn-ea"/>
+                <a:cs typeface="+mn-cs"/>
+              </a:defRPr>
+            </a:lvl4pPr>
+            <a:lvl5pPr marL="2057400" indent="-228600" algn="l" defTabSz="914400" rtl="0" eaLnBrk="1" latinLnBrk="0" hangingPunct="1">
+              <a:lnSpc>
+                <a:spcPct val="90000"/>
+              </a:lnSpc>
+              <a:spcBef>
+                <a:spcPts val="500"/>
+              </a:spcBef>
+              <a:buFont typeface="Arial" panose="020B0604020202020204" pitchFamily="34" charset="0"/>
+              <a:buChar char="•"/>
+              <a:defRPr sz="1800" kern="1200">
+                <a:solidFill>
+                  <a:schemeClr val="tx1"/>
+                </a:solidFill>
+                <a:latin typeface="+mn-lt"/>
+                <a:ea typeface="+mn-ea"/>
+                <a:cs typeface="+mn-cs"/>
+              </a:defRPr>
+            </a:lvl5pPr>
+            <a:lvl6pPr marL="2514600" indent="-228600" algn="l" defTabSz="914400" rtl="0" eaLnBrk="1" latinLnBrk="0" hangingPunct="1">
+              <a:lnSpc>
+                <a:spcPct val="90000"/>
+              </a:lnSpc>
+              <a:spcBef>
+                <a:spcPts val="500"/>
+              </a:spcBef>
+              <a:buFont typeface="Arial" panose="020B0604020202020204" pitchFamily="34" charset="0"/>
+              <a:buChar char="•"/>
+              <a:defRPr sz="1800" kern="1200">
+                <a:solidFill>
+                  <a:schemeClr val="tx1"/>
+                </a:solidFill>
+                <a:latin typeface="+mn-lt"/>
+                <a:ea typeface="+mn-ea"/>
+                <a:cs typeface="+mn-cs"/>
+              </a:defRPr>
+            </a:lvl6pPr>
+            <a:lvl7pPr marL="2971800" indent="-228600" algn="l" defTabSz="914400" rtl="0" eaLnBrk="1" latinLnBrk="0" hangingPunct="1">
+              <a:lnSpc>
+                <a:spcPct val="90000"/>
+              </a:lnSpc>
+              <a:spcBef>
+                <a:spcPts val="500"/>
+              </a:spcBef>
+              <a:buFont typeface="Arial" panose="020B0604020202020204" pitchFamily="34" charset="0"/>
+              <a:buChar char="•"/>
+              <a:defRPr sz="1800" kern="1200">
+                <a:solidFill>
+                  <a:schemeClr val="tx1"/>
+                </a:solidFill>
+                <a:latin typeface="+mn-lt"/>
+                <a:ea typeface="+mn-ea"/>
+                <a:cs typeface="+mn-cs"/>
+              </a:defRPr>
+            </a:lvl7pPr>
+            <a:lvl8pPr marL="3429000" indent="-228600" algn="l" defTabSz="914400" rtl="0" eaLnBrk="1" latinLnBrk="0" hangingPunct="1">
+              <a:lnSpc>
+                <a:spcPct val="90000"/>
+              </a:lnSpc>
+              <a:spcBef>
+                <a:spcPts val="500"/>
+              </a:spcBef>
+              <a:buFont typeface="Arial" panose="020B0604020202020204" pitchFamily="34" charset="0"/>
+              <a:buChar char="•"/>
+              <a:defRPr sz="1800" kern="1200">
+                <a:solidFill>
+                  <a:schemeClr val="tx1"/>
+                </a:solidFill>
+                <a:latin typeface="+mn-lt"/>
+                <a:ea typeface="+mn-ea"/>
+                <a:cs typeface="+mn-cs"/>
+              </a:defRPr>
+            </a:lvl8pPr>
+            <a:lvl9pPr marL="3886200" indent="-228600" algn="l" defTabSz="914400" rtl="0" eaLnBrk="1" latinLnBrk="0" hangingPunct="1">
+              <a:lnSpc>
+                <a:spcPct val="90000"/>
+              </a:lnSpc>
+              <a:spcBef>
+                <a:spcPts val="500"/>
+              </a:spcBef>
+              <a:buFont typeface="Arial" panose="020B0604020202020204" pitchFamily="34" charset="0"/>
+              <a:buChar char="•"/>
+              <a:defRPr sz="1800" kern="1200">
+                <a:solidFill>
+                  <a:schemeClr val="tx1"/>
+                </a:solidFill>
+                <a:latin typeface="+mn-lt"/>
+                <a:ea typeface="+mn-ea"/>
+                <a:cs typeface="+mn-cs"/>
+              </a:defRPr>
+            </a:lvl9pPr>
+          </a:lstStyle>
+          <a:p>
+            <a:pPr marL="0" indent="0">
+              <a:buFont typeface="Arial" panose="020B0604020202020204" pitchFamily="34" charset="0"/>
+              <a:buNone/>
+            </a:pPr>
+            <a:r>
+              <a:rPr lang="en-NZ" noProof="0" dirty="0"/>
+              <a:t>Component Picture</a:t>
+            </a:r>
+          </a:p>
+        </p:txBody>
+      </p:sp>
+      <p:sp>
+        <p:nvSpPr>
+          <p:cNvPr id="5" name="Content Placeholder 2">
+            <a:extLst>
+              <a:ext uri="{FF2B5EF4-FFF2-40B4-BE49-F238E27FC236}">
+                <a16:creationId xmlns:a16="http://schemas.microsoft.com/office/drawing/2014/main" id="{F10EB81D-A986-42AD-847E-FF3A1F656CEB}"/>
+              </a:ext>
+            </a:extLst>
+          </p:cNvPr>
+          <p:cNvSpPr txBox="1">
+            <a:spLocks/>
+          </p:cNvSpPr>
+          <p:nvPr/>
+        </p:nvSpPr>
+        <p:spPr>
+          <a:xfrm>
+            <a:off x="6415548" y="3686687"/>
+            <a:ext cx="4753897" cy="2441984"/>
+          </a:xfrm>
+          <a:prstGeom prst="rect">
+            <a:avLst/>
+          </a:prstGeom>
+          <a:solidFill>
+            <a:srgbClr val="FFCCCC"/>
+          </a:solidFill>
+        </p:spPr>
+        <p:txBody>
+          <a:bodyPr vert="horz" lIns="91440" tIns="45720" rIns="91440" bIns="45720" rtlCol="0">
+            <a:normAutofit fontScale="55000" lnSpcReduction="20000"/>
+          </a:bodyPr>
+          <a:lstStyle>
+            <a:lvl1pPr marL="228600" indent="-228600" algn="l" defTabSz="914400" rtl="0" eaLnBrk="1" latinLnBrk="0" hangingPunct="1">
+              <a:lnSpc>
+                <a:spcPct val="90000"/>
+              </a:lnSpc>
+              <a:spcBef>
+                <a:spcPts val="1000"/>
+              </a:spcBef>
+              <a:buFont typeface="Arial" panose="020B0604020202020204" pitchFamily="34" charset="0"/>
+              <a:buChar char="•"/>
+              <a:defRPr sz="2800" kern="1200">
+                <a:solidFill>
+                  <a:schemeClr val="tx1"/>
+                </a:solidFill>
+                <a:latin typeface="+mn-lt"/>
+                <a:ea typeface="+mn-ea"/>
+                <a:cs typeface="+mn-cs"/>
+              </a:defRPr>
+            </a:lvl1pPr>
+            <a:lvl2pPr marL="685800" indent="-228600" algn="l" defTabSz="914400" rtl="0" eaLnBrk="1" latinLnBrk="0" hangingPunct="1">
+              <a:lnSpc>
+                <a:spcPct val="90000"/>
+              </a:lnSpc>
+              <a:spcBef>
+                <a:spcPts val="500"/>
+              </a:spcBef>
+              <a:buFont typeface="Arial" panose="020B0604020202020204" pitchFamily="34" charset="0"/>
+              <a:buChar char="•"/>
+              <a:defRPr sz="2400" kern="1200">
+                <a:solidFill>
+                  <a:schemeClr val="tx1"/>
+                </a:solidFill>
+                <a:latin typeface="+mn-lt"/>
+                <a:ea typeface="+mn-ea"/>
+                <a:cs typeface="+mn-cs"/>
+              </a:defRPr>
+            </a:lvl2pPr>
+            <a:lvl3pPr marL="1143000" indent="-228600" algn="l" defTabSz="914400" rtl="0" eaLnBrk="1" latinLnBrk="0" hangingPunct="1">
+              <a:lnSpc>
+                <a:spcPct val="90000"/>
+              </a:lnSpc>
+              <a:spcBef>
+                <a:spcPts val="500"/>
+              </a:spcBef>
+              <a:buFont typeface="Arial" panose="020B0604020202020204" pitchFamily="34" charset="0"/>
+              <a:buChar char="•"/>
+              <a:defRPr sz="2000" kern="1200">
+                <a:solidFill>
+                  <a:schemeClr val="tx1"/>
+                </a:solidFill>
+                <a:latin typeface="+mn-lt"/>
+                <a:ea typeface="+mn-ea"/>
+                <a:cs typeface="+mn-cs"/>
+              </a:defRPr>
+            </a:lvl3pPr>
+            <a:lvl4pPr marL="1600200" indent="-228600" algn="l" defTabSz="914400" rtl="0" eaLnBrk="1" latinLnBrk="0" hangingPunct="1">
+              <a:lnSpc>
+                <a:spcPct val="90000"/>
+              </a:lnSpc>
+              <a:spcBef>
+                <a:spcPts val="500"/>
+              </a:spcBef>
+              <a:buFont typeface="Arial" panose="020B0604020202020204" pitchFamily="34" charset="0"/>
+              <a:buChar char="•"/>
+              <a:defRPr sz="1800" kern="1200">
+                <a:solidFill>
+                  <a:schemeClr val="tx1"/>
+                </a:solidFill>
+                <a:latin typeface="+mn-lt"/>
+                <a:ea typeface="+mn-ea"/>
+                <a:cs typeface="+mn-cs"/>
+              </a:defRPr>
+            </a:lvl4pPr>
+            <a:lvl5pPr marL="2057400" indent="-228600" algn="l" defTabSz="914400" rtl="0" eaLnBrk="1" latinLnBrk="0" hangingPunct="1">
+              <a:lnSpc>
+                <a:spcPct val="90000"/>
+              </a:lnSpc>
+              <a:spcBef>
+                <a:spcPts val="500"/>
+              </a:spcBef>
+              <a:buFont typeface="Arial" panose="020B0604020202020204" pitchFamily="34" charset="0"/>
+              <a:buChar char="•"/>
+              <a:defRPr sz="1800" kern="1200">
+                <a:solidFill>
+                  <a:schemeClr val="tx1"/>
+                </a:solidFill>
+                <a:latin typeface="+mn-lt"/>
+                <a:ea typeface="+mn-ea"/>
+                <a:cs typeface="+mn-cs"/>
+              </a:defRPr>
+            </a:lvl5pPr>
+            <a:lvl6pPr marL="2514600" indent="-228600" algn="l" defTabSz="914400" rtl="0" eaLnBrk="1" latinLnBrk="0" hangingPunct="1">
+              <a:lnSpc>
+                <a:spcPct val="90000"/>
+              </a:lnSpc>
+              <a:spcBef>
+                <a:spcPts val="500"/>
+              </a:spcBef>
+              <a:buFont typeface="Arial" panose="020B0604020202020204" pitchFamily="34" charset="0"/>
+              <a:buChar char="•"/>
+              <a:defRPr sz="1800" kern="1200">
+                <a:solidFill>
+                  <a:schemeClr val="tx1"/>
+                </a:solidFill>
+                <a:latin typeface="+mn-lt"/>
+                <a:ea typeface="+mn-ea"/>
+                <a:cs typeface="+mn-cs"/>
+              </a:defRPr>
+            </a:lvl6pPr>
+            <a:lvl7pPr marL="2971800" indent="-228600" algn="l" defTabSz="914400" rtl="0" eaLnBrk="1" latinLnBrk="0" hangingPunct="1">
+              <a:lnSpc>
+                <a:spcPct val="90000"/>
+              </a:lnSpc>
+              <a:spcBef>
+                <a:spcPts val="500"/>
+              </a:spcBef>
+              <a:buFont typeface="Arial" panose="020B0604020202020204" pitchFamily="34" charset="0"/>
+              <a:buChar char="•"/>
+              <a:defRPr sz="1800" kern="1200">
+                <a:solidFill>
+                  <a:schemeClr val="tx1"/>
+                </a:solidFill>
+                <a:latin typeface="+mn-lt"/>
+                <a:ea typeface="+mn-ea"/>
+                <a:cs typeface="+mn-cs"/>
+              </a:defRPr>
+            </a:lvl7pPr>
+            <a:lvl8pPr marL="3429000" indent="-228600" algn="l" defTabSz="914400" rtl="0" eaLnBrk="1" latinLnBrk="0" hangingPunct="1">
+              <a:lnSpc>
+                <a:spcPct val="90000"/>
+              </a:lnSpc>
+              <a:spcBef>
+                <a:spcPts val="500"/>
+              </a:spcBef>
+              <a:buFont typeface="Arial" panose="020B0604020202020204" pitchFamily="34" charset="0"/>
+              <a:buChar char="•"/>
+              <a:defRPr sz="1800" kern="1200">
+                <a:solidFill>
+                  <a:schemeClr val="tx1"/>
+                </a:solidFill>
+                <a:latin typeface="+mn-lt"/>
+                <a:ea typeface="+mn-ea"/>
+                <a:cs typeface="+mn-cs"/>
+              </a:defRPr>
+            </a:lvl8pPr>
+            <a:lvl9pPr marL="3886200" indent="-228600" algn="l" defTabSz="914400" rtl="0" eaLnBrk="1" latinLnBrk="0" hangingPunct="1">
+              <a:lnSpc>
+                <a:spcPct val="90000"/>
+              </a:lnSpc>
+              <a:spcBef>
+                <a:spcPts val="500"/>
+              </a:spcBef>
+              <a:buFont typeface="Arial" panose="020B0604020202020204" pitchFamily="34" charset="0"/>
+              <a:buChar char="•"/>
+              <a:defRPr sz="1800" kern="1200">
+                <a:solidFill>
+                  <a:schemeClr val="tx1"/>
+                </a:solidFill>
+                <a:latin typeface="+mn-lt"/>
+                <a:ea typeface="+mn-ea"/>
+                <a:cs typeface="+mn-cs"/>
+              </a:defRPr>
+            </a:lvl9pPr>
+          </a:lstStyle>
+          <a:p>
+            <a:pPr marL="0" indent="0">
+              <a:buNone/>
+            </a:pPr>
+            <a:r>
+              <a:rPr lang="en-NZ" dirty="0"/>
+              <a:t>Component Test Log:</a:t>
+            </a:r>
+            <a:br>
+              <a:rPr lang="en-NZ" dirty="0"/>
+            </a:br>
+            <a:r>
+              <a:rPr lang="en-NZ" dirty="0"/>
+              <a:t>The purpose of this test was to check that the LED indicators could switch on and off correctly without causing issues for the Arduino pins or flickering during operation. The LED circuit was built with a 1kΩ resistor in series to limit current. During initial testing, the LEDs worked correctly, but electrical noise from the motor power system caused slight flickering. A 0.1µF capacitor was added to help smooth the signal and remove the fluctuations. After this change, the LEDs operated consistently through ten test cycles with no failures, confirming that the system passed.</a:t>
+            </a:r>
+            <a:br>
+              <a:rPr lang="en-US" dirty="0"/>
+            </a:br>
+            <a:endParaRPr lang="en-US" dirty="0"/>
+          </a:p>
+          <a:p>
+            <a:pPr marL="0" indent="0">
+              <a:buFont typeface="Arial" panose="020B0604020202020204" pitchFamily="34" charset="0"/>
+              <a:buNone/>
+            </a:pPr>
+            <a:endParaRPr lang="en-NZ" noProof="0" dirty="0"/>
+          </a:p>
+          <a:p>
+            <a:pPr marL="0" indent="0">
+              <a:buFont typeface="Arial" panose="020B0604020202020204" pitchFamily="34" charset="0"/>
+              <a:buNone/>
+            </a:pPr>
+            <a:endParaRPr lang="en-NZ" noProof="0" dirty="0"/>
+          </a:p>
+        </p:txBody>
+      </p:sp>
+    </p:spTree>
+    <p:extLst>
+      <p:ext uri="{BB962C8B-B14F-4D97-AF65-F5344CB8AC3E}">
+        <p14:creationId xmlns:p14="http://schemas.microsoft.com/office/powerpoint/2010/main" val="3091740916"/>
+      </p:ext>
+    </p:extLst>
+  </p:cSld>
+  <p:clrMapOvr>
+    <a:masterClrMapping/>
+  </p:clrMapOvr>
+</p:sld>
+</file>
+
+<file path=ppt/slides/slide19.xml><?xml version="1.0" encoding="utf-8"?>
+<p:sld xmlns:a="http://schemas.openxmlformats.org/drawingml/2006/main" xmlns:r="http://schemas.openxmlformats.org/officeDocument/2006/relationships" xmlns:p="http://schemas.openxmlformats.org/presentationml/2006/main">
+  <p:cSld>
+    <p:spTree>
+      <p:nvGrpSpPr>
+        <p:cNvPr id="1" name="">
+          <a:extLst>
+            <a:ext uri="{FF2B5EF4-FFF2-40B4-BE49-F238E27FC236}">
+              <a16:creationId xmlns:a16="http://schemas.microsoft.com/office/drawing/2014/main" id="{AC9AB4D7-9EFD-2EDD-86C5-7124EF8D89CB}"/>
+            </a:ext>
+          </a:extLst>
+        </p:cNvPr>
+        <p:cNvGrpSpPr/>
+        <p:nvPr/>
+      </p:nvGrpSpPr>
+      <p:grpSpPr>
+        <a:xfrm>
+          <a:off x="0" y="0"/>
+          <a:ext cx="0" cy="0"/>
+          <a:chOff x="0" y="0"/>
+          <a:chExt cx="0" cy="0"/>
+        </a:xfrm>
+      </p:grpSpPr>
+      <p:sp>
+        <p:nvSpPr>
+          <p:cNvPr id="2" name="Title 1">
+            <a:extLst>
+              <a:ext uri="{FF2B5EF4-FFF2-40B4-BE49-F238E27FC236}">
+                <a16:creationId xmlns:a16="http://schemas.microsoft.com/office/drawing/2014/main" id="{11145C90-B6D3-BDE8-E1D1-5BE0CEFD46B4}"/>
+              </a:ext>
+            </a:extLst>
+          </p:cNvPr>
+          <p:cNvSpPr>
+            <a:spLocks noGrp="1"/>
+          </p:cNvSpPr>
+          <p:nvPr>
+            <p:ph type="title"/>
+          </p:nvPr>
+        </p:nvSpPr>
+        <p:spPr>
+          <a:solidFill>
+            <a:srgbClr val="FFFFCC"/>
+          </a:solidFill>
+        </p:spPr>
+        <p:txBody>
+          <a:bodyPr/>
+          <a:lstStyle/>
+          <a:p>
+            <a:r>
+              <a:rPr lang="en-NZ" noProof="0" dirty="0"/>
+              <a:t>Reliability Testing</a:t>
+            </a:r>
+          </a:p>
+        </p:txBody>
+      </p:sp>
+      <p:sp>
+        <p:nvSpPr>
+          <p:cNvPr id="5" name="Content Placeholder 2">
+            <a:extLst>
+              <a:ext uri="{FF2B5EF4-FFF2-40B4-BE49-F238E27FC236}">
+                <a16:creationId xmlns:a16="http://schemas.microsoft.com/office/drawing/2014/main" id="{50C57F65-7853-E45D-CA58-31BCC9DE7B02}"/>
+              </a:ext>
+            </a:extLst>
+          </p:cNvPr>
+          <p:cNvSpPr txBox="1">
+            <a:spLocks/>
+          </p:cNvSpPr>
+          <p:nvPr/>
+        </p:nvSpPr>
+        <p:spPr>
+          <a:xfrm>
+            <a:off x="789263" y="4869118"/>
+            <a:ext cx="10225548" cy="1623757"/>
+          </a:xfrm>
+          <a:prstGeom prst="rect">
+            <a:avLst/>
+          </a:prstGeom>
+          <a:solidFill>
+            <a:srgbClr val="FFFFCC"/>
+          </a:solidFill>
+        </p:spPr>
+        <p:txBody>
+          <a:bodyPr vert="horz" lIns="91440" tIns="45720" rIns="91440" bIns="45720" rtlCol="0">
+            <a:normAutofit/>
+          </a:bodyPr>
+          <a:lstStyle>
+            <a:lvl1pPr marL="228600" indent="-228600" algn="l" defTabSz="914400" rtl="0" eaLnBrk="1" latinLnBrk="0" hangingPunct="1">
+              <a:lnSpc>
+                <a:spcPct val="90000"/>
+              </a:lnSpc>
+              <a:spcBef>
+                <a:spcPts val="1000"/>
+              </a:spcBef>
+              <a:buFont typeface="Arial" panose="020B0604020202020204" pitchFamily="34" charset="0"/>
+              <a:buChar char="•"/>
+              <a:defRPr sz="2800" kern="1200">
+                <a:solidFill>
+                  <a:schemeClr val="tx1"/>
+                </a:solidFill>
+                <a:latin typeface="+mn-lt"/>
+                <a:ea typeface="+mn-ea"/>
+                <a:cs typeface="+mn-cs"/>
+              </a:defRPr>
+            </a:lvl1pPr>
+            <a:lvl2pPr marL="685800" indent="-228600" algn="l" defTabSz="914400" rtl="0" eaLnBrk="1" latinLnBrk="0" hangingPunct="1">
+              <a:lnSpc>
+                <a:spcPct val="90000"/>
+              </a:lnSpc>
+              <a:spcBef>
+                <a:spcPts val="500"/>
+              </a:spcBef>
+              <a:buFont typeface="Arial" panose="020B0604020202020204" pitchFamily="34" charset="0"/>
+              <a:buChar char="•"/>
+              <a:defRPr sz="2400" kern="1200">
+                <a:solidFill>
+                  <a:schemeClr val="tx1"/>
+                </a:solidFill>
+                <a:latin typeface="+mn-lt"/>
+                <a:ea typeface="+mn-ea"/>
+                <a:cs typeface="+mn-cs"/>
+              </a:defRPr>
+            </a:lvl2pPr>
+            <a:lvl3pPr marL="1143000" indent="-228600" algn="l" defTabSz="914400" rtl="0" eaLnBrk="1" latinLnBrk="0" hangingPunct="1">
+              <a:lnSpc>
+                <a:spcPct val="90000"/>
+              </a:lnSpc>
+              <a:spcBef>
+                <a:spcPts val="500"/>
+              </a:spcBef>
+              <a:buFont typeface="Arial" panose="020B0604020202020204" pitchFamily="34" charset="0"/>
+              <a:buChar char="•"/>
+              <a:defRPr sz="2000" kern="1200">
+                <a:solidFill>
+                  <a:schemeClr val="tx1"/>
+                </a:solidFill>
+                <a:latin typeface="+mn-lt"/>
+                <a:ea typeface="+mn-ea"/>
+                <a:cs typeface="+mn-cs"/>
+              </a:defRPr>
+            </a:lvl3pPr>
+            <a:lvl4pPr marL="1600200" indent="-228600" algn="l" defTabSz="914400" rtl="0" eaLnBrk="1" latinLnBrk="0" hangingPunct="1">
+              <a:lnSpc>
+                <a:spcPct val="90000"/>
+              </a:lnSpc>
+              <a:spcBef>
+                <a:spcPts val="500"/>
+              </a:spcBef>
+              <a:buFont typeface="Arial" panose="020B0604020202020204" pitchFamily="34" charset="0"/>
+              <a:buChar char="•"/>
+              <a:defRPr sz="1800" kern="1200">
+                <a:solidFill>
+                  <a:schemeClr val="tx1"/>
+                </a:solidFill>
+                <a:latin typeface="+mn-lt"/>
+                <a:ea typeface="+mn-ea"/>
+                <a:cs typeface="+mn-cs"/>
+              </a:defRPr>
+            </a:lvl4pPr>
+            <a:lvl5pPr marL="2057400" indent="-228600" algn="l" defTabSz="914400" rtl="0" eaLnBrk="1" latinLnBrk="0" hangingPunct="1">
+              <a:lnSpc>
+                <a:spcPct val="90000"/>
+              </a:lnSpc>
+              <a:spcBef>
+                <a:spcPts val="500"/>
+              </a:spcBef>
+              <a:buFont typeface="Arial" panose="020B0604020202020204" pitchFamily="34" charset="0"/>
+              <a:buChar char="•"/>
+              <a:defRPr sz="1800" kern="1200">
+                <a:solidFill>
+                  <a:schemeClr val="tx1"/>
+                </a:solidFill>
+                <a:latin typeface="+mn-lt"/>
+                <a:ea typeface="+mn-ea"/>
+                <a:cs typeface="+mn-cs"/>
+              </a:defRPr>
+            </a:lvl5pPr>
+            <a:lvl6pPr marL="2514600" indent="-228600" algn="l" defTabSz="914400" rtl="0" eaLnBrk="1" latinLnBrk="0" hangingPunct="1">
+              <a:lnSpc>
+                <a:spcPct val="90000"/>
+              </a:lnSpc>
+              <a:spcBef>
+                <a:spcPts val="500"/>
+              </a:spcBef>
+              <a:buFont typeface="Arial" panose="020B0604020202020204" pitchFamily="34" charset="0"/>
+              <a:buChar char="•"/>
+              <a:defRPr sz="1800" kern="1200">
+                <a:solidFill>
+                  <a:schemeClr val="tx1"/>
+                </a:solidFill>
+                <a:latin typeface="+mn-lt"/>
+                <a:ea typeface="+mn-ea"/>
+                <a:cs typeface="+mn-cs"/>
+              </a:defRPr>
+            </a:lvl6pPr>
+            <a:lvl7pPr marL="2971800" indent="-228600" algn="l" defTabSz="914400" rtl="0" eaLnBrk="1" latinLnBrk="0" hangingPunct="1">
+              <a:lnSpc>
+                <a:spcPct val="90000"/>
+              </a:lnSpc>
+              <a:spcBef>
+                <a:spcPts val="500"/>
+              </a:spcBef>
+              <a:buFont typeface="Arial" panose="020B0604020202020204" pitchFamily="34" charset="0"/>
+              <a:buChar char="•"/>
+              <a:defRPr sz="1800" kern="1200">
+                <a:solidFill>
+                  <a:schemeClr val="tx1"/>
+                </a:solidFill>
+                <a:latin typeface="+mn-lt"/>
+                <a:ea typeface="+mn-ea"/>
+                <a:cs typeface="+mn-cs"/>
+              </a:defRPr>
+            </a:lvl7pPr>
+            <a:lvl8pPr marL="3429000" indent="-228600" algn="l" defTabSz="914400" rtl="0" eaLnBrk="1" latinLnBrk="0" hangingPunct="1">
+              <a:lnSpc>
+                <a:spcPct val="90000"/>
+              </a:lnSpc>
+              <a:spcBef>
+                <a:spcPts val="500"/>
+              </a:spcBef>
+              <a:buFont typeface="Arial" panose="020B0604020202020204" pitchFamily="34" charset="0"/>
+              <a:buChar char="•"/>
+              <a:defRPr sz="1800" kern="1200">
+                <a:solidFill>
+                  <a:schemeClr val="tx1"/>
+                </a:solidFill>
+                <a:latin typeface="+mn-lt"/>
+                <a:ea typeface="+mn-ea"/>
+                <a:cs typeface="+mn-cs"/>
+              </a:defRPr>
+            </a:lvl8pPr>
+            <a:lvl9pPr marL="3886200" indent="-228600" algn="l" defTabSz="914400" rtl="0" eaLnBrk="1" latinLnBrk="0" hangingPunct="1">
+              <a:lnSpc>
+                <a:spcPct val="90000"/>
+              </a:lnSpc>
+              <a:spcBef>
+                <a:spcPts val="500"/>
+              </a:spcBef>
+              <a:buFont typeface="Arial" panose="020B0604020202020204" pitchFamily="34" charset="0"/>
+              <a:buChar char="•"/>
+              <a:defRPr sz="1800" kern="1200">
+                <a:solidFill>
+                  <a:schemeClr val="tx1"/>
+                </a:solidFill>
+                <a:latin typeface="+mn-lt"/>
+                <a:ea typeface="+mn-ea"/>
+                <a:cs typeface="+mn-cs"/>
+              </a:defRPr>
+            </a:lvl9pPr>
+          </a:lstStyle>
+          <a:p>
+            <a:pPr marL="0" indent="0">
+              <a:buFont typeface="Arial" panose="020B0604020202020204" pitchFamily="34" charset="0"/>
+              <a:buNone/>
+            </a:pPr>
+            <a:r>
+              <a:rPr lang="en-NZ" noProof="0" dirty="0"/>
+              <a:t>Analyse notes from testing and note changes to be made:</a:t>
+            </a:r>
+          </a:p>
+        </p:txBody>
+      </p:sp>
+      <p:sp>
+        <p:nvSpPr>
+          <p:cNvPr id="6" name="Content Placeholder 2">
+            <a:extLst>
+              <a:ext uri="{FF2B5EF4-FFF2-40B4-BE49-F238E27FC236}">
+                <a16:creationId xmlns:a16="http://schemas.microsoft.com/office/drawing/2014/main" id="{4FBA3B69-CE34-9320-97C4-16C15C4852CE}"/>
+              </a:ext>
+            </a:extLst>
+          </p:cNvPr>
+          <p:cNvSpPr txBox="1">
+            <a:spLocks/>
+          </p:cNvSpPr>
+          <p:nvPr/>
+        </p:nvSpPr>
+        <p:spPr>
+          <a:xfrm>
+            <a:off x="943898" y="1986117"/>
+            <a:ext cx="10225548" cy="530941"/>
+          </a:xfrm>
+          <a:prstGeom prst="rect">
+            <a:avLst/>
+          </a:prstGeom>
+          <a:solidFill>
+            <a:srgbClr val="FFFFCC"/>
+          </a:solidFill>
+        </p:spPr>
+        <p:txBody>
+          <a:bodyPr vert="horz" lIns="91440" tIns="45720" rIns="91440" bIns="45720" rtlCol="0">
+            <a:normAutofit/>
+          </a:bodyPr>
+          <a:lstStyle>
+            <a:lvl1pPr marL="228600" indent="-228600" algn="l" defTabSz="914400" rtl="0" eaLnBrk="1" latinLnBrk="0" hangingPunct="1">
+              <a:lnSpc>
+                <a:spcPct val="90000"/>
+              </a:lnSpc>
+              <a:spcBef>
+                <a:spcPts val="1000"/>
+              </a:spcBef>
+              <a:buFont typeface="Arial" panose="020B0604020202020204" pitchFamily="34" charset="0"/>
+              <a:buChar char="•"/>
+              <a:defRPr sz="2800" kern="1200">
+                <a:solidFill>
+                  <a:schemeClr val="tx1"/>
+                </a:solidFill>
+                <a:latin typeface="+mn-lt"/>
+                <a:ea typeface="+mn-ea"/>
+                <a:cs typeface="+mn-cs"/>
+              </a:defRPr>
+            </a:lvl1pPr>
+            <a:lvl2pPr marL="685800" indent="-228600" algn="l" defTabSz="914400" rtl="0" eaLnBrk="1" latinLnBrk="0" hangingPunct="1">
+              <a:lnSpc>
+                <a:spcPct val="90000"/>
+              </a:lnSpc>
+              <a:spcBef>
+                <a:spcPts val="500"/>
+              </a:spcBef>
+              <a:buFont typeface="Arial" panose="020B0604020202020204" pitchFamily="34" charset="0"/>
+              <a:buChar char="•"/>
+              <a:defRPr sz="2400" kern="1200">
+                <a:solidFill>
+                  <a:schemeClr val="tx1"/>
+                </a:solidFill>
+                <a:latin typeface="+mn-lt"/>
+                <a:ea typeface="+mn-ea"/>
+                <a:cs typeface="+mn-cs"/>
+              </a:defRPr>
+            </a:lvl2pPr>
+            <a:lvl3pPr marL="1143000" indent="-228600" algn="l" defTabSz="914400" rtl="0" eaLnBrk="1" latinLnBrk="0" hangingPunct="1">
+              <a:lnSpc>
+                <a:spcPct val="90000"/>
+              </a:lnSpc>
+              <a:spcBef>
+                <a:spcPts val="500"/>
+              </a:spcBef>
+              <a:buFont typeface="Arial" panose="020B0604020202020204" pitchFamily="34" charset="0"/>
+              <a:buChar char="•"/>
+              <a:defRPr sz="2000" kern="1200">
+                <a:solidFill>
+                  <a:schemeClr val="tx1"/>
+                </a:solidFill>
+                <a:latin typeface="+mn-lt"/>
+                <a:ea typeface="+mn-ea"/>
+                <a:cs typeface="+mn-cs"/>
+              </a:defRPr>
+            </a:lvl3pPr>
+            <a:lvl4pPr marL="1600200" indent="-228600" algn="l" defTabSz="914400" rtl="0" eaLnBrk="1" latinLnBrk="0" hangingPunct="1">
+              <a:lnSpc>
+                <a:spcPct val="90000"/>
+              </a:lnSpc>
+              <a:spcBef>
+                <a:spcPts val="500"/>
+              </a:spcBef>
+              <a:buFont typeface="Arial" panose="020B0604020202020204" pitchFamily="34" charset="0"/>
+              <a:buChar char="•"/>
+              <a:defRPr sz="1800" kern="1200">
+                <a:solidFill>
+                  <a:schemeClr val="tx1"/>
+                </a:solidFill>
+                <a:latin typeface="+mn-lt"/>
+                <a:ea typeface="+mn-ea"/>
+                <a:cs typeface="+mn-cs"/>
+              </a:defRPr>
+            </a:lvl4pPr>
+            <a:lvl5pPr marL="2057400" indent="-228600" algn="l" defTabSz="914400" rtl="0" eaLnBrk="1" latinLnBrk="0" hangingPunct="1">
+              <a:lnSpc>
+                <a:spcPct val="90000"/>
+              </a:lnSpc>
+              <a:spcBef>
+                <a:spcPts val="500"/>
+              </a:spcBef>
+              <a:buFont typeface="Arial" panose="020B0604020202020204" pitchFamily="34" charset="0"/>
+              <a:buChar char="•"/>
+              <a:defRPr sz="1800" kern="1200">
+                <a:solidFill>
+                  <a:schemeClr val="tx1"/>
+                </a:solidFill>
+                <a:latin typeface="+mn-lt"/>
+                <a:ea typeface="+mn-ea"/>
+                <a:cs typeface="+mn-cs"/>
+              </a:defRPr>
+            </a:lvl5pPr>
+            <a:lvl6pPr marL="2514600" indent="-228600" algn="l" defTabSz="914400" rtl="0" eaLnBrk="1" latinLnBrk="0" hangingPunct="1">
+              <a:lnSpc>
+                <a:spcPct val="90000"/>
+              </a:lnSpc>
+              <a:spcBef>
+                <a:spcPts val="500"/>
+              </a:spcBef>
+              <a:buFont typeface="Arial" panose="020B0604020202020204" pitchFamily="34" charset="0"/>
+              <a:buChar char="•"/>
+              <a:defRPr sz="1800" kern="1200">
+                <a:solidFill>
+                  <a:schemeClr val="tx1"/>
+                </a:solidFill>
+                <a:latin typeface="+mn-lt"/>
+                <a:ea typeface="+mn-ea"/>
+                <a:cs typeface="+mn-cs"/>
+              </a:defRPr>
+            </a:lvl6pPr>
+            <a:lvl7pPr marL="2971800" indent="-228600" algn="l" defTabSz="914400" rtl="0" eaLnBrk="1" latinLnBrk="0" hangingPunct="1">
+              <a:lnSpc>
+                <a:spcPct val="90000"/>
+              </a:lnSpc>
+              <a:spcBef>
+                <a:spcPts val="500"/>
+              </a:spcBef>
+              <a:buFont typeface="Arial" panose="020B0604020202020204" pitchFamily="34" charset="0"/>
+              <a:buChar char="•"/>
+              <a:defRPr sz="1800" kern="1200">
+                <a:solidFill>
+                  <a:schemeClr val="tx1"/>
+                </a:solidFill>
+                <a:latin typeface="+mn-lt"/>
+                <a:ea typeface="+mn-ea"/>
+                <a:cs typeface="+mn-cs"/>
+              </a:defRPr>
+            </a:lvl7pPr>
+            <a:lvl8pPr marL="3429000" indent="-228600" algn="l" defTabSz="914400" rtl="0" eaLnBrk="1" latinLnBrk="0" hangingPunct="1">
+              <a:lnSpc>
+                <a:spcPct val="90000"/>
+              </a:lnSpc>
+              <a:spcBef>
+                <a:spcPts val="500"/>
+              </a:spcBef>
+              <a:buFont typeface="Arial" panose="020B0604020202020204" pitchFamily="34" charset="0"/>
+              <a:buChar char="•"/>
+              <a:defRPr sz="1800" kern="1200">
+                <a:solidFill>
+                  <a:schemeClr val="tx1"/>
+                </a:solidFill>
+                <a:latin typeface="+mn-lt"/>
+                <a:ea typeface="+mn-ea"/>
+                <a:cs typeface="+mn-cs"/>
+              </a:defRPr>
+            </a:lvl8pPr>
+            <a:lvl9pPr marL="3886200" indent="-228600" algn="l" defTabSz="914400" rtl="0" eaLnBrk="1" latinLnBrk="0" hangingPunct="1">
+              <a:lnSpc>
+                <a:spcPct val="90000"/>
+              </a:lnSpc>
+              <a:spcBef>
+                <a:spcPts val="500"/>
+              </a:spcBef>
+              <a:buFont typeface="Arial" panose="020B0604020202020204" pitchFamily="34" charset="0"/>
+              <a:buChar char="•"/>
+              <a:defRPr sz="1800" kern="1200">
+                <a:solidFill>
+                  <a:schemeClr val="tx1"/>
+                </a:solidFill>
+                <a:latin typeface="+mn-lt"/>
+                <a:ea typeface="+mn-ea"/>
+                <a:cs typeface="+mn-cs"/>
+              </a:defRPr>
+            </a:lvl9pPr>
+          </a:lstStyle>
+          <a:p>
+            <a:pPr marL="0" indent="0">
+              <a:buFont typeface="Arial" panose="020B0604020202020204" pitchFamily="34" charset="0"/>
+              <a:buNone/>
+            </a:pPr>
+            <a:r>
+              <a:rPr lang="en-NZ" dirty="0"/>
+              <a:t>Test your circuits at least 10 times</a:t>
+            </a:r>
+            <a:endParaRPr lang="en-NZ" noProof="0" dirty="0"/>
+          </a:p>
+        </p:txBody>
+      </p:sp>
+      <p:sp>
+        <p:nvSpPr>
+          <p:cNvPr id="11" name="Content Placeholder 2">
+            <a:extLst>
+              <a:ext uri="{FF2B5EF4-FFF2-40B4-BE49-F238E27FC236}">
+                <a16:creationId xmlns:a16="http://schemas.microsoft.com/office/drawing/2014/main" id="{E3D936A8-CA08-48BB-AA98-F3A8B43B31CF}"/>
+              </a:ext>
+            </a:extLst>
+          </p:cNvPr>
+          <p:cNvSpPr txBox="1">
+            <a:spLocks/>
+          </p:cNvSpPr>
+          <p:nvPr/>
+        </p:nvSpPr>
+        <p:spPr>
+          <a:xfrm>
+            <a:off x="983226" y="2812487"/>
+            <a:ext cx="10225548" cy="1824114"/>
+          </a:xfrm>
+          <a:prstGeom prst="rect">
+            <a:avLst/>
+          </a:prstGeom>
+          <a:solidFill>
+            <a:srgbClr val="FFFFCC"/>
+          </a:solidFill>
+        </p:spPr>
+        <p:txBody>
+          <a:bodyPr vert="horz" lIns="91440" tIns="45720" rIns="91440" bIns="45720" rtlCol="0">
+            <a:normAutofit fontScale="70000" lnSpcReduction="20000"/>
+          </a:bodyPr>
+          <a:lstStyle>
+            <a:lvl1pPr marL="228600" indent="-228600" algn="l" defTabSz="914400" rtl="0" eaLnBrk="1" latinLnBrk="0" hangingPunct="1">
+              <a:lnSpc>
+                <a:spcPct val="90000"/>
+              </a:lnSpc>
+              <a:spcBef>
+                <a:spcPts val="1000"/>
+              </a:spcBef>
+              <a:buFont typeface="Arial" panose="020B0604020202020204" pitchFamily="34" charset="0"/>
+              <a:buChar char="•"/>
+              <a:defRPr sz="2800" kern="1200">
+                <a:solidFill>
+                  <a:schemeClr val="tx1"/>
+                </a:solidFill>
+                <a:latin typeface="+mn-lt"/>
+                <a:ea typeface="+mn-ea"/>
+                <a:cs typeface="+mn-cs"/>
+              </a:defRPr>
+            </a:lvl1pPr>
+            <a:lvl2pPr marL="685800" indent="-228600" algn="l" defTabSz="914400" rtl="0" eaLnBrk="1" latinLnBrk="0" hangingPunct="1">
+              <a:lnSpc>
+                <a:spcPct val="90000"/>
+              </a:lnSpc>
+              <a:spcBef>
+                <a:spcPts val="500"/>
+              </a:spcBef>
+              <a:buFont typeface="Arial" panose="020B0604020202020204" pitchFamily="34" charset="0"/>
+              <a:buChar char="•"/>
+              <a:defRPr sz="2400" kern="1200">
+                <a:solidFill>
+                  <a:schemeClr val="tx1"/>
+                </a:solidFill>
+                <a:latin typeface="+mn-lt"/>
+                <a:ea typeface="+mn-ea"/>
+                <a:cs typeface="+mn-cs"/>
+              </a:defRPr>
+            </a:lvl2pPr>
+            <a:lvl3pPr marL="1143000" indent="-228600" algn="l" defTabSz="914400" rtl="0" eaLnBrk="1" latinLnBrk="0" hangingPunct="1">
+              <a:lnSpc>
+                <a:spcPct val="90000"/>
+              </a:lnSpc>
+              <a:spcBef>
+                <a:spcPts val="500"/>
+              </a:spcBef>
+              <a:buFont typeface="Arial" panose="020B0604020202020204" pitchFamily="34" charset="0"/>
+              <a:buChar char="•"/>
+              <a:defRPr sz="2000" kern="1200">
+                <a:solidFill>
+                  <a:schemeClr val="tx1"/>
+                </a:solidFill>
+                <a:latin typeface="+mn-lt"/>
+                <a:ea typeface="+mn-ea"/>
+                <a:cs typeface="+mn-cs"/>
+              </a:defRPr>
+            </a:lvl3pPr>
+            <a:lvl4pPr marL="1600200" indent="-228600" algn="l" defTabSz="914400" rtl="0" eaLnBrk="1" latinLnBrk="0" hangingPunct="1">
+              <a:lnSpc>
+                <a:spcPct val="90000"/>
+              </a:lnSpc>
+              <a:spcBef>
+                <a:spcPts val="500"/>
+              </a:spcBef>
+              <a:buFont typeface="Arial" panose="020B0604020202020204" pitchFamily="34" charset="0"/>
+              <a:buChar char="•"/>
+              <a:defRPr sz="1800" kern="1200">
+                <a:solidFill>
+                  <a:schemeClr val="tx1"/>
+                </a:solidFill>
+                <a:latin typeface="+mn-lt"/>
+                <a:ea typeface="+mn-ea"/>
+                <a:cs typeface="+mn-cs"/>
+              </a:defRPr>
+            </a:lvl4pPr>
+            <a:lvl5pPr marL="2057400" indent="-228600" algn="l" defTabSz="914400" rtl="0" eaLnBrk="1" latinLnBrk="0" hangingPunct="1">
+              <a:lnSpc>
+                <a:spcPct val="90000"/>
+              </a:lnSpc>
+              <a:spcBef>
+                <a:spcPts val="500"/>
+              </a:spcBef>
+              <a:buFont typeface="Arial" panose="020B0604020202020204" pitchFamily="34" charset="0"/>
+              <a:buChar char="•"/>
+              <a:defRPr sz="1800" kern="1200">
+                <a:solidFill>
+                  <a:schemeClr val="tx1"/>
+                </a:solidFill>
+                <a:latin typeface="+mn-lt"/>
+                <a:ea typeface="+mn-ea"/>
+                <a:cs typeface="+mn-cs"/>
+              </a:defRPr>
+            </a:lvl5pPr>
+            <a:lvl6pPr marL="2514600" indent="-228600" algn="l" defTabSz="914400" rtl="0" eaLnBrk="1" latinLnBrk="0" hangingPunct="1">
+              <a:lnSpc>
+                <a:spcPct val="90000"/>
+              </a:lnSpc>
+              <a:spcBef>
+                <a:spcPts val="500"/>
+              </a:spcBef>
+              <a:buFont typeface="Arial" panose="020B0604020202020204" pitchFamily="34" charset="0"/>
+              <a:buChar char="•"/>
+              <a:defRPr sz="1800" kern="1200">
+                <a:solidFill>
+                  <a:schemeClr val="tx1"/>
+                </a:solidFill>
+                <a:latin typeface="+mn-lt"/>
+                <a:ea typeface="+mn-ea"/>
+                <a:cs typeface="+mn-cs"/>
+              </a:defRPr>
+            </a:lvl6pPr>
+            <a:lvl7pPr marL="2971800" indent="-228600" algn="l" defTabSz="914400" rtl="0" eaLnBrk="1" latinLnBrk="0" hangingPunct="1">
+              <a:lnSpc>
+                <a:spcPct val="90000"/>
+              </a:lnSpc>
+              <a:spcBef>
+                <a:spcPts val="500"/>
+              </a:spcBef>
+              <a:buFont typeface="Arial" panose="020B0604020202020204" pitchFamily="34" charset="0"/>
+              <a:buChar char="•"/>
+              <a:defRPr sz="1800" kern="1200">
+                <a:solidFill>
+                  <a:schemeClr val="tx1"/>
+                </a:solidFill>
+                <a:latin typeface="+mn-lt"/>
+                <a:ea typeface="+mn-ea"/>
+                <a:cs typeface="+mn-cs"/>
+              </a:defRPr>
+            </a:lvl7pPr>
+            <a:lvl8pPr marL="3429000" indent="-228600" algn="l" defTabSz="914400" rtl="0" eaLnBrk="1" latinLnBrk="0" hangingPunct="1">
+              <a:lnSpc>
+                <a:spcPct val="90000"/>
+              </a:lnSpc>
+              <a:spcBef>
+                <a:spcPts val="500"/>
+              </a:spcBef>
+              <a:buFont typeface="Arial" panose="020B0604020202020204" pitchFamily="34" charset="0"/>
+              <a:buChar char="•"/>
+              <a:defRPr sz="1800" kern="1200">
+                <a:solidFill>
+                  <a:schemeClr val="tx1"/>
+                </a:solidFill>
+                <a:latin typeface="+mn-lt"/>
+                <a:ea typeface="+mn-ea"/>
+                <a:cs typeface="+mn-cs"/>
+              </a:defRPr>
+            </a:lvl8pPr>
+            <a:lvl9pPr marL="3886200" indent="-228600" algn="l" defTabSz="914400" rtl="0" eaLnBrk="1" latinLnBrk="0" hangingPunct="1">
+              <a:lnSpc>
+                <a:spcPct val="90000"/>
+              </a:lnSpc>
+              <a:spcBef>
+                <a:spcPts val="500"/>
+              </a:spcBef>
+              <a:buFont typeface="Arial" panose="020B0604020202020204" pitchFamily="34" charset="0"/>
+              <a:buChar char="•"/>
+              <a:defRPr sz="1800" kern="1200">
+                <a:solidFill>
+                  <a:schemeClr val="tx1"/>
+                </a:solidFill>
+                <a:latin typeface="+mn-lt"/>
+                <a:ea typeface="+mn-ea"/>
+                <a:cs typeface="+mn-cs"/>
+              </a:defRPr>
+            </a:lvl9pPr>
+          </a:lstStyle>
+          <a:p>
+            <a:pPr marL="0" indent="0">
+              <a:buNone/>
+            </a:pPr>
+            <a:r>
+              <a:rPr lang="en-NZ" dirty="0"/>
+              <a:t>Reliability Notes from Testing:</a:t>
+            </a:r>
+            <a:br>
+              <a:rPr lang="en-NZ" dirty="0"/>
+            </a:br>
+            <a:r>
+              <a:rPr lang="en-NZ" dirty="0"/>
+              <a:t>The LED indicator circuit was tested through 10 switching cycles to check its reliability during operation. During the first three tests, the LEDs showed some flickering when the 800W motor was running, which was caused by electrical noise affecting the Arduino’s output signal. Before the fourth trial, a 0.1µF capacitor was added to smooth the output signal along with the 1kΩ current-limiting resistor. In the remaining seven tests, the LEDs operated consistently with no flickering or signal issues, showing that the changes improved the reliability of the system.</a:t>
+            </a:r>
+          </a:p>
+          <a:p>
+            <a:pPr marL="0" indent="0">
+              <a:buNone/>
+            </a:pPr>
+            <a:endParaRPr lang="en-NZ" noProof="0" dirty="0"/>
+          </a:p>
+        </p:txBody>
+      </p:sp>
+    </p:spTree>
+    <p:extLst>
+      <p:ext uri="{BB962C8B-B14F-4D97-AF65-F5344CB8AC3E}">
+        <p14:creationId xmlns:p14="http://schemas.microsoft.com/office/powerpoint/2010/main" val="3290795109"/>
       </p:ext>
     </p:extLst>
   </p:cSld>
@@ -11278,39 +10330,20 @@
             </a:pPr>
             <a:r>
               <a:rPr lang="en-NZ" noProof="0" dirty="0"/>
-              <a:t>Describe your project here: A 70cc hybrid </a:t>
-            </a:r>
-            <a:r>
-              <a:rPr lang="en-NZ" noProof="0" dirty="0" err="1"/>
-              <a:t>pitbike</a:t>
-            </a:r>
-            <a:r>
-              <a:rPr lang="en-NZ" noProof="0" dirty="0"/>
-              <a:t> with the 70cc engine being paired with a 800w 36v electric motor, that uses sensors like digital/</a:t>
-            </a:r>
-            <a:r>
-              <a:rPr lang="en-NZ" noProof="0" dirty="0" err="1"/>
-              <a:t>analog</a:t>
-            </a:r>
-            <a:r>
-              <a:rPr lang="en-NZ" noProof="0" dirty="0"/>
-              <a:t> hall effect sensors that act as throttle and speed matching sensors that will run </a:t>
-            </a:r>
-            <a:r>
-              <a:rPr lang="en-NZ" noProof="0" dirty="0" err="1"/>
-              <a:t>parralel</a:t>
-            </a:r>
-            <a:r>
-              <a:rPr lang="en-NZ" noProof="0" dirty="0"/>
-              <a:t> to the engine itself to give the bike more torque and power, this is because a 70cc engine has very weak low end (low rpms) torque where a electric </a:t>
-            </a:r>
-            <a:r>
-              <a:rPr lang="en-NZ" noProof="0"/>
-              <a:t>motor doesn’t.</a:t>
-            </a:r>
-            <a:br>
-              <a:rPr lang="en-NZ" noProof="0" dirty="0"/>
-            </a:br>
+              <a:t>Describe your project here:</a:t>
+            </a:r>
+            <a:r>
+              <a:rPr lang="en-NZ" dirty="0"/>
+              <a:t> This project is a hybrid 70cc pit bike that combines a petrol engine with an 800 W, 36 V electric motor to improve low-speed torque and acceleration. An Arduino Uno R4 </a:t>
+            </a:r>
+            <a:r>
+              <a:rPr lang="en-NZ" dirty="0" err="1"/>
+              <a:t>WiFi</a:t>
+            </a:r>
+            <a:r>
+              <a:rPr lang="en-NZ" dirty="0"/>
+              <a:t> uses analogue and digital Hall effect sensors to monitor throttle position and engine speed, then controls the electric motor through a motor controller. An electromagnetic clutch engages the motor only when assistance is needed, creating a hybrid drivetrain that combines mechanical and electronic systems.</a:t>
+            </a:r>
             <a:br>
               <a:rPr lang="en-NZ" noProof="0" dirty="0"/>
             </a:br>
@@ -11343,6 +10376,781 @@
 </file>
 
 <file path=ppt/slides/slide20.xml><?xml version="1.0" encoding="utf-8"?>
+<p:sld xmlns:a="http://schemas.openxmlformats.org/drawingml/2006/main" xmlns:r="http://schemas.openxmlformats.org/officeDocument/2006/relationships" xmlns:p="http://schemas.openxmlformats.org/presentationml/2006/main">
+  <p:cSld>
+    <p:spTree>
+      <p:nvGrpSpPr>
+        <p:cNvPr id="1" name="">
+          <a:extLst>
+            <a:ext uri="{FF2B5EF4-FFF2-40B4-BE49-F238E27FC236}">
+              <a16:creationId xmlns:a16="http://schemas.microsoft.com/office/drawing/2014/main" id="{E774EB2B-85A8-4549-4E6D-72F4823A201A}"/>
+            </a:ext>
+          </a:extLst>
+        </p:cNvPr>
+        <p:cNvGrpSpPr/>
+        <p:nvPr/>
+      </p:nvGrpSpPr>
+      <p:grpSpPr>
+        <a:xfrm>
+          <a:off x="0" y="0"/>
+          <a:ext cx="0" cy="0"/>
+          <a:chOff x="0" y="0"/>
+          <a:chExt cx="0" cy="0"/>
+        </a:xfrm>
+      </p:grpSpPr>
+      <p:sp>
+        <p:nvSpPr>
+          <p:cNvPr id="2" name="Title 1">
+            <a:extLst>
+              <a:ext uri="{FF2B5EF4-FFF2-40B4-BE49-F238E27FC236}">
+                <a16:creationId xmlns:a16="http://schemas.microsoft.com/office/drawing/2014/main" id="{5AD3A040-4DF6-3A52-2828-494419344D41}"/>
+              </a:ext>
+            </a:extLst>
+          </p:cNvPr>
+          <p:cNvSpPr>
+            <a:spLocks noGrp="1"/>
+          </p:cNvSpPr>
+          <p:nvPr>
+            <p:ph type="title"/>
+          </p:nvPr>
+        </p:nvSpPr>
+        <p:spPr>
+          <a:solidFill>
+            <a:schemeClr val="accent3">
+              <a:lumMod val="20000"/>
+              <a:lumOff val="80000"/>
+            </a:schemeClr>
+          </a:solidFill>
+        </p:spPr>
+        <p:txBody>
+          <a:bodyPr/>
+          <a:lstStyle/>
+          <a:p>
+            <a:r>
+              <a:rPr lang="en-NZ" noProof="0" dirty="0"/>
+              <a:t>Choice of Component/System </a:t>
+            </a:r>
+            <a:r>
+              <a:rPr lang="en-NZ" dirty="0"/>
+              <a:t>4</a:t>
+            </a:r>
+            <a:endParaRPr lang="en-NZ" noProof="0" dirty="0"/>
+          </a:p>
+        </p:txBody>
+      </p:sp>
+      <p:sp>
+        <p:nvSpPr>
+          <p:cNvPr id="5" name="Content Placeholder 2">
+            <a:extLst>
+              <a:ext uri="{FF2B5EF4-FFF2-40B4-BE49-F238E27FC236}">
+                <a16:creationId xmlns:a16="http://schemas.microsoft.com/office/drawing/2014/main" id="{208AF426-607B-1936-143C-7541AD8896ED}"/>
+              </a:ext>
+            </a:extLst>
+          </p:cNvPr>
+          <p:cNvSpPr txBox="1">
+            <a:spLocks/>
+          </p:cNvSpPr>
+          <p:nvPr/>
+        </p:nvSpPr>
+        <p:spPr>
+          <a:xfrm>
+            <a:off x="838200" y="3646026"/>
+            <a:ext cx="10225548" cy="2726095"/>
+          </a:xfrm>
+          <a:prstGeom prst="rect">
+            <a:avLst/>
+          </a:prstGeom>
+          <a:solidFill>
+            <a:schemeClr val="accent6">
+              <a:lumMod val="20000"/>
+              <a:lumOff val="80000"/>
+            </a:schemeClr>
+          </a:solidFill>
+        </p:spPr>
+        <p:txBody>
+          <a:bodyPr vert="horz" lIns="91440" tIns="45720" rIns="91440" bIns="45720" rtlCol="0">
+            <a:normAutofit/>
+          </a:bodyPr>
+          <a:lstStyle>
+            <a:lvl1pPr marL="228600" indent="-228600" algn="l" defTabSz="914400" rtl="0" eaLnBrk="1" latinLnBrk="0" hangingPunct="1">
+              <a:lnSpc>
+                <a:spcPct val="90000"/>
+              </a:lnSpc>
+              <a:spcBef>
+                <a:spcPts val="1000"/>
+              </a:spcBef>
+              <a:buFont typeface="Arial" panose="020B0604020202020204" pitchFamily="34" charset="0"/>
+              <a:buChar char="•"/>
+              <a:defRPr sz="2800" kern="1200">
+                <a:solidFill>
+                  <a:schemeClr val="tx1"/>
+                </a:solidFill>
+                <a:latin typeface="+mn-lt"/>
+                <a:ea typeface="+mn-ea"/>
+                <a:cs typeface="+mn-cs"/>
+              </a:defRPr>
+            </a:lvl1pPr>
+            <a:lvl2pPr marL="685800" indent="-228600" algn="l" defTabSz="914400" rtl="0" eaLnBrk="1" latinLnBrk="0" hangingPunct="1">
+              <a:lnSpc>
+                <a:spcPct val="90000"/>
+              </a:lnSpc>
+              <a:spcBef>
+                <a:spcPts val="500"/>
+              </a:spcBef>
+              <a:buFont typeface="Arial" panose="020B0604020202020204" pitchFamily="34" charset="0"/>
+              <a:buChar char="•"/>
+              <a:defRPr sz="2400" kern="1200">
+                <a:solidFill>
+                  <a:schemeClr val="tx1"/>
+                </a:solidFill>
+                <a:latin typeface="+mn-lt"/>
+                <a:ea typeface="+mn-ea"/>
+                <a:cs typeface="+mn-cs"/>
+              </a:defRPr>
+            </a:lvl2pPr>
+            <a:lvl3pPr marL="1143000" indent="-228600" algn="l" defTabSz="914400" rtl="0" eaLnBrk="1" latinLnBrk="0" hangingPunct="1">
+              <a:lnSpc>
+                <a:spcPct val="90000"/>
+              </a:lnSpc>
+              <a:spcBef>
+                <a:spcPts val="500"/>
+              </a:spcBef>
+              <a:buFont typeface="Arial" panose="020B0604020202020204" pitchFamily="34" charset="0"/>
+              <a:buChar char="•"/>
+              <a:defRPr sz="2000" kern="1200">
+                <a:solidFill>
+                  <a:schemeClr val="tx1"/>
+                </a:solidFill>
+                <a:latin typeface="+mn-lt"/>
+                <a:ea typeface="+mn-ea"/>
+                <a:cs typeface="+mn-cs"/>
+              </a:defRPr>
+            </a:lvl3pPr>
+            <a:lvl4pPr marL="1600200" indent="-228600" algn="l" defTabSz="914400" rtl="0" eaLnBrk="1" latinLnBrk="0" hangingPunct="1">
+              <a:lnSpc>
+                <a:spcPct val="90000"/>
+              </a:lnSpc>
+              <a:spcBef>
+                <a:spcPts val="500"/>
+              </a:spcBef>
+              <a:buFont typeface="Arial" panose="020B0604020202020204" pitchFamily="34" charset="0"/>
+              <a:buChar char="•"/>
+              <a:defRPr sz="1800" kern="1200">
+                <a:solidFill>
+                  <a:schemeClr val="tx1"/>
+                </a:solidFill>
+                <a:latin typeface="+mn-lt"/>
+                <a:ea typeface="+mn-ea"/>
+                <a:cs typeface="+mn-cs"/>
+              </a:defRPr>
+            </a:lvl4pPr>
+            <a:lvl5pPr marL="2057400" indent="-228600" algn="l" defTabSz="914400" rtl="0" eaLnBrk="1" latinLnBrk="0" hangingPunct="1">
+              <a:lnSpc>
+                <a:spcPct val="90000"/>
+              </a:lnSpc>
+              <a:spcBef>
+                <a:spcPts val="500"/>
+              </a:spcBef>
+              <a:buFont typeface="Arial" panose="020B0604020202020204" pitchFamily="34" charset="0"/>
+              <a:buChar char="•"/>
+              <a:defRPr sz="1800" kern="1200">
+                <a:solidFill>
+                  <a:schemeClr val="tx1"/>
+                </a:solidFill>
+                <a:latin typeface="+mn-lt"/>
+                <a:ea typeface="+mn-ea"/>
+                <a:cs typeface="+mn-cs"/>
+              </a:defRPr>
+            </a:lvl5pPr>
+            <a:lvl6pPr marL="2514600" indent="-228600" algn="l" defTabSz="914400" rtl="0" eaLnBrk="1" latinLnBrk="0" hangingPunct="1">
+              <a:lnSpc>
+                <a:spcPct val="90000"/>
+              </a:lnSpc>
+              <a:spcBef>
+                <a:spcPts val="500"/>
+              </a:spcBef>
+              <a:buFont typeface="Arial" panose="020B0604020202020204" pitchFamily="34" charset="0"/>
+              <a:buChar char="•"/>
+              <a:defRPr sz="1800" kern="1200">
+                <a:solidFill>
+                  <a:schemeClr val="tx1"/>
+                </a:solidFill>
+                <a:latin typeface="+mn-lt"/>
+                <a:ea typeface="+mn-ea"/>
+                <a:cs typeface="+mn-cs"/>
+              </a:defRPr>
+            </a:lvl6pPr>
+            <a:lvl7pPr marL="2971800" indent="-228600" algn="l" defTabSz="914400" rtl="0" eaLnBrk="1" latinLnBrk="0" hangingPunct="1">
+              <a:lnSpc>
+                <a:spcPct val="90000"/>
+              </a:lnSpc>
+              <a:spcBef>
+                <a:spcPts val="500"/>
+              </a:spcBef>
+              <a:buFont typeface="Arial" panose="020B0604020202020204" pitchFamily="34" charset="0"/>
+              <a:buChar char="•"/>
+              <a:defRPr sz="1800" kern="1200">
+                <a:solidFill>
+                  <a:schemeClr val="tx1"/>
+                </a:solidFill>
+                <a:latin typeface="+mn-lt"/>
+                <a:ea typeface="+mn-ea"/>
+                <a:cs typeface="+mn-cs"/>
+              </a:defRPr>
+            </a:lvl7pPr>
+            <a:lvl8pPr marL="3429000" indent="-228600" algn="l" defTabSz="914400" rtl="0" eaLnBrk="1" latinLnBrk="0" hangingPunct="1">
+              <a:lnSpc>
+                <a:spcPct val="90000"/>
+              </a:lnSpc>
+              <a:spcBef>
+                <a:spcPts val="500"/>
+              </a:spcBef>
+              <a:buFont typeface="Arial" panose="020B0604020202020204" pitchFamily="34" charset="0"/>
+              <a:buChar char="•"/>
+              <a:defRPr sz="1800" kern="1200">
+                <a:solidFill>
+                  <a:schemeClr val="tx1"/>
+                </a:solidFill>
+                <a:latin typeface="+mn-lt"/>
+                <a:ea typeface="+mn-ea"/>
+                <a:cs typeface="+mn-cs"/>
+              </a:defRPr>
+            </a:lvl8pPr>
+            <a:lvl9pPr marL="3886200" indent="-228600" algn="l" defTabSz="914400" rtl="0" eaLnBrk="1" latinLnBrk="0" hangingPunct="1">
+              <a:lnSpc>
+                <a:spcPct val="90000"/>
+              </a:lnSpc>
+              <a:spcBef>
+                <a:spcPts val="500"/>
+              </a:spcBef>
+              <a:buFont typeface="Arial" panose="020B0604020202020204" pitchFamily="34" charset="0"/>
+              <a:buChar char="•"/>
+              <a:defRPr sz="1800" kern="1200">
+                <a:solidFill>
+                  <a:schemeClr val="tx1"/>
+                </a:solidFill>
+                <a:latin typeface="+mn-lt"/>
+                <a:ea typeface="+mn-ea"/>
+                <a:cs typeface="+mn-cs"/>
+              </a:defRPr>
+            </a:lvl9pPr>
+          </a:lstStyle>
+          <a:p>
+            <a:pPr marL="0" indent="0">
+              <a:buFont typeface="Arial" panose="020B0604020202020204" pitchFamily="34" charset="0"/>
+              <a:buNone/>
+            </a:pPr>
+            <a:r>
+              <a:rPr lang="en-NZ" noProof="0" dirty="0"/>
+              <a:t>Justification of choice made</a:t>
+            </a:r>
+          </a:p>
+          <a:p>
+            <a:pPr marL="0" indent="0">
+              <a:buNone/>
+            </a:pPr>
+            <a:br>
+              <a:rPr lang="en-US" dirty="0"/>
+            </a:br>
+            <a:endParaRPr lang="en-US" dirty="0"/>
+          </a:p>
+          <a:p>
+            <a:pPr marL="0" indent="0">
+              <a:buFont typeface="Arial" panose="020B0604020202020204" pitchFamily="34" charset="0"/>
+              <a:buNone/>
+            </a:pPr>
+            <a:endParaRPr lang="en-NZ" noProof="0" dirty="0"/>
+          </a:p>
+        </p:txBody>
+      </p:sp>
+      <p:sp>
+        <p:nvSpPr>
+          <p:cNvPr id="8" name="Content Placeholder 7">
+            <a:extLst>
+              <a:ext uri="{FF2B5EF4-FFF2-40B4-BE49-F238E27FC236}">
+                <a16:creationId xmlns:a16="http://schemas.microsoft.com/office/drawing/2014/main" id="{DFB8CE4C-97AF-7F3E-9CAC-E06101B7E86D}"/>
+              </a:ext>
+            </a:extLst>
+          </p:cNvPr>
+          <p:cNvSpPr>
+            <a:spLocks noGrp="1"/>
+          </p:cNvSpPr>
+          <p:nvPr>
+            <p:ph idx="1"/>
+          </p:nvPr>
+        </p:nvSpPr>
+        <p:spPr>
+          <a:xfrm>
+            <a:off x="838200" y="1825625"/>
+            <a:ext cx="3723968" cy="1325563"/>
+          </a:xfrm>
+        </p:spPr>
+        <p:txBody>
+          <a:bodyPr>
+            <a:normAutofit fontScale="85000" lnSpcReduction="20000"/>
+          </a:bodyPr>
+          <a:lstStyle/>
+          <a:p>
+            <a:pPr marL="0" indent="0">
+              <a:buNone/>
+            </a:pPr>
+            <a:r>
+              <a:rPr lang="en-NZ" noProof="0" dirty="0"/>
+              <a:t>Chosen</a:t>
+            </a:r>
+          </a:p>
+          <a:p>
+            <a:pPr marL="0" indent="0">
+              <a:buNone/>
+            </a:pPr>
+            <a:r>
+              <a:rPr lang="en-US" dirty="0"/>
+              <a:t>Manual Lever-Operated Clutch with Electronic Position Sensor.</a:t>
+            </a:r>
+            <a:endParaRPr lang="en-NZ" noProof="0" dirty="0"/>
+          </a:p>
+        </p:txBody>
+      </p:sp>
+      <p:sp>
+        <p:nvSpPr>
+          <p:cNvPr id="9" name="Content Placeholder 7">
+            <a:extLst>
+              <a:ext uri="{FF2B5EF4-FFF2-40B4-BE49-F238E27FC236}">
+                <a16:creationId xmlns:a16="http://schemas.microsoft.com/office/drawing/2014/main" id="{0A4F4AF7-5E5A-2D76-3F73-6A09F3F31537}"/>
+              </a:ext>
+            </a:extLst>
+          </p:cNvPr>
+          <p:cNvSpPr txBox="1">
+            <a:spLocks/>
+          </p:cNvSpPr>
+          <p:nvPr/>
+        </p:nvSpPr>
+        <p:spPr>
+          <a:xfrm>
+            <a:off x="4234016" y="1846467"/>
+            <a:ext cx="3723968" cy="1325563"/>
+          </a:xfrm>
+          <a:prstGeom prst="rect">
+            <a:avLst/>
+          </a:prstGeom>
+        </p:spPr>
+        <p:txBody>
+          <a:bodyPr vert="horz" lIns="91440" tIns="45720" rIns="91440" bIns="45720" rtlCol="0">
+            <a:normAutofit lnSpcReduction="10000"/>
+          </a:bodyPr>
+          <a:lstStyle>
+            <a:lvl1pPr marL="228600" indent="-228600" algn="l" defTabSz="914400" rtl="0" eaLnBrk="1" latinLnBrk="0" hangingPunct="1">
+              <a:lnSpc>
+                <a:spcPct val="90000"/>
+              </a:lnSpc>
+              <a:spcBef>
+                <a:spcPts val="1000"/>
+              </a:spcBef>
+              <a:buFont typeface="Arial" panose="020B0604020202020204" pitchFamily="34" charset="0"/>
+              <a:buChar char="•"/>
+              <a:defRPr sz="2800" kern="1200">
+                <a:solidFill>
+                  <a:schemeClr val="tx1"/>
+                </a:solidFill>
+                <a:latin typeface="+mn-lt"/>
+                <a:ea typeface="+mn-ea"/>
+                <a:cs typeface="+mn-cs"/>
+              </a:defRPr>
+            </a:lvl1pPr>
+            <a:lvl2pPr marL="685800" indent="-228600" algn="l" defTabSz="914400" rtl="0" eaLnBrk="1" latinLnBrk="0" hangingPunct="1">
+              <a:lnSpc>
+                <a:spcPct val="90000"/>
+              </a:lnSpc>
+              <a:spcBef>
+                <a:spcPts val="500"/>
+              </a:spcBef>
+              <a:buFont typeface="Arial" panose="020B0604020202020204" pitchFamily="34" charset="0"/>
+              <a:buChar char="•"/>
+              <a:defRPr sz="2400" kern="1200">
+                <a:solidFill>
+                  <a:schemeClr val="tx1"/>
+                </a:solidFill>
+                <a:latin typeface="+mn-lt"/>
+                <a:ea typeface="+mn-ea"/>
+                <a:cs typeface="+mn-cs"/>
+              </a:defRPr>
+            </a:lvl2pPr>
+            <a:lvl3pPr marL="1143000" indent="-228600" algn="l" defTabSz="914400" rtl="0" eaLnBrk="1" latinLnBrk="0" hangingPunct="1">
+              <a:lnSpc>
+                <a:spcPct val="90000"/>
+              </a:lnSpc>
+              <a:spcBef>
+                <a:spcPts val="500"/>
+              </a:spcBef>
+              <a:buFont typeface="Arial" panose="020B0604020202020204" pitchFamily="34" charset="0"/>
+              <a:buChar char="•"/>
+              <a:defRPr sz="2000" kern="1200">
+                <a:solidFill>
+                  <a:schemeClr val="tx1"/>
+                </a:solidFill>
+                <a:latin typeface="+mn-lt"/>
+                <a:ea typeface="+mn-ea"/>
+                <a:cs typeface="+mn-cs"/>
+              </a:defRPr>
+            </a:lvl3pPr>
+            <a:lvl4pPr marL="1600200" indent="-228600" algn="l" defTabSz="914400" rtl="0" eaLnBrk="1" latinLnBrk="0" hangingPunct="1">
+              <a:lnSpc>
+                <a:spcPct val="90000"/>
+              </a:lnSpc>
+              <a:spcBef>
+                <a:spcPts val="500"/>
+              </a:spcBef>
+              <a:buFont typeface="Arial" panose="020B0604020202020204" pitchFamily="34" charset="0"/>
+              <a:buChar char="•"/>
+              <a:defRPr sz="1800" kern="1200">
+                <a:solidFill>
+                  <a:schemeClr val="tx1"/>
+                </a:solidFill>
+                <a:latin typeface="+mn-lt"/>
+                <a:ea typeface="+mn-ea"/>
+                <a:cs typeface="+mn-cs"/>
+              </a:defRPr>
+            </a:lvl4pPr>
+            <a:lvl5pPr marL="2057400" indent="-228600" algn="l" defTabSz="914400" rtl="0" eaLnBrk="1" latinLnBrk="0" hangingPunct="1">
+              <a:lnSpc>
+                <a:spcPct val="90000"/>
+              </a:lnSpc>
+              <a:spcBef>
+                <a:spcPts val="500"/>
+              </a:spcBef>
+              <a:buFont typeface="Arial" panose="020B0604020202020204" pitchFamily="34" charset="0"/>
+              <a:buChar char="•"/>
+              <a:defRPr sz="1800" kern="1200">
+                <a:solidFill>
+                  <a:schemeClr val="tx1"/>
+                </a:solidFill>
+                <a:latin typeface="+mn-lt"/>
+                <a:ea typeface="+mn-ea"/>
+                <a:cs typeface="+mn-cs"/>
+              </a:defRPr>
+            </a:lvl5pPr>
+            <a:lvl6pPr marL="2514600" indent="-228600" algn="l" defTabSz="914400" rtl="0" eaLnBrk="1" latinLnBrk="0" hangingPunct="1">
+              <a:lnSpc>
+                <a:spcPct val="90000"/>
+              </a:lnSpc>
+              <a:spcBef>
+                <a:spcPts val="500"/>
+              </a:spcBef>
+              <a:buFont typeface="Arial" panose="020B0604020202020204" pitchFamily="34" charset="0"/>
+              <a:buChar char="•"/>
+              <a:defRPr sz="1800" kern="1200">
+                <a:solidFill>
+                  <a:schemeClr val="tx1"/>
+                </a:solidFill>
+                <a:latin typeface="+mn-lt"/>
+                <a:ea typeface="+mn-ea"/>
+                <a:cs typeface="+mn-cs"/>
+              </a:defRPr>
+            </a:lvl6pPr>
+            <a:lvl7pPr marL="2971800" indent="-228600" algn="l" defTabSz="914400" rtl="0" eaLnBrk="1" latinLnBrk="0" hangingPunct="1">
+              <a:lnSpc>
+                <a:spcPct val="90000"/>
+              </a:lnSpc>
+              <a:spcBef>
+                <a:spcPts val="500"/>
+              </a:spcBef>
+              <a:buFont typeface="Arial" panose="020B0604020202020204" pitchFamily="34" charset="0"/>
+              <a:buChar char="•"/>
+              <a:defRPr sz="1800" kern="1200">
+                <a:solidFill>
+                  <a:schemeClr val="tx1"/>
+                </a:solidFill>
+                <a:latin typeface="+mn-lt"/>
+                <a:ea typeface="+mn-ea"/>
+                <a:cs typeface="+mn-cs"/>
+              </a:defRPr>
+            </a:lvl7pPr>
+            <a:lvl8pPr marL="3429000" indent="-228600" algn="l" defTabSz="914400" rtl="0" eaLnBrk="1" latinLnBrk="0" hangingPunct="1">
+              <a:lnSpc>
+                <a:spcPct val="90000"/>
+              </a:lnSpc>
+              <a:spcBef>
+                <a:spcPts val="500"/>
+              </a:spcBef>
+              <a:buFont typeface="Arial" panose="020B0604020202020204" pitchFamily="34" charset="0"/>
+              <a:buChar char="•"/>
+              <a:defRPr sz="1800" kern="1200">
+                <a:solidFill>
+                  <a:schemeClr val="tx1"/>
+                </a:solidFill>
+                <a:latin typeface="+mn-lt"/>
+                <a:ea typeface="+mn-ea"/>
+                <a:cs typeface="+mn-cs"/>
+              </a:defRPr>
+            </a:lvl8pPr>
+            <a:lvl9pPr marL="3886200" indent="-228600" algn="l" defTabSz="914400" rtl="0" eaLnBrk="1" latinLnBrk="0" hangingPunct="1">
+              <a:lnSpc>
+                <a:spcPct val="90000"/>
+              </a:lnSpc>
+              <a:spcBef>
+                <a:spcPts val="500"/>
+              </a:spcBef>
+              <a:buFont typeface="Arial" panose="020B0604020202020204" pitchFamily="34" charset="0"/>
+              <a:buChar char="•"/>
+              <a:defRPr sz="1800" kern="1200">
+                <a:solidFill>
+                  <a:schemeClr val="tx1"/>
+                </a:solidFill>
+                <a:latin typeface="+mn-lt"/>
+                <a:ea typeface="+mn-ea"/>
+                <a:cs typeface="+mn-cs"/>
+              </a:defRPr>
+            </a:lvl9pPr>
+          </a:lstStyle>
+          <a:p>
+            <a:pPr marL="0" indent="0">
+              <a:buFont typeface="Arial" panose="020B0604020202020204" pitchFamily="34" charset="0"/>
+              <a:buNone/>
+            </a:pPr>
+            <a:r>
+              <a:rPr lang="en-NZ" noProof="0" dirty="0"/>
+              <a:t>Alternative 1</a:t>
+            </a:r>
+          </a:p>
+          <a:p>
+            <a:pPr marL="0" indent="0">
+              <a:buNone/>
+            </a:pPr>
+            <a:r>
+              <a:rPr lang="en-NZ" dirty="0"/>
+              <a:t>Automatic Centrifugal Clutch Mechanism.</a:t>
+            </a:r>
+            <a:endParaRPr lang="en-NZ" noProof="0" dirty="0"/>
+          </a:p>
+        </p:txBody>
+      </p:sp>
+      <p:sp>
+        <p:nvSpPr>
+          <p:cNvPr id="10" name="Content Placeholder 7">
+            <a:extLst>
+              <a:ext uri="{FF2B5EF4-FFF2-40B4-BE49-F238E27FC236}">
+                <a16:creationId xmlns:a16="http://schemas.microsoft.com/office/drawing/2014/main" id="{841EBE6D-B5D0-4C30-C32E-F3AA1F02B8FD}"/>
+              </a:ext>
+            </a:extLst>
+          </p:cNvPr>
+          <p:cNvSpPr txBox="1">
+            <a:spLocks/>
+          </p:cNvSpPr>
+          <p:nvPr/>
+        </p:nvSpPr>
+        <p:spPr>
+          <a:xfrm>
+            <a:off x="7876867" y="1846467"/>
+            <a:ext cx="3723968" cy="1325563"/>
+          </a:xfrm>
+          <a:prstGeom prst="rect">
+            <a:avLst/>
+          </a:prstGeom>
+        </p:spPr>
+        <p:txBody>
+          <a:bodyPr vert="horz" lIns="91440" tIns="45720" rIns="91440" bIns="45720" rtlCol="0">
+            <a:normAutofit lnSpcReduction="10000"/>
+          </a:bodyPr>
+          <a:lstStyle>
+            <a:lvl1pPr marL="228600" indent="-228600" algn="l" defTabSz="914400" rtl="0" eaLnBrk="1" latinLnBrk="0" hangingPunct="1">
+              <a:lnSpc>
+                <a:spcPct val="90000"/>
+              </a:lnSpc>
+              <a:spcBef>
+                <a:spcPts val="1000"/>
+              </a:spcBef>
+              <a:buFont typeface="Arial" panose="020B0604020202020204" pitchFamily="34" charset="0"/>
+              <a:buChar char="•"/>
+              <a:defRPr sz="2800" kern="1200">
+                <a:solidFill>
+                  <a:schemeClr val="tx1"/>
+                </a:solidFill>
+                <a:latin typeface="+mn-lt"/>
+                <a:ea typeface="+mn-ea"/>
+                <a:cs typeface="+mn-cs"/>
+              </a:defRPr>
+            </a:lvl1pPr>
+            <a:lvl2pPr marL="685800" indent="-228600" algn="l" defTabSz="914400" rtl="0" eaLnBrk="1" latinLnBrk="0" hangingPunct="1">
+              <a:lnSpc>
+                <a:spcPct val="90000"/>
+              </a:lnSpc>
+              <a:spcBef>
+                <a:spcPts val="500"/>
+              </a:spcBef>
+              <a:buFont typeface="Arial" panose="020B0604020202020204" pitchFamily="34" charset="0"/>
+              <a:buChar char="•"/>
+              <a:defRPr sz="2400" kern="1200">
+                <a:solidFill>
+                  <a:schemeClr val="tx1"/>
+                </a:solidFill>
+                <a:latin typeface="+mn-lt"/>
+                <a:ea typeface="+mn-ea"/>
+                <a:cs typeface="+mn-cs"/>
+              </a:defRPr>
+            </a:lvl2pPr>
+            <a:lvl3pPr marL="1143000" indent="-228600" algn="l" defTabSz="914400" rtl="0" eaLnBrk="1" latinLnBrk="0" hangingPunct="1">
+              <a:lnSpc>
+                <a:spcPct val="90000"/>
+              </a:lnSpc>
+              <a:spcBef>
+                <a:spcPts val="500"/>
+              </a:spcBef>
+              <a:buFont typeface="Arial" panose="020B0604020202020204" pitchFamily="34" charset="0"/>
+              <a:buChar char="•"/>
+              <a:defRPr sz="2000" kern="1200">
+                <a:solidFill>
+                  <a:schemeClr val="tx1"/>
+                </a:solidFill>
+                <a:latin typeface="+mn-lt"/>
+                <a:ea typeface="+mn-ea"/>
+                <a:cs typeface="+mn-cs"/>
+              </a:defRPr>
+            </a:lvl3pPr>
+            <a:lvl4pPr marL="1600200" indent="-228600" algn="l" defTabSz="914400" rtl="0" eaLnBrk="1" latinLnBrk="0" hangingPunct="1">
+              <a:lnSpc>
+                <a:spcPct val="90000"/>
+              </a:lnSpc>
+              <a:spcBef>
+                <a:spcPts val="500"/>
+              </a:spcBef>
+              <a:buFont typeface="Arial" panose="020B0604020202020204" pitchFamily="34" charset="0"/>
+              <a:buChar char="•"/>
+              <a:defRPr sz="1800" kern="1200">
+                <a:solidFill>
+                  <a:schemeClr val="tx1"/>
+                </a:solidFill>
+                <a:latin typeface="+mn-lt"/>
+                <a:ea typeface="+mn-ea"/>
+                <a:cs typeface="+mn-cs"/>
+              </a:defRPr>
+            </a:lvl4pPr>
+            <a:lvl5pPr marL="2057400" indent="-228600" algn="l" defTabSz="914400" rtl="0" eaLnBrk="1" latinLnBrk="0" hangingPunct="1">
+              <a:lnSpc>
+                <a:spcPct val="90000"/>
+              </a:lnSpc>
+              <a:spcBef>
+                <a:spcPts val="500"/>
+              </a:spcBef>
+              <a:buFont typeface="Arial" panose="020B0604020202020204" pitchFamily="34" charset="0"/>
+              <a:buChar char="•"/>
+              <a:defRPr sz="1800" kern="1200">
+                <a:solidFill>
+                  <a:schemeClr val="tx1"/>
+                </a:solidFill>
+                <a:latin typeface="+mn-lt"/>
+                <a:ea typeface="+mn-ea"/>
+                <a:cs typeface="+mn-cs"/>
+              </a:defRPr>
+            </a:lvl5pPr>
+            <a:lvl6pPr marL="2514600" indent="-228600" algn="l" defTabSz="914400" rtl="0" eaLnBrk="1" latinLnBrk="0" hangingPunct="1">
+              <a:lnSpc>
+                <a:spcPct val="90000"/>
+              </a:lnSpc>
+              <a:spcBef>
+                <a:spcPts val="500"/>
+              </a:spcBef>
+              <a:buFont typeface="Arial" panose="020B0604020202020204" pitchFamily="34" charset="0"/>
+              <a:buChar char="•"/>
+              <a:defRPr sz="1800" kern="1200">
+                <a:solidFill>
+                  <a:schemeClr val="tx1"/>
+                </a:solidFill>
+                <a:latin typeface="+mn-lt"/>
+                <a:ea typeface="+mn-ea"/>
+                <a:cs typeface="+mn-cs"/>
+              </a:defRPr>
+            </a:lvl6pPr>
+            <a:lvl7pPr marL="2971800" indent="-228600" algn="l" defTabSz="914400" rtl="0" eaLnBrk="1" latinLnBrk="0" hangingPunct="1">
+              <a:lnSpc>
+                <a:spcPct val="90000"/>
+              </a:lnSpc>
+              <a:spcBef>
+                <a:spcPts val="500"/>
+              </a:spcBef>
+              <a:buFont typeface="Arial" panose="020B0604020202020204" pitchFamily="34" charset="0"/>
+              <a:buChar char="•"/>
+              <a:defRPr sz="1800" kern="1200">
+                <a:solidFill>
+                  <a:schemeClr val="tx1"/>
+                </a:solidFill>
+                <a:latin typeface="+mn-lt"/>
+                <a:ea typeface="+mn-ea"/>
+                <a:cs typeface="+mn-cs"/>
+              </a:defRPr>
+            </a:lvl7pPr>
+            <a:lvl8pPr marL="3429000" indent="-228600" algn="l" defTabSz="914400" rtl="0" eaLnBrk="1" latinLnBrk="0" hangingPunct="1">
+              <a:lnSpc>
+                <a:spcPct val="90000"/>
+              </a:lnSpc>
+              <a:spcBef>
+                <a:spcPts val="500"/>
+              </a:spcBef>
+              <a:buFont typeface="Arial" panose="020B0604020202020204" pitchFamily="34" charset="0"/>
+              <a:buChar char="•"/>
+              <a:defRPr sz="1800" kern="1200">
+                <a:solidFill>
+                  <a:schemeClr val="tx1"/>
+                </a:solidFill>
+                <a:latin typeface="+mn-lt"/>
+                <a:ea typeface="+mn-ea"/>
+                <a:cs typeface="+mn-cs"/>
+              </a:defRPr>
+            </a:lvl8pPr>
+            <a:lvl9pPr marL="3886200" indent="-228600" algn="l" defTabSz="914400" rtl="0" eaLnBrk="1" latinLnBrk="0" hangingPunct="1">
+              <a:lnSpc>
+                <a:spcPct val="90000"/>
+              </a:lnSpc>
+              <a:spcBef>
+                <a:spcPts val="500"/>
+              </a:spcBef>
+              <a:buFont typeface="Arial" panose="020B0604020202020204" pitchFamily="34" charset="0"/>
+              <a:buChar char="•"/>
+              <a:defRPr sz="1800" kern="1200">
+                <a:solidFill>
+                  <a:schemeClr val="tx1"/>
+                </a:solidFill>
+                <a:latin typeface="+mn-lt"/>
+                <a:ea typeface="+mn-ea"/>
+                <a:cs typeface="+mn-cs"/>
+              </a:defRPr>
+            </a:lvl9pPr>
+          </a:lstStyle>
+          <a:p>
+            <a:pPr marL="0" indent="0">
+              <a:buFont typeface="Arial" panose="020B0604020202020204" pitchFamily="34" charset="0"/>
+              <a:buNone/>
+            </a:pPr>
+            <a:r>
+              <a:rPr lang="en-NZ" noProof="0" dirty="0"/>
+              <a:t>Alternative 2</a:t>
+            </a:r>
+          </a:p>
+          <a:p>
+            <a:pPr marL="0" indent="0">
+              <a:buNone/>
+            </a:pPr>
+            <a:r>
+              <a:rPr lang="en-US" dirty="0"/>
+              <a:t>Direct Drive System (No Clutch).</a:t>
+            </a:r>
+            <a:endParaRPr lang="en-NZ" noProof="0" dirty="0"/>
+          </a:p>
+        </p:txBody>
+      </p:sp>
+    </p:spTree>
+    <p:extLst>
+      <p:ext uri="{BB962C8B-B14F-4D97-AF65-F5344CB8AC3E}">
+        <p14:creationId xmlns:p14="http://schemas.microsoft.com/office/powerpoint/2010/main" val="3463644882"/>
+      </p:ext>
+    </p:extLst>
+  </p:cSld>
+  <p:clrMapOvr>
+    <a:masterClrMapping/>
+  </p:clrMapOvr>
+</p:sld>
+</file>
+
+<file path=ppt/slides/slide21.xml><?xml version="1.0" encoding="utf-8"?>
 <p:sld xmlns:a="http://schemas.openxmlformats.org/drawingml/2006/main" xmlns:r="http://schemas.openxmlformats.org/officeDocument/2006/relationships" xmlns:p="http://schemas.openxmlformats.org/presentationml/2006/main">
   <p:cSld>
     <p:spTree>
@@ -11424,7 +11232,7 @@
         </p:spPr>
         <p:txBody>
           <a:bodyPr>
-            <a:normAutofit fontScale="55000" lnSpcReduction="20000"/>
+            <a:normAutofit fontScale="62500" lnSpcReduction="20000"/>
           </a:bodyPr>
           <a:lstStyle/>
           <a:p>
@@ -11433,7 +11241,7 @@
             </a:pPr>
             <a:r>
               <a:rPr lang="en-NZ" noProof="0" dirty="0"/>
-              <a:t>Explanation of component</a:t>
+              <a:t>Explanation of component-electromagnetic clutch</a:t>
             </a:r>
           </a:p>
           <a:p>
@@ -11441,8 +11249,8 @@
               <a:buNone/>
             </a:pPr>
             <a:r>
-              <a:rPr lang="en-US" dirty="0"/>
-              <a:t>The clutch assembly is a mechanical drivetrain component responsible for engaging and disengaging power transfer from the 800W motor to the drive gears. This setup utilizes a manual clutch lever mechanism monitored by an electronic sensor. When the rider pulls the lever, the mechanical plates separate to interrupt the motor's power flow, allowing smooth transitions and safety overrides. The accompanying electronic sensor converts the physical movement into a clear signal for the Arduino, allowing the microcontroller to cut motor power or adjust internal tracking whenever the clutch is disengaged.</a:t>
+              <a:rPr lang="en-NZ" dirty="0"/>
+              <a:t>The clutch system is used to connect and disconnect the 800W electric motor from the drivetrain. It uses a mechanical clutch mechanism controlled by a lever, with a sensor attached to detect when the clutch is being used. When the rider pulls the lever, the clutch disengages the motor from the drivetrain, allowing the motor to be safely disconnected. The sensor sends this information to the Arduino, allowing it to stop motor assistance and adjust the system accordingly.</a:t>
             </a:r>
             <a:endParaRPr lang="en-NZ" noProof="0" dirty="0"/>
           </a:p>
@@ -11682,7 +11490,7 @@
         </p:spPr>
         <p:txBody>
           <a:bodyPr vert="horz" lIns="91440" tIns="45720" rIns="91440" bIns="45720" rtlCol="0">
-            <a:normAutofit fontScale="40000" lnSpcReduction="20000"/>
+            <a:normAutofit fontScale="55000" lnSpcReduction="20000"/>
           </a:bodyPr>
           <a:lstStyle>
             <a:lvl1pPr marL="228600" indent="-228600" algn="l" defTabSz="914400" rtl="0" eaLnBrk="1" latinLnBrk="0" hangingPunct="1">
@@ -11850,27 +11658,19 @@
           </a:lstStyle>
           <a:p>
             <a:pPr marL="0" indent="0">
-              <a:buFont typeface="Arial" panose="020B0604020202020204" pitchFamily="34" charset="0"/>
               <a:buNone/>
             </a:pPr>
             <a:r>
-              <a:rPr lang="en-NZ" noProof="0" dirty="0"/>
-              <a:t>Component test log:</a:t>
-            </a:r>
-          </a:p>
-          <a:p>
-            <a:pPr marL="0" indent="0">
-              <a:buNone/>
-            </a:pPr>
-            <a:r>
-              <a:rPr lang="en-US" dirty="0"/>
-              <a:t>The objective of this test was to verify that the physical manual clutch assembly smoothly and securely interrupts mechanical power transfer from the 800W motor to the drive gears. The clutch unit was mounted directly to the main motor drivetrain on a test fixture and actuated manually under active motor load conditions. Initial trials showed slight friction binding along the lever actuation arm, which occasionally caused slow plate separation. To resolve this mechanical issue, the assembly linkages were cleaned, re-aligned, and treated with proper lubricant. Across ten consecutive mechanical engagements and disengagements under full motor torque, the plates separated cleanly without slipping, completely cutting mechanical drive to the wheels instantly upon lever pull and confirming a PASSED mechanical test status.</a:t>
-            </a:r>
-          </a:p>
-          <a:p>
-            <a:pPr marL="0" indent="0">
-              <a:buNone/>
-            </a:pPr>
+              <a:rPr lang="en-NZ" dirty="0"/>
+              <a:t>Component Test Log:</a:t>
+            </a:r>
+            <a:br>
+              <a:rPr lang="en-NZ" dirty="0"/>
+            </a:br>
+            <a:r>
+              <a:rPr lang="en-NZ" dirty="0"/>
+              <a:t>The purpose of this test was to check that the manual clutch could reliably engage and disengage the 800W motor from the drivetrain. The clutch was connected to the motor system and tested under load to ensure it could separate the drive components correctly. Initial testing showed some resistance in the lever mechanism, causing the clutch plates to separate slowly. The linkage was cleaned, adjusted, and lubricated to fix this issue. After these changes, the clutch successfully completed ten engagement and disengagement tests without slipping, confirming that it worked correctly.</a:t>
+            </a:r>
             <a:br>
               <a:rPr lang="en-US" dirty="0"/>
             </a:br>
@@ -11905,7 +11705,7 @@
 </p:sld>
 </file>
 
-<file path=ppt/slides/slide21.xml><?xml version="1.0" encoding="utf-8"?>
+<file path=ppt/slides/slide22.xml><?xml version="1.0" encoding="utf-8"?>
 <p:sld xmlns:a="http://schemas.openxmlformats.org/drawingml/2006/main" xmlns:r="http://schemas.openxmlformats.org/officeDocument/2006/relationships" xmlns:p="http://schemas.openxmlformats.org/presentationml/2006/main">
   <p:cSld>
     <p:spTree>
@@ -11988,7 +11788,7 @@
         </p:spPr>
         <p:txBody>
           <a:bodyPr vert="horz" lIns="91440" tIns="45720" rIns="91440" bIns="45720" rtlCol="0">
-            <a:normAutofit fontScale="47500" lnSpcReduction="20000"/>
+            <a:normAutofit fontScale="55000" lnSpcReduction="20000"/>
           </a:bodyPr>
           <a:lstStyle>
             <a:lvl1pPr marL="228600" indent="-228600" algn="l" defTabSz="914400" rtl="0" eaLnBrk="1" latinLnBrk="0" hangingPunct="1">
@@ -12156,24 +11956,19 @@
           </a:lstStyle>
           <a:p>
             <a:pPr marL="0" indent="0">
-              <a:buFont typeface="Arial" panose="020B0604020202020204" pitchFamily="34" charset="0"/>
               <a:buNone/>
             </a:pPr>
             <a:r>
-              <a:rPr lang="en-NZ" noProof="0" dirty="0"/>
-              <a:t>Analyse notes from testing and note changes to be made:    </a:t>
-            </a:r>
-            <a:r>
-              <a:rPr lang="en-US" dirty="0"/>
-              <a:t>Mechanical data analysis shows that the high torque from the 800W motor exerts tremendous forces on the clutch plates, making the system sensitive to even the slightest misalignment or tilting of the parts during operation. Using a standard linkage will only cause rapid failure if the gears are not perfectly aligned. To permanently ensure the durability and reliability of the e-bike drivetrain, a hardware fabrication change will be made: a customized sleeve will be made that is perfectly straight to serve as a central press-fit structure. This sleeve will permanently connect and align all hubs to a single central point, completely eliminating wobble, ensuring perfect drivetrain alignment, and preventing premature clutch wear over long-term use.</a:t>
-            </a:r>
-            <a:endParaRPr lang="en-NZ" noProof="0" dirty="0"/>
-          </a:p>
-          <a:p>
-            <a:pPr marL="0" indent="0">
-              <a:buFont typeface="Arial" panose="020B0604020202020204" pitchFamily="34" charset="0"/>
-              <a:buNone/>
-            </a:pPr>
+              <a:rPr lang="en-NZ" dirty="0"/>
+              <a:t>Analysis Notes from Testing and Changes to be Made:</a:t>
+            </a:r>
+            <a:br>
+              <a:rPr lang="en-NZ" dirty="0"/>
+            </a:br>
+            <a:r>
+              <a:rPr lang="en-NZ" dirty="0"/>
+              <a:t>Testing showed that the high torque produced by the 800W motor puts significant load on the clutch assembly, making correct alignment important for reliable operation. Small amounts of misalignment can cause extra stress and increased wear on the drivetrain components. To improve the strength and reliability of the system, a custom sleeve will be manufactured to act as a central alignment piece. This will help keep the clutch and drivetrain components correctly positioned, reducing movement and improving long-term durability.</a:t>
+            </a:r>
             <a:endParaRPr lang="en-NZ" noProof="0" dirty="0"/>
           </a:p>
           <a:p>
@@ -12637,7 +12432,7 @@
 </p:sld>
 </file>
 
-<file path=ppt/slides/slide22.xml><?xml version="1.0" encoding="utf-8"?>
+<file path=ppt/slides/slide23.xml><?xml version="1.0" encoding="utf-8"?>
 <p:sld xmlns:a="http://schemas.openxmlformats.org/drawingml/2006/main" xmlns:r="http://schemas.openxmlformats.org/officeDocument/2006/relationships" xmlns:p="http://schemas.openxmlformats.org/presentationml/2006/main">
   <p:cSld>
     <p:spTree>
@@ -12744,7 +12539,7 @@
 </p:sld>
 </file>
 
-<file path=ppt/slides/slide23.xml><?xml version="1.0" encoding="utf-8"?>
+<file path=ppt/slides/slide24.xml><?xml version="1.0" encoding="utf-8"?>
 <p:sld xmlns:a="http://schemas.openxmlformats.org/drawingml/2006/main" xmlns:r="http://schemas.openxmlformats.org/officeDocument/2006/relationships" xmlns:p="http://schemas.openxmlformats.org/presentationml/2006/main">
   <p:cSld>
     <p:spTree>
@@ -13060,7 +12855,7 @@
 </p:sld>
 </file>
 
-<file path=ppt/slides/slide24.xml><?xml version="1.0" encoding="utf-8"?>
+<file path=ppt/slides/slide25.xml><?xml version="1.0" encoding="utf-8"?>
 <p:sld xmlns:a="http://schemas.openxmlformats.org/drawingml/2006/main" xmlns:r="http://schemas.openxmlformats.org/officeDocument/2006/relationships" xmlns:p="http://schemas.openxmlformats.org/presentationml/2006/main">
   <p:cSld>
     <p:spTree>
@@ -13143,7 +12938,7 @@
 </p:sld>
 </file>
 
-<file path=ppt/slides/slide25.xml><?xml version="1.0" encoding="utf-8"?>
+<file path=ppt/slides/slide26.xml><?xml version="1.0" encoding="utf-8"?>
 <p:sld xmlns:a="http://schemas.openxmlformats.org/drawingml/2006/main" xmlns:r="http://schemas.openxmlformats.org/officeDocument/2006/relationships" xmlns:p="http://schemas.openxmlformats.org/presentationml/2006/main">
   <p:cSld>
     <p:spTree>
@@ -13555,7 +13350,7 @@
 </p:sld>
 </file>
 
-<file path=ppt/slides/slide26.xml><?xml version="1.0" encoding="utf-8"?>
+<file path=ppt/slides/slide27.xml><?xml version="1.0" encoding="utf-8"?>
 <p:sld xmlns:a="http://schemas.openxmlformats.org/drawingml/2006/main" xmlns:r="http://schemas.openxmlformats.org/officeDocument/2006/relationships" xmlns:p="http://schemas.openxmlformats.org/presentationml/2006/main">
   <p:cSld>
     <p:spTree>
@@ -14539,7 +14334,7 @@
 </p:sld>
 </file>
 
-<file path=ppt/slides/slide27.xml><?xml version="1.0" encoding="utf-8"?>
+<file path=ppt/slides/slide28.xml><?xml version="1.0" encoding="utf-8"?>
 <p:sld xmlns:a="http://schemas.openxmlformats.org/drawingml/2006/main" xmlns:r="http://schemas.openxmlformats.org/officeDocument/2006/relationships" xmlns:p="http://schemas.openxmlformats.org/presentationml/2006/main">
   <p:cSld>
     <p:spTree>
@@ -14942,7 +14737,7 @@
         </p:spPr>
         <p:txBody>
           <a:bodyPr>
-            <a:normAutofit fontScale="55000" lnSpcReduction="20000"/>
+            <a:normAutofit fontScale="70000" lnSpcReduction="20000"/>
           </a:bodyPr>
           <a:lstStyle/>
           <a:p>
@@ -14974,15 +14769,17 @@
               <a:buNone/>
             </a:pPr>
             <a:r>
-              <a:rPr lang="en-US" dirty="0"/>
-              <a:t>To establish reliable data sharing across the system, the I2C (Inter-Integrated Circuit) communication protocol was implemented to connect the Arduino master microcontroller to the dashboard OLED slave display. This network uses a two-wire synchronous bus consisting of a Serial Data line (SDA) and a Serial Clock line (SCL) . By utilizing I2C, the system transmits continuous, real-time telemetry updates—such as calculated travel speeds and rotational engine RPM—directly to the rider's screen using only two physical microcontroller pins, thereby preserving vital input resources for other critical sensors.</a:t>
-            </a:r>
-            <a:endParaRPr lang="en-NZ" noProof="0" dirty="0"/>
-          </a:p>
-          <a:p>
-            <a:pPr marL="0" indent="0">
-              <a:buNone/>
-            </a:pPr>
+              <a:rPr lang="en-NZ" dirty="0"/>
+              <a:t>I will meet this requirement by using I2C communication to connect the Arduino Uno R4 </a:t>
+            </a:r>
+            <a:r>
+              <a:rPr lang="en-NZ" dirty="0" err="1"/>
+              <a:t>WiFi</a:t>
+            </a:r>
+            <a:r>
+              <a:rPr lang="en-NZ" dirty="0"/>
+              <a:t> to the OLED dashboard display. This allows important information such as speed and RPM data to be transferred to the display while only using two communication pins, leaving the remaining pins available for other sensors and system components.</a:t>
+            </a:r>
             <a:endParaRPr lang="en-NZ" noProof="0" dirty="0"/>
           </a:p>
         </p:txBody>
@@ -15015,7 +14812,7 @@
         </p:spPr>
         <p:txBody>
           <a:bodyPr vert="horz" lIns="91440" tIns="45720" rIns="91440" bIns="45720" rtlCol="0">
-            <a:normAutofit fontScale="55000" lnSpcReduction="20000"/>
+            <a:normAutofit fontScale="70000" lnSpcReduction="20000"/>
           </a:bodyPr>
           <a:lstStyle>
             <a:lvl1pPr marL="228600" indent="-228600" algn="l" defTabSz="914400" rtl="0" eaLnBrk="1" latinLnBrk="0" hangingPunct="1">
@@ -15213,8 +15010,8 @@
               <a:buNone/>
             </a:pPr>
             <a:r>
-              <a:rPr lang="en-US" dirty="0"/>
-              <a:t>During bench testing, the high-current draw from the 800W motor introduced massive electromagnetic interference (EMI) and high-frequency voltage ripples into the circuit. To suppress this electrical noise, physical hardware filtering was integrated by placing 0.1uf ceramic decoupling capacitors across the signal and ground lines of the Hall effect speed sensors, the LED alert indicators, and the battery voltage divider inputs. This hardware modification permanently smoothed out voltage spikes and isolated the signal lines, resulting in zero false triggers and completely stable data tracking across consecutive trials.</a:t>
+              <a:rPr lang="en-NZ" dirty="0"/>
+              <a:t>I will meet this requirement by adding filtering components, such as 0.1µF ceramic capacitors, to reduce electrical noise caused by the high-current electric motor. This will improve the reliability of the Hall effect sensors, LED indicators, and battery monitoring system by providing more stable and accurate readings.</a:t>
             </a:r>
             <a:br>
               <a:rPr lang="en-US" dirty="0"/>
@@ -16275,7 +16072,7 @@
         </p:spPr>
         <p:txBody>
           <a:bodyPr>
-            <a:normAutofit lnSpcReduction="10000"/>
+            <a:normAutofit fontScale="85000" lnSpcReduction="10000"/>
           </a:bodyPr>
           <a:lstStyle/>
           <a:p>
@@ -16292,72 +16089,120 @@
             </a:r>
             <a:r>
               <a:rPr lang="en-US" sz="1800" i="1" noProof="0" dirty="0"/>
-              <a:t> of the electronics is as follows. Firstly to relay signal to a motor controller for </a:t>
-            </a:r>
-            <a:r>
-              <a:rPr lang="en-US" sz="1800" i="1" noProof="0" dirty="0" err="1"/>
-              <a:t>th</a:t>
-            </a:r>
-            <a:r>
-              <a:rPr lang="en-US" sz="1800" i="1" dirty="0"/>
-              <a:t>e 800w electric motor which is done with a analog hall effect sensor, the reason for having a separate controller is because the motor runs on 36v where as the Arduino r4 runs on 12v which is done with a 36-12v dc-dc buck converter. The next part is to have the 2 power units be separatable, this is done with a 24v electromagnetic hall effect sensor and another analog hall effect sensor so that when the bike comes </a:t>
-            </a:r>
-            <a:r>
-              <a:rPr lang="en-US" sz="1800" i="1" dirty="0" err="1"/>
-              <a:t>offthe</a:t>
-            </a:r>
-            <a:r>
-              <a:rPr lang="en-US" sz="1800" i="1" dirty="0"/>
-              <a:t> line both units are giving power and when the bike reaches a certain speed the clutch will disengage the electric motor from the engine(this is because the engine can go at a much greater rpm comparted to the electric motor) also in the case that  I need the motor detached from the rest of the power train  I have the analog hall effect sensor connected to the clutch leaver so that when I pull in the clutch It disengages both clutches. The third is the rpm sensing so using 2 digital hall effect sensors so detect </a:t>
-            </a:r>
-            <a:r>
-              <a:rPr lang="en-US" sz="1800" i="1" dirty="0" err="1"/>
-              <a:t>therpm</a:t>
-            </a:r>
-            <a:r>
-              <a:rPr lang="en-US" sz="1800" i="1" dirty="0"/>
-              <a:t> of both sides of the clutch so that before the magnetic clutch engages (since it will be disengaged at higher speeds) the electric motor matches the speed of the rest of the drive train otherwise if it doesn’t and it is slower than the rest of the drive  train it can either cause the bike to go slower or caused catastrophic damage to the bike itself. The fourth is the speed sensing using a digital </a:t>
-            </a:r>
-            <a:r>
-              <a:rPr lang="en-US" sz="1800" i="1" dirty="0" err="1"/>
-              <a:t>hallleffecct</a:t>
-            </a:r>
-            <a:r>
-              <a:rPr lang="en-US" sz="1800" i="1" dirty="0"/>
-              <a:t> sensor attached to the rear wheel to tell the Arduino what speed the bike is traveling at. </a:t>
-            </a:r>
-            <a:r>
-              <a:rPr lang="en-US" sz="1800" i="1" dirty="0" err="1"/>
-              <a:t>Fithly</a:t>
-            </a:r>
-            <a:r>
-              <a:rPr lang="en-US" sz="1800" i="1" dirty="0"/>
-              <a:t> battery and fuel gauges for the </a:t>
-            </a:r>
-            <a:r>
-              <a:rPr lang="en-US" sz="1800" i="1" dirty="0" err="1"/>
-              <a:t>battey</a:t>
-            </a:r>
-            <a:r>
-              <a:rPr lang="en-US" sz="1800" i="1" dirty="0"/>
-              <a:t> using a capacitor and resistor to give a readable signal for the Arduino to show the voltage of the battery and for the fuel using a flow sensor to tell the Arduino if there is fuel flow in the fuel lines so if there isn’t that means the fuel is low  Lastly is the dashboard so using a </a:t>
-            </a:r>
-            <a:r>
-              <a:rPr lang="en-US" sz="1800" i="1" dirty="0" err="1"/>
-              <a:t>Oled</a:t>
-            </a:r>
-            <a:r>
-              <a:rPr lang="en-US" sz="1800" i="1" dirty="0"/>
-              <a:t> display and a few </a:t>
-            </a:r>
-            <a:r>
-              <a:rPr lang="en-US" sz="1800" i="1" dirty="0" err="1"/>
-              <a:t>led’s</a:t>
-            </a:r>
-            <a:r>
-              <a:rPr lang="en-US" sz="1800" i="1" dirty="0"/>
-              <a:t> to visually display the speed, the rpm and the battery and fuel percentage.</a:t>
-            </a:r>
+              <a:t> of the electronics is as follows. </a:t>
+            </a:r>
+          </a:p>
+          <a:p>
+            <a:pPr marL="0" indent="0">
+              <a:buNone/>
+            </a:pPr>
+            <a:r>
+              <a:rPr lang="en-NZ" sz="1800" u="sng" dirty="0"/>
+              <a:t>Electric Motor Control</a:t>
+            </a:r>
+          </a:p>
+          <a:p>
+            <a:pPr marL="0" indent="0">
+              <a:buNone/>
+            </a:pPr>
+            <a:r>
+              <a:rPr lang="en-NZ" sz="1800" dirty="0"/>
+              <a:t>An analogue Hall effect sensor is used as the throttle input to send a signal to the 36 V motor controller, which controls the 800 W electric motor. </a:t>
+            </a:r>
+          </a:p>
+          <a:p>
+            <a:pPr marL="0" indent="0">
+              <a:buNone/>
+            </a:pPr>
+            <a:r>
+              <a:rPr lang="en-NZ" sz="1800" dirty="0"/>
+              <a:t>A 36 V to 12 V DC-DC buck converter is used to safely power the Arduino Uno R4 </a:t>
+            </a:r>
+            <a:r>
+              <a:rPr lang="en-NZ" sz="1800" dirty="0" err="1"/>
+              <a:t>WiFi</a:t>
+            </a:r>
+            <a:r>
+              <a:rPr lang="en-NZ" sz="1800" dirty="0"/>
+              <a:t> from the bike’s main battery system. </a:t>
+            </a:r>
+          </a:p>
+          <a:p>
+            <a:pPr marL="0" indent="0">
+              <a:buNone/>
+            </a:pPr>
+            <a:r>
+              <a:rPr lang="en-NZ" sz="1800" u="sng" dirty="0"/>
+              <a:t>Hybrid Power Switching</a:t>
+            </a:r>
+          </a:p>
+          <a:p>
+            <a:pPr marL="0" indent="0">
+              <a:buNone/>
+            </a:pPr>
+            <a:r>
+              <a:rPr lang="en-NZ" sz="1800" dirty="0"/>
+              <a:t>A 24 V electromagnetic clutch is used to connect and disconnect the electric motor from the drivetrain. </a:t>
+            </a:r>
+          </a:p>
+          <a:p>
+            <a:pPr marL="0" indent="0">
+              <a:buNone/>
+            </a:pPr>
+            <a:r>
+              <a:rPr lang="en-NZ" sz="1800" dirty="0"/>
+              <a:t>Both the petrol engine and electric motor provide power during acceleration to improve low-speed torque. </a:t>
+            </a:r>
+          </a:p>
+          <a:p>
+            <a:pPr marL="0" indent="0">
+              <a:buNone/>
+            </a:pPr>
+            <a:r>
+              <a:rPr lang="en-NZ" sz="1800" dirty="0"/>
+              <a:t>At higher speeds, the electric motor disengages because the petrol engine can operate at a higher RPM. </a:t>
+            </a:r>
+          </a:p>
+          <a:p>
+            <a:pPr marL="0" indent="0">
+              <a:buNone/>
+            </a:pPr>
+            <a:r>
+              <a:rPr lang="en-NZ" sz="1800" dirty="0"/>
+              <a:t>A second Hall effect sensor is connected to the clutch lever, allowing the rider to manually disengage the electric motor when required. </a:t>
+            </a:r>
+          </a:p>
+          <a:p>
+            <a:pPr marL="0" indent="0">
+              <a:buNone/>
+            </a:pPr>
+            <a:r>
+              <a:rPr lang="en-NZ" sz="1800" u="sng" dirty="0"/>
+              <a:t>RPM Matching System</a:t>
+            </a:r>
+          </a:p>
+          <a:p>
+            <a:pPr marL="0" indent="0">
+              <a:buNone/>
+            </a:pPr>
+            <a:r>
+              <a:rPr lang="en-NZ" sz="1800" dirty="0"/>
+              <a:t>Two digital Hall effect sensors measure the RPM on both sides of the electromagnetic clutch. </a:t>
+            </a:r>
+          </a:p>
+          <a:p>
+            <a:pPr marL="0" indent="0">
+              <a:buNone/>
+            </a:pPr>
+            <a:r>
+              <a:rPr lang="en-NZ" sz="1800" dirty="0"/>
+              <a:t>The Arduino uses this data to match the electric motor speed with the drivetrain before engaging the clutch, preventing drivetrain damage and sudden speed changes.</a:t>
+            </a:r>
+          </a:p>
+          <a:p>
+            <a:pPr marL="0" indent="0">
+              <a:buNone/>
+            </a:pPr>
             <a:endParaRPr lang="en-NZ" sz="1800" i="1" noProof="0" dirty="0"/>
           </a:p>
         </p:txBody>
@@ -16381,6 +16226,197 @@
 </file>
 
 <file path=ppt/slides/slide7.xml><?xml version="1.0" encoding="utf-8"?>
+<p:sld xmlns:a="http://schemas.openxmlformats.org/drawingml/2006/main" xmlns:r="http://schemas.openxmlformats.org/officeDocument/2006/relationships" xmlns:p="http://schemas.openxmlformats.org/presentationml/2006/main">
+  <p:cSld>
+    <p:spTree>
+      <p:nvGrpSpPr>
+        <p:cNvPr id="1" name="">
+          <a:extLst>
+            <a:ext uri="{FF2B5EF4-FFF2-40B4-BE49-F238E27FC236}">
+              <a16:creationId xmlns:a16="http://schemas.microsoft.com/office/drawing/2014/main" id="{A7C63D47-06A1-3925-FCDA-1F2C3981AD60}"/>
+            </a:ext>
+          </a:extLst>
+        </p:cNvPr>
+        <p:cNvGrpSpPr/>
+        <p:nvPr/>
+      </p:nvGrpSpPr>
+      <p:grpSpPr>
+        <a:xfrm>
+          <a:off x="0" y="0"/>
+          <a:ext cx="0" cy="0"/>
+          <a:chOff x="0" y="0"/>
+          <a:chExt cx="0" cy="0"/>
+        </a:xfrm>
+      </p:grpSpPr>
+      <p:sp>
+        <p:nvSpPr>
+          <p:cNvPr id="3" name="Content Placeholder 2">
+            <a:extLst>
+              <a:ext uri="{FF2B5EF4-FFF2-40B4-BE49-F238E27FC236}">
+                <a16:creationId xmlns:a16="http://schemas.microsoft.com/office/drawing/2014/main" id="{5ACC3126-8DD8-8C54-83C8-B51AC26F67BA}"/>
+              </a:ext>
+            </a:extLst>
+          </p:cNvPr>
+          <p:cNvSpPr>
+            <a:spLocks noGrp="1"/>
+          </p:cNvSpPr>
+          <p:nvPr>
+            <p:ph idx="1"/>
+          </p:nvPr>
+        </p:nvSpPr>
+        <p:spPr>
+          <a:xfrm>
+            <a:off x="838200" y="612648"/>
+            <a:ext cx="10515600" cy="5564315"/>
+          </a:xfrm>
+          <a:solidFill>
+            <a:srgbClr val="FFCCCC"/>
+          </a:solidFill>
+        </p:spPr>
+        <p:txBody>
+          <a:bodyPr>
+            <a:normAutofit/>
+          </a:bodyPr>
+          <a:lstStyle/>
+          <a:p>
+            <a:pPr marL="0" indent="0">
+              <a:buNone/>
+            </a:pPr>
+            <a:r>
+              <a:rPr lang="en-NZ" sz="1900" u="sng" dirty="0"/>
+              <a:t>Speed Monitoring</a:t>
+            </a:r>
+          </a:p>
+          <a:p>
+            <a:pPr marL="0" indent="0">
+              <a:buNone/>
+            </a:pPr>
+            <a:r>
+              <a:rPr lang="en-NZ" sz="1900" dirty="0"/>
+              <a:t>A digital Hall effect sensor mounted near the rear wheel measures wheel rotation speed. </a:t>
+            </a:r>
+          </a:p>
+          <a:p>
+            <a:pPr marL="0" indent="0">
+              <a:buNone/>
+            </a:pPr>
+            <a:r>
+              <a:rPr lang="en-NZ" sz="1900" dirty="0"/>
+              <a:t>The Arduino calculates the bike’s speed and displays it on the dashboard. </a:t>
+            </a:r>
+          </a:p>
+          <a:p>
+            <a:pPr marL="0" indent="0">
+              <a:buNone/>
+            </a:pPr>
+            <a:r>
+              <a:rPr lang="en-NZ" sz="1900" u="sng" dirty="0"/>
+              <a:t>Battery and Fuel Monitoring</a:t>
+            </a:r>
+          </a:p>
+          <a:p>
+            <a:pPr marL="0" indent="0">
+              <a:buNone/>
+            </a:pPr>
+            <a:r>
+              <a:rPr lang="en-NZ" sz="1900" dirty="0"/>
+              <a:t>A resistor and capacitor voltage divider circuit measures battery voltage and sends a readable signal to the Arduino. </a:t>
+            </a:r>
+          </a:p>
+          <a:p>
+            <a:pPr marL="0" indent="0">
+              <a:buNone/>
+            </a:pPr>
+            <a:r>
+              <a:rPr lang="en-NZ" sz="1900" dirty="0"/>
+              <a:t>A fuel flow sensor detects fuel movement through the fuel line, allowing the system to estimate fuel availability. </a:t>
+            </a:r>
+          </a:p>
+          <a:p>
+            <a:pPr marL="0" indent="0">
+              <a:buNone/>
+            </a:pPr>
+            <a:r>
+              <a:rPr lang="en-NZ" sz="1900" u="sng" dirty="0"/>
+              <a:t>Dashboard Display</a:t>
+            </a:r>
+          </a:p>
+          <a:p>
+            <a:pPr marL="0" indent="0">
+              <a:buNone/>
+            </a:pPr>
+            <a:r>
+              <a:rPr lang="en-NZ" sz="1900" dirty="0"/>
+              <a:t>An OLED display and LED indicators provide the rider with real-time information. </a:t>
+            </a:r>
+          </a:p>
+          <a:p>
+            <a:pPr marL="0" indent="0">
+              <a:buNone/>
+            </a:pPr>
+            <a:r>
+              <a:rPr lang="en-NZ" sz="1900" dirty="0"/>
+              <a:t>The dashboard displays: </a:t>
+            </a:r>
+          </a:p>
+          <a:p>
+            <a:pPr marL="0" indent="0">
+              <a:buNone/>
+            </a:pPr>
+            <a:r>
+              <a:rPr lang="en-NZ" sz="1900" dirty="0"/>
+              <a:t>Vehicle speed </a:t>
+            </a:r>
+          </a:p>
+          <a:p>
+            <a:pPr marL="0" indent="0">
+              <a:buNone/>
+            </a:pPr>
+            <a:r>
+              <a:rPr lang="en-NZ" sz="1900" dirty="0"/>
+              <a:t>Engine RPM </a:t>
+            </a:r>
+          </a:p>
+          <a:p>
+            <a:pPr marL="0" indent="0">
+              <a:buNone/>
+            </a:pPr>
+            <a:r>
+              <a:rPr lang="en-NZ" sz="1900" dirty="0"/>
+              <a:t>Electric motor RPM </a:t>
+            </a:r>
+          </a:p>
+          <a:p>
+            <a:pPr marL="0" indent="0">
+              <a:buNone/>
+            </a:pPr>
+            <a:r>
+              <a:rPr lang="en-NZ" sz="1900" dirty="0"/>
+              <a:t>Battery percentage </a:t>
+            </a:r>
+          </a:p>
+          <a:p>
+            <a:pPr marL="0" indent="0">
+              <a:buNone/>
+            </a:pPr>
+            <a:endParaRPr lang="en-NZ" sz="1800" i="1" noProof="0" dirty="0"/>
+          </a:p>
+        </p:txBody>
+      </p:sp>
+    </p:spTree>
+    <p:extLst>
+      <p:ext uri="{BB962C8B-B14F-4D97-AF65-F5344CB8AC3E}">
+        <p14:creationId xmlns:p14="http://schemas.microsoft.com/office/powerpoint/2010/main" val="2786755706"/>
+      </p:ext>
+    </p:extLst>
+  </p:cSld>
+  <p:clrMapOvr>
+    <a:masterClrMapping/>
+  </p:clrMapOvr>
+</p:sld>
+</file>
+
+<file path=ppt/slides/slide8.xml><?xml version="1.0" encoding="utf-8"?>
 <p:sld xmlns:a="http://schemas.openxmlformats.org/drawingml/2006/main" xmlns:r="http://schemas.openxmlformats.org/officeDocument/2006/relationships" xmlns:p="http://schemas.openxmlformats.org/presentationml/2006/main">
   <p:cSld>
     <p:spTree>
@@ -16464,8 +16500,16 @@
               <a:buNone/>
             </a:pPr>
             <a:r>
-              <a:rPr lang="en-US" sz="1800" dirty="0"/>
-              <a:t>For this project, I am using the I2C (Inter-Integrated Circuit) communication protocol to interface the Arduino with the dashboard OLED display. I2C operates as a master-slave system using a two-wire synchronous bus consisting of a Serial Data line (SDA) and a Serial Clock line (SCL). The Arduino acts as the master device, generating the clock signal and initiating contact by transmitting the unique 7-bit hardware address belonging to the OLED display. Once communication is established, the Arduino uses this data bus to send continuous, real-time telemetry updates. Specifically, I am using this protocol to transmit calculated values ​​for the bike's speed, clutch RPM and  battery voltage directly to the screen for the rider to see.</a:t>
+              <a:rPr lang="en-NZ" sz="1800" dirty="0"/>
+              <a:t>I am using I2C communication between the Arduino Uno R4 </a:t>
+            </a:r>
+            <a:r>
+              <a:rPr lang="en-NZ" sz="1800" dirty="0" err="1"/>
+              <a:t>WiFi</a:t>
+            </a:r>
+            <a:r>
+              <a:rPr lang="en-NZ" sz="1800" dirty="0"/>
+              <a:t> and the OLED dashboard display. I2C works by using two communication lines: SDA (Serial Data) to transfer information and SCL (Serial Clock) to synchronise the data transfer. The Arduino acts as the master device, sending information to the OLED display, which acts as the slave device. This allows the system to display real-time information such as speed, RPM, and battery voltage.</a:t>
             </a:r>
             <a:endParaRPr lang="en-NZ" sz="1800" i="1" noProof="0" dirty="0"/>
           </a:p>
@@ -16502,7 +16546,7 @@
         </p:spPr>
         <p:txBody>
           <a:bodyPr vert="horz" lIns="91440" tIns="45720" rIns="91440" bIns="45720" rtlCol="0">
-            <a:normAutofit lnSpcReduction="10000"/>
+            <a:normAutofit/>
           </a:bodyPr>
           <a:lstStyle>
             <a:lvl1pPr marL="228600" indent="-228600" algn="l" defTabSz="914400" rtl="0" eaLnBrk="1" latinLnBrk="0" hangingPunct="1">
@@ -16673,8 +16717,8 @@
               <a:buNone/>
             </a:pPr>
             <a:r>
-              <a:rPr lang="en-US" sz="1800" dirty="0"/>
-              <a:t>I selected the I2C protocol over alternative methods because it offers the best balance between speed and pin efficiency for this specific sensor-heavy application. While alternative interfaces like Parallel require eight or more digital pins, and SPI requires four, I2C requires only two microcontroller pins. Minimizing pin usage is critical for this e-bike layout because the system demands numerous dedicated hardware inputs for the digital speed sensors, analog clutch sensors, and the fuel flow meter. While SPI offers faster data transfer rates than I2C, the extra bandwidth is unnecessary for updating a small, primarily text-based dashboard screen. Furthermore, I2C supports multi-device connectivity on the same bus, allowing future upgrades—such as adding an I2C accelerometer or telemetry module—without consuming any additional physical pins on the Arduino.</a:t>
+              <a:rPr lang="en-NZ" sz="1800" dirty="0"/>
+              <a:t>I selected I2C because it only requires two Arduino pins, leaving more available pins for the other sensors used in the bike, such as Hall effect sensors and RPM sensors. I2C also provides enough communication speed for a small OLED display while allowing additional devices to be added to the same communication bus in the future.</a:t>
             </a:r>
             <a:endParaRPr lang="en-NZ" sz="1800" i="1" dirty="0"/>
           </a:p>
@@ -16698,7 +16742,7 @@
 </p:sld>
 </file>
 
-<file path=ppt/slides/slide8.xml><?xml version="1.0" encoding="utf-8"?>
+<file path=ppt/slides/slide9.xml><?xml version="1.0" encoding="utf-8"?>
 <p:sld xmlns:a="http://schemas.openxmlformats.org/drawingml/2006/main" xmlns:r="http://schemas.openxmlformats.org/officeDocument/2006/relationships" xmlns:p="http://schemas.openxmlformats.org/presentationml/2006/main">
   <p:cSld>
     <p:spTree>
@@ -16999,89 +17043,6 @@
     <p:extLst>
       <p:ext uri="{BB962C8B-B14F-4D97-AF65-F5344CB8AC3E}">
         <p14:creationId xmlns:p14="http://schemas.microsoft.com/office/powerpoint/2010/main" val="974559019"/>
-      </p:ext>
-    </p:extLst>
-  </p:cSld>
-  <p:clrMapOvr>
-    <a:masterClrMapping/>
-  </p:clrMapOvr>
-</p:sld>
-</file>
-
-<file path=ppt/slides/slide9.xml><?xml version="1.0" encoding="utf-8"?>
-<p:sld xmlns:a="http://schemas.openxmlformats.org/drawingml/2006/main" xmlns:r="http://schemas.openxmlformats.org/officeDocument/2006/relationships" xmlns:p="http://schemas.openxmlformats.org/presentationml/2006/main">
-  <p:cSld>
-    <p:spTree>
-      <p:nvGrpSpPr>
-        <p:cNvPr id="1" name=""/>
-        <p:cNvGrpSpPr/>
-        <p:nvPr/>
-      </p:nvGrpSpPr>
-      <p:grpSpPr>
-        <a:xfrm>
-          <a:off x="0" y="0"/>
-          <a:ext cx="0" cy="0"/>
-          <a:chOff x="0" y="0"/>
-          <a:chExt cx="0" cy="0"/>
-        </a:xfrm>
-      </p:grpSpPr>
-      <p:sp>
-        <p:nvSpPr>
-          <p:cNvPr id="4" name="Title 3">
-            <a:extLst>
-              <a:ext uri="{FF2B5EF4-FFF2-40B4-BE49-F238E27FC236}">
-                <a16:creationId xmlns:a16="http://schemas.microsoft.com/office/drawing/2014/main" id="{2B56BB34-A33E-CA54-E3A0-74010D4B0A63}"/>
-              </a:ext>
-            </a:extLst>
-          </p:cNvPr>
-          <p:cNvSpPr>
-            <a:spLocks noGrp="1"/>
-          </p:cNvSpPr>
-          <p:nvPr>
-            <p:ph type="ctrTitle"/>
-          </p:nvPr>
-        </p:nvSpPr>
-        <p:spPr/>
-        <p:txBody>
-          <a:bodyPr/>
-          <a:lstStyle/>
-          <a:p>
-            <a:r>
-              <a:rPr lang="en-NZ" noProof="0" dirty="0"/>
-              <a:t>Components and Systems</a:t>
-            </a:r>
-          </a:p>
-        </p:txBody>
-      </p:sp>
-      <p:sp>
-        <p:nvSpPr>
-          <p:cNvPr id="5" name="Subtitle 4">
-            <a:extLst>
-              <a:ext uri="{FF2B5EF4-FFF2-40B4-BE49-F238E27FC236}">
-                <a16:creationId xmlns:a16="http://schemas.microsoft.com/office/drawing/2014/main" id="{E04ACEFA-C5B9-70D8-D43C-68A151E2A2DE}"/>
-              </a:ext>
-            </a:extLst>
-          </p:cNvPr>
-          <p:cNvSpPr>
-            <a:spLocks noGrp="1"/>
-          </p:cNvSpPr>
-          <p:nvPr>
-            <p:ph type="subTitle" idx="1"/>
-          </p:nvPr>
-        </p:nvSpPr>
-        <p:spPr/>
-        <p:txBody>
-          <a:bodyPr/>
-          <a:lstStyle/>
-          <a:p>
-            <a:endParaRPr lang="en-NZ" noProof="0" dirty="0"/>
-          </a:p>
-        </p:txBody>
-      </p:sp>
-    </p:spTree>
-    <p:extLst>
-      <p:ext uri="{BB962C8B-B14F-4D97-AF65-F5344CB8AC3E}">
-        <p14:creationId xmlns:p14="http://schemas.microsoft.com/office/powerpoint/2010/main" val="3440362149"/>
       </p:ext>
     </p:extLst>
   </p:cSld>

--- a/AS91904 Electronics Heinrich Venter.pptx
+++ b/AS91904 Electronics Heinrich Venter.pptx
@@ -148,7 +148,7 @@
 <file path=ppt/revisionInfo.xml><?xml version="1.0" encoding="utf-8"?>
 <p1510:revInfo xmlns:a="http://schemas.openxmlformats.org/drawingml/2006/main" xmlns:r="http://schemas.openxmlformats.org/officeDocument/2006/relationships" xmlns:p1510="http://schemas.microsoft.com/office/powerpoint/2015/10/main">
   <p1510:revLst>
-    <p1510:client id="{93B3EF88-C134-4ECF-A8E1-33D5E10640B0}" v="20" dt="2026-07-19T07:47:21.733"/>
+    <p1510:client id="{93B3EF88-C134-4ECF-A8E1-33D5E10640B0}" v="34" dt="2026-07-20T07:23:58.450"/>
   </p1510:revLst>
 </p1510:revInfo>
 </file>
@@ -158,7 +158,7 @@
   <pc:docChgLst>
     <pc:chgData name="Heinrich Venter" userId="694de3c83518532c" providerId="LiveId" clId="{10CD68D7-CBE1-4750-A2D1-7DEE064E9363}"/>
     <pc:docChg chg="undo custSel addSld delSld modSld">
-      <pc:chgData name="Heinrich Venter" userId="694de3c83518532c" providerId="LiveId" clId="{10CD68D7-CBE1-4750-A2D1-7DEE064E9363}" dt="2026-07-19T07:49:15.322" v="5551" actId="20577"/>
+      <pc:chgData name="Heinrich Venter" userId="694de3c83518532c" providerId="LiveId" clId="{10CD68D7-CBE1-4750-A2D1-7DEE064E9363}" dt="2026-07-20T07:24:05.631" v="5641" actId="1076"/>
       <pc:docMkLst>
         <pc:docMk/>
       </pc:docMkLst>
@@ -199,6 +199,68 @@
             <ac:spMk id="4" creationId="{6748CEDE-0DB3-164E-E438-A407CD2F953C}"/>
           </ac:spMkLst>
         </pc:spChg>
+      </pc:sldChg>
+      <pc:sldChg chg="addSp modSp mod">
+        <pc:chgData name="Heinrich Venter" userId="694de3c83518532c" providerId="LiveId" clId="{10CD68D7-CBE1-4750-A2D1-7DEE064E9363}" dt="2026-07-20T06:50:51.461" v="5553"/>
+        <pc:sldMkLst>
+          <pc:docMk/>
+          <pc:sldMk cId="1365950852" sldId="267"/>
+        </pc:sldMkLst>
+        <pc:spChg chg="mod">
+          <ac:chgData name="Heinrich Venter" userId="694de3c83518532c" providerId="LiveId" clId="{10CD68D7-CBE1-4750-A2D1-7DEE064E9363}" dt="2026-07-20T06:50:50.479" v="5552" actId="20577"/>
+          <ac:spMkLst>
+            <pc:docMk/>
+            <pc:sldMk cId="1365950852" sldId="267"/>
+            <ac:spMk id="3" creationId="{DA45C6F8-39B2-B16D-3499-DEBD85A6474C}"/>
+          </ac:spMkLst>
+        </pc:spChg>
+        <pc:picChg chg="add">
+          <ac:chgData name="Heinrich Venter" userId="694de3c83518532c" providerId="LiveId" clId="{10CD68D7-CBE1-4750-A2D1-7DEE064E9363}" dt="2026-07-20T06:50:51.461" v="5553"/>
+          <ac:picMkLst>
+            <pc:docMk/>
+            <pc:sldMk cId="1365950852" sldId="267"/>
+            <ac:picMk id="4" creationId="{A1894E1A-8204-EA5E-8DAA-A29A51DA0F88}"/>
+          </ac:picMkLst>
+        </pc:picChg>
+      </pc:sldChg>
+      <pc:sldChg chg="addSp modSp mod">
+        <pc:chgData name="Heinrich Venter" userId="694de3c83518532c" providerId="LiveId" clId="{10CD68D7-CBE1-4750-A2D1-7DEE064E9363}" dt="2026-07-20T07:11:50.138" v="5562" actId="14100"/>
+        <pc:sldMkLst>
+          <pc:docMk/>
+          <pc:sldMk cId="974559019" sldId="268"/>
+        </pc:sldMkLst>
+        <pc:spChg chg="mod">
+          <ac:chgData name="Heinrich Venter" userId="694de3c83518532c" providerId="LiveId" clId="{10CD68D7-CBE1-4750-A2D1-7DEE064E9363}" dt="2026-07-20T07:11:23.325" v="5558" actId="14100"/>
+          <ac:spMkLst>
+            <pc:docMk/>
+            <pc:sldMk cId="974559019" sldId="268"/>
+            <ac:spMk id="2" creationId="{03C556D0-C1D9-5C68-8845-C708DF5F31D1}"/>
+          </ac:spMkLst>
+        </pc:spChg>
+        <pc:spChg chg="mod">
+          <ac:chgData name="Heinrich Venter" userId="694de3c83518532c" providerId="LiveId" clId="{10CD68D7-CBE1-4750-A2D1-7DEE064E9363}" dt="2026-07-20T07:11:32.184" v="5560" actId="1076"/>
+          <ac:spMkLst>
+            <pc:docMk/>
+            <pc:sldMk cId="974559019" sldId="268"/>
+            <ac:spMk id="3" creationId="{4ECA3479-9DD9-B6D5-BE2D-ABCAF7C76293}"/>
+          </ac:spMkLst>
+        </pc:spChg>
+        <pc:spChg chg="mod">
+          <ac:chgData name="Heinrich Venter" userId="694de3c83518532c" providerId="LiveId" clId="{10CD68D7-CBE1-4750-A2D1-7DEE064E9363}" dt="2026-07-20T07:11:17.157" v="5557" actId="20577"/>
+          <ac:spMkLst>
+            <pc:docMk/>
+            <pc:sldMk cId="974559019" sldId="268"/>
+            <ac:spMk id="4" creationId="{0BDD2F55-C254-2B6C-E842-EDF49DD5A11C}"/>
+          </ac:spMkLst>
+        </pc:spChg>
+        <pc:picChg chg="add mod">
+          <ac:chgData name="Heinrich Venter" userId="694de3c83518532c" providerId="LiveId" clId="{10CD68D7-CBE1-4750-A2D1-7DEE064E9363}" dt="2026-07-20T07:11:50.138" v="5562" actId="14100"/>
+          <ac:picMkLst>
+            <pc:docMk/>
+            <pc:sldMk cId="974559019" sldId="268"/>
+            <ac:picMk id="5" creationId="{235B136F-957E-4C8A-29DC-2D7245FC85D9}"/>
+          </ac:picMkLst>
+        </pc:picChg>
       </pc:sldChg>
       <pc:sldChg chg="modSp mod">
         <pc:chgData name="Heinrich Venter" userId="694de3c83518532c" providerId="LiveId" clId="{10CD68D7-CBE1-4750-A2D1-7DEE064E9363}" dt="2026-07-19T07:32:11.473" v="5366" actId="115"/>
@@ -253,12 +315,91 @@
           </ac:spMkLst>
         </pc:spChg>
       </pc:sldChg>
-      <pc:sldChg chg="modSp mod">
-        <pc:chgData name="Heinrich Venter" userId="694de3c83518532c" providerId="LiveId" clId="{10CD68D7-CBE1-4750-A2D1-7DEE064E9363}" dt="2026-07-19T07:40:14.476" v="5438" actId="27636"/>
+      <pc:sldChg chg="addSp modSp mod">
+        <pc:chgData name="Heinrich Venter" userId="694de3c83518532c" providerId="LiveId" clId="{10CD68D7-CBE1-4750-A2D1-7DEE064E9363}" dt="2026-07-20T07:15:24.675" v="5591" actId="14100"/>
+        <pc:sldMkLst>
+          <pc:docMk/>
+          <pc:sldMk cId="4188302786" sldId="287"/>
+        </pc:sldMkLst>
+        <pc:spChg chg="mod">
+          <ac:chgData name="Heinrich Venter" userId="694de3c83518532c" providerId="LiveId" clId="{10CD68D7-CBE1-4750-A2D1-7DEE064E9363}" dt="2026-07-20T07:13:41.191" v="5572" actId="14100"/>
+          <ac:spMkLst>
+            <pc:docMk/>
+            <pc:sldMk cId="4188302786" sldId="287"/>
+            <ac:spMk id="2" creationId="{5AD3A040-4DF6-3A52-2828-494419344D41}"/>
+          </ac:spMkLst>
+        </pc:spChg>
+        <pc:spChg chg="mod">
+          <ac:chgData name="Heinrich Venter" userId="694de3c83518532c" providerId="LiveId" clId="{10CD68D7-CBE1-4750-A2D1-7DEE064E9363}" dt="2026-07-20T07:13:47.977" v="5573" actId="1076"/>
+          <ac:spMkLst>
+            <pc:docMk/>
+            <pc:sldMk cId="4188302786" sldId="287"/>
+            <ac:spMk id="8" creationId="{DFB8CE4C-97AF-7F3E-9CAC-E06101B7E86D}"/>
+          </ac:spMkLst>
+        </pc:spChg>
+        <pc:spChg chg="mod">
+          <ac:chgData name="Heinrich Venter" userId="694de3c83518532c" providerId="LiveId" clId="{10CD68D7-CBE1-4750-A2D1-7DEE064E9363}" dt="2026-07-20T07:14:25.129" v="5577" actId="20577"/>
+          <ac:spMkLst>
+            <pc:docMk/>
+            <pc:sldMk cId="4188302786" sldId="287"/>
+            <ac:spMk id="9" creationId="{0A4F4AF7-5E5A-2D76-3F73-6A09F3F31537}"/>
+          </ac:spMkLst>
+        </pc:spChg>
+        <pc:spChg chg="mod">
+          <ac:chgData name="Heinrich Venter" userId="694de3c83518532c" providerId="LiveId" clId="{10CD68D7-CBE1-4750-A2D1-7DEE064E9363}" dt="2026-07-20T07:15:08.417" v="5586" actId="27636"/>
+          <ac:spMkLst>
+            <pc:docMk/>
+            <pc:sldMk cId="4188302786" sldId="287"/>
+            <ac:spMk id="10" creationId="{841EBE6D-B5D0-4C30-C32E-F3AA1F02B8FD}"/>
+          </ac:spMkLst>
+        </pc:spChg>
+        <pc:picChg chg="add mod">
+          <ac:chgData name="Heinrich Venter" userId="694de3c83518532c" providerId="LiveId" clId="{10CD68D7-CBE1-4750-A2D1-7DEE064E9363}" dt="2026-07-20T07:13:18.661" v="5566" actId="14100"/>
+          <ac:picMkLst>
+            <pc:docMk/>
+            <pc:sldMk cId="4188302786" sldId="287"/>
+            <ac:picMk id="3" creationId="{B891D3A8-164C-6F14-3174-7260DD50756C}"/>
+          </ac:picMkLst>
+        </pc:picChg>
+        <pc:picChg chg="add mod">
+          <ac:chgData name="Heinrich Venter" userId="694de3c83518532c" providerId="LiveId" clId="{10CD68D7-CBE1-4750-A2D1-7DEE064E9363}" dt="2026-07-20T07:14:02.272" v="5576" actId="14100"/>
+          <ac:picMkLst>
+            <pc:docMk/>
+            <pc:sldMk cId="4188302786" sldId="287"/>
+            <ac:picMk id="4" creationId="{DB5BC4F3-C531-1D3F-2F74-03D6ADDD369B}"/>
+          </ac:picMkLst>
+        </pc:picChg>
+        <pc:picChg chg="add mod">
+          <ac:chgData name="Heinrich Venter" userId="694de3c83518532c" providerId="LiveId" clId="{10CD68D7-CBE1-4750-A2D1-7DEE064E9363}" dt="2026-07-20T07:14:40.012" v="5584" actId="14100"/>
+          <ac:picMkLst>
+            <pc:docMk/>
+            <pc:sldMk cId="4188302786" sldId="287"/>
+            <ac:picMk id="6" creationId="{0738B815-EC1C-C22B-E05D-CE494F7F36C9}"/>
+          </ac:picMkLst>
+        </pc:picChg>
+        <pc:picChg chg="add mod">
+          <ac:chgData name="Heinrich Venter" userId="694de3c83518532c" providerId="LiveId" clId="{10CD68D7-CBE1-4750-A2D1-7DEE064E9363}" dt="2026-07-20T07:15:24.675" v="5591" actId="14100"/>
+          <ac:picMkLst>
+            <pc:docMk/>
+            <pc:sldMk cId="4188302786" sldId="287"/>
+            <ac:picMk id="7" creationId="{A3CFC61C-74CA-3081-5974-868F80B6B667}"/>
+          </ac:picMkLst>
+        </pc:picChg>
+      </pc:sldChg>
+      <pc:sldChg chg="addSp modSp mod">
+        <pc:chgData name="Heinrich Venter" userId="694de3c83518532c" providerId="LiveId" clId="{10CD68D7-CBE1-4750-A2D1-7DEE064E9363}" dt="2026-07-20T07:18:11.249" v="5610" actId="1076"/>
         <pc:sldMkLst>
           <pc:docMk/>
           <pc:sldMk cId="2953175661" sldId="288"/>
         </pc:sldMkLst>
+        <pc:spChg chg="mod">
+          <ac:chgData name="Heinrich Venter" userId="694de3c83518532c" providerId="LiveId" clId="{10CD68D7-CBE1-4750-A2D1-7DEE064E9363}" dt="2026-07-20T07:16:33.231" v="5597" actId="1076"/>
+          <ac:spMkLst>
+            <pc:docMk/>
+            <pc:sldMk cId="2953175661" sldId="288"/>
+            <ac:spMk id="2" creationId="{5AD3A040-4DF6-3A52-2828-494419344D41}"/>
+          </ac:spMkLst>
+        </pc:spChg>
         <pc:spChg chg="mod">
           <ac:chgData name="Heinrich Venter" userId="694de3c83518532c" providerId="LiveId" clId="{10CD68D7-CBE1-4750-A2D1-7DEE064E9363}" dt="2026-07-19T07:40:02.005" v="5433" actId="27636"/>
           <ac:spMkLst>
@@ -268,16 +409,56 @@
           </ac:spMkLst>
         </pc:spChg>
         <pc:spChg chg="mod">
-          <ac:chgData name="Heinrich Venter" userId="694de3c83518532c" providerId="LiveId" clId="{10CD68D7-CBE1-4750-A2D1-7DEE064E9363}" dt="2026-07-19T07:40:14.476" v="5438" actId="27636"/>
+          <ac:chgData name="Heinrich Venter" userId="694de3c83518532c" providerId="LiveId" clId="{10CD68D7-CBE1-4750-A2D1-7DEE064E9363}" dt="2026-07-20T07:16:38.272" v="5598" actId="1076"/>
+          <ac:spMkLst>
+            <pc:docMk/>
+            <pc:sldMk cId="2953175661" sldId="288"/>
+            <ac:spMk id="8" creationId="{DFB8CE4C-97AF-7F3E-9CAC-E06101B7E86D}"/>
+          </ac:spMkLst>
+        </pc:spChg>
+        <pc:spChg chg="mod">
+          <ac:chgData name="Heinrich Venter" userId="694de3c83518532c" providerId="LiveId" clId="{10CD68D7-CBE1-4750-A2D1-7DEE064E9363}" dt="2026-07-20T07:17:19.652" v="5602" actId="20577"/>
+          <ac:spMkLst>
+            <pc:docMk/>
+            <pc:sldMk cId="2953175661" sldId="288"/>
+            <ac:spMk id="9" creationId="{0A4F4AF7-5E5A-2D76-3F73-6A09F3F31537}"/>
+          </ac:spMkLst>
+        </pc:spChg>
+        <pc:spChg chg="mod">
+          <ac:chgData name="Heinrich Venter" userId="694de3c83518532c" providerId="LiveId" clId="{10CD68D7-CBE1-4750-A2D1-7DEE064E9363}" dt="2026-07-20T07:17:51.535" v="5607" actId="27636"/>
           <ac:spMkLst>
             <pc:docMk/>
             <pc:sldMk cId="2953175661" sldId="288"/>
             <ac:spMk id="10" creationId="{841EBE6D-B5D0-4C30-C32E-F3AA1F02B8FD}"/>
           </ac:spMkLst>
         </pc:spChg>
+        <pc:picChg chg="add mod">
+          <ac:chgData name="Heinrich Venter" userId="694de3c83518532c" providerId="LiveId" clId="{10CD68D7-CBE1-4750-A2D1-7DEE064E9363}" dt="2026-07-20T07:17:03.352" v="5601" actId="1076"/>
+          <ac:picMkLst>
+            <pc:docMk/>
+            <pc:sldMk cId="2953175661" sldId="288"/>
+            <ac:picMk id="3" creationId="{F5E4ECB3-7C85-9278-8865-913F5712CD83}"/>
+          </ac:picMkLst>
+        </pc:picChg>
+        <pc:picChg chg="add mod">
+          <ac:chgData name="Heinrich Venter" userId="694de3c83518532c" providerId="LiveId" clId="{10CD68D7-CBE1-4750-A2D1-7DEE064E9363}" dt="2026-07-20T07:17:34.274" v="5605" actId="1076"/>
+          <ac:picMkLst>
+            <pc:docMk/>
+            <pc:sldMk cId="2953175661" sldId="288"/>
+            <ac:picMk id="4" creationId="{32BBFE84-3B48-9181-4D61-41F2CE571F1A}"/>
+          </ac:picMkLst>
+        </pc:picChg>
+        <pc:picChg chg="add mod">
+          <ac:chgData name="Heinrich Venter" userId="694de3c83518532c" providerId="LiveId" clId="{10CD68D7-CBE1-4750-A2D1-7DEE064E9363}" dt="2026-07-20T07:18:11.249" v="5610" actId="1076"/>
+          <ac:picMkLst>
+            <pc:docMk/>
+            <pc:sldMk cId="2953175661" sldId="288"/>
+            <ac:picMk id="6" creationId="{41234967-307F-BDE8-49C4-83E454CBA3FC}"/>
+          </ac:picMkLst>
+        </pc:picChg>
       </pc:sldChg>
-      <pc:sldChg chg="modSp mod">
-        <pc:chgData name="Heinrich Venter" userId="694de3c83518532c" providerId="LiveId" clId="{10CD68D7-CBE1-4750-A2D1-7DEE064E9363}" dt="2026-07-19T07:49:07.086" v="5541" actId="20577"/>
+      <pc:sldChg chg="addSp modSp mod">
+        <pc:chgData name="Heinrich Venter" userId="694de3c83518532c" providerId="LiveId" clId="{10CD68D7-CBE1-4750-A2D1-7DEE064E9363}" dt="2026-07-20T07:18:55.754" v="5615" actId="1076"/>
         <pc:sldMkLst>
           <pc:docMk/>
           <pc:sldMk cId="708745857" sldId="289"/>
@@ -291,6 +472,14 @@
           </ac:spMkLst>
         </pc:spChg>
         <pc:spChg chg="mod">
+          <ac:chgData name="Heinrich Venter" userId="694de3c83518532c" providerId="LiveId" clId="{10CD68D7-CBE1-4750-A2D1-7DEE064E9363}" dt="2026-07-20T07:18:42.029" v="5612" actId="20577"/>
+          <ac:spMkLst>
+            <pc:docMk/>
+            <pc:sldMk cId="708745857" sldId="289"/>
+            <ac:spMk id="4" creationId="{48BF1EF6-F8B8-8CF4-9169-05F15F67B902}"/>
+          </ac:spMkLst>
+        </pc:spChg>
+        <pc:spChg chg="mod">
           <ac:chgData name="Heinrich Venter" userId="694de3c83518532c" providerId="LiveId" clId="{10CD68D7-CBE1-4750-A2D1-7DEE064E9363}" dt="2026-07-19T07:42:05.561" v="5447" actId="113"/>
           <ac:spMkLst>
             <pc:docMk/>
@@ -298,6 +487,14 @@
             <ac:spMk id="5" creationId="{F10EB81D-A986-42AD-847E-FF3A1F656CEB}"/>
           </ac:spMkLst>
         </pc:spChg>
+        <pc:picChg chg="add mod">
+          <ac:chgData name="Heinrich Venter" userId="694de3c83518532c" providerId="LiveId" clId="{10CD68D7-CBE1-4750-A2D1-7DEE064E9363}" dt="2026-07-20T07:18:55.754" v="5615" actId="1076"/>
+          <ac:picMkLst>
+            <pc:docMk/>
+            <pc:sldMk cId="708745857" sldId="289"/>
+            <ac:picMk id="6" creationId="{AF91522F-8864-87D1-BC0D-289AA19074B0}"/>
+          </ac:picMkLst>
+        </pc:picChg>
       </pc:sldChg>
       <pc:sldChg chg="modSp mod">
         <pc:chgData name="Heinrich Venter" userId="694de3c83518532c" providerId="LiveId" clId="{10CD68D7-CBE1-4750-A2D1-7DEE064E9363}" dt="2026-07-19T07:43:17.308" v="5453" actId="5793"/>
@@ -322,12 +519,20 @@
           </ac:spMkLst>
         </pc:spChg>
       </pc:sldChg>
-      <pc:sldChg chg="modSp mod">
-        <pc:chgData name="Heinrich Venter" userId="694de3c83518532c" providerId="LiveId" clId="{10CD68D7-CBE1-4750-A2D1-7DEE064E9363}" dt="2026-07-19T07:43:50.635" v="5455" actId="27636"/>
+      <pc:sldChg chg="addSp modSp mod">
+        <pc:chgData name="Heinrich Venter" userId="694de3c83518532c" providerId="LiveId" clId="{10CD68D7-CBE1-4750-A2D1-7DEE064E9363}" dt="2026-07-20T07:23:53.512" v="5638" actId="1076"/>
         <pc:sldMkLst>
           <pc:docMk/>
           <pc:sldMk cId="733961800" sldId="291"/>
         </pc:sldMkLst>
+        <pc:spChg chg="mod">
+          <ac:chgData name="Heinrich Venter" userId="694de3c83518532c" providerId="LiveId" clId="{10CD68D7-CBE1-4750-A2D1-7DEE064E9363}" dt="2026-07-20T07:20:03.508" v="5620" actId="27636"/>
+          <ac:spMkLst>
+            <pc:docMk/>
+            <pc:sldMk cId="733961800" sldId="291"/>
+            <ac:spMk id="2" creationId="{5AD3A040-4DF6-3A52-2828-494419344D41}"/>
+          </ac:spMkLst>
+        </pc:spChg>
         <pc:spChg chg="mod">
           <ac:chgData name="Heinrich Venter" userId="694de3c83518532c" providerId="LiveId" clId="{10CD68D7-CBE1-4750-A2D1-7DEE064E9363}" dt="2026-07-19T07:43:50.635" v="5455" actId="27636"/>
           <ac:spMkLst>
@@ -336,9 +541,57 @@
             <ac:spMk id="5" creationId="{208AF426-607B-1936-143C-7541AD8896ED}"/>
           </ac:spMkLst>
         </pc:spChg>
+        <pc:spChg chg="mod">
+          <ac:chgData name="Heinrich Venter" userId="694de3c83518532c" providerId="LiveId" clId="{10CD68D7-CBE1-4750-A2D1-7DEE064E9363}" dt="2026-07-20T07:23:35.589" v="5633" actId="20577"/>
+          <ac:spMkLst>
+            <pc:docMk/>
+            <pc:sldMk cId="733961800" sldId="291"/>
+            <ac:spMk id="8" creationId="{DFB8CE4C-97AF-7F3E-9CAC-E06101B7E86D}"/>
+          </ac:spMkLst>
+        </pc:spChg>
+        <pc:spChg chg="mod">
+          <ac:chgData name="Heinrich Venter" userId="694de3c83518532c" providerId="LiveId" clId="{10CD68D7-CBE1-4750-A2D1-7DEE064E9363}" dt="2026-07-20T07:20:15.750" v="5623" actId="1076"/>
+          <ac:spMkLst>
+            <pc:docMk/>
+            <pc:sldMk cId="733961800" sldId="291"/>
+            <ac:spMk id="9" creationId="{0A4F4AF7-5E5A-2D76-3F73-6A09F3F31537}"/>
+          </ac:spMkLst>
+        </pc:spChg>
+        <pc:spChg chg="mod">
+          <ac:chgData name="Heinrich Venter" userId="694de3c83518532c" providerId="LiveId" clId="{10CD68D7-CBE1-4750-A2D1-7DEE064E9363}" dt="2026-07-20T07:20:19.994" v="5624" actId="1076"/>
+          <ac:spMkLst>
+            <pc:docMk/>
+            <pc:sldMk cId="733961800" sldId="291"/>
+            <ac:spMk id="10" creationId="{841EBE6D-B5D0-4C30-C32E-F3AA1F02B8FD}"/>
+          </ac:spMkLst>
+        </pc:spChg>
+        <pc:picChg chg="add mod">
+          <ac:chgData name="Heinrich Venter" userId="694de3c83518532c" providerId="LiveId" clId="{10CD68D7-CBE1-4750-A2D1-7DEE064E9363}" dt="2026-07-20T07:20:32.495" v="5628" actId="1076"/>
+          <ac:picMkLst>
+            <pc:docMk/>
+            <pc:sldMk cId="733961800" sldId="291"/>
+            <ac:picMk id="3" creationId="{C7DC566A-00BF-C675-E80B-21DAE4679518}"/>
+          </ac:picMkLst>
+        </pc:picChg>
+        <pc:picChg chg="add mod">
+          <ac:chgData name="Heinrich Venter" userId="694de3c83518532c" providerId="LiveId" clId="{10CD68D7-CBE1-4750-A2D1-7DEE064E9363}" dt="2026-07-20T07:21:49.965" v="5632" actId="1076"/>
+          <ac:picMkLst>
+            <pc:docMk/>
+            <pc:sldMk cId="733961800" sldId="291"/>
+            <ac:picMk id="4" creationId="{96A3E7AE-22C5-3A9F-33D9-180F39A1BEC6}"/>
+          </ac:picMkLst>
+        </pc:picChg>
+        <pc:picChg chg="add mod">
+          <ac:chgData name="Heinrich Venter" userId="694de3c83518532c" providerId="LiveId" clId="{10CD68D7-CBE1-4750-A2D1-7DEE064E9363}" dt="2026-07-20T07:23:53.512" v="5638" actId="1076"/>
+          <ac:picMkLst>
+            <pc:docMk/>
+            <pc:sldMk cId="733961800" sldId="291"/>
+            <ac:picMk id="6" creationId="{7921DD65-1C86-BCAC-CD5C-B1807C14F56F}"/>
+          </ac:picMkLst>
+        </pc:picChg>
       </pc:sldChg>
-      <pc:sldChg chg="modSp mod">
-        <pc:chgData name="Heinrich Venter" userId="694de3c83518532c" providerId="LiveId" clId="{10CD68D7-CBE1-4750-A2D1-7DEE064E9363}" dt="2026-07-19T07:48:47.637" v="5509" actId="20577"/>
+      <pc:sldChg chg="addSp modSp mod">
+        <pc:chgData name="Heinrich Venter" userId="694de3c83518532c" providerId="LiveId" clId="{10CD68D7-CBE1-4750-A2D1-7DEE064E9363}" dt="2026-07-20T07:24:05.631" v="5641" actId="1076"/>
         <pc:sldMkLst>
           <pc:docMk/>
           <pc:sldMk cId="3091740916" sldId="292"/>
@@ -359,6 +612,14 @@
             <ac:spMk id="5" creationId="{F10EB81D-A986-42AD-847E-FF3A1F656CEB}"/>
           </ac:spMkLst>
         </pc:spChg>
+        <pc:picChg chg="add mod">
+          <ac:chgData name="Heinrich Venter" userId="694de3c83518532c" providerId="LiveId" clId="{10CD68D7-CBE1-4750-A2D1-7DEE064E9363}" dt="2026-07-20T07:24:05.631" v="5641" actId="1076"/>
+          <ac:picMkLst>
+            <pc:docMk/>
+            <pc:sldMk cId="3091740916" sldId="292"/>
+            <ac:picMk id="6" creationId="{1BE5260C-2BED-F6A7-900A-5CDFD9DE5058}"/>
+          </ac:picMkLst>
+        </pc:picChg>
       </pc:sldChg>
       <pc:sldChg chg="modSp mod">
         <pc:chgData name="Heinrich Venter" userId="694de3c83518532c" providerId="LiveId" clId="{10CD68D7-CBE1-4750-A2D1-7DEE064E9363}" dt="2026-07-19T07:45:38.419" v="5463" actId="113"/>
@@ -722,7 +983,7 @@
           <a:p>
             <a:fld id="{A609F6A2-FEED-40EB-83D5-ADDC04076AF0}" type="datetimeFigureOut">
               <a:rPr lang="en-NZ" smtClean="0"/>
-              <a:t>19/07/2026</a:t>
+              <a:t>20/07/2026</a:t>
             </a:fld>
             <a:endParaRPr lang="en-NZ"/>
           </a:p>
@@ -922,7 +1183,7 @@
           <a:p>
             <a:fld id="{A609F6A2-FEED-40EB-83D5-ADDC04076AF0}" type="datetimeFigureOut">
               <a:rPr lang="en-NZ" smtClean="0"/>
-              <a:t>19/07/2026</a:t>
+              <a:t>20/07/2026</a:t>
             </a:fld>
             <a:endParaRPr lang="en-NZ"/>
           </a:p>
@@ -1132,7 +1393,7 @@
           <a:p>
             <a:fld id="{A609F6A2-FEED-40EB-83D5-ADDC04076AF0}" type="datetimeFigureOut">
               <a:rPr lang="en-NZ" smtClean="0"/>
-              <a:t>19/07/2026</a:t>
+              <a:t>20/07/2026</a:t>
             </a:fld>
             <a:endParaRPr lang="en-NZ"/>
           </a:p>
@@ -1332,7 +1593,7 @@
           <a:p>
             <a:fld id="{A609F6A2-FEED-40EB-83D5-ADDC04076AF0}" type="datetimeFigureOut">
               <a:rPr lang="en-NZ" smtClean="0"/>
-              <a:t>19/07/2026</a:t>
+              <a:t>20/07/2026</a:t>
             </a:fld>
             <a:endParaRPr lang="en-NZ"/>
           </a:p>
@@ -1608,7 +1869,7 @@
           <a:p>
             <a:fld id="{A609F6A2-FEED-40EB-83D5-ADDC04076AF0}" type="datetimeFigureOut">
               <a:rPr lang="en-NZ" smtClean="0"/>
-              <a:t>19/07/2026</a:t>
+              <a:t>20/07/2026</a:t>
             </a:fld>
             <a:endParaRPr lang="en-NZ"/>
           </a:p>
@@ -1876,7 +2137,7 @@
           <a:p>
             <a:fld id="{A609F6A2-FEED-40EB-83D5-ADDC04076AF0}" type="datetimeFigureOut">
               <a:rPr lang="en-NZ" smtClean="0"/>
-              <a:t>19/07/2026</a:t>
+              <a:t>20/07/2026</a:t>
             </a:fld>
             <a:endParaRPr lang="en-NZ"/>
           </a:p>
@@ -2291,7 +2552,7 @@
           <a:p>
             <a:fld id="{A609F6A2-FEED-40EB-83D5-ADDC04076AF0}" type="datetimeFigureOut">
               <a:rPr lang="en-NZ" smtClean="0"/>
-              <a:t>19/07/2026</a:t>
+              <a:t>20/07/2026</a:t>
             </a:fld>
             <a:endParaRPr lang="en-NZ"/>
           </a:p>
@@ -2433,7 +2694,7 @@
           <a:p>
             <a:fld id="{A609F6A2-FEED-40EB-83D5-ADDC04076AF0}" type="datetimeFigureOut">
               <a:rPr lang="en-NZ" smtClean="0"/>
-              <a:t>19/07/2026</a:t>
+              <a:t>20/07/2026</a:t>
             </a:fld>
             <a:endParaRPr lang="en-NZ"/>
           </a:p>
@@ -2546,7 +2807,7 @@
           <a:p>
             <a:fld id="{A609F6A2-FEED-40EB-83D5-ADDC04076AF0}" type="datetimeFigureOut">
               <a:rPr lang="en-NZ" smtClean="0"/>
-              <a:t>19/07/2026</a:t>
+              <a:t>20/07/2026</a:t>
             </a:fld>
             <a:endParaRPr lang="en-NZ"/>
           </a:p>
@@ -2859,7 +3120,7 @@
           <a:p>
             <a:fld id="{A609F6A2-FEED-40EB-83D5-ADDC04076AF0}" type="datetimeFigureOut">
               <a:rPr lang="en-NZ" smtClean="0"/>
-              <a:t>19/07/2026</a:t>
+              <a:t>20/07/2026</a:t>
             </a:fld>
             <a:endParaRPr lang="en-NZ"/>
           </a:p>
@@ -3148,7 +3409,7 @@
           <a:p>
             <a:fld id="{A609F6A2-FEED-40EB-83D5-ADDC04076AF0}" type="datetimeFigureOut">
               <a:rPr lang="en-NZ" smtClean="0"/>
-              <a:t>19/07/2026</a:t>
+              <a:t>20/07/2026</a:t>
             </a:fld>
             <a:endParaRPr lang="en-NZ"/>
           </a:p>
@@ -3391,7 +3652,7 @@
           <a:p>
             <a:fld id="{A609F6A2-FEED-40EB-83D5-ADDC04076AF0}" type="datetimeFigureOut">
               <a:rPr lang="en-NZ" smtClean="0"/>
-              <a:t>19/07/2026</a:t>
+              <a:t>20/07/2026</a:t>
             </a:fld>
             <a:endParaRPr lang="en-NZ"/>
           </a:p>
@@ -4012,6 +4273,10 @@
           </p:nvPr>
         </p:nvSpPr>
         <p:spPr>
+          <a:xfrm>
+            <a:off x="838200" y="365125"/>
+            <a:ext cx="10515600" cy="720725"/>
+          </a:xfrm>
           <a:solidFill>
             <a:schemeClr val="accent3">
               <a:lumMod val="20000"/>
@@ -4308,7 +4573,7 @@
         </p:nvSpPr>
         <p:spPr>
           <a:xfrm>
-            <a:off x="838200" y="1825625"/>
+            <a:off x="838200" y="1085850"/>
             <a:ext cx="3723968" cy="1325563"/>
           </a:xfrm>
         </p:spPr>
@@ -4336,6 +4601,17 @@
               <a:rPr lang="en-NZ" dirty="0"/>
               <a:t> R4</a:t>
             </a:r>
+          </a:p>
+          <a:p>
+            <a:pPr marL="0" indent="0">
+              <a:buNone/>
+            </a:pPr>
+            <a:endParaRPr lang="en-NZ" dirty="0"/>
+          </a:p>
+          <a:p>
+            <a:pPr marL="0" indent="0">
+              <a:buNone/>
+            </a:pPr>
             <a:endParaRPr lang="en-NZ" noProof="0" dirty="0"/>
           </a:p>
         </p:txBody>
@@ -4356,7 +4632,7 @@
         </p:nvSpPr>
         <p:spPr>
           <a:xfrm>
-            <a:off x="4234016" y="1846467"/>
+            <a:off x="4234016" y="1085849"/>
             <a:ext cx="3723968" cy="1325563"/>
           </a:xfrm>
           <a:prstGeom prst="rect">
@@ -4554,6 +4830,13 @@
               <a:rPr lang="en-NZ" noProof="0" dirty="0"/>
               <a:t> </a:t>
             </a:r>
+          </a:p>
+          <a:p>
+            <a:pPr marL="0" indent="0">
+              <a:buFont typeface="Arial" panose="020B0604020202020204" pitchFamily="34" charset="0"/>
+              <a:buNone/>
+            </a:pPr>
+            <a:endParaRPr lang="en-NZ" noProof="0" dirty="0"/>
           </a:p>
         </p:txBody>
       </p:sp>
@@ -4573,7 +4856,7 @@
         </p:nvSpPr>
         <p:spPr>
           <a:xfrm>
-            <a:off x="7876867" y="1846467"/>
+            <a:off x="7793908" y="1085848"/>
             <a:ext cx="3723968" cy="1325563"/>
           </a:xfrm>
           <a:prstGeom prst="rect">
@@ -4582,7 +4865,7 @@
         </p:spPr>
         <p:txBody>
           <a:bodyPr vert="horz" lIns="91440" tIns="45720" rIns="91440" bIns="45720" rtlCol="0">
-            <a:normAutofit/>
+            <a:normAutofit fontScale="92500" lnSpcReduction="10000"/>
           </a:bodyPr>
           <a:lstStyle>
             <a:lvl1pPr marL="228600" indent="-228600" algn="l" defTabSz="914400" rtl="0" eaLnBrk="1" latinLnBrk="0" hangingPunct="1">
@@ -4767,6 +5050,12 @@
               <a:rPr lang="en-NZ" dirty="0"/>
               <a:t>Arduino r3</a:t>
             </a:r>
+          </a:p>
+          <a:p>
+            <a:pPr marL="0" indent="0">
+              <a:buFont typeface="Arial" panose="020B0604020202020204" pitchFamily="34" charset="0"/>
+              <a:buNone/>
+            </a:pPr>
             <a:r>
               <a:rPr lang="en-NZ" noProof="0" dirty="0"/>
               <a:t> </a:t>
@@ -4774,6 +5063,96 @@
           </a:p>
         </p:txBody>
       </p:sp>
+      <p:pic>
+        <p:nvPicPr>
+          <p:cNvPr id="4" name="Picture 3" descr="Arduino UNO R4 WiFi - SparkFun Electronics">
+            <a:extLst>
+              <a:ext uri="{FF2B5EF4-FFF2-40B4-BE49-F238E27FC236}">
+                <a16:creationId xmlns:a16="http://schemas.microsoft.com/office/drawing/2014/main" id="{DB5BC4F3-C531-1D3F-2F74-03D6ADDD369B}"/>
+              </a:ext>
+            </a:extLst>
+          </p:cNvPr>
+          <p:cNvPicPr>
+            <a:picLocks noChangeAspect="1"/>
+          </p:cNvPicPr>
+          <p:nvPr/>
+        </p:nvPicPr>
+        <p:blipFill>
+          <a:blip r:embed="rId2"/>
+          <a:stretch>
+            <a:fillRect/>
+          </a:stretch>
+        </p:blipFill>
+        <p:spPr>
+          <a:xfrm>
+            <a:off x="838201" y="1983915"/>
+            <a:ext cx="1704974" cy="1704974"/>
+          </a:xfrm>
+          <a:prstGeom prst="rect">
+            <a:avLst/>
+          </a:prstGeom>
+        </p:spPr>
+      </p:pic>
+      <p:pic>
+        <p:nvPicPr>
+          <p:cNvPr id="6" name="Picture 5" descr="Buy ESP32 ESP-32S WiFi+ Bluetooth Development Board">
+            <a:extLst>
+              <a:ext uri="{FF2B5EF4-FFF2-40B4-BE49-F238E27FC236}">
+                <a16:creationId xmlns:a16="http://schemas.microsoft.com/office/drawing/2014/main" id="{0738B815-EC1C-C22B-E05D-CE494F7F36C9}"/>
+              </a:ext>
+            </a:extLst>
+          </p:cNvPr>
+          <p:cNvPicPr>
+            <a:picLocks noChangeAspect="1"/>
+          </p:cNvPicPr>
+          <p:nvPr/>
+        </p:nvPicPr>
+        <p:blipFill>
+          <a:blip r:embed="rId3"/>
+          <a:stretch>
+            <a:fillRect/>
+          </a:stretch>
+        </p:blipFill>
+        <p:spPr>
+          <a:xfrm>
+            <a:off x="4234015" y="1983915"/>
+            <a:ext cx="1246583" cy="1662110"/>
+          </a:xfrm>
+          <a:prstGeom prst="rect">
+            <a:avLst/>
+          </a:prstGeom>
+        </p:spPr>
+      </p:pic>
+      <p:pic>
+        <p:nvPicPr>
+          <p:cNvPr id="7" name="Picture 6" descr="Arduino Uno Rev 3 SMD, A000073">
+            <a:extLst>
+              <a:ext uri="{FF2B5EF4-FFF2-40B4-BE49-F238E27FC236}">
+                <a16:creationId xmlns:a16="http://schemas.microsoft.com/office/drawing/2014/main" id="{A3CFC61C-74CA-3081-5974-868F80B6B667}"/>
+              </a:ext>
+            </a:extLst>
+          </p:cNvPr>
+          <p:cNvPicPr>
+            <a:picLocks noChangeAspect="1"/>
+          </p:cNvPicPr>
+          <p:nvPr/>
+        </p:nvPicPr>
+        <p:blipFill>
+          <a:blip r:embed="rId4"/>
+          <a:stretch>
+            <a:fillRect/>
+          </a:stretch>
+        </p:blipFill>
+        <p:spPr>
+          <a:xfrm>
+            <a:off x="7793907" y="1983916"/>
+            <a:ext cx="2230497" cy="1662108"/>
+          </a:xfrm>
+          <a:prstGeom prst="rect">
+            <a:avLst/>
+          </a:prstGeom>
+        </p:spPr>
+      </p:pic>
     </p:spTree>
     <p:extLst>
       <p:ext uri="{BB962C8B-B14F-4D97-AF65-F5344CB8AC3E}">
@@ -6190,6 +6569,10 @@
           </p:nvPr>
         </p:nvSpPr>
         <p:spPr>
+          <a:xfrm>
+            <a:off x="838200" y="165100"/>
+            <a:ext cx="10515600" cy="777875"/>
+          </a:xfrm>
           <a:solidFill>
             <a:schemeClr val="accent3">
               <a:lumMod val="20000"/>
@@ -6460,7 +6843,7 @@
         </p:nvSpPr>
         <p:spPr>
           <a:xfrm>
-            <a:off x="838200" y="1825625"/>
+            <a:off x="838200" y="942975"/>
             <a:ext cx="3723968" cy="1325563"/>
           </a:xfrm>
         </p:spPr>
@@ -6492,6 +6875,11 @@
               <a:rPr lang="en-NZ" dirty="0"/>
               <a:t> screen</a:t>
             </a:r>
+          </a:p>
+          <a:p>
+            <a:pPr marL="0" indent="0">
+              <a:buNone/>
+            </a:pPr>
             <a:endParaRPr lang="en-NZ" noProof="0" dirty="0"/>
           </a:p>
         </p:txBody>
@@ -6512,7 +6900,7 @@
         </p:nvSpPr>
         <p:spPr>
           <a:xfrm>
-            <a:off x="4234016" y="1846467"/>
+            <a:off x="4234016" y="942974"/>
             <a:ext cx="3723968" cy="1325563"/>
           </a:xfrm>
           <a:prstGeom prst="rect">
@@ -6710,6 +7098,13 @@
               <a:rPr lang="en-NZ" noProof="0" dirty="0"/>
               <a:t> </a:t>
             </a:r>
+          </a:p>
+          <a:p>
+            <a:pPr marL="0" indent="0">
+              <a:buFont typeface="Arial" panose="020B0604020202020204" pitchFamily="34" charset="0"/>
+              <a:buNone/>
+            </a:pPr>
+            <a:endParaRPr lang="en-NZ" noProof="0" dirty="0"/>
           </a:p>
         </p:txBody>
       </p:sp>
@@ -6729,7 +7124,7 @@
         </p:nvSpPr>
         <p:spPr>
           <a:xfrm>
-            <a:off x="7876867" y="1846467"/>
+            <a:off x="7793908" y="942973"/>
             <a:ext cx="3723968" cy="1325563"/>
           </a:xfrm>
           <a:prstGeom prst="rect">
@@ -6738,7 +7133,7 @@
         </p:spPr>
         <p:txBody>
           <a:bodyPr vert="horz" lIns="91440" tIns="45720" rIns="91440" bIns="45720" rtlCol="0">
-            <a:normAutofit/>
+            <a:normAutofit fontScale="92500" lnSpcReduction="10000"/>
           </a:bodyPr>
           <a:lstStyle>
             <a:lvl1pPr marL="228600" indent="-228600" algn="l" defTabSz="914400" rtl="0" eaLnBrk="1" latinLnBrk="0" hangingPunct="1">
@@ -6923,6 +7318,12 @@
               <a:rPr lang="en-NZ" dirty="0"/>
               <a:t> SPI TFT colour display</a:t>
             </a:r>
+          </a:p>
+          <a:p>
+            <a:pPr marL="0" indent="0">
+              <a:buFont typeface="Arial" panose="020B0604020202020204" pitchFamily="34" charset="0"/>
+              <a:buNone/>
+            </a:pPr>
             <a:r>
               <a:rPr lang="en-NZ" noProof="0" dirty="0"/>
               <a:t> </a:t>
@@ -6930,6 +7331,96 @@
           </a:p>
         </p:txBody>
       </p:sp>
+      <p:pic>
+        <p:nvPicPr>
+          <p:cNvPr id="3" name="Picture 2" descr="1.3&quot; IIC I2C Serial 128x64 SSH1106 OLED Display Module | SunFounder">
+            <a:extLst>
+              <a:ext uri="{FF2B5EF4-FFF2-40B4-BE49-F238E27FC236}">
+                <a16:creationId xmlns:a16="http://schemas.microsoft.com/office/drawing/2014/main" id="{F5E4ECB3-7C85-9278-8865-913F5712CD83}"/>
+              </a:ext>
+            </a:extLst>
+          </p:cNvPr>
+          <p:cNvPicPr>
+            <a:picLocks noChangeAspect="1"/>
+          </p:cNvPicPr>
+          <p:nvPr/>
+        </p:nvPicPr>
+        <p:blipFill>
+          <a:blip r:embed="rId3"/>
+          <a:stretch>
+            <a:fillRect/>
+          </a:stretch>
+        </p:blipFill>
+        <p:spPr>
+          <a:xfrm>
+            <a:off x="838200" y="1862138"/>
+            <a:ext cx="1566862" cy="1566862"/>
+          </a:xfrm>
+          <a:prstGeom prst="rect">
+            <a:avLst/>
+          </a:prstGeom>
+        </p:spPr>
+      </p:pic>
+      <p:pic>
+        <p:nvPicPr>
+          <p:cNvPr id="4" name="Picture 3" descr="Dot Matrix White on Blue LCD 16x2 Character">
+            <a:extLst>
+              <a:ext uri="{FF2B5EF4-FFF2-40B4-BE49-F238E27FC236}">
+                <a16:creationId xmlns:a16="http://schemas.microsoft.com/office/drawing/2014/main" id="{32BBFE84-3B48-9181-4D61-41F2CE571F1A}"/>
+              </a:ext>
+            </a:extLst>
+          </p:cNvPr>
+          <p:cNvPicPr>
+            <a:picLocks noChangeAspect="1"/>
+          </p:cNvPicPr>
+          <p:nvPr/>
+        </p:nvPicPr>
+        <p:blipFill>
+          <a:blip r:embed="rId4"/>
+          <a:stretch>
+            <a:fillRect/>
+          </a:stretch>
+        </p:blipFill>
+        <p:spPr>
+          <a:xfrm>
+            <a:off x="4234016" y="1928812"/>
+            <a:ext cx="1433513" cy="1433513"/>
+          </a:xfrm>
+          <a:prstGeom prst="rect">
+            <a:avLst/>
+          </a:prstGeom>
+        </p:spPr>
+      </p:pic>
+      <p:pic>
+        <p:nvPicPr>
+          <p:cNvPr id="6" name="Picture 5" descr="TFT LCD - Full Colour TFT LCD Display 1.8 inch(128x160) SPI Interface">
+            <a:extLst>
+              <a:ext uri="{FF2B5EF4-FFF2-40B4-BE49-F238E27FC236}">
+                <a16:creationId xmlns:a16="http://schemas.microsoft.com/office/drawing/2014/main" id="{41234967-307F-BDE8-49C4-83E454CBA3FC}"/>
+              </a:ext>
+            </a:extLst>
+          </p:cNvPr>
+          <p:cNvPicPr>
+            <a:picLocks noChangeAspect="1"/>
+          </p:cNvPicPr>
+          <p:nvPr/>
+        </p:nvPicPr>
+        <p:blipFill>
+          <a:blip r:embed="rId5"/>
+          <a:stretch>
+            <a:fillRect/>
+          </a:stretch>
+        </p:blipFill>
+        <p:spPr>
+          <a:xfrm>
+            <a:off x="7793908" y="1909762"/>
+            <a:ext cx="1471612" cy="1471612"/>
+          </a:xfrm>
+          <a:prstGeom prst="rect">
+            <a:avLst/>
+          </a:prstGeom>
+        </p:spPr>
+      </p:pic>
     </p:spTree>
     <p:extLst>
       <p:ext uri="{BB962C8B-B14F-4D97-AF65-F5344CB8AC3E}">
@@ -7272,6 +7763,20 @@
               <a:t>Component Picture</a:t>
             </a:r>
           </a:p>
+          <a:p>
+            <a:pPr marL="0" indent="0">
+              <a:buFont typeface="Arial" panose="020B0604020202020204" pitchFamily="34" charset="0"/>
+              <a:buNone/>
+            </a:pPr>
+            <a:endParaRPr lang="en-NZ" noProof="0" dirty="0"/>
+          </a:p>
+          <a:p>
+            <a:pPr marL="0" indent="0">
+              <a:buFont typeface="Arial" panose="020B0604020202020204" pitchFamily="34" charset="0"/>
+              <a:buNone/>
+            </a:pPr>
+            <a:endParaRPr lang="en-NZ" noProof="0" dirty="0"/>
+          </a:p>
         </p:txBody>
       </p:sp>
       <p:sp>
@@ -7487,6 +7992,36 @@
           </a:p>
         </p:txBody>
       </p:sp>
+      <p:pic>
+        <p:nvPicPr>
+          <p:cNvPr id="6" name="Picture 5" descr="UGN3503UA Hall Effect Sensor | Afterpay &amp; ZipPay Available | Click &amp; Collect | Jaycar">
+            <a:extLst>
+              <a:ext uri="{FF2B5EF4-FFF2-40B4-BE49-F238E27FC236}">
+                <a16:creationId xmlns:a16="http://schemas.microsoft.com/office/drawing/2014/main" id="{AF91522F-8864-87D1-BC0D-289AA19074B0}"/>
+              </a:ext>
+            </a:extLst>
+          </p:cNvPr>
+          <p:cNvPicPr>
+            <a:picLocks noChangeAspect="1"/>
+          </p:cNvPicPr>
+          <p:nvPr/>
+        </p:nvPicPr>
+        <p:blipFill>
+          <a:blip r:embed="rId2"/>
+          <a:stretch>
+            <a:fillRect/>
+          </a:stretch>
+        </p:blipFill>
+        <p:spPr>
+          <a:xfrm>
+            <a:off x="1022555" y="4210050"/>
+            <a:ext cx="1738312" cy="1738312"/>
+          </a:xfrm>
+          <a:prstGeom prst="rect">
+            <a:avLst/>
+          </a:prstGeom>
+        </p:spPr>
+      </p:pic>
     </p:spTree>
     <p:extLst>
       <p:ext uri="{BB962C8B-B14F-4D97-AF65-F5344CB8AC3E}">
@@ -8239,6 +8774,10 @@
           </p:nvPr>
         </p:nvSpPr>
         <p:spPr>
+          <a:xfrm>
+            <a:off x="838199" y="155575"/>
+            <a:ext cx="10515600" cy="649749"/>
+          </a:xfrm>
           <a:solidFill>
             <a:schemeClr val="accent3">
               <a:lumMod val="20000"/>
@@ -8247,7 +8786,9 @@
           </a:solidFill>
         </p:spPr>
         <p:txBody>
-          <a:bodyPr/>
+          <a:bodyPr>
+            <a:normAutofit fontScale="90000"/>
+          </a:bodyPr>
           <a:lstStyle/>
           <a:p>
             <a:r>
@@ -8504,7 +9045,7 @@
         </p:nvSpPr>
         <p:spPr>
           <a:xfrm>
-            <a:off x="838200" y="1825625"/>
+            <a:off x="858018" y="805324"/>
             <a:ext cx="3723968" cy="1325563"/>
           </a:xfrm>
         </p:spPr>
@@ -8538,6 +9079,11 @@
               <a:rPr lang="en-US" dirty="0"/>
               <a:t> filtering capacitor</a:t>
             </a:r>
+          </a:p>
+          <a:p>
+            <a:pPr marL="0" indent="0">
+              <a:buNone/>
+            </a:pPr>
             <a:endParaRPr lang="en-NZ" noProof="0" dirty="0"/>
           </a:p>
         </p:txBody>
@@ -8558,7 +9104,7 @@
         </p:nvSpPr>
         <p:spPr>
           <a:xfrm>
-            <a:off x="4234016" y="1846467"/>
+            <a:off x="4088990" y="832516"/>
             <a:ext cx="3723968" cy="1325563"/>
           </a:xfrm>
           <a:prstGeom prst="rect">
@@ -8763,6 +9309,12 @@
               <a:rPr lang="en-NZ" noProof="0" dirty="0"/>
               <a:t> </a:t>
             </a:r>
+          </a:p>
+          <a:p>
+            <a:pPr marL="0" indent="0">
+              <a:buNone/>
+            </a:pPr>
+            <a:endParaRPr lang="en-NZ" noProof="0" dirty="0"/>
           </a:p>
         </p:txBody>
       </p:sp>
@@ -8782,7 +9334,7 @@
         </p:nvSpPr>
         <p:spPr>
           <a:xfrm>
-            <a:off x="7876867" y="1846467"/>
+            <a:off x="7812958" y="913708"/>
             <a:ext cx="3723968" cy="1325563"/>
           </a:xfrm>
           <a:prstGeom prst="rect">
@@ -8979,6 +9531,96 @@
           </a:p>
         </p:txBody>
       </p:sp>
+      <p:pic>
+        <p:nvPicPr>
+          <p:cNvPr id="3" name="Picture 2" descr="ZMPT101B Single Phase AC Voltage Sensor Module – QuartzComponents">
+            <a:extLst>
+              <a:ext uri="{FF2B5EF4-FFF2-40B4-BE49-F238E27FC236}">
+                <a16:creationId xmlns:a16="http://schemas.microsoft.com/office/drawing/2014/main" id="{C7DC566A-00BF-C675-E80B-21DAE4679518}"/>
+              </a:ext>
+            </a:extLst>
+          </p:cNvPr>
+          <p:cNvPicPr>
+            <a:picLocks noChangeAspect="1"/>
+          </p:cNvPicPr>
+          <p:nvPr/>
+        </p:nvPicPr>
+        <p:blipFill>
+          <a:blip r:embed="rId2"/>
+          <a:stretch>
+            <a:fillRect/>
+          </a:stretch>
+        </p:blipFill>
+        <p:spPr>
+          <a:xfrm>
+            <a:off x="4088990" y="2072174"/>
+            <a:ext cx="1492660" cy="1492660"/>
+          </a:xfrm>
+          <a:prstGeom prst="rect">
+            <a:avLst/>
+          </a:prstGeom>
+        </p:spPr>
+      </p:pic>
+      <p:pic>
+        <p:nvPicPr>
+          <p:cNvPr id="4" name="Picture 3" descr="1pc ADS1115 16-Bit I2C ADC Development Board Analog to Digital Converter  Module: Amazon.com: Industrial &amp; Scientific">
+            <a:extLst>
+              <a:ext uri="{FF2B5EF4-FFF2-40B4-BE49-F238E27FC236}">
+                <a16:creationId xmlns:a16="http://schemas.microsoft.com/office/drawing/2014/main" id="{96A3E7AE-22C5-3A9F-33D9-180F39A1BEC6}"/>
+              </a:ext>
+            </a:extLst>
+          </p:cNvPr>
+          <p:cNvPicPr>
+            <a:picLocks noChangeAspect="1"/>
+          </p:cNvPicPr>
+          <p:nvPr/>
+        </p:nvPicPr>
+        <p:blipFill>
+          <a:blip r:embed="rId3"/>
+          <a:stretch>
+            <a:fillRect/>
+          </a:stretch>
+        </p:blipFill>
+        <p:spPr>
+          <a:xfrm>
+            <a:off x="7812958" y="2072174"/>
+            <a:ext cx="1923804" cy="1562129"/>
+          </a:xfrm>
+          <a:prstGeom prst="rect">
+            <a:avLst/>
+          </a:prstGeom>
+        </p:spPr>
+      </p:pic>
+      <p:pic>
+        <p:nvPicPr>
+          <p:cNvPr id="6" name="Picture 5" descr="Voltage Divider Circuit: Definition, Diagram, and Applications">
+            <a:extLst>
+              <a:ext uri="{FF2B5EF4-FFF2-40B4-BE49-F238E27FC236}">
+                <a16:creationId xmlns:a16="http://schemas.microsoft.com/office/drawing/2014/main" id="{7921DD65-1C86-BCAC-CD5C-B1807C14F56F}"/>
+              </a:ext>
+            </a:extLst>
+          </p:cNvPr>
+          <p:cNvPicPr>
+            <a:picLocks noChangeAspect="1"/>
+          </p:cNvPicPr>
+          <p:nvPr/>
+        </p:nvPicPr>
+        <p:blipFill>
+          <a:blip r:embed="rId4"/>
+          <a:stretch>
+            <a:fillRect/>
+          </a:stretch>
+        </p:blipFill>
+        <p:spPr>
+          <a:xfrm>
+            <a:off x="858018" y="2019913"/>
+            <a:ext cx="1790701" cy="1585517"/>
+          </a:xfrm>
+          <a:prstGeom prst="rect">
+            <a:avLst/>
+          </a:prstGeom>
+        </p:spPr>
+      </p:pic>
     </p:spTree>
     <p:extLst>
       <p:ext uri="{BB962C8B-B14F-4D97-AF65-F5344CB8AC3E}">
@@ -9539,6 +10181,36 @@
           </a:p>
         </p:txBody>
       </p:sp>
+      <p:pic>
+        <p:nvPicPr>
+          <p:cNvPr id="6" name="Picture 5" descr="Voltage Divider Circuit: Definition, Diagram, and Applications">
+            <a:extLst>
+              <a:ext uri="{FF2B5EF4-FFF2-40B4-BE49-F238E27FC236}">
+                <a16:creationId xmlns:a16="http://schemas.microsoft.com/office/drawing/2014/main" id="{1BE5260C-2BED-F6A7-900A-5CDFD9DE5058}"/>
+              </a:ext>
+            </a:extLst>
+          </p:cNvPr>
+          <p:cNvPicPr>
+            <a:picLocks noChangeAspect="1"/>
+          </p:cNvPicPr>
+          <p:nvPr/>
+        </p:nvPicPr>
+        <p:blipFill>
+          <a:blip r:embed="rId2"/>
+          <a:stretch>
+            <a:fillRect/>
+          </a:stretch>
+        </p:blipFill>
+        <p:spPr>
+          <a:xfrm>
+            <a:off x="1022555" y="4310954"/>
+            <a:ext cx="1629031" cy="1442371"/>
+          </a:xfrm>
+          <a:prstGeom prst="rect">
+            <a:avLst/>
+          </a:prstGeom>
+        </p:spPr>
+      </p:pic>
     </p:spTree>
     <p:extLst>
       <p:ext uri="{BB962C8B-B14F-4D97-AF65-F5344CB8AC3E}">
@@ -15985,8 +16657,44 @@
               <a:t>Insert diagram here of electronics outcome</a:t>
             </a:r>
           </a:p>
+          <a:p>
+            <a:pPr marL="0" indent="0">
+              <a:buNone/>
+            </a:pPr>
+            <a:endParaRPr lang="en-NZ" noProof="0" dirty="0"/>
+          </a:p>
         </p:txBody>
       </p:sp>
+      <p:pic>
+        <p:nvPicPr>
+          <p:cNvPr id="4" name="Picture 3">
+            <a:extLst>
+              <a:ext uri="{FF2B5EF4-FFF2-40B4-BE49-F238E27FC236}">
+                <a16:creationId xmlns:a16="http://schemas.microsoft.com/office/drawing/2014/main" id="{A1894E1A-8204-EA5E-8DAA-A29A51DA0F88}"/>
+              </a:ext>
+            </a:extLst>
+          </p:cNvPr>
+          <p:cNvPicPr>
+            <a:picLocks noChangeAspect="1"/>
+          </p:cNvPicPr>
+          <p:nvPr/>
+        </p:nvPicPr>
+        <p:blipFill>
+          <a:blip r:embed="rId2"/>
+          <a:stretch>
+            <a:fillRect/>
+          </a:stretch>
+        </p:blipFill>
+        <p:spPr>
+          <a:xfrm>
+            <a:off x="952500" y="0"/>
+            <a:ext cx="10287000" cy="6858000"/>
+          </a:xfrm>
+          <a:prstGeom prst="rect">
+            <a:avLst/>
+          </a:prstGeom>
+        </p:spPr>
+      </p:pic>
     </p:spTree>
     <p:extLst>
       <p:ext uri="{BB962C8B-B14F-4D97-AF65-F5344CB8AC3E}">
@@ -16776,6 +17484,10 @@
           </p:nvPr>
         </p:nvSpPr>
         <p:spPr>
+          <a:xfrm>
+            <a:off x="838200" y="365126"/>
+            <a:ext cx="10515600" cy="878246"/>
+          </a:xfrm>
           <a:solidFill>
             <a:schemeClr val="accent6">
               <a:lumMod val="40000"/>
@@ -16812,8 +17524,8 @@
         </p:nvSpPr>
         <p:spPr>
           <a:xfrm>
-            <a:off x="838200" y="1825625"/>
-            <a:ext cx="10515600" cy="878246"/>
+            <a:off x="838200" y="1243372"/>
+            <a:ext cx="10515600" cy="541336"/>
           </a:xfrm>
           <a:solidFill>
             <a:schemeClr val="accent6">
@@ -17032,13 +17744,40 @@
               <a:buFont typeface="Arial" panose="020B0604020202020204" pitchFamily="34" charset="0"/>
               <a:buNone/>
             </a:pPr>
-            <a:r>
-              <a:rPr lang="en-NZ" noProof="0" dirty="0"/>
-              <a:t>Insert updated diagram here of electronics outcome</a:t>
-            </a:r>
+            <a:endParaRPr lang="en-NZ" noProof="0" dirty="0"/>
           </a:p>
         </p:txBody>
       </p:sp>
+      <p:pic>
+        <p:nvPicPr>
+          <p:cNvPr id="5" name="Picture 4">
+            <a:extLst>
+              <a:ext uri="{FF2B5EF4-FFF2-40B4-BE49-F238E27FC236}">
+                <a16:creationId xmlns:a16="http://schemas.microsoft.com/office/drawing/2014/main" id="{235B136F-957E-4C8A-29DC-2D7245FC85D9}"/>
+              </a:ext>
+            </a:extLst>
+          </p:cNvPr>
+          <p:cNvPicPr>
+            <a:picLocks noChangeAspect="1"/>
+          </p:cNvPicPr>
+          <p:nvPr/>
+        </p:nvPicPr>
+        <p:blipFill>
+          <a:blip r:embed="rId2"/>
+          <a:stretch>
+            <a:fillRect/>
+          </a:stretch>
+        </p:blipFill>
+        <p:spPr>
+          <a:xfrm>
+            <a:off x="838200" y="1760346"/>
+            <a:ext cx="7098792" cy="4732528"/>
+          </a:xfrm>
+          <a:prstGeom prst="rect">
+            <a:avLst/>
+          </a:prstGeom>
+        </p:spPr>
+      </p:pic>
     </p:spTree>
     <p:extLst>
       <p:ext uri="{BB962C8B-B14F-4D97-AF65-F5344CB8AC3E}">

--- a/AS91904 Electronics Heinrich Venter.pptx
+++ b/AS91904 Electronics Heinrich Venter.pptx
@@ -148,7 +148,7 @@
 <file path=ppt/revisionInfo.xml><?xml version="1.0" encoding="utf-8"?>
 <p1510:revInfo xmlns:a="http://schemas.openxmlformats.org/drawingml/2006/main" xmlns:r="http://schemas.openxmlformats.org/officeDocument/2006/relationships" xmlns:p1510="http://schemas.microsoft.com/office/powerpoint/2015/10/main">
   <p1510:revLst>
-    <p1510:client id="{93B3EF88-C134-4ECF-A8E1-33D5E10640B0}" v="34" dt="2026-07-20T07:23:58.450"/>
+    <p1510:client id="{93B3EF88-C134-4ECF-A8E1-33D5E10640B0}" v="36" dt="2026-07-21T09:19:41.558"/>
   </p1510:revLst>
 </p1510:revInfo>
 </file>
@@ -158,7 +158,7 @@
   <pc:docChgLst>
     <pc:chgData name="Heinrich Venter" userId="694de3c83518532c" providerId="LiveId" clId="{10CD68D7-CBE1-4750-A2D1-7DEE064E9363}"/>
     <pc:docChg chg="undo custSel addSld delSld modSld">
-      <pc:chgData name="Heinrich Venter" userId="694de3c83518532c" providerId="LiveId" clId="{10CD68D7-CBE1-4750-A2D1-7DEE064E9363}" dt="2026-07-20T07:24:05.631" v="5641" actId="1076"/>
+      <pc:chgData name="Heinrich Venter" userId="694de3c83518532c" providerId="LiveId" clId="{10CD68D7-CBE1-4750-A2D1-7DEE064E9363}" dt="2026-07-21T09:26:56.270" v="6125" actId="1076"/>
       <pc:docMkLst>
         <pc:docMk/>
       </pc:docMkLst>
@@ -200,8 +200,8 @@
           </ac:spMkLst>
         </pc:spChg>
       </pc:sldChg>
-      <pc:sldChg chg="addSp modSp mod">
-        <pc:chgData name="Heinrich Venter" userId="694de3c83518532c" providerId="LiveId" clId="{10CD68D7-CBE1-4750-A2D1-7DEE064E9363}" dt="2026-07-20T06:50:51.461" v="5553"/>
+      <pc:sldChg chg="addSp delSp modSp mod">
+        <pc:chgData name="Heinrich Venter" userId="694de3c83518532c" providerId="LiveId" clId="{10CD68D7-CBE1-4750-A2D1-7DEE064E9363}" dt="2026-07-21T09:26:56.270" v="6125" actId="1076"/>
         <pc:sldMkLst>
           <pc:docMk/>
           <pc:sldMk cId="1365950852" sldId="267"/>
@@ -214,12 +214,20 @@
             <ac:spMk id="3" creationId="{DA45C6F8-39B2-B16D-3499-DEBD85A6474C}"/>
           </ac:spMkLst>
         </pc:spChg>
-        <pc:picChg chg="add">
-          <ac:chgData name="Heinrich Venter" userId="694de3c83518532c" providerId="LiveId" clId="{10CD68D7-CBE1-4750-A2D1-7DEE064E9363}" dt="2026-07-20T06:50:51.461" v="5553"/>
+        <pc:picChg chg="add del mod">
+          <ac:chgData name="Heinrich Venter" userId="694de3c83518532c" providerId="LiveId" clId="{10CD68D7-CBE1-4750-A2D1-7DEE064E9363}" dt="2026-07-21T09:26:51.395" v="6124" actId="478"/>
           <ac:picMkLst>
             <pc:docMk/>
             <pc:sldMk cId="1365950852" sldId="267"/>
             <ac:picMk id="4" creationId="{A1894E1A-8204-EA5E-8DAA-A29A51DA0F88}"/>
+          </ac:picMkLst>
+        </pc:picChg>
+        <pc:picChg chg="add mod">
+          <ac:chgData name="Heinrich Venter" userId="694de3c83518532c" providerId="LiveId" clId="{10CD68D7-CBE1-4750-A2D1-7DEE064E9363}" dt="2026-07-21T09:26:56.270" v="6125" actId="1076"/>
+          <ac:picMkLst>
+            <pc:docMk/>
+            <pc:sldMk cId="1365950852" sldId="267"/>
+            <ac:picMk id="6" creationId="{492AF9CD-BEC7-1A70-4B88-CD503A3E326B}"/>
           </ac:picMkLst>
         </pc:picChg>
       </pc:sldChg>
@@ -636,8 +644,71 @@
           </ac:spMkLst>
         </pc:spChg>
       </pc:sldChg>
-      <pc:sldChg chg="modSp mod">
-        <pc:chgData name="Heinrich Venter" userId="694de3c83518532c" providerId="LiveId" clId="{10CD68D7-CBE1-4750-A2D1-7DEE064E9363}" dt="2026-07-19T07:48:24.589" v="5499" actId="20577"/>
+      <pc:sldChg chg="addSp modSp mod">
+        <pc:chgData name="Heinrich Venter" userId="694de3c83518532c" providerId="LiveId" clId="{10CD68D7-CBE1-4750-A2D1-7DEE064E9363}" dt="2026-07-21T09:24:51.872" v="6112" actId="20577"/>
+        <pc:sldMkLst>
+          <pc:docMk/>
+          <pc:sldMk cId="3463644882" sldId="294"/>
+        </pc:sldMkLst>
+        <pc:spChg chg="mod">
+          <ac:chgData name="Heinrich Venter" userId="694de3c83518532c" providerId="LiveId" clId="{10CD68D7-CBE1-4750-A2D1-7DEE064E9363}" dt="2026-07-21T09:18:26.374" v="5645" actId="1076"/>
+          <ac:spMkLst>
+            <pc:docMk/>
+            <pc:sldMk cId="3463644882" sldId="294"/>
+            <ac:spMk id="2" creationId="{5AD3A040-4DF6-3A52-2828-494419344D41}"/>
+          </ac:spMkLst>
+        </pc:spChg>
+        <pc:spChg chg="mod">
+          <ac:chgData name="Heinrich Venter" userId="694de3c83518532c" providerId="LiveId" clId="{10CD68D7-CBE1-4750-A2D1-7DEE064E9363}" dt="2026-07-21T09:24:51.872" v="6112" actId="20577"/>
+          <ac:spMkLst>
+            <pc:docMk/>
+            <pc:sldMk cId="3463644882" sldId="294"/>
+            <ac:spMk id="5" creationId="{208AF426-607B-1936-143C-7541AD8896ED}"/>
+          </ac:spMkLst>
+        </pc:spChg>
+        <pc:spChg chg="mod">
+          <ac:chgData name="Heinrich Venter" userId="694de3c83518532c" providerId="LiveId" clId="{10CD68D7-CBE1-4750-A2D1-7DEE064E9363}" dt="2026-07-21T09:19:40.352" v="5706" actId="20577"/>
+          <ac:spMkLst>
+            <pc:docMk/>
+            <pc:sldMk cId="3463644882" sldId="294"/>
+            <ac:spMk id="8" creationId="{DFB8CE4C-97AF-7F3E-9CAC-E06101B7E86D}"/>
+          </ac:spMkLst>
+        </pc:spChg>
+        <pc:spChg chg="mod">
+          <ac:chgData name="Heinrich Venter" userId="694de3c83518532c" providerId="LiveId" clId="{10CD68D7-CBE1-4750-A2D1-7DEE064E9363}" dt="2026-07-21T09:18:32.808" v="5647" actId="1076"/>
+          <ac:spMkLst>
+            <pc:docMk/>
+            <pc:sldMk cId="3463644882" sldId="294"/>
+            <ac:spMk id="9" creationId="{0A4F4AF7-5E5A-2D76-3F73-6A09F3F31537}"/>
+          </ac:spMkLst>
+        </pc:spChg>
+        <pc:spChg chg="mod">
+          <ac:chgData name="Heinrich Venter" userId="694de3c83518532c" providerId="LiveId" clId="{10CD68D7-CBE1-4750-A2D1-7DEE064E9363}" dt="2026-07-21T09:19:55.722" v="5711" actId="20577"/>
+          <ac:spMkLst>
+            <pc:docMk/>
+            <pc:sldMk cId="3463644882" sldId="294"/>
+            <ac:spMk id="10" creationId="{841EBE6D-B5D0-4C30-C32E-F3AA1F02B8FD}"/>
+          </ac:spMkLst>
+        </pc:spChg>
+        <pc:picChg chg="add mod">
+          <ac:chgData name="Heinrich Venter" userId="694de3c83518532c" providerId="LiveId" clId="{10CD68D7-CBE1-4750-A2D1-7DEE064E9363}" dt="2026-07-21T09:18:51.266" v="5651" actId="1076"/>
+          <ac:picMkLst>
+            <pc:docMk/>
+            <pc:sldMk cId="3463644882" sldId="294"/>
+            <ac:picMk id="3" creationId="{5B75F591-E097-34BE-A9DF-06ABD01594D4}"/>
+          </ac:picMkLst>
+        </pc:picChg>
+        <pc:picChg chg="add mod">
+          <ac:chgData name="Heinrich Venter" userId="694de3c83518532c" providerId="LiveId" clId="{10CD68D7-CBE1-4750-A2D1-7DEE064E9363}" dt="2026-07-21T09:19:47.038" v="5708" actId="1076"/>
+          <ac:picMkLst>
+            <pc:docMk/>
+            <pc:sldMk cId="3463644882" sldId="294"/>
+            <ac:picMk id="4" creationId="{885EA768-A1E5-06E4-17BA-A6EBFF50C25D}"/>
+          </ac:picMkLst>
+        </pc:picChg>
+      </pc:sldChg>
+      <pc:sldChg chg="addSp modSp mod">
+        <pc:chgData name="Heinrich Venter" userId="694de3c83518532c" providerId="LiveId" clId="{10CD68D7-CBE1-4750-A2D1-7DEE064E9363}" dt="2026-07-21T09:25:24.805" v="6116" actId="1076"/>
         <pc:sldMkLst>
           <pc:docMk/>
           <pc:sldMk cId="2380697536" sldId="295"/>
@@ -651,6 +722,14 @@
           </ac:spMkLst>
         </pc:spChg>
         <pc:spChg chg="mod">
+          <ac:chgData name="Heinrich Venter" userId="694de3c83518532c" providerId="LiveId" clId="{10CD68D7-CBE1-4750-A2D1-7DEE064E9363}" dt="2026-07-21T09:25:20.126" v="6114" actId="20577"/>
+          <ac:spMkLst>
+            <pc:docMk/>
+            <pc:sldMk cId="2380697536" sldId="295"/>
+            <ac:spMk id="4" creationId="{48BF1EF6-F8B8-8CF4-9169-05F15F67B902}"/>
+          </ac:spMkLst>
+        </pc:spChg>
+        <pc:spChg chg="mod">
           <ac:chgData name="Heinrich Venter" userId="694de3c83518532c" providerId="LiveId" clId="{10CD68D7-CBE1-4750-A2D1-7DEE064E9363}" dt="2026-07-19T07:46:26.812" v="5468" actId="113"/>
           <ac:spMkLst>
             <pc:docMk/>
@@ -658,6 +737,14 @@
             <ac:spMk id="5" creationId="{F10EB81D-A986-42AD-847E-FF3A1F656CEB}"/>
           </ac:spMkLst>
         </pc:spChg>
+        <pc:picChg chg="add mod">
+          <ac:chgData name="Heinrich Venter" userId="694de3c83518532c" providerId="LiveId" clId="{10CD68D7-CBE1-4750-A2D1-7DEE064E9363}" dt="2026-07-21T09:25:24.805" v="6116" actId="1076"/>
+          <ac:picMkLst>
+            <pc:docMk/>
+            <pc:sldMk cId="2380697536" sldId="295"/>
+            <ac:picMk id="7" creationId="{1F3EFE40-4052-6299-7AB2-078AF453B97D}"/>
+          </ac:picMkLst>
+        </pc:picChg>
       </pc:sldChg>
       <pc:sldChg chg="modSp mod">
         <pc:chgData name="Heinrich Venter" userId="694de3c83518532c" providerId="LiveId" clId="{10CD68D7-CBE1-4750-A2D1-7DEE064E9363}" dt="2026-07-19T07:47:24.773" v="5471" actId="113"/>
@@ -680,14 +767,6 @@
           <pc:docMk/>
           <pc:sldMk cId="2786755706" sldId="297"/>
         </pc:sldMkLst>
-        <pc:spChg chg="del mod">
-          <ac:chgData name="Heinrich Venter" userId="694de3c83518532c" providerId="LiveId" clId="{10CD68D7-CBE1-4750-A2D1-7DEE064E9363}" dt="2026-07-19T07:29:56.896" v="5334" actId="478"/>
-          <ac:spMkLst>
-            <pc:docMk/>
-            <pc:sldMk cId="2786755706" sldId="297"/>
-            <ac:spMk id="2" creationId="{94DDEAAA-AF49-3DC7-1377-01361DDFF102}"/>
-          </ac:spMkLst>
-        </pc:spChg>
         <pc:spChg chg="mod">
           <ac:chgData name="Heinrich Venter" userId="694de3c83518532c" providerId="LiveId" clId="{10CD68D7-CBE1-4750-A2D1-7DEE064E9363}" dt="2026-07-19T07:33:22.639" v="5412" actId="27636"/>
           <ac:spMkLst>
@@ -983,7 +1062,7 @@
           <a:p>
             <a:fld id="{A609F6A2-FEED-40EB-83D5-ADDC04076AF0}" type="datetimeFigureOut">
               <a:rPr lang="en-NZ" smtClean="0"/>
-              <a:t>20/07/2026</a:t>
+              <a:t>21/07/2026</a:t>
             </a:fld>
             <a:endParaRPr lang="en-NZ"/>
           </a:p>
@@ -1183,7 +1262,7 @@
           <a:p>
             <a:fld id="{A609F6A2-FEED-40EB-83D5-ADDC04076AF0}" type="datetimeFigureOut">
               <a:rPr lang="en-NZ" smtClean="0"/>
-              <a:t>20/07/2026</a:t>
+              <a:t>21/07/2026</a:t>
             </a:fld>
             <a:endParaRPr lang="en-NZ"/>
           </a:p>
@@ -1393,7 +1472,7 @@
           <a:p>
             <a:fld id="{A609F6A2-FEED-40EB-83D5-ADDC04076AF0}" type="datetimeFigureOut">
               <a:rPr lang="en-NZ" smtClean="0"/>
-              <a:t>20/07/2026</a:t>
+              <a:t>21/07/2026</a:t>
             </a:fld>
             <a:endParaRPr lang="en-NZ"/>
           </a:p>
@@ -1593,7 +1672,7 @@
           <a:p>
             <a:fld id="{A609F6A2-FEED-40EB-83D5-ADDC04076AF0}" type="datetimeFigureOut">
               <a:rPr lang="en-NZ" smtClean="0"/>
-              <a:t>20/07/2026</a:t>
+              <a:t>21/07/2026</a:t>
             </a:fld>
             <a:endParaRPr lang="en-NZ"/>
           </a:p>
@@ -1869,7 +1948,7 @@
           <a:p>
             <a:fld id="{A609F6A2-FEED-40EB-83D5-ADDC04076AF0}" type="datetimeFigureOut">
               <a:rPr lang="en-NZ" smtClean="0"/>
-              <a:t>20/07/2026</a:t>
+              <a:t>21/07/2026</a:t>
             </a:fld>
             <a:endParaRPr lang="en-NZ"/>
           </a:p>
@@ -2137,7 +2216,7 @@
           <a:p>
             <a:fld id="{A609F6A2-FEED-40EB-83D5-ADDC04076AF0}" type="datetimeFigureOut">
               <a:rPr lang="en-NZ" smtClean="0"/>
-              <a:t>20/07/2026</a:t>
+              <a:t>21/07/2026</a:t>
             </a:fld>
             <a:endParaRPr lang="en-NZ"/>
           </a:p>
@@ -2552,7 +2631,7 @@
           <a:p>
             <a:fld id="{A609F6A2-FEED-40EB-83D5-ADDC04076AF0}" type="datetimeFigureOut">
               <a:rPr lang="en-NZ" smtClean="0"/>
-              <a:t>20/07/2026</a:t>
+              <a:t>21/07/2026</a:t>
             </a:fld>
             <a:endParaRPr lang="en-NZ"/>
           </a:p>
@@ -2694,7 +2773,7 @@
           <a:p>
             <a:fld id="{A609F6A2-FEED-40EB-83D5-ADDC04076AF0}" type="datetimeFigureOut">
               <a:rPr lang="en-NZ" smtClean="0"/>
-              <a:t>20/07/2026</a:t>
+              <a:t>21/07/2026</a:t>
             </a:fld>
             <a:endParaRPr lang="en-NZ"/>
           </a:p>
@@ -2807,7 +2886,7 @@
           <a:p>
             <a:fld id="{A609F6A2-FEED-40EB-83D5-ADDC04076AF0}" type="datetimeFigureOut">
               <a:rPr lang="en-NZ" smtClean="0"/>
-              <a:t>20/07/2026</a:t>
+              <a:t>21/07/2026</a:t>
             </a:fld>
             <a:endParaRPr lang="en-NZ"/>
           </a:p>
@@ -3120,7 +3199,7 @@
           <a:p>
             <a:fld id="{A609F6A2-FEED-40EB-83D5-ADDC04076AF0}" type="datetimeFigureOut">
               <a:rPr lang="en-NZ" smtClean="0"/>
-              <a:t>20/07/2026</a:t>
+              <a:t>21/07/2026</a:t>
             </a:fld>
             <a:endParaRPr lang="en-NZ"/>
           </a:p>
@@ -3409,7 +3488,7 @@
           <a:p>
             <a:fld id="{A609F6A2-FEED-40EB-83D5-ADDC04076AF0}" type="datetimeFigureOut">
               <a:rPr lang="en-NZ" smtClean="0"/>
-              <a:t>20/07/2026</a:t>
+              <a:t>21/07/2026</a:t>
             </a:fld>
             <a:endParaRPr lang="en-NZ"/>
           </a:p>
@@ -3652,7 +3731,7 @@
           <a:p>
             <a:fld id="{A609F6A2-FEED-40EB-83D5-ADDC04076AF0}" type="datetimeFigureOut">
               <a:rPr lang="en-NZ" smtClean="0"/>
-              <a:t>20/07/2026</a:t>
+              <a:t>21/07/2026</a:t>
             </a:fld>
             <a:endParaRPr lang="en-NZ"/>
           </a:p>
@@ -11087,6 +11166,10 @@
           </p:nvPr>
         </p:nvSpPr>
         <p:spPr>
+          <a:xfrm>
+            <a:off x="838200" y="110657"/>
+            <a:ext cx="10515600" cy="750443"/>
+          </a:xfrm>
           <a:solidFill>
             <a:schemeClr val="accent3">
               <a:lumMod val="20000"/>
@@ -11141,7 +11224,7 @@
         </p:spPr>
         <p:txBody>
           <a:bodyPr vert="horz" lIns="91440" tIns="45720" rIns="91440" bIns="45720" rtlCol="0">
-            <a:normAutofit/>
+            <a:normAutofit fontScale="92500" lnSpcReduction="20000"/>
           </a:bodyPr>
           <a:lstStyle>
             <a:lvl1pPr marL="228600" indent="-228600" algn="l" defTabSz="914400" rtl="0" eaLnBrk="1" latinLnBrk="0" hangingPunct="1">
@@ -11316,6 +11399,22 @@
               <a:rPr lang="en-NZ" noProof="0" dirty="0"/>
               <a:t>Justification of choice made</a:t>
             </a:r>
+            <a:endParaRPr lang="en-NZ" dirty="0"/>
+          </a:p>
+          <a:p>
+            <a:pPr marL="0" indent="0">
+              <a:buFont typeface="Arial" panose="020B0604020202020204" pitchFamily="34" charset="0"/>
+              <a:buNone/>
+            </a:pPr>
+            <a:r>
+              <a:rPr lang="en-NZ" noProof="0" dirty="0"/>
+              <a:t>I chose </a:t>
+            </a:r>
+            <a:r>
+              <a:rPr lang="en-NZ" dirty="0"/>
+              <a:t>the electromagnetic clutch because, when a electric motor gets back driven it can cause something called back emf which is basically electric breaking but with a electromagnetic clutch yon can physically disconnect the 2 power units from each other specifically the electric motor which mean no back emf.</a:t>
+            </a:r>
+            <a:endParaRPr lang="en-NZ" noProof="0" dirty="0"/>
           </a:p>
           <a:p>
             <a:pPr marL="0" indent="0">
@@ -11353,13 +11452,13 @@
         </p:nvSpPr>
         <p:spPr>
           <a:xfrm>
-            <a:off x="838200" y="1825625"/>
+            <a:off x="838200" y="897055"/>
             <a:ext cx="3723968" cy="1325563"/>
           </a:xfrm>
         </p:spPr>
         <p:txBody>
           <a:bodyPr>
-            <a:normAutofit fontScale="85000" lnSpcReduction="20000"/>
+            <a:normAutofit lnSpcReduction="10000"/>
           </a:bodyPr>
           <a:lstStyle/>
           <a:p>
@@ -11376,9 +11475,24 @@
               <a:buNone/>
             </a:pPr>
             <a:r>
-              <a:rPr lang="en-US" dirty="0"/>
-              <a:t>Manual Lever-Operated Clutch with Electronic Position Sensor.</a:t>
-            </a:r>
+              <a:rPr lang="en-NZ" dirty="0" err="1"/>
+              <a:t>Electromangetic</a:t>
+            </a:r>
+            <a:r>
+              <a:rPr lang="en-NZ" dirty="0"/>
+              <a:t> clutch</a:t>
+            </a:r>
+          </a:p>
+          <a:p>
+            <a:pPr marL="0" indent="0">
+              <a:buNone/>
+            </a:pPr>
+            <a:endParaRPr lang="en-NZ" dirty="0"/>
+          </a:p>
+          <a:p>
+            <a:pPr marL="0" indent="0">
+              <a:buNone/>
+            </a:pPr>
             <a:endParaRPr lang="en-NZ" noProof="0" dirty="0"/>
           </a:p>
         </p:txBody>
@@ -11399,7 +11513,7 @@
         </p:nvSpPr>
         <p:spPr>
           <a:xfrm>
-            <a:off x="4234016" y="1846467"/>
+            <a:off x="4234015" y="897054"/>
             <a:ext cx="3723968" cy="1325563"/>
           </a:xfrm>
           <a:prstGeom prst="rect">
@@ -11592,6 +11706,11 @@
               <a:rPr lang="en-NZ" dirty="0"/>
               <a:t>Automatic Centrifugal Clutch Mechanism.</a:t>
             </a:r>
+          </a:p>
+          <a:p>
+            <a:pPr marL="0" indent="0">
+              <a:buNone/>
+            </a:pPr>
             <a:endParaRPr lang="en-NZ" noProof="0" dirty="0"/>
           </a:p>
         </p:txBody>
@@ -11612,7 +11731,7 @@
         </p:nvSpPr>
         <p:spPr>
           <a:xfrm>
-            <a:off x="7876867" y="1846467"/>
+            <a:off x="7957983" y="861100"/>
             <a:ext cx="3723968" cy="1325563"/>
           </a:xfrm>
           <a:prstGeom prst="rect">
@@ -11809,6 +11928,88 @@
           </a:p>
         </p:txBody>
       </p:sp>
+      <p:pic>
+        <p:nvPicPr>
+          <p:cNvPr id="3" name="Picture 2" descr="Three-shoe Centrifugal Clutch | Download Scientific Diagram">
+            <a:extLst>
+              <a:ext uri="{FF2B5EF4-FFF2-40B4-BE49-F238E27FC236}">
+                <a16:creationId xmlns:a16="http://schemas.microsoft.com/office/drawing/2014/main" id="{5B75F591-E097-34BE-A9DF-06ABD01594D4}"/>
+              </a:ext>
+            </a:extLst>
+          </p:cNvPr>
+          <p:cNvPicPr>
+            <a:picLocks noChangeAspect="1"/>
+          </p:cNvPicPr>
+          <p:nvPr/>
+        </p:nvPicPr>
+        <p:blipFill>
+          <a:blip r:embed="rId2" cstate="print">
+            <a:extLst>
+              <a:ext uri="{28A0092B-C50C-407E-A947-70E740481C1C}">
+                <a14:useLocalDpi xmlns:a14="http://schemas.microsoft.com/office/drawing/2010/main" val="0"/>
+              </a:ext>
+            </a:extLst>
+          </a:blip>
+          <a:srcRect/>
+          <a:stretch>
+            <a:fillRect/>
+          </a:stretch>
+        </p:blipFill>
+        <p:spPr bwMode="auto">
+          <a:xfrm>
+            <a:off x="4234015" y="2222617"/>
+            <a:ext cx="1821815" cy="1290320"/>
+          </a:xfrm>
+          <a:prstGeom prst="rect">
+            <a:avLst/>
+          </a:prstGeom>
+          <a:noFill/>
+          <a:ln>
+            <a:noFill/>
+          </a:ln>
+        </p:spPr>
+      </p:pic>
+      <p:pic>
+        <p:nvPicPr>
+          <p:cNvPr id="4" name="Picture 3" descr="Chain Tail-ME1 Miniature Electromagnetic Bearing Mounted Clutch With Hub">
+            <a:extLst>
+              <a:ext uri="{FF2B5EF4-FFF2-40B4-BE49-F238E27FC236}">
+                <a16:creationId xmlns:a16="http://schemas.microsoft.com/office/drawing/2014/main" id="{885EA768-A1E5-06E4-17BA-A6EBFF50C25D}"/>
+              </a:ext>
+            </a:extLst>
+          </p:cNvPr>
+          <p:cNvPicPr>
+            <a:picLocks noChangeAspect="1"/>
+          </p:cNvPicPr>
+          <p:nvPr/>
+        </p:nvPicPr>
+        <p:blipFill>
+          <a:blip r:embed="rId3" cstate="print">
+            <a:extLst>
+              <a:ext uri="{28A0092B-C50C-407E-A947-70E740481C1C}">
+                <a14:useLocalDpi xmlns:a14="http://schemas.microsoft.com/office/drawing/2010/main" val="0"/>
+              </a:ext>
+            </a:extLst>
+          </a:blip>
+          <a:srcRect/>
+          <a:stretch>
+            <a:fillRect/>
+          </a:stretch>
+        </p:blipFill>
+        <p:spPr bwMode="auto">
+          <a:xfrm>
+            <a:off x="838200" y="2153285"/>
+            <a:ext cx="1275715" cy="1275715"/>
+          </a:xfrm>
+          <a:prstGeom prst="rect">
+            <a:avLst/>
+          </a:prstGeom>
+          <a:noFill/>
+          <a:ln>
+            <a:noFill/>
+          </a:ln>
+        </p:spPr>
+      </p:pic>
     </p:spTree>
     <p:extLst>
       <p:ext uri="{BB962C8B-B14F-4D97-AF65-F5344CB8AC3E}">
@@ -12132,6 +12333,20 @@
               <a:t>Component Picture</a:t>
             </a:r>
           </a:p>
+          <a:p>
+            <a:pPr marL="0" indent="0">
+              <a:buFont typeface="Arial" panose="020B0604020202020204" pitchFamily="34" charset="0"/>
+              <a:buNone/>
+            </a:pPr>
+            <a:endParaRPr lang="en-NZ" noProof="0" dirty="0"/>
+          </a:p>
+          <a:p>
+            <a:pPr marL="0" indent="0">
+              <a:buFont typeface="Arial" panose="020B0604020202020204" pitchFamily="34" charset="0"/>
+              <a:buNone/>
+            </a:pPr>
+            <a:endParaRPr lang="en-NZ" noProof="0" dirty="0"/>
+          </a:p>
         </p:txBody>
       </p:sp>
       <p:sp>
@@ -12364,6 +12579,47 @@
           </a:p>
         </p:txBody>
       </p:sp>
+      <p:pic>
+        <p:nvPicPr>
+          <p:cNvPr id="7" name="Picture 6" descr="Chain Tail-ME1 Miniature Electromagnetic Bearing Mounted Clutch With Hub">
+            <a:extLst>
+              <a:ext uri="{FF2B5EF4-FFF2-40B4-BE49-F238E27FC236}">
+                <a16:creationId xmlns:a16="http://schemas.microsoft.com/office/drawing/2014/main" id="{1F3EFE40-4052-6299-7AB2-078AF453B97D}"/>
+              </a:ext>
+            </a:extLst>
+          </p:cNvPr>
+          <p:cNvPicPr>
+            <a:picLocks noChangeAspect="1"/>
+          </p:cNvPicPr>
+          <p:nvPr/>
+        </p:nvPicPr>
+        <p:blipFill>
+          <a:blip r:embed="rId2" cstate="print">
+            <a:extLst>
+              <a:ext uri="{28A0092B-C50C-407E-A947-70E740481C1C}">
+                <a14:useLocalDpi xmlns:a14="http://schemas.microsoft.com/office/drawing/2010/main" val="0"/>
+              </a:ext>
+            </a:extLst>
+          </a:blip>
+          <a:srcRect/>
+          <a:stretch>
+            <a:fillRect/>
+          </a:stretch>
+        </p:blipFill>
+        <p:spPr bwMode="auto">
+          <a:xfrm>
+            <a:off x="1022555" y="4269821"/>
+            <a:ext cx="1275715" cy="1275715"/>
+          </a:xfrm>
+          <a:prstGeom prst="rect">
+            <a:avLst/>
+          </a:prstGeom>
+          <a:noFill/>
+          <a:ln>
+            <a:noFill/>
+          </a:ln>
+        </p:spPr>
+      </p:pic>
     </p:spTree>
     <p:extLst>
       <p:ext uri="{BB962C8B-B14F-4D97-AF65-F5344CB8AC3E}">
@@ -13183,11 +13439,7 @@
             </a:pPr>
             <a:r>
               <a:rPr lang="en-NZ" dirty="0"/>
-              <a:t>Include a screenshot/video of the final outcome working before </a:t>
-            </a:r>
-            <a:r>
-              <a:rPr lang="en-NZ"/>
-              <a:t>testing here</a:t>
+              <a:t>Include a screenshot/video of the final outcome working before testing here</a:t>
             </a:r>
           </a:p>
           <a:p>
@@ -16667,10 +16919,10 @@
       </p:sp>
       <p:pic>
         <p:nvPicPr>
-          <p:cNvPr id="4" name="Picture 3">
+          <p:cNvPr id="6" name="Picture 5">
             <a:extLst>
               <a:ext uri="{FF2B5EF4-FFF2-40B4-BE49-F238E27FC236}">
-                <a16:creationId xmlns:a16="http://schemas.microsoft.com/office/drawing/2014/main" id="{A1894E1A-8204-EA5E-8DAA-A29A51DA0F88}"/>
+                <a16:creationId xmlns:a16="http://schemas.microsoft.com/office/drawing/2014/main" id="{492AF9CD-BEC7-1A70-4B88-CD503A3E326B}"/>
               </a:ext>
             </a:extLst>
           </p:cNvPr>
@@ -16687,8 +16939,8 @@
         </p:blipFill>
         <p:spPr>
           <a:xfrm>
-            <a:off x="952500" y="0"/>
-            <a:ext cx="10287000" cy="6858000"/>
+            <a:off x="838200" y="2307001"/>
+            <a:ext cx="6735115" cy="4258269"/>
           </a:xfrm>
           <a:prstGeom prst="rect">
             <a:avLst/>

--- a/AS91904 Electronics Heinrich Venter.pptx
+++ b/AS91904 Electronics Heinrich Venter.pptx
@@ -157,8 +157,8 @@
 <pc:chgInfo xmlns:a="http://schemas.openxmlformats.org/drawingml/2006/main" xmlns:r="http://schemas.openxmlformats.org/officeDocument/2006/relationships" xmlns:ac="http://schemas.microsoft.com/office/drawing/2013/main/command" xmlns:pc="http://schemas.microsoft.com/office/powerpoint/2013/main/command">
   <pc:docChgLst>
     <pc:chgData name="Heinrich Venter" userId="694de3c83518532c" providerId="LiveId" clId="{10CD68D7-CBE1-4750-A2D1-7DEE064E9363}"/>
-    <pc:docChg chg="undo custSel addSld delSld modSld">
-      <pc:chgData name="Heinrich Venter" userId="694de3c83518532c" providerId="LiveId" clId="{10CD68D7-CBE1-4750-A2D1-7DEE064E9363}" dt="2026-07-21T09:26:56.270" v="6125" actId="1076"/>
+    <pc:docChg chg="undo custSel addSld delSld modSld sldOrd">
+      <pc:chgData name="Heinrich Venter" userId="694de3c83518532c" providerId="LiveId" clId="{10CD68D7-CBE1-4750-A2D1-7DEE064E9363}" dt="2026-07-22T06:43:59.681" v="6195" actId="20577"/>
       <pc:docMkLst>
         <pc:docMk/>
       </pc:docMkLst>
@@ -231,8 +231,8 @@
           </ac:picMkLst>
         </pc:picChg>
       </pc:sldChg>
-      <pc:sldChg chg="addSp modSp mod">
-        <pc:chgData name="Heinrich Venter" userId="694de3c83518532c" providerId="LiveId" clId="{10CD68D7-CBE1-4750-A2D1-7DEE064E9363}" dt="2026-07-20T07:11:50.138" v="5562" actId="14100"/>
+      <pc:sldChg chg="addSp modSp mod ord">
+        <pc:chgData name="Heinrich Venter" userId="694de3c83518532c" providerId="LiveId" clId="{10CD68D7-CBE1-4750-A2D1-7DEE064E9363}" dt="2026-07-22T06:41:25.669" v="6131"/>
         <pc:sldMkLst>
           <pc:docMk/>
           <pc:sldMk cId="974559019" sldId="268"/>
@@ -361,14 +361,6 @@
             <ac:spMk id="10" creationId="{841EBE6D-B5D0-4C30-C32E-F3AA1F02B8FD}"/>
           </ac:spMkLst>
         </pc:spChg>
-        <pc:picChg chg="add mod">
-          <ac:chgData name="Heinrich Venter" userId="694de3c83518532c" providerId="LiveId" clId="{10CD68D7-CBE1-4750-A2D1-7DEE064E9363}" dt="2026-07-20T07:13:18.661" v="5566" actId="14100"/>
-          <ac:picMkLst>
-            <pc:docMk/>
-            <pc:sldMk cId="4188302786" sldId="287"/>
-            <ac:picMk id="3" creationId="{B891D3A8-164C-6F14-3174-7260DD50756C}"/>
-          </ac:picMkLst>
-        </pc:picChg>
         <pc:picChg chg="add mod">
           <ac:chgData name="Heinrich Venter" userId="694de3c83518532c" providerId="LiveId" clId="{10CD68D7-CBE1-4750-A2D1-7DEE064E9363}" dt="2026-07-20T07:14:02.272" v="5576" actId="14100"/>
           <ac:picMkLst>
@@ -599,13 +591,13 @@
         </pc:picChg>
       </pc:sldChg>
       <pc:sldChg chg="addSp modSp mod">
-        <pc:chgData name="Heinrich Venter" userId="694de3c83518532c" providerId="LiveId" clId="{10CD68D7-CBE1-4750-A2D1-7DEE064E9363}" dt="2026-07-20T07:24:05.631" v="5641" actId="1076"/>
+        <pc:chgData name="Heinrich Venter" userId="694de3c83518532c" providerId="LiveId" clId="{10CD68D7-CBE1-4750-A2D1-7DEE064E9363}" dt="2026-07-22T06:43:20.590" v="6173" actId="20577"/>
         <pc:sldMkLst>
           <pc:docMk/>
           <pc:sldMk cId="3091740916" sldId="292"/>
         </pc:sldMkLst>
         <pc:spChg chg="mod">
-          <ac:chgData name="Heinrich Venter" userId="694de3c83518532c" providerId="LiveId" clId="{10CD68D7-CBE1-4750-A2D1-7DEE064E9363}" dt="2026-07-19T07:48:47.637" v="5509" actId="20577"/>
+          <ac:chgData name="Heinrich Venter" userId="694de3c83518532c" providerId="LiveId" clId="{10CD68D7-CBE1-4750-A2D1-7DEE064E9363}" dt="2026-07-22T06:43:20.590" v="6173" actId="20577"/>
           <ac:spMkLst>
             <pc:docMk/>
             <pc:sldMk cId="3091740916" sldId="292"/>
@@ -630,13 +622,13 @@
         </pc:picChg>
       </pc:sldChg>
       <pc:sldChg chg="modSp mod">
-        <pc:chgData name="Heinrich Venter" userId="694de3c83518532c" providerId="LiveId" clId="{10CD68D7-CBE1-4750-A2D1-7DEE064E9363}" dt="2026-07-19T07:45:38.419" v="5463" actId="113"/>
+        <pc:chgData name="Heinrich Venter" userId="694de3c83518532c" providerId="LiveId" clId="{10CD68D7-CBE1-4750-A2D1-7DEE064E9363}" dt="2026-07-22T06:43:59.681" v="6195" actId="20577"/>
         <pc:sldMkLst>
           <pc:docMk/>
           <pc:sldMk cId="3290795109" sldId="293"/>
         </pc:sldMkLst>
         <pc:spChg chg="mod">
-          <ac:chgData name="Heinrich Venter" userId="694de3c83518532c" providerId="LiveId" clId="{10CD68D7-CBE1-4750-A2D1-7DEE064E9363}" dt="2026-07-19T07:45:38.419" v="5463" actId="113"/>
+          <ac:chgData name="Heinrich Venter" userId="694de3c83518532c" providerId="LiveId" clId="{10CD68D7-CBE1-4750-A2D1-7DEE064E9363}" dt="2026-07-22T06:43:59.681" v="6195" actId="20577"/>
           <ac:spMkLst>
             <pc:docMk/>
             <pc:sldMk cId="3290795109" sldId="293"/>
@@ -1062,7 +1054,7 @@
           <a:p>
             <a:fld id="{A609F6A2-FEED-40EB-83D5-ADDC04076AF0}" type="datetimeFigureOut">
               <a:rPr lang="en-NZ" smtClean="0"/>
-              <a:t>21/07/2026</a:t>
+              <a:t>22/07/2026</a:t>
             </a:fld>
             <a:endParaRPr lang="en-NZ"/>
           </a:p>
@@ -1262,7 +1254,7 @@
           <a:p>
             <a:fld id="{A609F6A2-FEED-40EB-83D5-ADDC04076AF0}" type="datetimeFigureOut">
               <a:rPr lang="en-NZ" smtClean="0"/>
-              <a:t>21/07/2026</a:t>
+              <a:t>22/07/2026</a:t>
             </a:fld>
             <a:endParaRPr lang="en-NZ"/>
           </a:p>
@@ -1472,7 +1464,7 @@
           <a:p>
             <a:fld id="{A609F6A2-FEED-40EB-83D5-ADDC04076AF0}" type="datetimeFigureOut">
               <a:rPr lang="en-NZ" smtClean="0"/>
-              <a:t>21/07/2026</a:t>
+              <a:t>22/07/2026</a:t>
             </a:fld>
             <a:endParaRPr lang="en-NZ"/>
           </a:p>
@@ -1672,7 +1664,7 @@
           <a:p>
             <a:fld id="{A609F6A2-FEED-40EB-83D5-ADDC04076AF0}" type="datetimeFigureOut">
               <a:rPr lang="en-NZ" smtClean="0"/>
-              <a:t>21/07/2026</a:t>
+              <a:t>22/07/2026</a:t>
             </a:fld>
             <a:endParaRPr lang="en-NZ"/>
           </a:p>
@@ -1948,7 +1940,7 @@
           <a:p>
             <a:fld id="{A609F6A2-FEED-40EB-83D5-ADDC04076AF0}" type="datetimeFigureOut">
               <a:rPr lang="en-NZ" smtClean="0"/>
-              <a:t>21/07/2026</a:t>
+              <a:t>22/07/2026</a:t>
             </a:fld>
             <a:endParaRPr lang="en-NZ"/>
           </a:p>
@@ -2216,7 +2208,7 @@
           <a:p>
             <a:fld id="{A609F6A2-FEED-40EB-83D5-ADDC04076AF0}" type="datetimeFigureOut">
               <a:rPr lang="en-NZ" smtClean="0"/>
-              <a:t>21/07/2026</a:t>
+              <a:t>22/07/2026</a:t>
             </a:fld>
             <a:endParaRPr lang="en-NZ"/>
           </a:p>
@@ -2631,7 +2623,7 @@
           <a:p>
             <a:fld id="{A609F6A2-FEED-40EB-83D5-ADDC04076AF0}" type="datetimeFigureOut">
               <a:rPr lang="en-NZ" smtClean="0"/>
-              <a:t>21/07/2026</a:t>
+              <a:t>22/07/2026</a:t>
             </a:fld>
             <a:endParaRPr lang="en-NZ"/>
           </a:p>
@@ -2773,7 +2765,7 @@
           <a:p>
             <a:fld id="{A609F6A2-FEED-40EB-83D5-ADDC04076AF0}" type="datetimeFigureOut">
               <a:rPr lang="en-NZ" smtClean="0"/>
-              <a:t>21/07/2026</a:t>
+              <a:t>22/07/2026</a:t>
             </a:fld>
             <a:endParaRPr lang="en-NZ"/>
           </a:p>
@@ -2886,7 +2878,7 @@
           <a:p>
             <a:fld id="{A609F6A2-FEED-40EB-83D5-ADDC04076AF0}" type="datetimeFigureOut">
               <a:rPr lang="en-NZ" smtClean="0"/>
-              <a:t>21/07/2026</a:t>
+              <a:t>22/07/2026</a:t>
             </a:fld>
             <a:endParaRPr lang="en-NZ"/>
           </a:p>
@@ -3199,7 +3191,7 @@
           <a:p>
             <a:fld id="{A609F6A2-FEED-40EB-83D5-ADDC04076AF0}" type="datetimeFigureOut">
               <a:rPr lang="en-NZ" smtClean="0"/>
-              <a:t>21/07/2026</a:t>
+              <a:t>22/07/2026</a:t>
             </a:fld>
             <a:endParaRPr lang="en-NZ"/>
           </a:p>
@@ -3488,7 +3480,7 @@
           <a:p>
             <a:fld id="{A609F6A2-FEED-40EB-83D5-ADDC04076AF0}" type="datetimeFigureOut">
               <a:rPr lang="en-NZ" smtClean="0"/>
-              <a:t>21/07/2026</a:t>
+              <a:t>22/07/2026</a:t>
             </a:fld>
             <a:endParaRPr lang="en-NZ"/>
           </a:p>
@@ -3731,7 +3723,7 @@
           <a:p>
             <a:fld id="{A609F6A2-FEED-40EB-83D5-ADDC04076AF0}" type="datetimeFigureOut">
               <a:rPr lang="en-NZ" smtClean="0"/>
-              <a:t>21/07/2026</a:t>
+              <a:t>22/07/2026</a:t>
             </a:fld>
             <a:endParaRPr lang="en-NZ"/>
           </a:p>
@@ -9818,7 +9810,15 @@
             </a:pPr>
             <a:r>
               <a:rPr lang="en-NZ" dirty="0"/>
-              <a:t>The visual indicator system uses LEDs to provide the rider with quick information about the bike’s condition, such as low battery warnings or system errors. Each LED has a 1kΩ resistor connected in series to limit the current and protect both the LED and the Arduino output pins from damage. The Arduino controls the LEDs through its digital pins by switching them between HIGH and LOW states depending on the sensor information it receives.</a:t>
+              <a:t>The visual indicator system uses led to provide the rider with quick information about the bike’s condition, such as low battery warnings or system errors. Each led has a 1k ohm resistor connected in series to limit the current and protect both the led and the Arduino output pins from damage. The Arduino controls the </a:t>
+            </a:r>
+            <a:r>
+              <a:rPr lang="en-NZ" dirty="0" err="1"/>
+              <a:t>leds</a:t>
+            </a:r>
+            <a:r>
+              <a:rPr lang="en-NZ" dirty="0"/>
+              <a:t> through its digital pins by switching  them between high and low states depending on the sensor information it receives.</a:t>
             </a:r>
             <a:endParaRPr lang="en-NZ" noProof="0" dirty="0"/>
           </a:p>
@@ -10978,7 +10978,15 @@
             </a:br>
             <a:r>
               <a:rPr lang="en-NZ" dirty="0"/>
-              <a:t>The LED indicator circuit was tested through 10 switching cycles to check its reliability during operation. During the first three tests, the LEDs showed some flickering when the 800W motor was running, which was caused by electrical noise affecting the Arduino’s output signal. Before the fourth trial, a 0.1µF capacitor was added to smooth the output signal along with the 1kΩ current-limiting resistor. In the remaining seven tests, the LEDs operated consistently with no flickering or signal issues, showing that the changes improved the reliability of the system.</a:t>
+              <a:t>The led indicator circuit was tested through 10 switching cycles to check its reliability during operation. During the first three tests, the led showed some flickering when the 800W motor was running, which was caused by electrical noise affecting the Arduino’s output signal. Before the fourth trial, a 0.1uF capacitor was added to smooth the output signal along with the 1k ohm current-limiting resistor. In the remaining seven tests, the </a:t>
+            </a:r>
+            <a:r>
+              <a:rPr lang="en-NZ" dirty="0" err="1"/>
+              <a:t>ledsoperated</a:t>
+            </a:r>
+            <a:r>
+              <a:rPr lang="en-NZ" dirty="0"/>
+              <a:t> consistently with no flickering or signal issues, showing that the changes improved the reliability of the system.</a:t>
             </a:r>
           </a:p>
           <a:p>

--- a/AS91904 Electronics Heinrich Venter.pptx
+++ b/AS91904 Electronics Heinrich Venter.pptx
@@ -148,7 +148,7 @@
 <file path=ppt/revisionInfo.xml><?xml version="1.0" encoding="utf-8"?>
 <p1510:revInfo xmlns:a="http://schemas.openxmlformats.org/drawingml/2006/main" xmlns:r="http://schemas.openxmlformats.org/officeDocument/2006/relationships" xmlns:p1510="http://schemas.microsoft.com/office/powerpoint/2015/10/main">
   <p1510:revLst>
-    <p1510:client id="{93B3EF88-C134-4ECF-A8E1-33D5E10640B0}" v="36" dt="2026-07-21T09:19:41.558"/>
+    <p1510:client id="{93B3EF88-C134-4ECF-A8E1-33D5E10640B0}" v="37" dt="2026-07-22T22:13:43.081"/>
   </p1510:revLst>
 </p1510:revInfo>
 </file>
@@ -158,7 +158,7 @@
   <pc:docChgLst>
     <pc:chgData name="Heinrich Venter" userId="694de3c83518532c" providerId="LiveId" clId="{10CD68D7-CBE1-4750-A2D1-7DEE064E9363}"/>
     <pc:docChg chg="undo custSel addSld delSld modSld sldOrd">
-      <pc:chgData name="Heinrich Venter" userId="694de3c83518532c" providerId="LiveId" clId="{10CD68D7-CBE1-4750-A2D1-7DEE064E9363}" dt="2026-07-22T06:43:59.681" v="6195" actId="20577"/>
+      <pc:chgData name="Heinrich Venter" userId="694de3c83518532c" providerId="LiveId" clId="{10CD68D7-CBE1-4750-A2D1-7DEE064E9363}" dt="2026-07-22T22:13:48.059" v="6227" actId="1076"/>
       <pc:docMkLst>
         <pc:docMk/>
       </pc:docMkLst>
@@ -590,8 +590,8 @@
           </ac:picMkLst>
         </pc:picChg>
       </pc:sldChg>
-      <pc:sldChg chg="addSp modSp mod">
-        <pc:chgData name="Heinrich Venter" userId="694de3c83518532c" providerId="LiveId" clId="{10CD68D7-CBE1-4750-A2D1-7DEE064E9363}" dt="2026-07-22T06:43:20.590" v="6173" actId="20577"/>
+      <pc:sldChg chg="addSp delSp modSp mod">
+        <pc:chgData name="Heinrich Venter" userId="694de3c83518532c" providerId="LiveId" clId="{10CD68D7-CBE1-4750-A2D1-7DEE064E9363}" dt="2026-07-22T22:10:17.893" v="6196" actId="478"/>
         <pc:sldMkLst>
           <pc:docMk/>
           <pc:sldMk cId="3091740916" sldId="292"/>
@@ -612,8 +612,8 @@
             <ac:spMk id="5" creationId="{F10EB81D-A986-42AD-847E-FF3A1F656CEB}"/>
           </ac:spMkLst>
         </pc:spChg>
-        <pc:picChg chg="add mod">
-          <ac:chgData name="Heinrich Venter" userId="694de3c83518532c" providerId="LiveId" clId="{10CD68D7-CBE1-4750-A2D1-7DEE064E9363}" dt="2026-07-20T07:24:05.631" v="5641" actId="1076"/>
+        <pc:picChg chg="add del mod">
+          <ac:chgData name="Heinrich Venter" userId="694de3c83518532c" providerId="LiveId" clId="{10CD68D7-CBE1-4750-A2D1-7DEE064E9363}" dt="2026-07-22T22:10:17.893" v="6196" actId="478"/>
           <ac:picMkLst>
             <pc:docMk/>
             <pc:sldMk cId="3091740916" sldId="292"/>
@@ -637,7 +637,7 @@
         </pc:spChg>
       </pc:sldChg>
       <pc:sldChg chg="addSp modSp mod">
-        <pc:chgData name="Heinrich Venter" userId="694de3c83518532c" providerId="LiveId" clId="{10CD68D7-CBE1-4750-A2D1-7DEE064E9363}" dt="2026-07-21T09:24:51.872" v="6112" actId="20577"/>
+        <pc:chgData name="Heinrich Venter" userId="694de3c83518532c" providerId="LiveId" clId="{10CD68D7-CBE1-4750-A2D1-7DEE064E9363}" dt="2026-07-22T22:13:48.059" v="6227" actId="1076"/>
         <pc:sldMkLst>
           <pc:docMk/>
           <pc:sldMk cId="3463644882" sldId="294"/>
@@ -675,7 +675,7 @@
           </ac:spMkLst>
         </pc:spChg>
         <pc:spChg chg="mod">
-          <ac:chgData name="Heinrich Venter" userId="694de3c83518532c" providerId="LiveId" clId="{10CD68D7-CBE1-4750-A2D1-7DEE064E9363}" dt="2026-07-21T09:19:55.722" v="5711" actId="20577"/>
+          <ac:chgData name="Heinrich Venter" userId="694de3c83518532c" providerId="LiveId" clId="{10CD68D7-CBE1-4750-A2D1-7DEE064E9363}" dt="2026-07-22T22:13:19.305" v="6225" actId="20577"/>
           <ac:spMkLst>
             <pc:docMk/>
             <pc:sldMk cId="3463644882" sldId="294"/>
@@ -696,6 +696,14 @@
             <pc:docMk/>
             <pc:sldMk cId="3463644882" sldId="294"/>
             <ac:picMk id="4" creationId="{885EA768-A1E5-06E4-17BA-A6EBFF50C25D}"/>
+          </ac:picMkLst>
+        </pc:picChg>
+        <pc:picChg chg="add mod">
+          <ac:chgData name="Heinrich Venter" userId="694de3c83518532c" providerId="LiveId" clId="{10CD68D7-CBE1-4750-A2D1-7DEE064E9363}" dt="2026-07-22T22:13:48.059" v="6227" actId="1076"/>
+          <ac:picMkLst>
+            <pc:docMk/>
+            <pc:sldMk cId="3463644882" sldId="294"/>
+            <ac:picMk id="6" creationId="{CC844138-7A79-5941-F455-95476870EB40}"/>
           </ac:picMkLst>
         </pc:picChg>
       </pc:sldChg>
@@ -1054,7 +1062,7 @@
           <a:p>
             <a:fld id="{A609F6A2-FEED-40EB-83D5-ADDC04076AF0}" type="datetimeFigureOut">
               <a:rPr lang="en-NZ" smtClean="0"/>
-              <a:t>22/07/2026</a:t>
+              <a:t>23/07/2026</a:t>
             </a:fld>
             <a:endParaRPr lang="en-NZ"/>
           </a:p>
@@ -1254,7 +1262,7 @@
           <a:p>
             <a:fld id="{A609F6A2-FEED-40EB-83D5-ADDC04076AF0}" type="datetimeFigureOut">
               <a:rPr lang="en-NZ" smtClean="0"/>
-              <a:t>22/07/2026</a:t>
+              <a:t>23/07/2026</a:t>
             </a:fld>
             <a:endParaRPr lang="en-NZ"/>
           </a:p>
@@ -1464,7 +1472,7 @@
           <a:p>
             <a:fld id="{A609F6A2-FEED-40EB-83D5-ADDC04076AF0}" type="datetimeFigureOut">
               <a:rPr lang="en-NZ" smtClean="0"/>
-              <a:t>22/07/2026</a:t>
+              <a:t>23/07/2026</a:t>
             </a:fld>
             <a:endParaRPr lang="en-NZ"/>
           </a:p>
@@ -1664,7 +1672,7 @@
           <a:p>
             <a:fld id="{A609F6A2-FEED-40EB-83D5-ADDC04076AF0}" type="datetimeFigureOut">
               <a:rPr lang="en-NZ" smtClean="0"/>
-              <a:t>22/07/2026</a:t>
+              <a:t>23/07/2026</a:t>
             </a:fld>
             <a:endParaRPr lang="en-NZ"/>
           </a:p>
@@ -1940,7 +1948,7 @@
           <a:p>
             <a:fld id="{A609F6A2-FEED-40EB-83D5-ADDC04076AF0}" type="datetimeFigureOut">
               <a:rPr lang="en-NZ" smtClean="0"/>
-              <a:t>22/07/2026</a:t>
+              <a:t>23/07/2026</a:t>
             </a:fld>
             <a:endParaRPr lang="en-NZ"/>
           </a:p>
@@ -2208,7 +2216,7 @@
           <a:p>
             <a:fld id="{A609F6A2-FEED-40EB-83D5-ADDC04076AF0}" type="datetimeFigureOut">
               <a:rPr lang="en-NZ" smtClean="0"/>
-              <a:t>22/07/2026</a:t>
+              <a:t>23/07/2026</a:t>
             </a:fld>
             <a:endParaRPr lang="en-NZ"/>
           </a:p>
@@ -2623,7 +2631,7 @@
           <a:p>
             <a:fld id="{A609F6A2-FEED-40EB-83D5-ADDC04076AF0}" type="datetimeFigureOut">
               <a:rPr lang="en-NZ" smtClean="0"/>
-              <a:t>22/07/2026</a:t>
+              <a:t>23/07/2026</a:t>
             </a:fld>
             <a:endParaRPr lang="en-NZ"/>
           </a:p>
@@ -2765,7 +2773,7 @@
           <a:p>
             <a:fld id="{A609F6A2-FEED-40EB-83D5-ADDC04076AF0}" type="datetimeFigureOut">
               <a:rPr lang="en-NZ" smtClean="0"/>
-              <a:t>22/07/2026</a:t>
+              <a:t>23/07/2026</a:t>
             </a:fld>
             <a:endParaRPr lang="en-NZ"/>
           </a:p>
@@ -2878,7 +2886,7 @@
           <a:p>
             <a:fld id="{A609F6A2-FEED-40EB-83D5-ADDC04076AF0}" type="datetimeFigureOut">
               <a:rPr lang="en-NZ" smtClean="0"/>
-              <a:t>22/07/2026</a:t>
+              <a:t>23/07/2026</a:t>
             </a:fld>
             <a:endParaRPr lang="en-NZ"/>
           </a:p>
@@ -3191,7 +3199,7 @@
           <a:p>
             <a:fld id="{A609F6A2-FEED-40EB-83D5-ADDC04076AF0}" type="datetimeFigureOut">
               <a:rPr lang="en-NZ" smtClean="0"/>
-              <a:t>22/07/2026</a:t>
+              <a:t>23/07/2026</a:t>
             </a:fld>
             <a:endParaRPr lang="en-NZ"/>
           </a:p>
@@ -3480,7 +3488,7 @@
           <a:p>
             <a:fld id="{A609F6A2-FEED-40EB-83D5-ADDC04076AF0}" type="datetimeFigureOut">
               <a:rPr lang="en-NZ" smtClean="0"/>
-              <a:t>22/07/2026</a:t>
+              <a:t>23/07/2026</a:t>
             </a:fld>
             <a:endParaRPr lang="en-NZ"/>
           </a:p>
@@ -3723,7 +3731,7 @@
           <a:p>
             <a:fld id="{A609F6A2-FEED-40EB-83D5-ADDC04076AF0}" type="datetimeFigureOut">
               <a:rPr lang="en-NZ" smtClean="0"/>
-              <a:t>22/07/2026</a:t>
+              <a:t>23/07/2026</a:t>
             </a:fld>
             <a:endParaRPr lang="en-NZ"/>
           </a:p>
@@ -10260,36 +10268,6 @@
           </a:p>
         </p:txBody>
       </p:sp>
-      <p:pic>
-        <p:nvPicPr>
-          <p:cNvPr id="6" name="Picture 5" descr="Voltage Divider Circuit: Definition, Diagram, and Applications">
-            <a:extLst>
-              <a:ext uri="{FF2B5EF4-FFF2-40B4-BE49-F238E27FC236}">
-                <a16:creationId xmlns:a16="http://schemas.microsoft.com/office/drawing/2014/main" id="{1BE5260C-2BED-F6A7-900A-5CDFD9DE5058}"/>
-              </a:ext>
-            </a:extLst>
-          </p:cNvPr>
-          <p:cNvPicPr>
-            <a:picLocks noChangeAspect="1"/>
-          </p:cNvPicPr>
-          <p:nvPr/>
-        </p:nvPicPr>
-        <p:blipFill>
-          <a:blip r:embed="rId2"/>
-          <a:stretch>
-            <a:fillRect/>
-          </a:stretch>
-        </p:blipFill>
-        <p:spPr>
-          <a:xfrm>
-            <a:off x="1022555" y="4310954"/>
-            <a:ext cx="1629031" cy="1442371"/>
-          </a:xfrm>
-          <a:prstGeom prst="rect">
-            <a:avLst/>
-          </a:prstGeom>
-        </p:spPr>
-      </p:pic>
     </p:spTree>
     <p:extLst>
       <p:ext uri="{BB962C8B-B14F-4D97-AF65-F5344CB8AC3E}">
@@ -11748,7 +11726,7 @@
         </p:spPr>
         <p:txBody>
           <a:bodyPr vert="horz" lIns="91440" tIns="45720" rIns="91440" bIns="45720" rtlCol="0">
-            <a:normAutofit lnSpcReduction="10000"/>
+            <a:normAutofit/>
           </a:bodyPr>
           <a:lstStyle>
             <a:lvl1pPr marL="228600" indent="-228600" algn="l" defTabSz="914400" rtl="0" eaLnBrk="1" latinLnBrk="0" hangingPunct="1">
@@ -11923,14 +11901,24 @@
               <a:rPr lang="en-NZ" noProof="0" dirty="0"/>
               <a:t>Alternative 2</a:t>
             </a:r>
+            <a:endParaRPr lang="en-NZ" dirty="0"/>
           </a:p>
           <a:p>
             <a:pPr marL="0" indent="0">
+              <a:buFont typeface="Arial" panose="020B0604020202020204" pitchFamily="34" charset="0"/>
               <a:buNone/>
             </a:pPr>
             <a:r>
-              <a:rPr lang="en-US" dirty="0"/>
-              <a:t>Direct Drive System (No Clutch).</a:t>
+              <a:rPr lang="en-NZ" noProof="0" dirty="0"/>
+              <a:t>One way </a:t>
+            </a:r>
+            <a:r>
+              <a:rPr lang="en-NZ" noProof="0" dirty="0" err="1"/>
+              <a:t>bearin</a:t>
+            </a:r>
+            <a:r>
+              <a:rPr lang="en-NZ" dirty="0"/>
+              <a:t>g</a:t>
             </a:r>
             <a:endParaRPr lang="en-NZ" noProof="0" dirty="0"/>
           </a:p>
@@ -12008,6 +11996,47 @@
           <a:xfrm>
             <a:off x="838200" y="2153285"/>
             <a:ext cx="1275715" cy="1275715"/>
+          </a:xfrm>
+          <a:prstGeom prst="rect">
+            <a:avLst/>
+          </a:prstGeom>
+          <a:noFill/>
+          <a:ln>
+            <a:noFill/>
+          </a:ln>
+        </p:spPr>
+      </p:pic>
+      <p:pic>
+        <p:nvPicPr>
+          <p:cNvPr id="6" name="Picture 5" descr="All about one way clutch bearing">
+            <a:extLst>
+              <a:ext uri="{FF2B5EF4-FFF2-40B4-BE49-F238E27FC236}">
+                <a16:creationId xmlns:a16="http://schemas.microsoft.com/office/drawing/2014/main" id="{CC844138-7A79-5941-F455-95476870EB40}"/>
+              </a:ext>
+            </a:extLst>
+          </p:cNvPr>
+          <p:cNvPicPr>
+            <a:picLocks noChangeAspect="1"/>
+          </p:cNvPicPr>
+          <p:nvPr/>
+        </p:nvPicPr>
+        <p:blipFill>
+          <a:blip r:embed="rId4" cstate="print">
+            <a:extLst>
+              <a:ext uri="{28A0092B-C50C-407E-A947-70E740481C1C}">
+                <a14:useLocalDpi xmlns:a14="http://schemas.microsoft.com/office/drawing/2010/main" val="0"/>
+              </a:ext>
+            </a:extLst>
+          </a:blip>
+          <a:srcRect/>
+          <a:stretch>
+            <a:fillRect/>
+          </a:stretch>
+        </p:blipFill>
+        <p:spPr bwMode="auto">
+          <a:xfrm>
+            <a:off x="7945522" y="2139315"/>
+            <a:ext cx="1610360" cy="1289685"/>
           </a:xfrm>
           <a:prstGeom prst="rect">
             <a:avLst/>
